--- a/presentations/payments_dashboards_summary.pptx
+++ b/presentations/payments_dashboards_summary.pptx
@@ -10,6 +10,7 @@
     <p:sldId id="258" r:id="rId9"/>
     <p:sldId id="259" r:id="rId10"/>
     <p:sldId id="260" r:id="rId11"/>
+    <p:sldId id="267" r:id="rId18"/>
     <p:sldId id="261" r:id="rId12"/>
     <p:sldId id="262" r:id="rId13"/>
     <p:sldId id="263" r:id="rId14"/>
@@ -5708,6 +5709,1670 @@
                 <a:hlinkClick r:id="rId6"/>
               </a:rPr>
               <a:t>Open dashboard</a:t>
+            </a:r>
+          </a:p>
+        </p:txBody>
+      </p:sp>
+      <p:sp>
+        <p:nvSpPr>
+          <p:cNvPr id="32" name="Rounded Rectangle 31"/>
+          <p:cNvSpPr/>
+          <p:nvPr/>
+        </p:nvSpPr>
+        <p:spPr>
+          <a:xfrm>
+            <a:off x="777240" y="5577840"/>
+            <a:ext cx="10607040" cy="685800"/>
+          </a:xfrm>
+          <a:prstGeom prst="roundRect">
+            <a:avLst/>
+          </a:prstGeom>
+          <a:solidFill>
+            <a:srgbClr val="FFFFFF"/>
+          </a:solidFill>
+          <a:ln>
+            <a:solidFill>
+              <a:srgbClr val="D2DDEB"/>
+            </a:solidFill>
+          </a:ln>
+        </p:spPr>
+        <p:style>
+          <a:lnRef idx="1">
+            <a:schemeClr val="accent1"/>
+          </a:lnRef>
+          <a:fillRef idx="3">
+            <a:schemeClr val="accent1"/>
+          </a:fillRef>
+          <a:effectRef idx="2">
+            <a:schemeClr val="accent1"/>
+          </a:effectRef>
+          <a:fontRef idx="minor">
+            <a:schemeClr val="lt1"/>
+          </a:fontRef>
+        </p:style>
+        <p:txBody>
+          <a:bodyPr rtlCol="0" anchor="ctr"/>
+          <a:lstStyle/>
+          <a:p>
+            <a:pPr algn="ctr"/>
+          </a:p>
+        </p:txBody>
+      </p:sp>
+      <p:sp>
+        <p:nvSpPr>
+          <p:cNvPr id="33" name="Rectangle 32"/>
+          <p:cNvSpPr/>
+          <p:nvPr/>
+        </p:nvSpPr>
+        <p:spPr>
+          <a:xfrm>
+            <a:off x="777240" y="5577840"/>
+            <a:ext cx="73152" cy="685800"/>
+          </a:xfrm>
+          <a:prstGeom prst="rect">
+            <a:avLst/>
+          </a:prstGeom>
+          <a:solidFill>
+            <a:srgbClr val="00959C"/>
+          </a:solidFill>
+          <a:ln>
+            <a:noFill/>
+          </a:ln>
+        </p:spPr>
+        <p:style>
+          <a:lnRef idx="1">
+            <a:schemeClr val="accent1"/>
+          </a:lnRef>
+          <a:fillRef idx="3">
+            <a:schemeClr val="accent1"/>
+          </a:fillRef>
+          <a:effectRef idx="2">
+            <a:schemeClr val="accent1"/>
+          </a:effectRef>
+          <a:fontRef idx="minor">
+            <a:schemeClr val="lt1"/>
+          </a:fontRef>
+        </p:style>
+        <p:txBody>
+          <a:bodyPr rtlCol="0" anchor="ctr"/>
+          <a:lstStyle/>
+          <a:p>
+            <a:pPr algn="ctr"/>
+          </a:p>
+        </p:txBody>
+      </p:sp>
+      <p:sp>
+        <p:nvSpPr>
+          <p:cNvPr id="34" name="TextBox 33"/>
+          <p:cNvSpPr txBox="1"/>
+          <p:nvPr/>
+        </p:nvSpPr>
+        <p:spPr>
+          <a:xfrm>
+            <a:off x="978408" y="5715000"/>
+            <a:ext cx="10287000" cy="274320"/>
+          </a:xfrm>
+          <a:prstGeom prst="rect">
+            <a:avLst/>
+          </a:prstGeom>
+          <a:noFill/>
+        </p:spPr>
+        <p:txBody>
+          <a:bodyPr wrap="none">
+            <a:spAutoFit/>
+          </a:bodyPr>
+          <a:lstStyle/>
+          <a:p>
+            <a:pPr>
+              <a:defRPr sz="1000" b="1">
+                <a:solidFill>
+                  <a:srgbClr val="667487"/>
+                </a:solidFill>
+              </a:defRPr>
+            </a:pPr>
+            <a:r>
+              <a:t>Payments Observability Dashboard</a:t>
+            </a:r>
+          </a:p>
+        </p:txBody>
+      </p:sp>
+      <p:sp>
+        <p:nvSpPr>
+          <p:cNvPr id="35" name="TextBox 34"/>
+          <p:cNvSpPr txBox="1"/>
+          <p:nvPr/>
+        </p:nvSpPr>
+        <p:spPr>
+          <a:xfrm>
+            <a:off x="978408" y="6035040"/>
+            <a:ext cx="10287000" cy="0"/>
+          </a:xfrm>
+          <a:prstGeom prst="rect">
+            <a:avLst/>
+          </a:prstGeom>
+          <a:noFill/>
+        </p:spPr>
+        <p:txBody>
+          <a:bodyPr wrap="square">
+            <a:normAutofit/>
+          </a:bodyPr>
+          <a:lstStyle/>
+          <a:p>
+            <a:pPr>
+              <a:spcAft>
+                <a:spcPts val="300"/>
+              </a:spcAft>
+              <a:defRPr sz="950">
+                <a:solidFill>
+                  <a:srgbClr val="222D3D"/>
+                </a:solidFill>
+              </a:defRPr>
+            </a:pPr>
+            <a:r>
+              <a:t>https://payments-c225aa.kb.us-central1.gcp.elastic.cloud:443/app/dashboards#/view/250b10ed-6fa9-4032-bec9-8d7d1a3632f6</a:t>
+            </a:r>
+          </a:p>
+        </p:txBody>
+      </p:sp>
+      <p:sp>
+        <p:nvSpPr>
+          <p:cNvPr id="36" name="TextBox 35"/>
+          <p:cNvSpPr txBox="1"/>
+          <p:nvPr/>
+        </p:nvSpPr>
+        <p:spPr>
+          <a:xfrm>
+            <a:off x="1005840" y="5897880"/>
+            <a:ext cx="7315200" cy="256032"/>
+          </a:xfrm>
+          <a:prstGeom prst="rect">
+            <a:avLst/>
+          </a:prstGeom>
+          <a:noFill/>
+        </p:spPr>
+        <p:txBody>
+          <a:bodyPr wrap="none">
+            <a:spAutoFit/>
+          </a:bodyPr>
+          <a:lstStyle/>
+          <a:p>
+            <a:r>
+              <a:rPr sz="1000" u="sng">
+                <a:solidFill>
+                  <a:srgbClr val="3673C8"/>
+                </a:solidFill>
+                <a:hlinkClick r:id="rId7"/>
+              </a:rPr>
+              <a:t>Open dashboard</a:t>
+            </a:r>
+          </a:p>
+        </p:txBody>
+      </p:sp>
+    </p:spTree>
+  </p:cSld>
+  <p:clrMapOvr>
+    <a:masterClrMapping/>
+  </p:clrMapOvr>
+</p:sld>
+</file>
+
+<file path=ppt/slides/slide12.xml><?xml version="1.0" encoding="utf-8"?>
+<p:sld xmlns:a="http://schemas.openxmlformats.org/drawingml/2006/main" xmlns:p="http://schemas.openxmlformats.org/presentationml/2006/main" xmlns:r="http://schemas.openxmlformats.org/officeDocument/2006/relationships">
+  <p:cSld>
+    <p:bg>
+      <p:bgPr>
+        <a:solidFill>
+          <a:srgbClr val="F4F8FC"/>
+        </a:solidFill>
+        <a:effectLst/>
+      </p:bgPr>
+    </p:bg>
+    <p:spTree>
+      <p:nvGrpSpPr>
+        <p:cNvPr id="1" name=""/>
+        <p:cNvGrpSpPr/>
+        <p:nvPr/>
+      </p:nvGrpSpPr>
+      <p:grpSpPr/>
+      <p:sp>
+        <p:nvSpPr>
+          <p:cNvPr id="2" name="Rectangle 1"/>
+          <p:cNvSpPr/>
+          <p:nvPr/>
+        </p:nvSpPr>
+        <p:spPr>
+          <a:xfrm>
+            <a:off x="0" y="0"/>
+            <a:ext cx="12191695" cy="164592"/>
+          </a:xfrm>
+          <a:prstGeom prst="rect">
+            <a:avLst/>
+          </a:prstGeom>
+          <a:solidFill>
+            <a:srgbClr val="3673C8"/>
+          </a:solidFill>
+          <a:ln>
+            <a:noFill/>
+          </a:ln>
+        </p:spPr>
+        <p:style>
+          <a:lnRef idx="1">
+            <a:schemeClr val="accent1"/>
+          </a:lnRef>
+          <a:fillRef idx="3">
+            <a:schemeClr val="accent1"/>
+          </a:fillRef>
+          <a:effectRef idx="2">
+            <a:schemeClr val="accent1"/>
+          </a:effectRef>
+          <a:fontRef idx="minor">
+            <a:schemeClr val="lt1"/>
+          </a:fontRef>
+        </p:style>
+        <p:txBody>
+          <a:bodyPr rtlCol="0" anchor="ctr"/>
+          <a:lstStyle/>
+          <a:p>
+            <a:pPr algn="ctr"/>
+          </a:p>
+        </p:txBody>
+      </p:sp>
+      <p:sp>
+        <p:nvSpPr>
+          <p:cNvPr id="3" name="TextBox 2"/>
+          <p:cNvSpPr txBox="1"/>
+          <p:nvPr/>
+        </p:nvSpPr>
+        <p:spPr>
+          <a:xfrm>
+            <a:off x="502920" y="320040"/>
+            <a:ext cx="8503920" cy="502920"/>
+          </a:xfrm>
+          <a:prstGeom prst="rect">
+            <a:avLst/>
+          </a:prstGeom>
+          <a:noFill/>
+        </p:spPr>
+        <p:txBody>
+          <a:bodyPr wrap="none">
+            <a:spAutoFit/>
+          </a:bodyPr>
+          <a:lstStyle/>
+          <a:p>
+            <a:pPr>
+              <a:defRPr sz="2400" b="1">
+                <a:solidFill>
+                  <a:srgbClr val="142440"/>
+                </a:solidFill>
+              </a:defRPr>
+            </a:pPr>
+            <a:r>
+              <a:t>Observability Dashboard</a:t>
+            </a:r>
+          </a:p>
+        </p:txBody>
+      </p:sp>
+      <p:sp>
+        <p:nvSpPr>
+          <p:cNvPr id="4" name="TextBox 3"/>
+          <p:cNvSpPr txBox="1"/>
+          <p:nvPr/>
+        </p:nvSpPr>
+        <p:spPr>
+          <a:xfrm>
+            <a:off x="530352" y="822960"/>
+            <a:ext cx="9875520" cy="320040"/>
+          </a:xfrm>
+          <a:prstGeom prst="rect">
+            <a:avLst/>
+          </a:prstGeom>
+          <a:noFill/>
+        </p:spPr>
+        <p:txBody>
+          <a:bodyPr wrap="none">
+            <a:spAutoFit/>
+          </a:bodyPr>
+          <a:lstStyle/>
+          <a:p>
+            <a:pPr>
+              <a:defRPr sz="1050">
+                <a:solidFill>
+                  <a:srgbClr val="667487"/>
+                </a:solidFill>
+              </a:defRPr>
+            </a:pPr>
+            <a:r>
+              <a:t>Service-health view built from the current payment transaction data</a:t>
+            </a:r>
+          </a:p>
+        </p:txBody>
+      </p:sp>
+      <p:sp>
+        <p:nvSpPr>
+          <p:cNvPr id="5" name="TextBox 4"/>
+          <p:cNvSpPr txBox="1"/>
+          <p:nvPr/>
+        </p:nvSpPr>
+        <p:spPr>
+          <a:xfrm>
+            <a:off x="502920" y="6446520"/>
+            <a:ext cx="4572000" cy="228600"/>
+          </a:xfrm>
+          <a:prstGeom prst="rect">
+            <a:avLst/>
+          </a:prstGeom>
+          <a:noFill/>
+        </p:spPr>
+        <p:txBody>
+          <a:bodyPr wrap="none">
+            <a:spAutoFit/>
+          </a:bodyPr>
+          <a:lstStyle/>
+          <a:p>
+            <a:pPr>
+              <a:defRPr sz="800">
+                <a:solidFill>
+                  <a:srgbClr val="667487"/>
+                </a:solidFill>
+              </a:defRPr>
+            </a:pPr>
+            <a:r>
+              <a:t>Elastic Payments Analytics Demo</a:t>
+            </a:r>
+          </a:p>
+        </p:txBody>
+      </p:sp>
+      <p:sp>
+        <p:nvSpPr>
+          <p:cNvPr id="6" name="TextBox 5"/>
+          <p:cNvSpPr txBox="1"/>
+          <p:nvPr/>
+        </p:nvSpPr>
+        <p:spPr>
+          <a:xfrm>
+            <a:off x="9326880" y="6446520"/>
+            <a:ext cx="2377440" cy="228600"/>
+          </a:xfrm>
+          <a:prstGeom prst="rect">
+            <a:avLst/>
+          </a:prstGeom>
+          <a:noFill/>
+        </p:spPr>
+        <p:txBody>
+          <a:bodyPr wrap="none">
+            <a:spAutoFit/>
+          </a:bodyPr>
+          <a:lstStyle/>
+          <a:p>
+            <a:pPr algn="r">
+              <a:defRPr sz="800">
+                <a:solidFill>
+                  <a:srgbClr val="667487"/>
+                </a:solidFill>
+              </a:defRPr>
+            </a:pPr>
+            <a:r>
+              <a:t>Jun 09, 2026</a:t>
+            </a:r>
+          </a:p>
+        </p:txBody>
+      </p:sp>
+      <p:sp>
+        <p:nvSpPr>
+          <p:cNvPr id="7" name="Rounded Rectangle 6"/>
+          <p:cNvSpPr/>
+          <p:nvPr/>
+        </p:nvSpPr>
+        <p:spPr>
+          <a:xfrm>
+            <a:off x="502920" y="1234440"/>
+            <a:ext cx="1737360" cy="1005840"/>
+          </a:xfrm>
+          <a:prstGeom prst="roundRect">
+            <a:avLst/>
+          </a:prstGeom>
+          <a:solidFill>
+            <a:srgbClr val="FFFFFF"/>
+          </a:solidFill>
+          <a:ln>
+            <a:solidFill>
+              <a:srgbClr val="D2DDEB"/>
+            </a:solidFill>
+          </a:ln>
+        </p:spPr>
+        <p:style>
+          <a:lnRef idx="1">
+            <a:schemeClr val="accent1"/>
+          </a:lnRef>
+          <a:fillRef idx="3">
+            <a:schemeClr val="accent1"/>
+          </a:fillRef>
+          <a:effectRef idx="2">
+            <a:schemeClr val="accent1"/>
+          </a:effectRef>
+          <a:fontRef idx="minor">
+            <a:schemeClr val="lt1"/>
+          </a:fontRef>
+        </p:style>
+        <p:txBody>
+          <a:bodyPr rtlCol="0" anchor="ctr"/>
+          <a:lstStyle/>
+          <a:p>
+            <a:pPr algn="ctr"/>
+          </a:p>
+        </p:txBody>
+      </p:sp>
+      <p:sp>
+        <p:nvSpPr>
+          <p:cNvPr id="8" name="Rectangle 7"/>
+          <p:cNvSpPr/>
+          <p:nvPr/>
+        </p:nvSpPr>
+        <p:spPr>
+          <a:xfrm>
+            <a:off x="502920" y="1234440"/>
+            <a:ext cx="73152" cy="1005840"/>
+          </a:xfrm>
+          <a:prstGeom prst="rect">
+            <a:avLst/>
+          </a:prstGeom>
+          <a:solidFill>
+            <a:srgbClr val="44AA5C"/>
+          </a:solidFill>
+          <a:ln>
+            <a:noFill/>
+          </a:ln>
+        </p:spPr>
+        <p:style>
+          <a:lnRef idx="1">
+            <a:schemeClr val="accent1"/>
+          </a:lnRef>
+          <a:fillRef idx="3">
+            <a:schemeClr val="accent1"/>
+          </a:fillRef>
+          <a:effectRef idx="2">
+            <a:schemeClr val="accent1"/>
+          </a:effectRef>
+          <a:fontRef idx="minor">
+            <a:schemeClr val="lt1"/>
+          </a:fontRef>
+        </p:style>
+        <p:txBody>
+          <a:bodyPr rtlCol="0" anchor="ctr"/>
+          <a:lstStyle/>
+          <a:p>
+            <a:pPr algn="ctr"/>
+          </a:p>
+        </p:txBody>
+      </p:sp>
+      <p:sp>
+        <p:nvSpPr>
+          <p:cNvPr id="9" name="TextBox 8"/>
+          <p:cNvSpPr txBox="1"/>
+          <p:nvPr/>
+        </p:nvSpPr>
+        <p:spPr>
+          <a:xfrm>
+            <a:off x="704088" y="1371600"/>
+            <a:ext cx="1417319" cy="274320"/>
+          </a:xfrm>
+          <a:prstGeom prst="rect">
+            <a:avLst/>
+          </a:prstGeom>
+          <a:noFill/>
+        </p:spPr>
+        <p:txBody>
+          <a:bodyPr wrap="none">
+            <a:spAutoFit/>
+          </a:bodyPr>
+          <a:lstStyle/>
+          <a:p>
+            <a:pPr>
+              <a:defRPr sz="1000" b="1">
+                <a:solidFill>
+                  <a:srgbClr val="667487"/>
+                </a:solidFill>
+              </a:defRPr>
+            </a:pPr>
+            <a:r>
+              <a:t>Availability SLI</a:t>
+            </a:r>
+          </a:p>
+        </p:txBody>
+      </p:sp>
+      <p:sp>
+        <p:nvSpPr>
+          <p:cNvPr id="10" name="TextBox 9"/>
+          <p:cNvSpPr txBox="1"/>
+          <p:nvPr/>
+        </p:nvSpPr>
+        <p:spPr>
+          <a:xfrm>
+            <a:off x="704088" y="1673352"/>
+            <a:ext cx="1417319" cy="502920"/>
+          </a:xfrm>
+          <a:prstGeom prst="rect">
+            <a:avLst/>
+          </a:prstGeom>
+          <a:noFill/>
+        </p:spPr>
+        <p:txBody>
+          <a:bodyPr wrap="none">
+            <a:spAutoFit/>
+          </a:bodyPr>
+          <a:lstStyle/>
+          <a:p>
+            <a:pPr>
+              <a:defRPr sz="2200" b="1">
+                <a:solidFill>
+                  <a:srgbClr val="142440"/>
+                </a:solidFill>
+              </a:defRPr>
+            </a:pPr>
+            <a:r>
+              <a:t>94.81%</a:t>
+            </a:r>
+          </a:p>
+        </p:txBody>
+      </p:sp>
+      <p:sp>
+        <p:nvSpPr>
+          <p:cNvPr id="11" name="Rounded Rectangle 10"/>
+          <p:cNvSpPr/>
+          <p:nvPr/>
+        </p:nvSpPr>
+        <p:spPr>
+          <a:xfrm>
+            <a:off x="2423160" y="1234440"/>
+            <a:ext cx="1737360" cy="1005840"/>
+          </a:xfrm>
+          <a:prstGeom prst="roundRect">
+            <a:avLst/>
+          </a:prstGeom>
+          <a:solidFill>
+            <a:srgbClr val="FFFFFF"/>
+          </a:solidFill>
+          <a:ln>
+            <a:solidFill>
+              <a:srgbClr val="D2DDEB"/>
+            </a:solidFill>
+          </a:ln>
+        </p:spPr>
+        <p:style>
+          <a:lnRef idx="1">
+            <a:schemeClr val="accent1"/>
+          </a:lnRef>
+          <a:fillRef idx="3">
+            <a:schemeClr val="accent1"/>
+          </a:fillRef>
+          <a:effectRef idx="2">
+            <a:schemeClr val="accent1"/>
+          </a:effectRef>
+          <a:fontRef idx="minor">
+            <a:schemeClr val="lt1"/>
+          </a:fontRef>
+        </p:style>
+        <p:txBody>
+          <a:bodyPr rtlCol="0" anchor="ctr"/>
+          <a:lstStyle/>
+          <a:p>
+            <a:pPr algn="ctr"/>
+          </a:p>
+        </p:txBody>
+      </p:sp>
+      <p:sp>
+        <p:nvSpPr>
+          <p:cNvPr id="12" name="Rectangle 11"/>
+          <p:cNvSpPr/>
+          <p:nvPr/>
+        </p:nvSpPr>
+        <p:spPr>
+          <a:xfrm>
+            <a:off x="2423160" y="1234440"/>
+            <a:ext cx="73152" cy="1005840"/>
+          </a:xfrm>
+          <a:prstGeom prst="rect">
+            <a:avLst/>
+          </a:prstGeom>
+          <a:solidFill>
+            <a:srgbClr val="EF8438"/>
+          </a:solidFill>
+          <a:ln>
+            <a:noFill/>
+          </a:ln>
+        </p:spPr>
+        <p:style>
+          <a:lnRef idx="1">
+            <a:schemeClr val="accent1"/>
+          </a:lnRef>
+          <a:fillRef idx="3">
+            <a:schemeClr val="accent1"/>
+          </a:fillRef>
+          <a:effectRef idx="2">
+            <a:schemeClr val="accent1"/>
+          </a:effectRef>
+          <a:fontRef idx="minor">
+            <a:schemeClr val="lt1"/>
+          </a:fontRef>
+        </p:style>
+        <p:txBody>
+          <a:bodyPr rtlCol="0" anchor="ctr"/>
+          <a:lstStyle/>
+          <a:p>
+            <a:pPr algn="ctr"/>
+          </a:p>
+        </p:txBody>
+      </p:sp>
+      <p:sp>
+        <p:nvSpPr>
+          <p:cNvPr id="13" name="TextBox 12"/>
+          <p:cNvSpPr txBox="1"/>
+          <p:nvPr/>
+        </p:nvSpPr>
+        <p:spPr>
+          <a:xfrm>
+            <a:off x="2624328" y="1371600"/>
+            <a:ext cx="1417319" cy="274320"/>
+          </a:xfrm>
+          <a:prstGeom prst="rect">
+            <a:avLst/>
+          </a:prstGeom>
+          <a:noFill/>
+        </p:spPr>
+        <p:txBody>
+          <a:bodyPr wrap="none">
+            <a:spAutoFit/>
+          </a:bodyPr>
+          <a:lstStyle/>
+          <a:p>
+            <a:pPr>
+              <a:defRPr sz="1000" b="1">
+                <a:solidFill>
+                  <a:srgbClr val="667487"/>
+                </a:solidFill>
+              </a:defRPr>
+            </a:pPr>
+            <a:r>
+              <a:t>Failure Rate</a:t>
+            </a:r>
+          </a:p>
+        </p:txBody>
+      </p:sp>
+      <p:sp>
+        <p:nvSpPr>
+          <p:cNvPr id="14" name="TextBox 13"/>
+          <p:cNvSpPr txBox="1"/>
+          <p:nvPr/>
+        </p:nvSpPr>
+        <p:spPr>
+          <a:xfrm>
+            <a:off x="2624328" y="1673352"/>
+            <a:ext cx="1417319" cy="502920"/>
+          </a:xfrm>
+          <a:prstGeom prst="rect">
+            <a:avLst/>
+          </a:prstGeom>
+          <a:noFill/>
+        </p:spPr>
+        <p:txBody>
+          <a:bodyPr wrap="none">
+            <a:spAutoFit/>
+          </a:bodyPr>
+          <a:lstStyle/>
+          <a:p>
+            <a:pPr>
+              <a:defRPr sz="2200" b="1">
+                <a:solidFill>
+                  <a:srgbClr val="142440"/>
+                </a:solidFill>
+              </a:defRPr>
+            </a:pPr>
+            <a:r>
+              <a:t>5.19%</a:t>
+            </a:r>
+          </a:p>
+        </p:txBody>
+      </p:sp>
+      <p:sp>
+        <p:nvSpPr>
+          <p:cNvPr id="15" name="Rounded Rectangle 14"/>
+          <p:cNvSpPr/>
+          <p:nvPr/>
+        </p:nvSpPr>
+        <p:spPr>
+          <a:xfrm>
+            <a:off x="4343400" y="1234440"/>
+            <a:ext cx="1737360" cy="1005840"/>
+          </a:xfrm>
+          <a:prstGeom prst="roundRect">
+            <a:avLst/>
+          </a:prstGeom>
+          <a:solidFill>
+            <a:srgbClr val="FFFFFF"/>
+          </a:solidFill>
+          <a:ln>
+            <a:solidFill>
+              <a:srgbClr val="D2DDEB"/>
+            </a:solidFill>
+          </a:ln>
+        </p:spPr>
+        <p:style>
+          <a:lnRef idx="1">
+            <a:schemeClr val="accent1"/>
+          </a:lnRef>
+          <a:fillRef idx="3">
+            <a:schemeClr val="accent1"/>
+          </a:fillRef>
+          <a:effectRef idx="2">
+            <a:schemeClr val="accent1"/>
+          </a:effectRef>
+          <a:fontRef idx="minor">
+            <a:schemeClr val="lt1"/>
+          </a:fontRef>
+        </p:style>
+        <p:txBody>
+          <a:bodyPr rtlCol="0" anchor="ctr"/>
+          <a:lstStyle/>
+          <a:p>
+            <a:pPr algn="ctr"/>
+          </a:p>
+        </p:txBody>
+      </p:sp>
+      <p:sp>
+        <p:nvSpPr>
+          <p:cNvPr id="16" name="Rectangle 15"/>
+          <p:cNvSpPr/>
+          <p:nvPr/>
+        </p:nvSpPr>
+        <p:spPr>
+          <a:xfrm>
+            <a:off x="4343400" y="1234440"/>
+            <a:ext cx="73152" cy="1005840"/>
+          </a:xfrm>
+          <a:prstGeom prst="rect">
+            <a:avLst/>
+          </a:prstGeom>
+          <a:solidFill>
+            <a:srgbClr val="3673C8"/>
+          </a:solidFill>
+          <a:ln>
+            <a:noFill/>
+          </a:ln>
+        </p:spPr>
+        <p:style>
+          <a:lnRef idx="1">
+            <a:schemeClr val="accent1"/>
+          </a:lnRef>
+          <a:fillRef idx="3">
+            <a:schemeClr val="accent1"/>
+          </a:fillRef>
+          <a:effectRef idx="2">
+            <a:schemeClr val="accent1"/>
+          </a:effectRef>
+          <a:fontRef idx="minor">
+            <a:schemeClr val="lt1"/>
+          </a:fontRef>
+        </p:style>
+        <p:txBody>
+          <a:bodyPr rtlCol="0" anchor="ctr"/>
+          <a:lstStyle/>
+          <a:p>
+            <a:pPr algn="ctr"/>
+          </a:p>
+        </p:txBody>
+      </p:sp>
+      <p:sp>
+        <p:nvSpPr>
+          <p:cNvPr id="17" name="TextBox 16"/>
+          <p:cNvSpPr txBox="1"/>
+          <p:nvPr/>
+        </p:nvSpPr>
+        <p:spPr>
+          <a:xfrm>
+            <a:off x="4544568" y="1371600"/>
+            <a:ext cx="1417319" cy="274320"/>
+          </a:xfrm>
+          <a:prstGeom prst="rect">
+            <a:avLst/>
+          </a:prstGeom>
+          <a:noFill/>
+        </p:spPr>
+        <p:txBody>
+          <a:bodyPr wrap="none">
+            <a:spAutoFit/>
+          </a:bodyPr>
+          <a:lstStyle/>
+          <a:p>
+            <a:pPr>
+              <a:defRPr sz="1000" b="1">
+                <a:solidFill>
+                  <a:srgbClr val="667487"/>
+                </a:solidFill>
+              </a:defRPr>
+            </a:pPr>
+            <a:r>
+              <a:t>P95 Latency</a:t>
+            </a:r>
+          </a:p>
+        </p:txBody>
+      </p:sp>
+      <p:sp>
+        <p:nvSpPr>
+          <p:cNvPr id="18" name="TextBox 17"/>
+          <p:cNvSpPr txBox="1"/>
+          <p:nvPr/>
+        </p:nvSpPr>
+        <p:spPr>
+          <a:xfrm>
+            <a:off x="4544568" y="1673352"/>
+            <a:ext cx="1417319" cy="502920"/>
+          </a:xfrm>
+          <a:prstGeom prst="rect">
+            <a:avLst/>
+          </a:prstGeom>
+          <a:noFill/>
+        </p:spPr>
+        <p:txBody>
+          <a:bodyPr wrap="none">
+            <a:spAutoFit/>
+          </a:bodyPr>
+          <a:lstStyle/>
+          <a:p>
+            <a:pPr>
+              <a:defRPr sz="2200" b="1">
+                <a:solidFill>
+                  <a:srgbClr val="142440"/>
+                </a:solidFill>
+              </a:defRPr>
+            </a:pPr>
+            <a:r>
+              <a:t>2,376 ms</a:t>
+            </a:r>
+          </a:p>
+        </p:txBody>
+      </p:sp>
+      <p:sp>
+        <p:nvSpPr>
+          <p:cNvPr id="19" name="Rounded Rectangle 18"/>
+          <p:cNvSpPr/>
+          <p:nvPr/>
+        </p:nvSpPr>
+        <p:spPr>
+          <a:xfrm>
+            <a:off x="6263640" y="1234440"/>
+            <a:ext cx="1737360" cy="1005840"/>
+          </a:xfrm>
+          <a:prstGeom prst="roundRect">
+            <a:avLst/>
+          </a:prstGeom>
+          <a:solidFill>
+            <a:srgbClr val="FFFFFF"/>
+          </a:solidFill>
+          <a:ln>
+            <a:solidFill>
+              <a:srgbClr val="D2DDEB"/>
+            </a:solidFill>
+          </a:ln>
+        </p:spPr>
+        <p:style>
+          <a:lnRef idx="1">
+            <a:schemeClr val="accent1"/>
+          </a:lnRef>
+          <a:fillRef idx="3">
+            <a:schemeClr val="accent1"/>
+          </a:fillRef>
+          <a:effectRef idx="2">
+            <a:schemeClr val="accent1"/>
+          </a:effectRef>
+          <a:fontRef idx="minor">
+            <a:schemeClr val="lt1"/>
+          </a:fontRef>
+        </p:style>
+        <p:txBody>
+          <a:bodyPr rtlCol="0" anchor="ctr"/>
+          <a:lstStyle/>
+          <a:p>
+            <a:pPr algn="ctr"/>
+          </a:p>
+        </p:txBody>
+      </p:sp>
+      <p:sp>
+        <p:nvSpPr>
+          <p:cNvPr id="20" name="Rectangle 19"/>
+          <p:cNvSpPr/>
+          <p:nvPr/>
+        </p:nvSpPr>
+        <p:spPr>
+          <a:xfrm>
+            <a:off x="6263640" y="1234440"/>
+            <a:ext cx="73152" cy="1005840"/>
+          </a:xfrm>
+          <a:prstGeom prst="rect">
+            <a:avLst/>
+          </a:prstGeom>
+          <a:solidFill>
+            <a:srgbClr val="7058BE"/>
+          </a:solidFill>
+          <a:ln>
+            <a:noFill/>
+          </a:ln>
+        </p:spPr>
+        <p:style>
+          <a:lnRef idx="1">
+            <a:schemeClr val="accent1"/>
+          </a:lnRef>
+          <a:fillRef idx="3">
+            <a:schemeClr val="accent1"/>
+          </a:fillRef>
+          <a:effectRef idx="2">
+            <a:schemeClr val="accent1"/>
+          </a:effectRef>
+          <a:fontRef idx="minor">
+            <a:schemeClr val="lt1"/>
+          </a:fontRef>
+        </p:style>
+        <p:txBody>
+          <a:bodyPr rtlCol="0" anchor="ctr"/>
+          <a:lstStyle/>
+          <a:p>
+            <a:pPr algn="ctr"/>
+          </a:p>
+        </p:txBody>
+      </p:sp>
+      <p:sp>
+        <p:nvSpPr>
+          <p:cNvPr id="21" name="TextBox 20"/>
+          <p:cNvSpPr txBox="1"/>
+          <p:nvPr/>
+        </p:nvSpPr>
+        <p:spPr>
+          <a:xfrm>
+            <a:off x="6464808" y="1371600"/>
+            <a:ext cx="1417319" cy="274320"/>
+          </a:xfrm>
+          <a:prstGeom prst="rect">
+            <a:avLst/>
+          </a:prstGeom>
+          <a:noFill/>
+        </p:spPr>
+        <p:txBody>
+          <a:bodyPr wrap="none">
+            <a:spAutoFit/>
+          </a:bodyPr>
+          <a:lstStyle/>
+          <a:p>
+            <a:pPr>
+              <a:defRPr sz="1000" b="1">
+                <a:solidFill>
+                  <a:srgbClr val="667487"/>
+                </a:solidFill>
+              </a:defRPr>
+            </a:pPr>
+            <a:r>
+              <a:t>P99 Latency</a:t>
+            </a:r>
+          </a:p>
+        </p:txBody>
+      </p:sp>
+      <p:sp>
+        <p:nvSpPr>
+          <p:cNvPr id="22" name="TextBox 21"/>
+          <p:cNvSpPr txBox="1"/>
+          <p:nvPr/>
+        </p:nvSpPr>
+        <p:spPr>
+          <a:xfrm>
+            <a:off x="6464808" y="1673352"/>
+            <a:ext cx="1417319" cy="502920"/>
+          </a:xfrm>
+          <a:prstGeom prst="rect">
+            <a:avLst/>
+          </a:prstGeom>
+          <a:noFill/>
+        </p:spPr>
+        <p:txBody>
+          <a:bodyPr wrap="none">
+            <a:spAutoFit/>
+          </a:bodyPr>
+          <a:lstStyle/>
+          <a:p>
+            <a:pPr>
+              <a:defRPr sz="2200" b="1">
+                <a:solidFill>
+                  <a:srgbClr val="142440"/>
+                </a:solidFill>
+              </a:defRPr>
+            </a:pPr>
+            <a:r>
+              <a:t>2,475 ms</a:t>
+            </a:r>
+          </a:p>
+        </p:txBody>
+      </p:sp>
+      <p:sp>
+        <p:nvSpPr>
+          <p:cNvPr id="23" name="Rounded Rectangle 22"/>
+          <p:cNvSpPr/>
+          <p:nvPr/>
+        </p:nvSpPr>
+        <p:spPr>
+          <a:xfrm>
+            <a:off x="8183880" y="1234440"/>
+            <a:ext cx="1737360" cy="1005840"/>
+          </a:xfrm>
+          <a:prstGeom prst="roundRect">
+            <a:avLst/>
+          </a:prstGeom>
+          <a:solidFill>
+            <a:srgbClr val="FFFFFF"/>
+          </a:solidFill>
+          <a:ln>
+            <a:solidFill>
+              <a:srgbClr val="D2DDEB"/>
+            </a:solidFill>
+          </a:ln>
+        </p:spPr>
+        <p:style>
+          <a:lnRef idx="1">
+            <a:schemeClr val="accent1"/>
+          </a:lnRef>
+          <a:fillRef idx="3">
+            <a:schemeClr val="accent1"/>
+          </a:fillRef>
+          <a:effectRef idx="2">
+            <a:schemeClr val="accent1"/>
+          </a:effectRef>
+          <a:fontRef idx="minor">
+            <a:schemeClr val="lt1"/>
+          </a:fontRef>
+        </p:style>
+        <p:txBody>
+          <a:bodyPr rtlCol="0" anchor="ctr"/>
+          <a:lstStyle/>
+          <a:p>
+            <a:pPr algn="ctr"/>
+          </a:p>
+        </p:txBody>
+      </p:sp>
+      <p:sp>
+        <p:nvSpPr>
+          <p:cNvPr id="24" name="Rectangle 23"/>
+          <p:cNvSpPr/>
+          <p:nvPr/>
+        </p:nvSpPr>
+        <p:spPr>
+          <a:xfrm>
+            <a:off x="8183880" y="1234440"/>
+            <a:ext cx="73152" cy="1005840"/>
+          </a:xfrm>
+          <a:prstGeom prst="rect">
+            <a:avLst/>
+          </a:prstGeom>
+          <a:solidFill>
+            <a:srgbClr val="00959C"/>
+          </a:solidFill>
+          <a:ln>
+            <a:noFill/>
+          </a:ln>
+        </p:spPr>
+        <p:style>
+          <a:lnRef idx="1">
+            <a:schemeClr val="accent1"/>
+          </a:lnRef>
+          <a:fillRef idx="3">
+            <a:schemeClr val="accent1"/>
+          </a:fillRef>
+          <a:effectRef idx="2">
+            <a:schemeClr val="accent1"/>
+          </a:effectRef>
+          <a:fontRef idx="minor">
+            <a:schemeClr val="lt1"/>
+          </a:fontRef>
+        </p:style>
+        <p:txBody>
+          <a:bodyPr rtlCol="0" anchor="ctr"/>
+          <a:lstStyle/>
+          <a:p>
+            <a:pPr algn="ctr"/>
+          </a:p>
+        </p:txBody>
+      </p:sp>
+      <p:sp>
+        <p:nvSpPr>
+          <p:cNvPr id="25" name="TextBox 24"/>
+          <p:cNvSpPr txBox="1"/>
+          <p:nvPr/>
+        </p:nvSpPr>
+        <p:spPr>
+          <a:xfrm>
+            <a:off x="8385048" y="1371600"/>
+            <a:ext cx="1417319" cy="274320"/>
+          </a:xfrm>
+          <a:prstGeom prst="rect">
+            <a:avLst/>
+          </a:prstGeom>
+          <a:noFill/>
+        </p:spPr>
+        <p:txBody>
+          <a:bodyPr wrap="none">
+            <a:spAutoFit/>
+          </a:bodyPr>
+          <a:lstStyle/>
+          <a:p>
+            <a:pPr>
+              <a:defRPr sz="1000" b="1">
+                <a:solidFill>
+                  <a:srgbClr val="667487"/>
+                </a:solidFill>
+              </a:defRPr>
+            </a:pPr>
+            <a:r>
+              <a:t>Latency SLO &lt;=2s</a:t>
+            </a:r>
+          </a:p>
+        </p:txBody>
+      </p:sp>
+      <p:sp>
+        <p:nvSpPr>
+          <p:cNvPr id="26" name="TextBox 25"/>
+          <p:cNvSpPr txBox="1"/>
+          <p:nvPr/>
+        </p:nvSpPr>
+        <p:spPr>
+          <a:xfrm>
+            <a:off x="8385048" y="1673352"/>
+            <a:ext cx="1417319" cy="502920"/>
+          </a:xfrm>
+          <a:prstGeom prst="rect">
+            <a:avLst/>
+          </a:prstGeom>
+          <a:noFill/>
+        </p:spPr>
+        <p:txBody>
+          <a:bodyPr wrap="none">
+            <a:spAutoFit/>
+          </a:bodyPr>
+          <a:lstStyle/>
+          <a:p>
+            <a:pPr>
+              <a:defRPr sz="2200" b="1">
+                <a:solidFill>
+                  <a:srgbClr val="142440"/>
+                </a:solidFill>
+              </a:defRPr>
+            </a:pPr>
+            <a:r>
+              <a:t>79.89%</a:t>
+            </a:r>
+          </a:p>
+        </p:txBody>
+      </p:sp>
+      <p:sp>
+        <p:nvSpPr>
+          <p:cNvPr id="27" name="Rounded Rectangle 26"/>
+          <p:cNvSpPr/>
+          <p:nvPr/>
+        </p:nvSpPr>
+        <p:spPr>
+          <a:xfrm>
+            <a:off x="10104120" y="1234440"/>
+            <a:ext cx="1737360" cy="1005840"/>
+          </a:xfrm>
+          <a:prstGeom prst="roundRect">
+            <a:avLst/>
+          </a:prstGeom>
+          <a:solidFill>
+            <a:srgbClr val="FFFFFF"/>
+          </a:solidFill>
+          <a:ln>
+            <a:solidFill>
+              <a:srgbClr val="D2DDEB"/>
+            </a:solidFill>
+          </a:ln>
+        </p:spPr>
+        <p:style>
+          <a:lnRef idx="1">
+            <a:schemeClr val="accent1"/>
+          </a:lnRef>
+          <a:fillRef idx="3">
+            <a:schemeClr val="accent1"/>
+          </a:fillRef>
+          <a:effectRef idx="2">
+            <a:schemeClr val="accent1"/>
+          </a:effectRef>
+          <a:fontRef idx="minor">
+            <a:schemeClr val="lt1"/>
+          </a:fontRef>
+        </p:style>
+        <p:txBody>
+          <a:bodyPr rtlCol="0" anchor="ctr"/>
+          <a:lstStyle/>
+          <a:p>
+            <a:pPr algn="ctr"/>
+          </a:p>
+        </p:txBody>
+      </p:sp>
+      <p:sp>
+        <p:nvSpPr>
+          <p:cNvPr id="28" name="Rectangle 27"/>
+          <p:cNvSpPr/>
+          <p:nvPr/>
+        </p:nvSpPr>
+        <p:spPr>
+          <a:xfrm>
+            <a:off x="10104120" y="1234440"/>
+            <a:ext cx="73152" cy="1005840"/>
+          </a:xfrm>
+          <a:prstGeom prst="rect">
+            <a:avLst/>
+          </a:prstGeom>
+          <a:solidFill>
+            <a:srgbClr val="D24848"/>
+          </a:solidFill>
+          <a:ln>
+            <a:noFill/>
+          </a:ln>
+        </p:spPr>
+        <p:style>
+          <a:lnRef idx="1">
+            <a:schemeClr val="accent1"/>
+          </a:lnRef>
+          <a:fillRef idx="3">
+            <a:schemeClr val="accent1"/>
+          </a:fillRef>
+          <a:effectRef idx="2">
+            <a:schemeClr val="accent1"/>
+          </a:effectRef>
+          <a:fontRef idx="minor">
+            <a:schemeClr val="lt1"/>
+          </a:fontRef>
+        </p:style>
+        <p:txBody>
+          <a:bodyPr rtlCol="0" anchor="ctr"/>
+          <a:lstStyle/>
+          <a:p>
+            <a:pPr algn="ctr"/>
+          </a:p>
+        </p:txBody>
+      </p:sp>
+      <p:sp>
+        <p:nvSpPr>
+          <p:cNvPr id="29" name="TextBox 28"/>
+          <p:cNvSpPr txBox="1"/>
+          <p:nvPr/>
+        </p:nvSpPr>
+        <p:spPr>
+          <a:xfrm>
+            <a:off x="10305288" y="1371600"/>
+            <a:ext cx="1417319" cy="274320"/>
+          </a:xfrm>
+          <a:prstGeom prst="rect">
+            <a:avLst/>
+          </a:prstGeom>
+          <a:noFill/>
+        </p:spPr>
+        <p:txBody>
+          <a:bodyPr wrap="none">
+            <a:spAutoFit/>
+          </a:bodyPr>
+          <a:lstStyle/>
+          <a:p>
+            <a:pPr>
+              <a:defRPr sz="1000" b="1">
+                <a:solidFill>
+                  <a:srgbClr val="667487"/>
+                </a:solidFill>
+              </a:defRPr>
+            </a:pPr>
+            <a:r>
+              <a:t>Error Log Events</a:t>
+            </a:r>
+          </a:p>
+        </p:txBody>
+      </p:sp>
+      <p:sp>
+        <p:nvSpPr>
+          <p:cNvPr id="30" name="TextBox 29"/>
+          <p:cNvSpPr txBox="1"/>
+          <p:nvPr/>
+        </p:nvSpPr>
+        <p:spPr>
+          <a:xfrm>
+            <a:off x="10305288" y="1673352"/>
+            <a:ext cx="1417319" cy="502920"/>
+          </a:xfrm>
+          <a:prstGeom prst="rect">
+            <a:avLst/>
+          </a:prstGeom>
+          <a:noFill/>
+        </p:spPr>
+        <p:txBody>
+          <a:bodyPr wrap="none">
+            <a:spAutoFit/>
+          </a:bodyPr>
+          <a:lstStyle/>
+          <a:p>
+            <a:pPr>
+              <a:defRPr sz="2200" b="1">
+                <a:solidFill>
+                  <a:srgbClr val="142440"/>
+                </a:solidFill>
+              </a:defRPr>
+            </a:pPr>
+            <a:r>
+              <a:t>51,887</a:t>
+            </a:r>
+          </a:p>
+        </p:txBody>
+      </p:sp>
+      <p:sp>
+        <p:nvSpPr>
+          <p:cNvPr id="31" name="TextBox 30"/>
+          <p:cNvSpPr txBox="1"/>
+          <p:nvPr/>
+        </p:nvSpPr>
+        <p:spPr>
+          <a:xfrm>
+            <a:off x="822960" y="2788920"/>
+            <a:ext cx="5212080" cy="2377440"/>
+          </a:xfrm>
+          <a:prstGeom prst="rect">
+            <a:avLst/>
+          </a:prstGeom>
+          <a:noFill/>
+        </p:spPr>
+        <p:txBody>
+          <a:bodyPr wrap="square">
+            <a:spAutoFit/>
+          </a:bodyPr>
+          <a:lstStyle/>
+          <a:p>
+            <a:pPr>
+              <a:buChar char="•"/>
+              <a:spcAft>
+                <a:spcPts val="800"/>
+              </a:spcAft>
+              <a:defRPr sz="1400">
+                <a:solidFill>
+                  <a:srgbClr val="222D3D"/>
+                </a:solidFill>
+              </a:defRPr>
+            </a:pPr>
+            <a:r>
+              <a:t>Treats each payment transaction as a service event for payments-api.</a:t>
+            </a:r>
+          </a:p>
+          <a:p>
+            <a:pPr>
+              <a:buChar char="•"/>
+              <a:spcAft>
+                <a:spcPts val="800"/>
+              </a:spcAft>
+              <a:defRPr sz="1400">
+                <a:solidFill>
+                  <a:srgbClr val="222D3D"/>
+                </a:solidFill>
+              </a:defRPr>
+            </a:pPr>
+            <a:r>
+              <a:t>Shows throughput, failure-rate and latency trends over time.</a:t>
+            </a:r>
+          </a:p>
+          <a:p>
+            <a:pPr>
+              <a:buChar char="•"/>
+              <a:spcAft>
+                <a:spcPts val="800"/>
+              </a:spcAft>
+              <a:defRPr sz="1400">
+                <a:solidFill>
+                  <a:srgbClr val="222D3D"/>
+                </a:solidFill>
+              </a:defRPr>
+            </a:pPr>
+            <a:r>
+              <a:t>Uses error_message as application log events for troubleshooting.</a:t>
+            </a:r>
+          </a:p>
+          <a:p>
+            <a:pPr>
+              <a:buChar char="•"/>
+              <a:spcAft>
+                <a:spcPts val="800"/>
+              </a:spcAft>
+              <a:defRPr sz="1400">
+                <a:solidFill>
+                  <a:srgbClr val="222D3D"/>
+                </a:solidFill>
+              </a:defRPr>
+            </a:pPr>
+            <a:r>
+              <a:t>Includes trace-style drill-down for slowest and failed transactions.</a:t>
+            </a:r>
+          </a:p>
+        </p:txBody>
+      </p:sp>
+      <p:sp>
+        <p:nvSpPr>
+          <p:cNvPr id="32" name="Rounded Rectangle 31"/>
+          <p:cNvSpPr/>
+          <p:nvPr/>
+        </p:nvSpPr>
+        <p:spPr>
+          <a:xfrm>
+            <a:off x="6400800" y="2788920"/>
+            <a:ext cx="4663440" cy="2240280"/>
+          </a:xfrm>
+          <a:prstGeom prst="roundRect">
+            <a:avLst/>
+          </a:prstGeom>
+          <a:solidFill>
+            <a:srgbClr val="FFFFFF"/>
+          </a:solidFill>
+          <a:ln>
+            <a:solidFill>
+              <a:srgbClr val="D2DDEB"/>
+            </a:solidFill>
+          </a:ln>
+        </p:spPr>
+        <p:style>
+          <a:lnRef idx="1">
+            <a:schemeClr val="accent1"/>
+          </a:lnRef>
+          <a:fillRef idx="3">
+            <a:schemeClr val="accent1"/>
+          </a:fillRef>
+          <a:effectRef idx="2">
+            <a:schemeClr val="accent1"/>
+          </a:effectRef>
+          <a:fontRef idx="minor">
+            <a:schemeClr val="lt1"/>
+          </a:fontRef>
+        </p:style>
+        <p:txBody>
+          <a:bodyPr rtlCol="0" anchor="ctr"/>
+          <a:lstStyle/>
+          <a:p>
+            <a:pPr algn="ctr"/>
+          </a:p>
+        </p:txBody>
+      </p:sp>
+      <p:sp>
+        <p:nvSpPr>
+          <p:cNvPr id="33" name="Rectangle 32"/>
+          <p:cNvSpPr/>
+          <p:nvPr/>
+        </p:nvSpPr>
+        <p:spPr>
+          <a:xfrm>
+            <a:off x="6400800" y="2788920"/>
+            <a:ext cx="73152" cy="2240280"/>
+          </a:xfrm>
+          <a:prstGeom prst="rect">
+            <a:avLst/>
+          </a:prstGeom>
+          <a:solidFill>
+            <a:srgbClr val="00959C"/>
+          </a:solidFill>
+          <a:ln>
+            <a:noFill/>
+          </a:ln>
+        </p:spPr>
+        <p:style>
+          <a:lnRef idx="1">
+            <a:schemeClr val="accent1"/>
+          </a:lnRef>
+          <a:fillRef idx="3">
+            <a:schemeClr val="accent1"/>
+          </a:fillRef>
+          <a:effectRef idx="2">
+            <a:schemeClr val="accent1"/>
+          </a:effectRef>
+          <a:fontRef idx="minor">
+            <a:schemeClr val="lt1"/>
+          </a:fontRef>
+        </p:style>
+        <p:txBody>
+          <a:bodyPr rtlCol="0" anchor="ctr"/>
+          <a:lstStyle/>
+          <a:p>
+            <a:pPr algn="ctr"/>
+          </a:p>
+        </p:txBody>
+      </p:sp>
+      <p:sp>
+        <p:nvSpPr>
+          <p:cNvPr id="34" name="TextBox 33"/>
+          <p:cNvSpPr txBox="1"/>
+          <p:nvPr/>
+        </p:nvSpPr>
+        <p:spPr>
+          <a:xfrm>
+            <a:off x="6601968" y="2926079"/>
+            <a:ext cx="4343400" cy="274320"/>
+          </a:xfrm>
+          <a:prstGeom prst="rect">
+            <a:avLst/>
+          </a:prstGeom>
+          <a:noFill/>
+        </p:spPr>
+        <p:txBody>
+          <a:bodyPr wrap="none">
+            <a:spAutoFit/>
+          </a:bodyPr>
+          <a:lstStyle/>
+          <a:p>
+            <a:pPr>
+              <a:defRPr sz="1000" b="1">
+                <a:solidFill>
+                  <a:srgbClr val="667487"/>
+                </a:solidFill>
+              </a:defRPr>
+            </a:pPr>
+            <a:r>
+              <a:t>Production extension</a:t>
+            </a:r>
+          </a:p>
+        </p:txBody>
+      </p:sp>
+      <p:sp>
+        <p:nvSpPr>
+          <p:cNvPr id="35" name="TextBox 34"/>
+          <p:cNvSpPr txBox="1"/>
+          <p:nvPr/>
+        </p:nvSpPr>
+        <p:spPr>
+          <a:xfrm>
+            <a:off x="6601968" y="3246120"/>
+            <a:ext cx="4343400" cy="1554480"/>
+          </a:xfrm>
+          <a:prstGeom prst="rect">
+            <a:avLst/>
+          </a:prstGeom>
+          <a:noFill/>
+        </p:spPr>
+        <p:txBody>
+          <a:bodyPr wrap="square">
+            <a:normAutofit/>
+          </a:bodyPr>
+          <a:lstStyle/>
+          <a:p>
+            <a:pPr>
+              <a:spcAft>
+                <a:spcPts val="300"/>
+              </a:spcAft>
+              <a:defRPr sz="950">
+                <a:solidFill>
+                  <a:srgbClr val="222D3D"/>
+                </a:solidFill>
+              </a:defRPr>
+            </a:pPr>
+            <a:r>
+              <a:t>Add real APM traces for end-to-end request paths.</a:t>
+            </a:r>
+          </a:p>
+          <a:p>
+            <a:pPr>
+              <a:spcAft>
+                <a:spcPts val="300"/>
+              </a:spcAft>
+              <a:defRPr sz="950">
+                <a:solidFill>
+                  <a:srgbClr val="222D3D"/>
+                </a:solidFill>
+              </a:defRPr>
+            </a:pPr>
+            <a:r>
+              <a:t>Ingest application logs and infrastructure metrics.</a:t>
+            </a:r>
+          </a:p>
+          <a:p>
+            <a:pPr>
+              <a:spcAft>
+                <a:spcPts val="300"/>
+              </a:spcAft>
+              <a:defRPr sz="950">
+                <a:solidFill>
+                  <a:srgbClr val="222D3D"/>
+                </a:solidFill>
+              </a:defRPr>
+            </a:pPr>
+            <a:r>
+              <a:t>Create alert rules and official Elastic SLO objects.</a:t>
+            </a:r>
+          </a:p>
+        </p:txBody>
+      </p:sp>
+      <p:sp>
+        <p:nvSpPr>
+          <p:cNvPr id="36" name="TextBox 35"/>
+          <p:cNvSpPr txBox="1"/>
+          <p:nvPr/>
+        </p:nvSpPr>
+        <p:spPr>
+          <a:xfrm>
+            <a:off x="868680" y="5897880"/>
+            <a:ext cx="7315200" cy="256032"/>
+          </a:xfrm>
+          <a:prstGeom prst="rect">
+            <a:avLst/>
+          </a:prstGeom>
+          <a:noFill/>
+        </p:spPr>
+        <p:txBody>
+          <a:bodyPr wrap="none">
+            <a:spAutoFit/>
+          </a:bodyPr>
+          <a:lstStyle/>
+          <a:p>
+            <a:r>
+              <a:rPr sz="1000" u="sng">
+                <a:solidFill>
+                  <a:srgbClr val="3673C8"/>
+                </a:solidFill>
+                <a:hlinkClick r:id="rId2"/>
+              </a:rPr>
+              <a:t>Open Payments Observability Dashboard</a:t>
             </a:r>
           </a:p>
         </p:txBody>

--- a/presentations/payments_dashboards_summary.pptx
+++ b/presentations/payments_dashboards_summary.pptx
@@ -3994,7 +3994,7 @@
               </a:defRPr>
             </a:pPr>
             <a:r>
-              <a:t>Recommended next steps</a:t>
+              <a:t>Key insights to communicate</a:t>
             </a:r>
           </a:p>
         </p:txBody>
@@ -4029,7 +4029,7 @@
               </a:defRPr>
             </a:pPr>
             <a:r>
-              <a:t>How to take the demo toward production</a:t>
+              <a:t>Business and technical outcomes from the dashboards</a:t>
             </a:r>
           </a:p>
         </p:txBody>
@@ -4112,8 +4112,8 @@
         </p:nvSpPr>
         <p:spPr>
           <a:xfrm>
-            <a:off x="868680" y="1188720"/>
-            <a:ext cx="5212080" cy="4389120"/>
+            <a:off x="822960" y="1234440"/>
+            <a:ext cx="5303520" cy="4389120"/>
           </a:xfrm>
           <a:prstGeom prst="rect">
             <a:avLst/>
@@ -4131,14 +4131,14 @@
               <a:spcAft>
                 <a:spcPts val="800"/>
               </a:spcAft>
-              <a:defRPr sz="1500">
+              <a:defRPr sz="1400">
                 <a:solidFill>
                   <a:srgbClr val="222D3D"/>
                 </a:solidFill>
               </a:defRPr>
             </a:pPr>
             <a:r>
-              <a:t>Connect real payment streams or batch exports.</a:t>
+              <a:t>Payment approval rate is 93.02%, showing a healthy baseline.</a:t>
             </a:r>
           </a:p>
           <a:p>
@@ -4147,14 +4147,14 @@
               <a:spcAft>
                 <a:spcPts val="800"/>
               </a:spcAft>
-              <a:defRPr sz="1500">
+              <a:defRPr sz="1400">
                 <a:solidFill>
                   <a:srgbClr val="222D3D"/>
                 </a:solidFill>
               </a:defRPr>
             </a:pPr>
             <a:r>
-              <a:t>Add alerts for high decline rate, high latency and off-hours spikes.</a:t>
+              <a:t>Total synthetic revenue is approximately $35,128,691 across 1,000,000 transactions.</a:t>
             </a:r>
           </a:p>
           <a:p>
@@ -4163,14 +4163,14 @@
               <a:spcAft>
                 <a:spcPts val="800"/>
               </a:spcAft>
-              <a:defRPr sz="1500">
+              <a:defRPr sz="1400">
                 <a:solidFill>
                   <a:srgbClr val="222D3D"/>
                 </a:solidFill>
               </a:defRPr>
             </a:pPr>
             <a:r>
-              <a:t>Introduce ML anomaly detection after baseline behavior is established.</a:t>
+              <a:t>Operational risk: 51,887 failed transactions and 201,523 high-latency transactions.</a:t>
             </a:r>
           </a:p>
           <a:p>
@@ -4179,14 +4179,14 @@
               <a:spcAft>
                 <a:spcPts val="800"/>
               </a:spcAft>
-              <a:defRPr sz="1500">
+              <a:defRPr sz="1400">
                 <a:solidFill>
                   <a:srgbClr val="222D3D"/>
                 </a:solidFill>
               </a:defRPr>
             </a:pPr>
             <a:r>
-              <a:t>Define production index lifecycle policy where ILM is available.</a:t>
+              <a:t>Country and merchant breakdowns make it easy to explain where performance changes originate.</a:t>
             </a:r>
           </a:p>
           <a:p>
@@ -4195,14 +4195,14 @@
               <a:spcAft>
                 <a:spcPts val="800"/>
               </a:spcAft>
-              <a:defRPr sz="1500">
+              <a:defRPr sz="1400">
                 <a:solidFill>
                   <a:srgbClr val="222D3D"/>
                 </a:solidFill>
               </a:defRPr>
             </a:pPr>
             <a:r>
-              <a:t>Add role-based access and scheduled PDF/PNG dashboard reports.</a:t>
+              <a:t>Runtime fields and ES|QL enable new calculations without reindexing the data.</a:t>
             </a:r>
           </a:p>
         </p:txBody>
@@ -4215,8 +4215,8 @@
         </p:nvSpPr>
         <p:spPr>
           <a:xfrm>
-            <a:off x="6400800" y="1325880"/>
-            <a:ext cx="4572000" cy="1828800"/>
+            <a:off x="6537960" y="1325880"/>
+            <a:ext cx="4480560" cy="3108960"/>
           </a:xfrm>
           <a:prstGeom prst="roundRect">
             <a:avLst/>
@@ -4260,14 +4260,14 @@
         </p:nvSpPr>
         <p:spPr>
           <a:xfrm>
-            <a:off x="6400800" y="1325880"/>
-            <a:ext cx="73152" cy="1828800"/>
+            <a:off x="6537960" y="1325880"/>
+            <a:ext cx="73152" cy="3108960"/>
           </a:xfrm>
           <a:prstGeom prst="rect">
             <a:avLst/>
           </a:prstGeom>
           <a:solidFill>
-            <a:srgbClr val="44AA5C"/>
+            <a:srgbClr val="3673C8"/>
           </a:solidFill>
           <a:ln>
             <a:noFill/>
@@ -4303,8 +4303,8 @@
         </p:nvSpPr>
         <p:spPr>
           <a:xfrm>
-            <a:off x="6601968" y="1463039"/>
-            <a:ext cx="4251960" cy="274320"/>
+            <a:off x="6739128" y="1463039"/>
+            <a:ext cx="4160520" cy="274320"/>
           </a:xfrm>
           <a:prstGeom prst="rect">
             <a:avLst/>
@@ -4325,7 +4325,7 @@
               </a:defRPr>
             </a:pPr>
             <a:r>
-              <a:t>Suggested closing statement</a:t>
+              <a:t>Presentation narrative</a:t>
             </a:r>
           </a:p>
         </p:txBody>
@@ -4338,8 +4338,8 @@
         </p:nvSpPr>
         <p:spPr>
           <a:xfrm>
-            <a:off x="6601968" y="1783080"/>
-            <a:ext cx="4251960" cy="1143000"/>
+            <a:off x="6739128" y="1783080"/>
+            <a:ext cx="4160520" cy="2423160"/>
           </a:xfrm>
           <a:prstGeom prst="rect">
             <a:avLst/>
@@ -4363,155 +4363,9 @@
               </a:defRPr>
             </a:pPr>
             <a:r>
-              <a:t>Elastic provides one platform for payment search, analytics, operations, anomaly detection and geographic insight.</a:t>
-            </a:r>
-          </a:p>
-        </p:txBody>
-      </p:sp>
-      <p:sp>
-        <p:nvSpPr>
-          <p:cNvPr id="12" name="Rounded Rectangle 11"/>
-          <p:cNvSpPr/>
-          <p:nvPr/>
-        </p:nvSpPr>
-        <p:spPr>
-          <a:xfrm>
-            <a:off x="6400800" y="3657600"/>
-            <a:ext cx="4572000" cy="1463040"/>
-          </a:xfrm>
-          <a:prstGeom prst="roundRect">
-            <a:avLst/>
-          </a:prstGeom>
-          <a:solidFill>
-            <a:srgbClr val="FFFFFF"/>
-          </a:solidFill>
-          <a:ln>
-            <a:solidFill>
-              <a:srgbClr val="D2DDEB"/>
-            </a:solidFill>
-          </a:ln>
-        </p:spPr>
-        <p:style>
-          <a:lnRef idx="1">
-            <a:schemeClr val="accent1"/>
-          </a:lnRef>
-          <a:fillRef idx="3">
-            <a:schemeClr val="accent1"/>
-          </a:fillRef>
-          <a:effectRef idx="2">
-            <a:schemeClr val="accent1"/>
-          </a:effectRef>
-          <a:fontRef idx="minor">
-            <a:schemeClr val="lt1"/>
-          </a:fontRef>
-        </p:style>
-        <p:txBody>
-          <a:bodyPr rtlCol="0" anchor="ctr"/>
-          <a:lstStyle/>
-          <a:p>
-            <a:pPr algn="ctr"/>
-          </a:p>
-        </p:txBody>
-      </p:sp>
-      <p:sp>
-        <p:nvSpPr>
-          <p:cNvPr id="13" name="Rectangle 12"/>
-          <p:cNvSpPr/>
-          <p:nvPr/>
-        </p:nvSpPr>
-        <p:spPr>
-          <a:xfrm>
-            <a:off x="6400800" y="3657600"/>
-            <a:ext cx="73152" cy="1463040"/>
-          </a:xfrm>
-          <a:prstGeom prst="rect">
-            <a:avLst/>
-          </a:prstGeom>
-          <a:solidFill>
-            <a:srgbClr val="7058BE"/>
-          </a:solidFill>
-          <a:ln>
-            <a:noFill/>
-          </a:ln>
-        </p:spPr>
-        <p:style>
-          <a:lnRef idx="1">
-            <a:schemeClr val="accent1"/>
-          </a:lnRef>
-          <a:fillRef idx="3">
-            <a:schemeClr val="accent1"/>
-          </a:fillRef>
-          <a:effectRef idx="2">
-            <a:schemeClr val="accent1"/>
-          </a:effectRef>
-          <a:fontRef idx="minor">
-            <a:schemeClr val="lt1"/>
-          </a:fontRef>
-        </p:style>
-        <p:txBody>
-          <a:bodyPr rtlCol="0" anchor="ctr"/>
-          <a:lstStyle/>
-          <a:p>
-            <a:pPr algn="ctr"/>
-          </a:p>
-        </p:txBody>
-      </p:sp>
-      <p:sp>
-        <p:nvSpPr>
-          <p:cNvPr id="14" name="TextBox 13"/>
-          <p:cNvSpPr txBox="1"/>
-          <p:nvPr/>
-        </p:nvSpPr>
-        <p:spPr>
-          <a:xfrm>
-            <a:off x="6601968" y="3794760"/>
-            <a:ext cx="4251960" cy="274320"/>
-          </a:xfrm>
-          <a:prstGeom prst="rect">
-            <a:avLst/>
-          </a:prstGeom>
-          <a:noFill/>
-        </p:spPr>
-        <p:txBody>
-          <a:bodyPr wrap="none">
-            <a:spAutoFit/>
-          </a:bodyPr>
-          <a:lstStyle/>
-          <a:p>
-            <a:pPr>
-              <a:defRPr sz="1000" b="1">
-                <a:solidFill>
-                  <a:srgbClr val="667487"/>
-                </a:solidFill>
-              </a:defRPr>
-            </a:pPr>
-            <a:r>
-              <a:t>Deliverable</a:t>
-            </a:r>
-          </a:p>
-        </p:txBody>
-      </p:sp>
-      <p:sp>
-        <p:nvSpPr>
-          <p:cNvPr id="15" name="TextBox 14"/>
-          <p:cNvSpPr txBox="1"/>
-          <p:nvPr/>
-        </p:nvSpPr>
-        <p:spPr>
-          <a:xfrm>
-            <a:off x="6601968" y="4114800"/>
-            <a:ext cx="4251960" cy="777240"/>
-          </a:xfrm>
-          <a:prstGeom prst="rect">
-            <a:avLst/>
-          </a:prstGeom>
-          <a:noFill/>
-        </p:spPr>
-        <p:txBody>
-          <a:bodyPr wrap="square">
-            <a:normAutofit/>
-          </a:bodyPr>
-          <a:lstStyle/>
+              <a:t>1. Start with executive KPIs</a:t>
+            </a:r>
+          </a:p>
           <a:p>
             <a:pPr>
               <a:spcAft>
@@ -4524,7 +4378,37 @@
               </a:defRPr>
             </a:pPr>
             <a:r>
-              <a:t>This deck summarizes five live Kibana dashboards and the Elasticsearch capabilities behind them.</a:t>
+              <a:t>2. Show operational drill-down</a:t>
+            </a:r>
+          </a:p>
+          <a:p>
+            <a:pPr>
+              <a:spcAft>
+                <a:spcPts val="300"/>
+              </a:spcAft>
+              <a:defRPr sz="950">
+                <a:solidFill>
+                  <a:srgbClr val="222D3D"/>
+                </a:solidFill>
+              </a:defRPr>
+            </a:pPr>
+            <a:r>
+              <a:t>3. Demonstrate anomaly monitoring</a:t>
+            </a:r>
+          </a:p>
+          <a:p>
+            <a:pPr>
+              <a:spcAft>
+                <a:spcPts val="300"/>
+              </a:spcAft>
+              <a:defRPr sz="950">
+                <a:solidFill>
+                  <a:srgbClr val="222D3D"/>
+                </a:solidFill>
+              </a:defRPr>
+            </a:pPr>
+            <a:r>
+              <a:t>4. Close with Elasticsearch platform capabilities</a:t>
             </a:r>
           </a:p>
         </p:txBody>
@@ -4628,7 +4512,7 @@
               </a:defRPr>
             </a:pPr>
             <a:r>
-              <a:t>Appendix: live dashboard links</a:t>
+              <a:t>Recommended next steps</a:t>
             </a:r>
           </a:p>
         </p:txBody>
@@ -4663,7 +4547,7 @@
               </a:defRPr>
             </a:pPr>
             <a:r>
-              <a:t>Use these links during the demo or Q&amp;A</a:t>
+              <a:t>How to take the demo toward production</a:t>
             </a:r>
           </a:p>
         </p:txBody>
@@ -4740,14 +4624,117 @@
       </p:sp>
       <p:sp>
         <p:nvSpPr>
-          <p:cNvPr id="7" name="Rounded Rectangle 6"/>
+          <p:cNvPr id="7" name="TextBox 6"/>
+          <p:cNvSpPr txBox="1"/>
+          <p:nvPr/>
+        </p:nvSpPr>
+        <p:spPr>
+          <a:xfrm>
+            <a:off x="868680" y="1188720"/>
+            <a:ext cx="5212080" cy="4389120"/>
+          </a:xfrm>
+          <a:prstGeom prst="rect">
+            <a:avLst/>
+          </a:prstGeom>
+          <a:noFill/>
+        </p:spPr>
+        <p:txBody>
+          <a:bodyPr wrap="square">
+            <a:spAutoFit/>
+          </a:bodyPr>
+          <a:lstStyle/>
+          <a:p>
+            <a:pPr>
+              <a:buChar char="•"/>
+              <a:spcAft>
+                <a:spcPts val="800"/>
+              </a:spcAft>
+              <a:defRPr sz="1500">
+                <a:solidFill>
+                  <a:srgbClr val="222D3D"/>
+                </a:solidFill>
+              </a:defRPr>
+            </a:pPr>
+            <a:r>
+              <a:t>Connect real payment streams or batch exports.</a:t>
+            </a:r>
+          </a:p>
+          <a:p>
+            <a:pPr>
+              <a:buChar char="•"/>
+              <a:spcAft>
+                <a:spcPts val="800"/>
+              </a:spcAft>
+              <a:defRPr sz="1500">
+                <a:solidFill>
+                  <a:srgbClr val="222D3D"/>
+                </a:solidFill>
+              </a:defRPr>
+            </a:pPr>
+            <a:r>
+              <a:t>Add alerts for high decline rate, high latency and off-hours spikes.</a:t>
+            </a:r>
+          </a:p>
+          <a:p>
+            <a:pPr>
+              <a:buChar char="•"/>
+              <a:spcAft>
+                <a:spcPts val="800"/>
+              </a:spcAft>
+              <a:defRPr sz="1500">
+                <a:solidFill>
+                  <a:srgbClr val="222D3D"/>
+                </a:solidFill>
+              </a:defRPr>
+            </a:pPr>
+            <a:r>
+              <a:t>Introduce ML anomaly detection after baseline behavior is established.</a:t>
+            </a:r>
+          </a:p>
+          <a:p>
+            <a:pPr>
+              <a:buChar char="•"/>
+              <a:spcAft>
+                <a:spcPts val="800"/>
+              </a:spcAft>
+              <a:defRPr sz="1500">
+                <a:solidFill>
+                  <a:srgbClr val="222D3D"/>
+                </a:solidFill>
+              </a:defRPr>
+            </a:pPr>
+            <a:r>
+              <a:t>Define production index lifecycle policy where ILM is available.</a:t>
+            </a:r>
+          </a:p>
+          <a:p>
+            <a:pPr>
+              <a:buChar char="•"/>
+              <a:spcAft>
+                <a:spcPts val="800"/>
+              </a:spcAft>
+              <a:defRPr sz="1500">
+                <a:solidFill>
+                  <a:srgbClr val="222D3D"/>
+                </a:solidFill>
+              </a:defRPr>
+            </a:pPr>
+            <a:r>
+              <a:t>Add role-based access and scheduled PDF/PNG dashboard reports.</a:t>
+            </a:r>
+          </a:p>
+        </p:txBody>
+      </p:sp>
+      <p:sp>
+        <p:nvSpPr>
+          <p:cNvPr id="8" name="Rounded Rectangle 7"/>
           <p:cNvSpPr/>
           <p:nvPr/>
         </p:nvSpPr>
         <p:spPr>
           <a:xfrm>
-            <a:off x="777240" y="1234440"/>
-            <a:ext cx="10607040" cy="685800"/>
+            <a:off x="6400800" y="1325880"/>
+            <a:ext cx="4572000" cy="1828800"/>
           </a:xfrm>
           <a:prstGeom prst="roundRect">
             <a:avLst/>
@@ -4785,20 +4772,20 @@
       </p:sp>
       <p:sp>
         <p:nvSpPr>
-          <p:cNvPr id="8" name="Rectangle 7"/>
+          <p:cNvPr id="9" name="Rectangle 8"/>
           <p:cNvSpPr/>
           <p:nvPr/>
         </p:nvSpPr>
         <p:spPr>
           <a:xfrm>
-            <a:off x="777240" y="1234440"/>
-            <a:ext cx="73152" cy="685800"/>
+            <a:off x="6400800" y="1325880"/>
+            <a:ext cx="73152" cy="1828800"/>
           </a:xfrm>
           <a:prstGeom prst="rect">
             <a:avLst/>
           </a:prstGeom>
           <a:solidFill>
-            <a:srgbClr val="3673C8"/>
+            <a:srgbClr val="44AA5C"/>
           </a:solidFill>
           <a:ln>
             <a:noFill/>
@@ -4828,14 +4815,14 @@
       </p:sp>
       <p:sp>
         <p:nvSpPr>
-          <p:cNvPr id="9" name="TextBox 8"/>
-          <p:cNvSpPr txBox="1"/>
-          <p:nvPr/>
-        </p:nvSpPr>
-        <p:spPr>
-          <a:xfrm>
-            <a:off x="978408" y="1371600"/>
-            <a:ext cx="10287000" cy="274320"/>
+          <p:cNvPr id="10" name="TextBox 9"/>
+          <p:cNvSpPr txBox="1"/>
+          <p:nvPr/>
+        </p:nvSpPr>
+        <p:spPr>
+          <a:xfrm>
+            <a:off x="6601968" y="1463039"/>
+            <a:ext cx="4251960" cy="274320"/>
           </a:xfrm>
           <a:prstGeom prst="rect">
             <a:avLst/>
@@ -4856,21 +4843,21 @@
               </a:defRPr>
             </a:pPr>
             <a:r>
-              <a:t>Executive Dashboard</a:t>
-            </a:r>
-          </a:p>
-        </p:txBody>
-      </p:sp>
-      <p:sp>
-        <p:nvSpPr>
-          <p:cNvPr id="10" name="TextBox 9"/>
-          <p:cNvSpPr txBox="1"/>
-          <p:nvPr/>
-        </p:nvSpPr>
-        <p:spPr>
-          <a:xfrm>
-            <a:off x="978408" y="1691640"/>
-            <a:ext cx="10287000" cy="0"/>
+              <a:t>Suggested closing statement</a:t>
+            </a:r>
+          </a:p>
+        </p:txBody>
+      </p:sp>
+      <p:sp>
+        <p:nvSpPr>
+          <p:cNvPr id="11" name="TextBox 10"/>
+          <p:cNvSpPr txBox="1"/>
+          <p:nvPr/>
+        </p:nvSpPr>
+        <p:spPr>
+          <a:xfrm>
+            <a:off x="6601968" y="1783080"/>
+            <a:ext cx="4251960" cy="1143000"/>
           </a:xfrm>
           <a:prstGeom prst="rect">
             <a:avLst/>
@@ -4894,41 +4881,7 @@
               </a:defRPr>
             </a:pPr>
             <a:r>
-              <a:t>https://payments-c225aa.kb.us-central1.gcp.elastic.cloud:443/app/dashboards#/view/4175393e-6f7a-4ff6-b800-0a6cc952fb08</a:t>
-            </a:r>
-          </a:p>
-        </p:txBody>
-      </p:sp>
-      <p:sp>
-        <p:nvSpPr>
-          <p:cNvPr id="11" name="TextBox 10"/>
-          <p:cNvSpPr txBox="1"/>
-          <p:nvPr/>
-        </p:nvSpPr>
-        <p:spPr>
-          <a:xfrm>
-            <a:off x="1005840" y="1554480"/>
-            <a:ext cx="7315200" cy="256032"/>
-          </a:xfrm>
-          <a:prstGeom prst="rect">
-            <a:avLst/>
-          </a:prstGeom>
-          <a:noFill/>
-        </p:spPr>
-        <p:txBody>
-          <a:bodyPr wrap="none">
-            <a:spAutoFit/>
-          </a:bodyPr>
-          <a:lstStyle/>
-          <a:p>
-            <a:r>
-              <a:rPr sz="1000" u="sng">
-                <a:solidFill>
-                  <a:srgbClr val="3673C8"/>
-                </a:solidFill>
-                <a:hlinkClick r:id="rId2"/>
-              </a:rPr>
-              <a:t>Open dashboard</a:t>
+              <a:t>Elastic provides one platform for payment search, analytics, operations, anomaly detection and geographic insight.</a:t>
             </a:r>
           </a:p>
         </p:txBody>
@@ -4941,8 +4894,8 @@
         </p:nvSpPr>
         <p:spPr>
           <a:xfrm>
-            <a:off x="777240" y="2103120"/>
-            <a:ext cx="10607040" cy="685800"/>
+            <a:off x="6400800" y="3657600"/>
+            <a:ext cx="4572000" cy="1463040"/>
           </a:xfrm>
           <a:prstGeom prst="roundRect">
             <a:avLst/>
@@ -4986,14 +4939,14 @@
         </p:nvSpPr>
         <p:spPr>
           <a:xfrm>
-            <a:off x="777240" y="2103120"/>
-            <a:ext cx="73152" cy="685800"/>
+            <a:off x="6400800" y="3657600"/>
+            <a:ext cx="73152" cy="1463040"/>
           </a:xfrm>
           <a:prstGeom prst="rect">
             <a:avLst/>
           </a:prstGeom>
           <a:solidFill>
-            <a:srgbClr val="3673C8"/>
+            <a:srgbClr val="7058BE"/>
           </a:solidFill>
           <a:ln>
             <a:noFill/>
@@ -5029,8 +4982,8 @@
         </p:nvSpPr>
         <p:spPr>
           <a:xfrm>
-            <a:off x="978408" y="2240279"/>
-            <a:ext cx="10287000" cy="274320"/>
+            <a:off x="6601968" y="3794760"/>
+            <a:ext cx="4251960" cy="274320"/>
           </a:xfrm>
           <a:prstGeom prst="rect">
             <a:avLst/>
@@ -5051,7 +5004,7 @@
               </a:defRPr>
             </a:pPr>
             <a:r>
-              <a:t>Operational Dashboard</a:t>
+              <a:t>Deliverable</a:t>
             </a:r>
           </a:p>
         </p:txBody>
@@ -5064,8 +5017,8 @@
         </p:nvSpPr>
         <p:spPr>
           <a:xfrm>
-            <a:off x="978408" y="2560320"/>
-            <a:ext cx="10287000" cy="0"/>
+            <a:off x="6601968" y="4114800"/>
+            <a:ext cx="4251960" cy="777240"/>
           </a:xfrm>
           <a:prstGeom prst="rect">
             <a:avLst/>
@@ -5089,821 +5042,7 @@
               </a:defRPr>
             </a:pPr>
             <a:r>
-              <a:t>https://payments-c225aa.kb.us-central1.gcp.elastic.cloud:443/app/dashboards#/view/f95d1796-ed29-40c4-af2c-a05a0f834039</a:t>
-            </a:r>
-          </a:p>
-        </p:txBody>
-      </p:sp>
-      <p:sp>
-        <p:nvSpPr>
-          <p:cNvPr id="16" name="TextBox 15"/>
-          <p:cNvSpPr txBox="1"/>
-          <p:nvPr/>
-        </p:nvSpPr>
-        <p:spPr>
-          <a:xfrm>
-            <a:off x="1005840" y="2423160"/>
-            <a:ext cx="7315200" cy="256032"/>
-          </a:xfrm>
-          <a:prstGeom prst="rect">
-            <a:avLst/>
-          </a:prstGeom>
-          <a:noFill/>
-        </p:spPr>
-        <p:txBody>
-          <a:bodyPr wrap="none">
-            <a:spAutoFit/>
-          </a:bodyPr>
-          <a:lstStyle/>
-          <a:p>
-            <a:r>
-              <a:rPr sz="1000" u="sng">
-                <a:solidFill>
-                  <a:srgbClr val="3673C8"/>
-                </a:solidFill>
-                <a:hlinkClick r:id="rId3"/>
-              </a:rPr>
-              <a:t>Open dashboard</a:t>
-            </a:r>
-          </a:p>
-        </p:txBody>
-      </p:sp>
-      <p:sp>
-        <p:nvSpPr>
-          <p:cNvPr id="17" name="Rounded Rectangle 16"/>
-          <p:cNvSpPr/>
-          <p:nvPr/>
-        </p:nvSpPr>
-        <p:spPr>
-          <a:xfrm>
-            <a:off x="777240" y="2971800"/>
-            <a:ext cx="10607040" cy="685800"/>
-          </a:xfrm>
-          <a:prstGeom prst="roundRect">
-            <a:avLst/>
-          </a:prstGeom>
-          <a:solidFill>
-            <a:srgbClr val="FFFFFF"/>
-          </a:solidFill>
-          <a:ln>
-            <a:solidFill>
-              <a:srgbClr val="D2DDEB"/>
-            </a:solidFill>
-          </a:ln>
-        </p:spPr>
-        <p:style>
-          <a:lnRef idx="1">
-            <a:schemeClr val="accent1"/>
-          </a:lnRef>
-          <a:fillRef idx="3">
-            <a:schemeClr val="accent1"/>
-          </a:fillRef>
-          <a:effectRef idx="2">
-            <a:schemeClr val="accent1"/>
-          </a:effectRef>
-          <a:fontRef idx="minor">
-            <a:schemeClr val="lt1"/>
-          </a:fontRef>
-        </p:style>
-        <p:txBody>
-          <a:bodyPr rtlCol="0" anchor="ctr"/>
-          <a:lstStyle/>
-          <a:p>
-            <a:pPr algn="ctr"/>
-          </a:p>
-        </p:txBody>
-      </p:sp>
-      <p:sp>
-        <p:nvSpPr>
-          <p:cNvPr id="18" name="Rectangle 17"/>
-          <p:cNvSpPr/>
-          <p:nvPr/>
-        </p:nvSpPr>
-        <p:spPr>
-          <a:xfrm>
-            <a:off x="777240" y="2971800"/>
-            <a:ext cx="73152" cy="685800"/>
-          </a:xfrm>
-          <a:prstGeom prst="rect">
-            <a:avLst/>
-          </a:prstGeom>
-          <a:solidFill>
-            <a:srgbClr val="3673C8"/>
-          </a:solidFill>
-          <a:ln>
-            <a:noFill/>
-          </a:ln>
-        </p:spPr>
-        <p:style>
-          <a:lnRef idx="1">
-            <a:schemeClr val="accent1"/>
-          </a:lnRef>
-          <a:fillRef idx="3">
-            <a:schemeClr val="accent1"/>
-          </a:fillRef>
-          <a:effectRef idx="2">
-            <a:schemeClr val="accent1"/>
-          </a:effectRef>
-          <a:fontRef idx="minor">
-            <a:schemeClr val="lt1"/>
-          </a:fontRef>
-        </p:style>
-        <p:txBody>
-          <a:bodyPr rtlCol="0" anchor="ctr"/>
-          <a:lstStyle/>
-          <a:p>
-            <a:pPr algn="ctr"/>
-          </a:p>
-        </p:txBody>
-      </p:sp>
-      <p:sp>
-        <p:nvSpPr>
-          <p:cNvPr id="19" name="TextBox 18"/>
-          <p:cNvSpPr txBox="1"/>
-          <p:nvPr/>
-        </p:nvSpPr>
-        <p:spPr>
-          <a:xfrm>
-            <a:off x="978408" y="3108960"/>
-            <a:ext cx="10287000" cy="274320"/>
-          </a:xfrm>
-          <a:prstGeom prst="rect">
-            <a:avLst/>
-          </a:prstGeom>
-          <a:noFill/>
-        </p:spPr>
-        <p:txBody>
-          <a:bodyPr wrap="none">
-            <a:spAutoFit/>
-          </a:bodyPr>
-          <a:lstStyle/>
-          <a:p>
-            <a:pPr>
-              <a:defRPr sz="1000" b="1">
-                <a:solidFill>
-                  <a:srgbClr val="667487"/>
-                </a:solidFill>
-              </a:defRPr>
-            </a:pPr>
-            <a:r>
-              <a:t>Anomaly Detection Dashboard</a:t>
-            </a:r>
-          </a:p>
-        </p:txBody>
-      </p:sp>
-      <p:sp>
-        <p:nvSpPr>
-          <p:cNvPr id="20" name="TextBox 19"/>
-          <p:cNvSpPr txBox="1"/>
-          <p:nvPr/>
-        </p:nvSpPr>
-        <p:spPr>
-          <a:xfrm>
-            <a:off x="978408" y="3429000"/>
-            <a:ext cx="10287000" cy="0"/>
-          </a:xfrm>
-          <a:prstGeom prst="rect">
-            <a:avLst/>
-          </a:prstGeom>
-          <a:noFill/>
-        </p:spPr>
-        <p:txBody>
-          <a:bodyPr wrap="square">
-            <a:normAutofit/>
-          </a:bodyPr>
-          <a:lstStyle/>
-          <a:p>
-            <a:pPr>
-              <a:spcAft>
-                <a:spcPts val="300"/>
-              </a:spcAft>
-              <a:defRPr sz="950">
-                <a:solidFill>
-                  <a:srgbClr val="222D3D"/>
-                </a:solidFill>
-              </a:defRPr>
-            </a:pPr>
-            <a:r>
-              <a:t>https://payments-c225aa.kb.us-central1.gcp.elastic.cloud:443/app/dashboards#/view/3b55a52b-7342-469d-8ebc-317ec4450018</a:t>
-            </a:r>
-          </a:p>
-        </p:txBody>
-      </p:sp>
-      <p:sp>
-        <p:nvSpPr>
-          <p:cNvPr id="21" name="TextBox 20"/>
-          <p:cNvSpPr txBox="1"/>
-          <p:nvPr/>
-        </p:nvSpPr>
-        <p:spPr>
-          <a:xfrm>
-            <a:off x="1005840" y="3291840"/>
-            <a:ext cx="7315200" cy="256032"/>
-          </a:xfrm>
-          <a:prstGeom prst="rect">
-            <a:avLst/>
-          </a:prstGeom>
-          <a:noFill/>
-        </p:spPr>
-        <p:txBody>
-          <a:bodyPr wrap="none">
-            <a:spAutoFit/>
-          </a:bodyPr>
-          <a:lstStyle/>
-          <a:p>
-            <a:r>
-              <a:rPr sz="1000" u="sng">
-                <a:solidFill>
-                  <a:srgbClr val="3673C8"/>
-                </a:solidFill>
-                <a:hlinkClick r:id="rId4"/>
-              </a:rPr>
-              <a:t>Open dashboard</a:t>
-            </a:r>
-          </a:p>
-        </p:txBody>
-      </p:sp>
-      <p:sp>
-        <p:nvSpPr>
-          <p:cNvPr id="22" name="Rounded Rectangle 21"/>
-          <p:cNvSpPr/>
-          <p:nvPr/>
-        </p:nvSpPr>
-        <p:spPr>
-          <a:xfrm>
-            <a:off x="777240" y="3840480"/>
-            <a:ext cx="10607040" cy="685800"/>
-          </a:xfrm>
-          <a:prstGeom prst="roundRect">
-            <a:avLst/>
-          </a:prstGeom>
-          <a:solidFill>
-            <a:srgbClr val="FFFFFF"/>
-          </a:solidFill>
-          <a:ln>
-            <a:solidFill>
-              <a:srgbClr val="D2DDEB"/>
-            </a:solidFill>
-          </a:ln>
-        </p:spPr>
-        <p:style>
-          <a:lnRef idx="1">
-            <a:schemeClr val="accent1"/>
-          </a:lnRef>
-          <a:fillRef idx="3">
-            <a:schemeClr val="accent1"/>
-          </a:fillRef>
-          <a:effectRef idx="2">
-            <a:schemeClr val="accent1"/>
-          </a:effectRef>
-          <a:fontRef idx="minor">
-            <a:schemeClr val="lt1"/>
-          </a:fontRef>
-        </p:style>
-        <p:txBody>
-          <a:bodyPr rtlCol="0" anchor="ctr"/>
-          <a:lstStyle/>
-          <a:p>
-            <a:pPr algn="ctr"/>
-          </a:p>
-        </p:txBody>
-      </p:sp>
-      <p:sp>
-        <p:nvSpPr>
-          <p:cNvPr id="23" name="Rectangle 22"/>
-          <p:cNvSpPr/>
-          <p:nvPr/>
-        </p:nvSpPr>
-        <p:spPr>
-          <a:xfrm>
-            <a:off x="777240" y="3840480"/>
-            <a:ext cx="73152" cy="685800"/>
-          </a:xfrm>
-          <a:prstGeom prst="rect">
-            <a:avLst/>
-          </a:prstGeom>
-          <a:solidFill>
-            <a:srgbClr val="3673C8"/>
-          </a:solidFill>
-          <a:ln>
-            <a:noFill/>
-          </a:ln>
-        </p:spPr>
-        <p:style>
-          <a:lnRef idx="1">
-            <a:schemeClr val="accent1"/>
-          </a:lnRef>
-          <a:fillRef idx="3">
-            <a:schemeClr val="accent1"/>
-          </a:fillRef>
-          <a:effectRef idx="2">
-            <a:schemeClr val="accent1"/>
-          </a:effectRef>
-          <a:fontRef idx="minor">
-            <a:schemeClr val="lt1"/>
-          </a:fontRef>
-        </p:style>
-        <p:txBody>
-          <a:bodyPr rtlCol="0" anchor="ctr"/>
-          <a:lstStyle/>
-          <a:p>
-            <a:pPr algn="ctr"/>
-          </a:p>
-        </p:txBody>
-      </p:sp>
-      <p:sp>
-        <p:nvSpPr>
-          <p:cNvPr id="24" name="TextBox 23"/>
-          <p:cNvSpPr txBox="1"/>
-          <p:nvPr/>
-        </p:nvSpPr>
-        <p:spPr>
-          <a:xfrm>
-            <a:off x="978408" y="3977640"/>
-            <a:ext cx="10287000" cy="274320"/>
-          </a:xfrm>
-          <a:prstGeom prst="rect">
-            <a:avLst/>
-          </a:prstGeom>
-          <a:noFill/>
-        </p:spPr>
-        <p:txBody>
-          <a:bodyPr wrap="none">
-            <a:spAutoFit/>
-          </a:bodyPr>
-          <a:lstStyle/>
-          <a:p>
-            <a:pPr>
-              <a:defRPr sz="1000" b="1">
-                <a:solidFill>
-                  <a:srgbClr val="667487"/>
-                </a:solidFill>
-              </a:defRPr>
-            </a:pPr>
-            <a:r>
-              <a:t>Elasticsearch Capabilities Demo</a:t>
-            </a:r>
-          </a:p>
-        </p:txBody>
-      </p:sp>
-      <p:sp>
-        <p:nvSpPr>
-          <p:cNvPr id="25" name="TextBox 24"/>
-          <p:cNvSpPr txBox="1"/>
-          <p:nvPr/>
-        </p:nvSpPr>
-        <p:spPr>
-          <a:xfrm>
-            <a:off x="978408" y="4297680"/>
-            <a:ext cx="10287000" cy="0"/>
-          </a:xfrm>
-          <a:prstGeom prst="rect">
-            <a:avLst/>
-          </a:prstGeom>
-          <a:noFill/>
-        </p:spPr>
-        <p:txBody>
-          <a:bodyPr wrap="square">
-            <a:normAutofit/>
-          </a:bodyPr>
-          <a:lstStyle/>
-          <a:p>
-            <a:pPr>
-              <a:spcAft>
-                <a:spcPts val="300"/>
-              </a:spcAft>
-              <a:defRPr sz="950">
-                <a:solidFill>
-                  <a:srgbClr val="222D3D"/>
-                </a:solidFill>
-              </a:defRPr>
-            </a:pPr>
-            <a:r>
-              <a:t>https://payments-c225aa.kb.us-central1.gcp.elastic.cloud:443/app/dashboards#/view/d5e44534-8afb-438e-ae72-aa908ab2bb11</a:t>
-            </a:r>
-          </a:p>
-        </p:txBody>
-      </p:sp>
-      <p:sp>
-        <p:nvSpPr>
-          <p:cNvPr id="26" name="TextBox 25"/>
-          <p:cNvSpPr txBox="1"/>
-          <p:nvPr/>
-        </p:nvSpPr>
-        <p:spPr>
-          <a:xfrm>
-            <a:off x="1005840" y="4160520"/>
-            <a:ext cx="7315200" cy="256032"/>
-          </a:xfrm>
-          <a:prstGeom prst="rect">
-            <a:avLst/>
-          </a:prstGeom>
-          <a:noFill/>
-        </p:spPr>
-        <p:txBody>
-          <a:bodyPr wrap="none">
-            <a:spAutoFit/>
-          </a:bodyPr>
-          <a:lstStyle/>
-          <a:p>
-            <a:r>
-              <a:rPr sz="1000" u="sng">
-                <a:solidFill>
-                  <a:srgbClr val="3673C8"/>
-                </a:solidFill>
-                <a:hlinkClick r:id="rId5"/>
-              </a:rPr>
-              <a:t>Open dashboard</a:t>
-            </a:r>
-          </a:p>
-        </p:txBody>
-      </p:sp>
-      <p:sp>
-        <p:nvSpPr>
-          <p:cNvPr id="27" name="Rounded Rectangle 26"/>
-          <p:cNvSpPr/>
-          <p:nvPr/>
-        </p:nvSpPr>
-        <p:spPr>
-          <a:xfrm>
-            <a:off x="777240" y="4709160"/>
-            <a:ext cx="10607040" cy="685800"/>
-          </a:xfrm>
-          <a:prstGeom prst="roundRect">
-            <a:avLst/>
-          </a:prstGeom>
-          <a:solidFill>
-            <a:srgbClr val="FFFFFF"/>
-          </a:solidFill>
-          <a:ln>
-            <a:solidFill>
-              <a:srgbClr val="D2DDEB"/>
-            </a:solidFill>
-          </a:ln>
-        </p:spPr>
-        <p:style>
-          <a:lnRef idx="1">
-            <a:schemeClr val="accent1"/>
-          </a:lnRef>
-          <a:fillRef idx="3">
-            <a:schemeClr val="accent1"/>
-          </a:fillRef>
-          <a:effectRef idx="2">
-            <a:schemeClr val="accent1"/>
-          </a:effectRef>
-          <a:fontRef idx="minor">
-            <a:schemeClr val="lt1"/>
-          </a:fontRef>
-        </p:style>
-        <p:txBody>
-          <a:bodyPr rtlCol="0" anchor="ctr"/>
-          <a:lstStyle/>
-          <a:p>
-            <a:pPr algn="ctr"/>
-          </a:p>
-        </p:txBody>
-      </p:sp>
-      <p:sp>
-        <p:nvSpPr>
-          <p:cNvPr id="28" name="Rectangle 27"/>
-          <p:cNvSpPr/>
-          <p:nvPr/>
-        </p:nvSpPr>
-        <p:spPr>
-          <a:xfrm>
-            <a:off x="777240" y="4709160"/>
-            <a:ext cx="73152" cy="685800"/>
-          </a:xfrm>
-          <a:prstGeom prst="rect">
-            <a:avLst/>
-          </a:prstGeom>
-          <a:solidFill>
-            <a:srgbClr val="3673C8"/>
-          </a:solidFill>
-          <a:ln>
-            <a:noFill/>
-          </a:ln>
-        </p:spPr>
-        <p:style>
-          <a:lnRef idx="1">
-            <a:schemeClr val="accent1"/>
-          </a:lnRef>
-          <a:fillRef idx="3">
-            <a:schemeClr val="accent1"/>
-          </a:fillRef>
-          <a:effectRef idx="2">
-            <a:schemeClr val="accent1"/>
-          </a:effectRef>
-          <a:fontRef idx="minor">
-            <a:schemeClr val="lt1"/>
-          </a:fontRef>
-        </p:style>
-        <p:txBody>
-          <a:bodyPr rtlCol="0" anchor="ctr"/>
-          <a:lstStyle/>
-          <a:p>
-            <a:pPr algn="ctr"/>
-          </a:p>
-        </p:txBody>
-      </p:sp>
-      <p:sp>
-        <p:nvSpPr>
-          <p:cNvPr id="29" name="TextBox 28"/>
-          <p:cNvSpPr txBox="1"/>
-          <p:nvPr/>
-        </p:nvSpPr>
-        <p:spPr>
-          <a:xfrm>
-            <a:off x="978408" y="4846320"/>
-            <a:ext cx="10287000" cy="274320"/>
-          </a:xfrm>
-          <a:prstGeom prst="rect">
-            <a:avLst/>
-          </a:prstGeom>
-          <a:noFill/>
-        </p:spPr>
-        <p:txBody>
-          <a:bodyPr wrap="none">
-            <a:spAutoFit/>
-          </a:bodyPr>
-          <a:lstStyle/>
-          <a:p>
-            <a:pPr>
-              <a:defRPr sz="1000" b="1">
-                <a:solidFill>
-                  <a:srgbClr val="667487"/>
-                </a:solidFill>
-              </a:defRPr>
-            </a:pPr>
-            <a:r>
-              <a:t>Payments World Map</a:t>
-            </a:r>
-          </a:p>
-        </p:txBody>
-      </p:sp>
-      <p:sp>
-        <p:nvSpPr>
-          <p:cNvPr id="30" name="TextBox 29"/>
-          <p:cNvSpPr txBox="1"/>
-          <p:nvPr/>
-        </p:nvSpPr>
-        <p:spPr>
-          <a:xfrm>
-            <a:off x="978408" y="5166360"/>
-            <a:ext cx="10287000" cy="0"/>
-          </a:xfrm>
-          <a:prstGeom prst="rect">
-            <a:avLst/>
-          </a:prstGeom>
-          <a:noFill/>
-        </p:spPr>
-        <p:txBody>
-          <a:bodyPr wrap="square">
-            <a:normAutofit/>
-          </a:bodyPr>
-          <a:lstStyle/>
-          <a:p>
-            <a:pPr>
-              <a:spcAft>
-                <a:spcPts val="300"/>
-              </a:spcAft>
-              <a:defRPr sz="950">
-                <a:solidFill>
-                  <a:srgbClr val="222D3D"/>
-                </a:solidFill>
-              </a:defRPr>
-            </a:pPr>
-            <a:r>
-              <a:t>https://payments-c225aa.kb.us-central1.gcp.elastic.cloud:443/app/dashboards#/view/9a0f1247-c2d0-475a-9d11-b5c21e950fa2</a:t>
-            </a:r>
-          </a:p>
-        </p:txBody>
-      </p:sp>
-      <p:sp>
-        <p:nvSpPr>
-          <p:cNvPr id="31" name="TextBox 30"/>
-          <p:cNvSpPr txBox="1"/>
-          <p:nvPr/>
-        </p:nvSpPr>
-        <p:spPr>
-          <a:xfrm>
-            <a:off x="1005840" y="5029200"/>
-            <a:ext cx="7315200" cy="256032"/>
-          </a:xfrm>
-          <a:prstGeom prst="rect">
-            <a:avLst/>
-          </a:prstGeom>
-          <a:noFill/>
-        </p:spPr>
-        <p:txBody>
-          <a:bodyPr wrap="none">
-            <a:spAutoFit/>
-          </a:bodyPr>
-          <a:lstStyle/>
-          <a:p>
-            <a:r>
-              <a:rPr sz="1000" u="sng">
-                <a:solidFill>
-                  <a:srgbClr val="3673C8"/>
-                </a:solidFill>
-                <a:hlinkClick r:id="rId6"/>
-              </a:rPr>
-              <a:t>Open dashboard</a:t>
-            </a:r>
-          </a:p>
-        </p:txBody>
-      </p:sp>
-      <p:sp>
-        <p:nvSpPr>
-          <p:cNvPr id="32" name="Rounded Rectangle 31"/>
-          <p:cNvSpPr/>
-          <p:nvPr/>
-        </p:nvSpPr>
-        <p:spPr>
-          <a:xfrm>
-            <a:off x="777240" y="5577840"/>
-            <a:ext cx="10607040" cy="685800"/>
-          </a:xfrm>
-          <a:prstGeom prst="roundRect">
-            <a:avLst/>
-          </a:prstGeom>
-          <a:solidFill>
-            <a:srgbClr val="FFFFFF"/>
-          </a:solidFill>
-          <a:ln>
-            <a:solidFill>
-              <a:srgbClr val="D2DDEB"/>
-            </a:solidFill>
-          </a:ln>
-        </p:spPr>
-        <p:style>
-          <a:lnRef idx="1">
-            <a:schemeClr val="accent1"/>
-          </a:lnRef>
-          <a:fillRef idx="3">
-            <a:schemeClr val="accent1"/>
-          </a:fillRef>
-          <a:effectRef idx="2">
-            <a:schemeClr val="accent1"/>
-          </a:effectRef>
-          <a:fontRef idx="minor">
-            <a:schemeClr val="lt1"/>
-          </a:fontRef>
-        </p:style>
-        <p:txBody>
-          <a:bodyPr rtlCol="0" anchor="ctr"/>
-          <a:lstStyle/>
-          <a:p>
-            <a:pPr algn="ctr"/>
-          </a:p>
-        </p:txBody>
-      </p:sp>
-      <p:sp>
-        <p:nvSpPr>
-          <p:cNvPr id="33" name="Rectangle 32"/>
-          <p:cNvSpPr/>
-          <p:nvPr/>
-        </p:nvSpPr>
-        <p:spPr>
-          <a:xfrm>
-            <a:off x="777240" y="5577840"/>
-            <a:ext cx="73152" cy="685800"/>
-          </a:xfrm>
-          <a:prstGeom prst="rect">
-            <a:avLst/>
-          </a:prstGeom>
-          <a:solidFill>
-            <a:srgbClr val="00959C"/>
-          </a:solidFill>
-          <a:ln>
-            <a:noFill/>
-          </a:ln>
-        </p:spPr>
-        <p:style>
-          <a:lnRef idx="1">
-            <a:schemeClr val="accent1"/>
-          </a:lnRef>
-          <a:fillRef idx="3">
-            <a:schemeClr val="accent1"/>
-          </a:fillRef>
-          <a:effectRef idx="2">
-            <a:schemeClr val="accent1"/>
-          </a:effectRef>
-          <a:fontRef idx="minor">
-            <a:schemeClr val="lt1"/>
-          </a:fontRef>
-        </p:style>
-        <p:txBody>
-          <a:bodyPr rtlCol="0" anchor="ctr"/>
-          <a:lstStyle/>
-          <a:p>
-            <a:pPr algn="ctr"/>
-          </a:p>
-        </p:txBody>
-      </p:sp>
-      <p:sp>
-        <p:nvSpPr>
-          <p:cNvPr id="34" name="TextBox 33"/>
-          <p:cNvSpPr txBox="1"/>
-          <p:nvPr/>
-        </p:nvSpPr>
-        <p:spPr>
-          <a:xfrm>
-            <a:off x="978408" y="5715000"/>
-            <a:ext cx="10287000" cy="274320"/>
-          </a:xfrm>
-          <a:prstGeom prst="rect">
-            <a:avLst/>
-          </a:prstGeom>
-          <a:noFill/>
-        </p:spPr>
-        <p:txBody>
-          <a:bodyPr wrap="none">
-            <a:spAutoFit/>
-          </a:bodyPr>
-          <a:lstStyle/>
-          <a:p>
-            <a:pPr>
-              <a:defRPr sz="1000" b="1">
-                <a:solidFill>
-                  <a:srgbClr val="667487"/>
-                </a:solidFill>
-              </a:defRPr>
-            </a:pPr>
-            <a:r>
-              <a:t>Payments Observability Dashboard</a:t>
-            </a:r>
-          </a:p>
-        </p:txBody>
-      </p:sp>
-      <p:sp>
-        <p:nvSpPr>
-          <p:cNvPr id="35" name="TextBox 34"/>
-          <p:cNvSpPr txBox="1"/>
-          <p:nvPr/>
-        </p:nvSpPr>
-        <p:spPr>
-          <a:xfrm>
-            <a:off x="978408" y="6035040"/>
-            <a:ext cx="10287000" cy="0"/>
-          </a:xfrm>
-          <a:prstGeom prst="rect">
-            <a:avLst/>
-          </a:prstGeom>
-          <a:noFill/>
-        </p:spPr>
-        <p:txBody>
-          <a:bodyPr wrap="square">
-            <a:normAutofit/>
-          </a:bodyPr>
-          <a:lstStyle/>
-          <a:p>
-            <a:pPr>
-              <a:spcAft>
-                <a:spcPts val="300"/>
-              </a:spcAft>
-              <a:defRPr sz="950">
-                <a:solidFill>
-                  <a:srgbClr val="222D3D"/>
-                </a:solidFill>
-              </a:defRPr>
-            </a:pPr>
-            <a:r>
-              <a:t>https://payments-c225aa.kb.us-central1.gcp.elastic.cloud:443/app/dashboards#/view/250b10ed-6fa9-4032-bec9-8d7d1a3632f6</a:t>
-            </a:r>
-          </a:p>
-        </p:txBody>
-      </p:sp>
-      <p:sp>
-        <p:nvSpPr>
-          <p:cNvPr id="36" name="TextBox 35"/>
-          <p:cNvSpPr txBox="1"/>
-          <p:nvPr/>
-        </p:nvSpPr>
-        <p:spPr>
-          <a:xfrm>
-            <a:off x="1005840" y="5897880"/>
-            <a:ext cx="7315200" cy="256032"/>
-          </a:xfrm>
-          <a:prstGeom prst="rect">
-            <a:avLst/>
-          </a:prstGeom>
-          <a:noFill/>
-        </p:spPr>
-        <p:txBody>
-          <a:bodyPr wrap="none">
-            <a:spAutoFit/>
-          </a:bodyPr>
-          <a:lstStyle/>
-          <a:p>
-            <a:r>
-              <a:rPr sz="1000" u="sng">
-                <a:solidFill>
-                  <a:srgbClr val="3673C8"/>
-                </a:solidFill>
-                <a:hlinkClick r:id="rId7"/>
-              </a:rPr>
-              <a:t>Open dashboard</a:t>
+              <a:t>This deck summarizes five live Kibana dashboards and the Elasticsearch capabilities behind them.</a:t>
             </a:r>
           </a:p>
         </p:txBody>
@@ -5986,7 +5125,7 @@
         <p:spPr>
           <a:xfrm>
             <a:off x="502920" y="320040"/>
-            <a:ext cx="8503920" cy="502920"/>
+            <a:ext cx="8046720" cy="502920"/>
           </a:xfrm>
           <a:prstGeom prst="rect">
             <a:avLst/>
@@ -6007,7 +5146,7 @@
               </a:defRPr>
             </a:pPr>
             <a:r>
-              <a:t>Observability Dashboard</a:t>
+              <a:t>Appendix: live dashboard links</a:t>
             </a:r>
           </a:p>
         </p:txBody>
@@ -6021,7 +5160,7 @@
         <p:spPr>
           <a:xfrm>
             <a:off x="530352" y="822960"/>
-            <a:ext cx="9875520" cy="320040"/>
+            <a:ext cx="9601200" cy="320040"/>
           </a:xfrm>
           <a:prstGeom prst="rect">
             <a:avLst/>
@@ -6042,7 +5181,7 @@
               </a:defRPr>
             </a:pPr>
             <a:r>
-              <a:t>Service-health view built from the current payment transaction data</a:t>
+              <a:t>Use these links during the demo or Q&amp;A</a:t>
             </a:r>
           </a:p>
         </p:txBody>
@@ -6125,8 +5264,8 @@
         </p:nvSpPr>
         <p:spPr>
           <a:xfrm>
-            <a:off x="502920" y="1234440"/>
-            <a:ext cx="1737360" cy="1005840"/>
+            <a:off x="777240" y="1234440"/>
+            <a:ext cx="10607040" cy="685800"/>
           </a:xfrm>
           <a:prstGeom prst="roundRect">
             <a:avLst/>
@@ -6170,14 +5309,14 @@
         </p:nvSpPr>
         <p:spPr>
           <a:xfrm>
-            <a:off x="502920" y="1234440"/>
-            <a:ext cx="73152" cy="1005840"/>
+            <a:off x="777240" y="1234440"/>
+            <a:ext cx="73152" cy="685800"/>
           </a:xfrm>
           <a:prstGeom prst="rect">
             <a:avLst/>
           </a:prstGeom>
           <a:solidFill>
-            <a:srgbClr val="44AA5C"/>
+            <a:srgbClr val="3673C8"/>
           </a:solidFill>
           <a:ln>
             <a:noFill/>
@@ -6213,8 +5352,8 @@
         </p:nvSpPr>
         <p:spPr>
           <a:xfrm>
-            <a:off x="704088" y="1371600"/>
-            <a:ext cx="1417319" cy="274320"/>
+            <a:off x="978408" y="1371600"/>
+            <a:ext cx="10287000" cy="274320"/>
           </a:xfrm>
           <a:prstGeom prst="rect">
             <a:avLst/>
@@ -6235,7 +5374,7 @@
               </a:defRPr>
             </a:pPr>
             <a:r>
-              <a:t>Availability SLI</a:t>
+              <a:t>Executive Dashboard</a:t>
             </a:r>
           </a:p>
         </p:txBody>
@@ -6248,8 +5387,46 @@
         </p:nvSpPr>
         <p:spPr>
           <a:xfrm>
-            <a:off x="704088" y="1673352"/>
-            <a:ext cx="1417319" cy="502920"/>
+            <a:off x="978408" y="1691640"/>
+            <a:ext cx="10287000" cy="0"/>
+          </a:xfrm>
+          <a:prstGeom prst="rect">
+            <a:avLst/>
+          </a:prstGeom>
+          <a:noFill/>
+        </p:spPr>
+        <p:txBody>
+          <a:bodyPr wrap="square">
+            <a:normAutofit/>
+          </a:bodyPr>
+          <a:lstStyle/>
+          <a:p>
+            <a:pPr>
+              <a:spcAft>
+                <a:spcPts val="300"/>
+              </a:spcAft>
+              <a:defRPr sz="950">
+                <a:solidFill>
+                  <a:srgbClr val="222D3D"/>
+                </a:solidFill>
+              </a:defRPr>
+            </a:pPr>
+            <a:r>
+              <a:t>https://payments-c225aa.kb.us-central1.gcp.elastic.cloud:443/app/dashboards#/view/4175393e-6f7a-4ff6-b800-0a6cc952fb08</a:t>
+            </a:r>
+          </a:p>
+        </p:txBody>
+      </p:sp>
+      <p:sp>
+        <p:nvSpPr>
+          <p:cNvPr id="11" name="TextBox 10"/>
+          <p:cNvSpPr txBox="1"/>
+          <p:nvPr/>
+        </p:nvSpPr>
+        <p:spPr>
+          <a:xfrm>
+            <a:off x="1005840" y="1554480"/>
+            <a:ext cx="7315200" cy="256032"/>
           </a:xfrm>
           <a:prstGeom prst="rect">
             <a:avLst/>
@@ -6262,29 +5439,28 @@
           </a:bodyPr>
           <a:lstStyle/>
           <a:p>
-            <a:pPr>
-              <a:defRPr sz="2200" b="1">
-                <a:solidFill>
-                  <a:srgbClr val="142440"/>
-                </a:solidFill>
-              </a:defRPr>
-            </a:pPr>
-            <a:r>
-              <a:t>94.81%</a:t>
-            </a:r>
-          </a:p>
-        </p:txBody>
-      </p:sp>
-      <p:sp>
-        <p:nvSpPr>
-          <p:cNvPr id="11" name="Rounded Rectangle 10"/>
+            <a:r>
+              <a:rPr sz="1000" u="sng">
+                <a:solidFill>
+                  <a:srgbClr val="3673C8"/>
+                </a:solidFill>
+                <a:hlinkClick r:id="rId2"/>
+              </a:rPr>
+              <a:t>Open dashboard</a:t>
+            </a:r>
+          </a:p>
+        </p:txBody>
+      </p:sp>
+      <p:sp>
+        <p:nvSpPr>
+          <p:cNvPr id="12" name="Rounded Rectangle 11"/>
           <p:cNvSpPr/>
           <p:nvPr/>
         </p:nvSpPr>
         <p:spPr>
           <a:xfrm>
-            <a:off x="2423160" y="1234440"/>
-            <a:ext cx="1737360" cy="1005840"/>
+            <a:off x="777240" y="2103120"/>
+            <a:ext cx="10607040" cy="685800"/>
           </a:xfrm>
           <a:prstGeom prst="roundRect">
             <a:avLst/>
@@ -6322,20 +5498,20 @@
       </p:sp>
       <p:sp>
         <p:nvSpPr>
-          <p:cNvPr id="12" name="Rectangle 11"/>
+          <p:cNvPr id="13" name="Rectangle 12"/>
           <p:cNvSpPr/>
           <p:nvPr/>
         </p:nvSpPr>
         <p:spPr>
           <a:xfrm>
-            <a:off x="2423160" y="1234440"/>
-            <a:ext cx="73152" cy="1005840"/>
+            <a:off x="777240" y="2103120"/>
+            <a:ext cx="73152" cy="685800"/>
           </a:xfrm>
           <a:prstGeom prst="rect">
             <a:avLst/>
           </a:prstGeom>
           <a:solidFill>
-            <a:srgbClr val="EF8438"/>
+            <a:srgbClr val="3673C8"/>
           </a:solidFill>
           <a:ln>
             <a:noFill/>
@@ -6365,14 +5541,14 @@
       </p:sp>
       <p:sp>
         <p:nvSpPr>
-          <p:cNvPr id="13" name="TextBox 12"/>
-          <p:cNvSpPr txBox="1"/>
-          <p:nvPr/>
-        </p:nvSpPr>
-        <p:spPr>
-          <a:xfrm>
-            <a:off x="2624328" y="1371600"/>
-            <a:ext cx="1417319" cy="274320"/>
+          <p:cNvPr id="14" name="TextBox 13"/>
+          <p:cNvSpPr txBox="1"/>
+          <p:nvPr/>
+        </p:nvSpPr>
+        <p:spPr>
+          <a:xfrm>
+            <a:off x="978408" y="2240279"/>
+            <a:ext cx="10287000" cy="274320"/>
           </a:xfrm>
           <a:prstGeom prst="rect">
             <a:avLst/>
@@ -6393,21 +5569,59 @@
               </a:defRPr>
             </a:pPr>
             <a:r>
-              <a:t>Failure Rate</a:t>
-            </a:r>
-          </a:p>
-        </p:txBody>
-      </p:sp>
-      <p:sp>
-        <p:nvSpPr>
-          <p:cNvPr id="14" name="TextBox 13"/>
-          <p:cNvSpPr txBox="1"/>
-          <p:nvPr/>
-        </p:nvSpPr>
-        <p:spPr>
-          <a:xfrm>
-            <a:off x="2624328" y="1673352"/>
-            <a:ext cx="1417319" cy="502920"/>
+              <a:t>Operational Dashboard</a:t>
+            </a:r>
+          </a:p>
+        </p:txBody>
+      </p:sp>
+      <p:sp>
+        <p:nvSpPr>
+          <p:cNvPr id="15" name="TextBox 14"/>
+          <p:cNvSpPr txBox="1"/>
+          <p:nvPr/>
+        </p:nvSpPr>
+        <p:spPr>
+          <a:xfrm>
+            <a:off x="978408" y="2560320"/>
+            <a:ext cx="10287000" cy="0"/>
+          </a:xfrm>
+          <a:prstGeom prst="rect">
+            <a:avLst/>
+          </a:prstGeom>
+          <a:noFill/>
+        </p:spPr>
+        <p:txBody>
+          <a:bodyPr wrap="square">
+            <a:normAutofit/>
+          </a:bodyPr>
+          <a:lstStyle/>
+          <a:p>
+            <a:pPr>
+              <a:spcAft>
+                <a:spcPts val="300"/>
+              </a:spcAft>
+              <a:defRPr sz="950">
+                <a:solidFill>
+                  <a:srgbClr val="222D3D"/>
+                </a:solidFill>
+              </a:defRPr>
+            </a:pPr>
+            <a:r>
+              <a:t>https://payments-c225aa.kb.us-central1.gcp.elastic.cloud:443/app/dashboards#/view/f95d1796-ed29-40c4-af2c-a05a0f834039</a:t>
+            </a:r>
+          </a:p>
+        </p:txBody>
+      </p:sp>
+      <p:sp>
+        <p:nvSpPr>
+          <p:cNvPr id="16" name="TextBox 15"/>
+          <p:cNvSpPr txBox="1"/>
+          <p:nvPr/>
+        </p:nvSpPr>
+        <p:spPr>
+          <a:xfrm>
+            <a:off x="1005840" y="2423160"/>
+            <a:ext cx="7315200" cy="256032"/>
           </a:xfrm>
           <a:prstGeom prst="rect">
             <a:avLst/>
@@ -6420,29 +5634,28 @@
           </a:bodyPr>
           <a:lstStyle/>
           <a:p>
-            <a:pPr>
-              <a:defRPr sz="2200" b="1">
-                <a:solidFill>
-                  <a:srgbClr val="142440"/>
-                </a:solidFill>
-              </a:defRPr>
-            </a:pPr>
-            <a:r>
-              <a:t>5.19%</a:t>
-            </a:r>
-          </a:p>
-        </p:txBody>
-      </p:sp>
-      <p:sp>
-        <p:nvSpPr>
-          <p:cNvPr id="15" name="Rounded Rectangle 14"/>
+            <a:r>
+              <a:rPr sz="1000" u="sng">
+                <a:solidFill>
+                  <a:srgbClr val="3673C8"/>
+                </a:solidFill>
+                <a:hlinkClick r:id="rId3"/>
+              </a:rPr>
+              <a:t>Open dashboard</a:t>
+            </a:r>
+          </a:p>
+        </p:txBody>
+      </p:sp>
+      <p:sp>
+        <p:nvSpPr>
+          <p:cNvPr id="17" name="Rounded Rectangle 16"/>
           <p:cNvSpPr/>
           <p:nvPr/>
         </p:nvSpPr>
         <p:spPr>
           <a:xfrm>
-            <a:off x="4343400" y="1234440"/>
-            <a:ext cx="1737360" cy="1005840"/>
+            <a:off x="777240" y="2971800"/>
+            <a:ext cx="10607040" cy="685800"/>
           </a:xfrm>
           <a:prstGeom prst="roundRect">
             <a:avLst/>
@@ -6480,14 +5693,14 @@
       </p:sp>
       <p:sp>
         <p:nvSpPr>
-          <p:cNvPr id="16" name="Rectangle 15"/>
+          <p:cNvPr id="18" name="Rectangle 17"/>
           <p:cNvSpPr/>
           <p:nvPr/>
         </p:nvSpPr>
         <p:spPr>
           <a:xfrm>
-            <a:off x="4343400" y="1234440"/>
-            <a:ext cx="73152" cy="1005840"/>
+            <a:off x="777240" y="2971800"/>
+            <a:ext cx="73152" cy="685800"/>
           </a:xfrm>
           <a:prstGeom prst="rect">
             <a:avLst/>
@@ -6523,14 +5736,14 @@
       </p:sp>
       <p:sp>
         <p:nvSpPr>
-          <p:cNvPr id="17" name="TextBox 16"/>
-          <p:cNvSpPr txBox="1"/>
-          <p:nvPr/>
-        </p:nvSpPr>
-        <p:spPr>
-          <a:xfrm>
-            <a:off x="4544568" y="1371600"/>
-            <a:ext cx="1417319" cy="274320"/>
+          <p:cNvPr id="19" name="TextBox 18"/>
+          <p:cNvSpPr txBox="1"/>
+          <p:nvPr/>
+        </p:nvSpPr>
+        <p:spPr>
+          <a:xfrm>
+            <a:off x="978408" y="3108960"/>
+            <a:ext cx="10287000" cy="274320"/>
           </a:xfrm>
           <a:prstGeom prst="rect">
             <a:avLst/>
@@ -6551,21 +5764,59 @@
               </a:defRPr>
             </a:pPr>
             <a:r>
-              <a:t>P95 Latency</a:t>
-            </a:r>
-          </a:p>
-        </p:txBody>
-      </p:sp>
-      <p:sp>
-        <p:nvSpPr>
-          <p:cNvPr id="18" name="TextBox 17"/>
-          <p:cNvSpPr txBox="1"/>
-          <p:nvPr/>
-        </p:nvSpPr>
-        <p:spPr>
-          <a:xfrm>
-            <a:off x="4544568" y="1673352"/>
-            <a:ext cx="1417319" cy="502920"/>
+              <a:t>Anomaly Detection Dashboard</a:t>
+            </a:r>
+          </a:p>
+        </p:txBody>
+      </p:sp>
+      <p:sp>
+        <p:nvSpPr>
+          <p:cNvPr id="20" name="TextBox 19"/>
+          <p:cNvSpPr txBox="1"/>
+          <p:nvPr/>
+        </p:nvSpPr>
+        <p:spPr>
+          <a:xfrm>
+            <a:off x="978408" y="3429000"/>
+            <a:ext cx="10287000" cy="0"/>
+          </a:xfrm>
+          <a:prstGeom prst="rect">
+            <a:avLst/>
+          </a:prstGeom>
+          <a:noFill/>
+        </p:spPr>
+        <p:txBody>
+          <a:bodyPr wrap="square">
+            <a:normAutofit/>
+          </a:bodyPr>
+          <a:lstStyle/>
+          <a:p>
+            <a:pPr>
+              <a:spcAft>
+                <a:spcPts val="300"/>
+              </a:spcAft>
+              <a:defRPr sz="950">
+                <a:solidFill>
+                  <a:srgbClr val="222D3D"/>
+                </a:solidFill>
+              </a:defRPr>
+            </a:pPr>
+            <a:r>
+              <a:t>https://payments-c225aa.kb.us-central1.gcp.elastic.cloud:443/app/dashboards#/view/3b55a52b-7342-469d-8ebc-317ec4450018</a:t>
+            </a:r>
+          </a:p>
+        </p:txBody>
+      </p:sp>
+      <p:sp>
+        <p:nvSpPr>
+          <p:cNvPr id="21" name="TextBox 20"/>
+          <p:cNvSpPr txBox="1"/>
+          <p:nvPr/>
+        </p:nvSpPr>
+        <p:spPr>
+          <a:xfrm>
+            <a:off x="1005840" y="3291840"/>
+            <a:ext cx="7315200" cy="256032"/>
           </a:xfrm>
           <a:prstGeom prst="rect">
             <a:avLst/>
@@ -6578,29 +5829,28 @@
           </a:bodyPr>
           <a:lstStyle/>
           <a:p>
-            <a:pPr>
-              <a:defRPr sz="2200" b="1">
-                <a:solidFill>
-                  <a:srgbClr val="142440"/>
-                </a:solidFill>
-              </a:defRPr>
-            </a:pPr>
-            <a:r>
-              <a:t>2,376 ms</a:t>
-            </a:r>
-          </a:p>
-        </p:txBody>
-      </p:sp>
-      <p:sp>
-        <p:nvSpPr>
-          <p:cNvPr id="19" name="Rounded Rectangle 18"/>
+            <a:r>
+              <a:rPr sz="1000" u="sng">
+                <a:solidFill>
+                  <a:srgbClr val="3673C8"/>
+                </a:solidFill>
+                <a:hlinkClick r:id="rId4"/>
+              </a:rPr>
+              <a:t>Open dashboard</a:t>
+            </a:r>
+          </a:p>
+        </p:txBody>
+      </p:sp>
+      <p:sp>
+        <p:nvSpPr>
+          <p:cNvPr id="22" name="Rounded Rectangle 21"/>
           <p:cNvSpPr/>
           <p:nvPr/>
         </p:nvSpPr>
         <p:spPr>
           <a:xfrm>
-            <a:off x="6263640" y="1234440"/>
-            <a:ext cx="1737360" cy="1005840"/>
+            <a:off x="777240" y="3840480"/>
+            <a:ext cx="10607040" cy="685800"/>
           </a:xfrm>
           <a:prstGeom prst="roundRect">
             <a:avLst/>
@@ -6638,20 +5888,20 @@
       </p:sp>
       <p:sp>
         <p:nvSpPr>
-          <p:cNvPr id="20" name="Rectangle 19"/>
+          <p:cNvPr id="23" name="Rectangle 22"/>
           <p:cNvSpPr/>
           <p:nvPr/>
         </p:nvSpPr>
         <p:spPr>
           <a:xfrm>
-            <a:off x="6263640" y="1234440"/>
-            <a:ext cx="73152" cy="1005840"/>
+            <a:off x="777240" y="3840480"/>
+            <a:ext cx="73152" cy="685800"/>
           </a:xfrm>
           <a:prstGeom prst="rect">
             <a:avLst/>
           </a:prstGeom>
           <a:solidFill>
-            <a:srgbClr val="7058BE"/>
+            <a:srgbClr val="3673C8"/>
           </a:solidFill>
           <a:ln>
             <a:noFill/>
@@ -6681,14 +5931,14 @@
       </p:sp>
       <p:sp>
         <p:nvSpPr>
-          <p:cNvPr id="21" name="TextBox 20"/>
-          <p:cNvSpPr txBox="1"/>
-          <p:nvPr/>
-        </p:nvSpPr>
-        <p:spPr>
-          <a:xfrm>
-            <a:off x="6464808" y="1371600"/>
-            <a:ext cx="1417319" cy="274320"/>
+          <p:cNvPr id="24" name="TextBox 23"/>
+          <p:cNvSpPr txBox="1"/>
+          <p:nvPr/>
+        </p:nvSpPr>
+        <p:spPr>
+          <a:xfrm>
+            <a:off x="978408" y="3977640"/>
+            <a:ext cx="10287000" cy="274320"/>
           </a:xfrm>
           <a:prstGeom prst="rect">
             <a:avLst/>
@@ -6709,21 +5959,59 @@
               </a:defRPr>
             </a:pPr>
             <a:r>
-              <a:t>P99 Latency</a:t>
-            </a:r>
-          </a:p>
-        </p:txBody>
-      </p:sp>
-      <p:sp>
-        <p:nvSpPr>
-          <p:cNvPr id="22" name="TextBox 21"/>
-          <p:cNvSpPr txBox="1"/>
-          <p:nvPr/>
-        </p:nvSpPr>
-        <p:spPr>
-          <a:xfrm>
-            <a:off x="6464808" y="1673352"/>
-            <a:ext cx="1417319" cy="502920"/>
+              <a:t>Elasticsearch Capabilities Demo</a:t>
+            </a:r>
+          </a:p>
+        </p:txBody>
+      </p:sp>
+      <p:sp>
+        <p:nvSpPr>
+          <p:cNvPr id="25" name="TextBox 24"/>
+          <p:cNvSpPr txBox="1"/>
+          <p:nvPr/>
+        </p:nvSpPr>
+        <p:spPr>
+          <a:xfrm>
+            <a:off x="978408" y="4297680"/>
+            <a:ext cx="10287000" cy="0"/>
+          </a:xfrm>
+          <a:prstGeom prst="rect">
+            <a:avLst/>
+          </a:prstGeom>
+          <a:noFill/>
+        </p:spPr>
+        <p:txBody>
+          <a:bodyPr wrap="square">
+            <a:normAutofit/>
+          </a:bodyPr>
+          <a:lstStyle/>
+          <a:p>
+            <a:pPr>
+              <a:spcAft>
+                <a:spcPts val="300"/>
+              </a:spcAft>
+              <a:defRPr sz="950">
+                <a:solidFill>
+                  <a:srgbClr val="222D3D"/>
+                </a:solidFill>
+              </a:defRPr>
+            </a:pPr>
+            <a:r>
+              <a:t>https://payments-c225aa.kb.us-central1.gcp.elastic.cloud:443/app/dashboards#/view/d5e44534-8afb-438e-ae72-aa908ab2bb11</a:t>
+            </a:r>
+          </a:p>
+        </p:txBody>
+      </p:sp>
+      <p:sp>
+        <p:nvSpPr>
+          <p:cNvPr id="26" name="TextBox 25"/>
+          <p:cNvSpPr txBox="1"/>
+          <p:nvPr/>
+        </p:nvSpPr>
+        <p:spPr>
+          <a:xfrm>
+            <a:off x="1005840" y="4160520"/>
+            <a:ext cx="7315200" cy="256032"/>
           </a:xfrm>
           <a:prstGeom prst="rect">
             <a:avLst/>
@@ -6736,29 +6024,28 @@
           </a:bodyPr>
           <a:lstStyle/>
           <a:p>
-            <a:pPr>
-              <a:defRPr sz="2200" b="1">
-                <a:solidFill>
-                  <a:srgbClr val="142440"/>
-                </a:solidFill>
-              </a:defRPr>
-            </a:pPr>
-            <a:r>
-              <a:t>2,475 ms</a:t>
-            </a:r>
-          </a:p>
-        </p:txBody>
-      </p:sp>
-      <p:sp>
-        <p:nvSpPr>
-          <p:cNvPr id="23" name="Rounded Rectangle 22"/>
+            <a:r>
+              <a:rPr sz="1000" u="sng">
+                <a:solidFill>
+                  <a:srgbClr val="3673C8"/>
+                </a:solidFill>
+                <a:hlinkClick r:id="rId5"/>
+              </a:rPr>
+              <a:t>Open dashboard</a:t>
+            </a:r>
+          </a:p>
+        </p:txBody>
+      </p:sp>
+      <p:sp>
+        <p:nvSpPr>
+          <p:cNvPr id="27" name="Rounded Rectangle 26"/>
           <p:cNvSpPr/>
           <p:nvPr/>
         </p:nvSpPr>
         <p:spPr>
           <a:xfrm>
-            <a:off x="8183880" y="1234440"/>
-            <a:ext cx="1737360" cy="1005840"/>
+            <a:off x="777240" y="4709160"/>
+            <a:ext cx="10607040" cy="685800"/>
           </a:xfrm>
           <a:prstGeom prst="roundRect">
             <a:avLst/>
@@ -6796,20 +6083,20 @@
       </p:sp>
       <p:sp>
         <p:nvSpPr>
-          <p:cNvPr id="24" name="Rectangle 23"/>
+          <p:cNvPr id="28" name="Rectangle 27"/>
           <p:cNvSpPr/>
           <p:nvPr/>
         </p:nvSpPr>
         <p:spPr>
           <a:xfrm>
-            <a:off x="8183880" y="1234440"/>
-            <a:ext cx="73152" cy="1005840"/>
+            <a:off x="777240" y="4709160"/>
+            <a:ext cx="73152" cy="685800"/>
           </a:xfrm>
           <a:prstGeom prst="rect">
             <a:avLst/>
           </a:prstGeom>
           <a:solidFill>
-            <a:srgbClr val="00959C"/>
+            <a:srgbClr val="3673C8"/>
           </a:solidFill>
           <a:ln>
             <a:noFill/>
@@ -6839,14 +6126,14 @@
       </p:sp>
       <p:sp>
         <p:nvSpPr>
-          <p:cNvPr id="25" name="TextBox 24"/>
-          <p:cNvSpPr txBox="1"/>
-          <p:nvPr/>
-        </p:nvSpPr>
-        <p:spPr>
-          <a:xfrm>
-            <a:off x="8385048" y="1371600"/>
-            <a:ext cx="1417319" cy="274320"/>
+          <p:cNvPr id="29" name="TextBox 28"/>
+          <p:cNvSpPr txBox="1"/>
+          <p:nvPr/>
+        </p:nvSpPr>
+        <p:spPr>
+          <a:xfrm>
+            <a:off x="978408" y="4846320"/>
+            <a:ext cx="10287000" cy="274320"/>
           </a:xfrm>
           <a:prstGeom prst="rect">
             <a:avLst/>
@@ -6867,21 +6154,59 @@
               </a:defRPr>
             </a:pPr>
             <a:r>
-              <a:t>Latency SLO &lt;=2s</a:t>
-            </a:r>
-          </a:p>
-        </p:txBody>
-      </p:sp>
-      <p:sp>
-        <p:nvSpPr>
-          <p:cNvPr id="26" name="TextBox 25"/>
-          <p:cNvSpPr txBox="1"/>
-          <p:nvPr/>
-        </p:nvSpPr>
-        <p:spPr>
-          <a:xfrm>
-            <a:off x="8385048" y="1673352"/>
-            <a:ext cx="1417319" cy="502920"/>
+              <a:t>Payments World Map</a:t>
+            </a:r>
+          </a:p>
+        </p:txBody>
+      </p:sp>
+      <p:sp>
+        <p:nvSpPr>
+          <p:cNvPr id="30" name="TextBox 29"/>
+          <p:cNvSpPr txBox="1"/>
+          <p:nvPr/>
+        </p:nvSpPr>
+        <p:spPr>
+          <a:xfrm>
+            <a:off x="978408" y="5166360"/>
+            <a:ext cx="10287000" cy="0"/>
+          </a:xfrm>
+          <a:prstGeom prst="rect">
+            <a:avLst/>
+          </a:prstGeom>
+          <a:noFill/>
+        </p:spPr>
+        <p:txBody>
+          <a:bodyPr wrap="square">
+            <a:normAutofit/>
+          </a:bodyPr>
+          <a:lstStyle/>
+          <a:p>
+            <a:pPr>
+              <a:spcAft>
+                <a:spcPts val="300"/>
+              </a:spcAft>
+              <a:defRPr sz="950">
+                <a:solidFill>
+                  <a:srgbClr val="222D3D"/>
+                </a:solidFill>
+              </a:defRPr>
+            </a:pPr>
+            <a:r>
+              <a:t>https://payments-c225aa.kb.us-central1.gcp.elastic.cloud:443/app/dashboards#/view/9a0f1247-c2d0-475a-9d11-b5c21e950fa2</a:t>
+            </a:r>
+          </a:p>
+        </p:txBody>
+      </p:sp>
+      <p:sp>
+        <p:nvSpPr>
+          <p:cNvPr id="31" name="TextBox 30"/>
+          <p:cNvSpPr txBox="1"/>
+          <p:nvPr/>
+        </p:nvSpPr>
+        <p:spPr>
+          <a:xfrm>
+            <a:off x="1005840" y="5029200"/>
+            <a:ext cx="7315200" cy="256032"/>
           </a:xfrm>
           <a:prstGeom prst="rect">
             <a:avLst/>
@@ -6894,29 +6219,28 @@
           </a:bodyPr>
           <a:lstStyle/>
           <a:p>
-            <a:pPr>
-              <a:defRPr sz="2200" b="1">
-                <a:solidFill>
-                  <a:srgbClr val="142440"/>
-                </a:solidFill>
-              </a:defRPr>
-            </a:pPr>
-            <a:r>
-              <a:t>79.89%</a:t>
-            </a:r>
-          </a:p>
-        </p:txBody>
-      </p:sp>
-      <p:sp>
-        <p:nvSpPr>
-          <p:cNvPr id="27" name="Rounded Rectangle 26"/>
+            <a:r>
+              <a:rPr sz="1000" u="sng">
+                <a:solidFill>
+                  <a:srgbClr val="3673C8"/>
+                </a:solidFill>
+                <a:hlinkClick r:id="rId6"/>
+              </a:rPr>
+              <a:t>Open dashboard</a:t>
+            </a:r>
+          </a:p>
+        </p:txBody>
+      </p:sp>
+      <p:sp>
+        <p:nvSpPr>
+          <p:cNvPr id="32" name="Rounded Rectangle 31"/>
           <p:cNvSpPr/>
           <p:nvPr/>
         </p:nvSpPr>
         <p:spPr>
           <a:xfrm>
-            <a:off x="10104120" y="1234440"/>
-            <a:ext cx="1737360" cy="1005840"/>
+            <a:off x="777240" y="5577840"/>
+            <a:ext cx="10607040" cy="685800"/>
           </a:xfrm>
           <a:prstGeom prst="roundRect">
             <a:avLst/>
@@ -6954,259 +6278,14 @@
       </p:sp>
       <p:sp>
         <p:nvSpPr>
-          <p:cNvPr id="28" name="Rectangle 27"/>
-          <p:cNvSpPr/>
-          <p:nvPr/>
-        </p:nvSpPr>
-        <p:spPr>
-          <a:xfrm>
-            <a:off x="10104120" y="1234440"/>
-            <a:ext cx="73152" cy="1005840"/>
-          </a:xfrm>
-          <a:prstGeom prst="rect">
-            <a:avLst/>
-          </a:prstGeom>
-          <a:solidFill>
-            <a:srgbClr val="D24848"/>
-          </a:solidFill>
-          <a:ln>
-            <a:noFill/>
-          </a:ln>
-        </p:spPr>
-        <p:style>
-          <a:lnRef idx="1">
-            <a:schemeClr val="accent1"/>
-          </a:lnRef>
-          <a:fillRef idx="3">
-            <a:schemeClr val="accent1"/>
-          </a:fillRef>
-          <a:effectRef idx="2">
-            <a:schemeClr val="accent1"/>
-          </a:effectRef>
-          <a:fontRef idx="minor">
-            <a:schemeClr val="lt1"/>
-          </a:fontRef>
-        </p:style>
-        <p:txBody>
-          <a:bodyPr rtlCol="0" anchor="ctr"/>
-          <a:lstStyle/>
-          <a:p>
-            <a:pPr algn="ctr"/>
-          </a:p>
-        </p:txBody>
-      </p:sp>
-      <p:sp>
-        <p:nvSpPr>
-          <p:cNvPr id="29" name="TextBox 28"/>
-          <p:cNvSpPr txBox="1"/>
-          <p:nvPr/>
-        </p:nvSpPr>
-        <p:spPr>
-          <a:xfrm>
-            <a:off x="10305288" y="1371600"/>
-            <a:ext cx="1417319" cy="274320"/>
-          </a:xfrm>
-          <a:prstGeom prst="rect">
-            <a:avLst/>
-          </a:prstGeom>
-          <a:noFill/>
-        </p:spPr>
-        <p:txBody>
-          <a:bodyPr wrap="none">
-            <a:spAutoFit/>
-          </a:bodyPr>
-          <a:lstStyle/>
-          <a:p>
-            <a:pPr>
-              <a:defRPr sz="1000" b="1">
-                <a:solidFill>
-                  <a:srgbClr val="667487"/>
-                </a:solidFill>
-              </a:defRPr>
-            </a:pPr>
-            <a:r>
-              <a:t>Error Log Events</a:t>
-            </a:r>
-          </a:p>
-        </p:txBody>
-      </p:sp>
-      <p:sp>
-        <p:nvSpPr>
-          <p:cNvPr id="30" name="TextBox 29"/>
-          <p:cNvSpPr txBox="1"/>
-          <p:nvPr/>
-        </p:nvSpPr>
-        <p:spPr>
-          <a:xfrm>
-            <a:off x="10305288" y="1673352"/>
-            <a:ext cx="1417319" cy="502920"/>
-          </a:xfrm>
-          <a:prstGeom prst="rect">
-            <a:avLst/>
-          </a:prstGeom>
-          <a:noFill/>
-        </p:spPr>
-        <p:txBody>
-          <a:bodyPr wrap="none">
-            <a:spAutoFit/>
-          </a:bodyPr>
-          <a:lstStyle/>
-          <a:p>
-            <a:pPr>
-              <a:defRPr sz="2200" b="1">
-                <a:solidFill>
-                  <a:srgbClr val="142440"/>
-                </a:solidFill>
-              </a:defRPr>
-            </a:pPr>
-            <a:r>
-              <a:t>51,887</a:t>
-            </a:r>
-          </a:p>
-        </p:txBody>
-      </p:sp>
-      <p:sp>
-        <p:nvSpPr>
-          <p:cNvPr id="31" name="TextBox 30"/>
-          <p:cNvSpPr txBox="1"/>
-          <p:nvPr/>
-        </p:nvSpPr>
-        <p:spPr>
-          <a:xfrm>
-            <a:off x="822960" y="2788920"/>
-            <a:ext cx="5212080" cy="2377440"/>
-          </a:xfrm>
-          <a:prstGeom prst="rect">
-            <a:avLst/>
-          </a:prstGeom>
-          <a:noFill/>
-        </p:spPr>
-        <p:txBody>
-          <a:bodyPr wrap="square">
-            <a:spAutoFit/>
-          </a:bodyPr>
-          <a:lstStyle/>
-          <a:p>
-            <a:pPr>
-              <a:buChar char="•"/>
-              <a:spcAft>
-                <a:spcPts val="800"/>
-              </a:spcAft>
-              <a:defRPr sz="1400">
-                <a:solidFill>
-                  <a:srgbClr val="222D3D"/>
-                </a:solidFill>
-              </a:defRPr>
-            </a:pPr>
-            <a:r>
-              <a:t>Treats each payment transaction as a service event for payments-api.</a:t>
-            </a:r>
-          </a:p>
-          <a:p>
-            <a:pPr>
-              <a:buChar char="•"/>
-              <a:spcAft>
-                <a:spcPts val="800"/>
-              </a:spcAft>
-              <a:defRPr sz="1400">
-                <a:solidFill>
-                  <a:srgbClr val="222D3D"/>
-                </a:solidFill>
-              </a:defRPr>
-            </a:pPr>
-            <a:r>
-              <a:t>Shows throughput, failure-rate and latency trends over time.</a:t>
-            </a:r>
-          </a:p>
-          <a:p>
-            <a:pPr>
-              <a:buChar char="•"/>
-              <a:spcAft>
-                <a:spcPts val="800"/>
-              </a:spcAft>
-              <a:defRPr sz="1400">
-                <a:solidFill>
-                  <a:srgbClr val="222D3D"/>
-                </a:solidFill>
-              </a:defRPr>
-            </a:pPr>
-            <a:r>
-              <a:t>Uses error_message as application log events for troubleshooting.</a:t>
-            </a:r>
-          </a:p>
-          <a:p>
-            <a:pPr>
-              <a:buChar char="•"/>
-              <a:spcAft>
-                <a:spcPts val="800"/>
-              </a:spcAft>
-              <a:defRPr sz="1400">
-                <a:solidFill>
-                  <a:srgbClr val="222D3D"/>
-                </a:solidFill>
-              </a:defRPr>
-            </a:pPr>
-            <a:r>
-              <a:t>Includes trace-style drill-down for slowest and failed transactions.</a:t>
-            </a:r>
-          </a:p>
-        </p:txBody>
-      </p:sp>
-      <p:sp>
-        <p:nvSpPr>
-          <p:cNvPr id="32" name="Rounded Rectangle 31"/>
-          <p:cNvSpPr/>
-          <p:nvPr/>
-        </p:nvSpPr>
-        <p:spPr>
-          <a:xfrm>
-            <a:off x="6400800" y="2788920"/>
-            <a:ext cx="4663440" cy="2240280"/>
-          </a:xfrm>
-          <a:prstGeom prst="roundRect">
-            <a:avLst/>
-          </a:prstGeom>
-          <a:solidFill>
-            <a:srgbClr val="FFFFFF"/>
-          </a:solidFill>
-          <a:ln>
-            <a:solidFill>
-              <a:srgbClr val="D2DDEB"/>
-            </a:solidFill>
-          </a:ln>
-        </p:spPr>
-        <p:style>
-          <a:lnRef idx="1">
-            <a:schemeClr val="accent1"/>
-          </a:lnRef>
-          <a:fillRef idx="3">
-            <a:schemeClr val="accent1"/>
-          </a:fillRef>
-          <a:effectRef idx="2">
-            <a:schemeClr val="accent1"/>
-          </a:effectRef>
-          <a:fontRef idx="minor">
-            <a:schemeClr val="lt1"/>
-          </a:fontRef>
-        </p:style>
-        <p:txBody>
-          <a:bodyPr rtlCol="0" anchor="ctr"/>
-          <a:lstStyle/>
-          <a:p>
-            <a:pPr algn="ctr"/>
-          </a:p>
-        </p:txBody>
-      </p:sp>
-      <p:sp>
-        <p:nvSpPr>
           <p:cNvPr id="33" name="Rectangle 32"/>
           <p:cNvSpPr/>
           <p:nvPr/>
         </p:nvSpPr>
         <p:spPr>
           <a:xfrm>
-            <a:off x="6400800" y="2788920"/>
-            <a:ext cx="73152" cy="2240280"/>
+            <a:off x="777240" y="5577840"/>
+            <a:ext cx="73152" cy="685800"/>
           </a:xfrm>
           <a:prstGeom prst="rect">
             <a:avLst/>
@@ -7248,8 +6327,8 @@
         </p:nvSpPr>
         <p:spPr>
           <a:xfrm>
-            <a:off x="6601968" y="2926079"/>
-            <a:ext cx="4343400" cy="274320"/>
+            <a:off x="978408" y="5715000"/>
+            <a:ext cx="10287000" cy="274320"/>
           </a:xfrm>
           <a:prstGeom prst="rect">
             <a:avLst/>
@@ -7270,7 +6349,7 @@
               </a:defRPr>
             </a:pPr>
             <a:r>
-              <a:t>Production extension</a:t>
+              <a:t>Payments Visibility Dashboard</a:t>
             </a:r>
           </a:p>
         </p:txBody>
@@ -7283,8 +6362,8 @@
         </p:nvSpPr>
         <p:spPr>
           <a:xfrm>
-            <a:off x="6601968" y="3246120"/>
-            <a:ext cx="4343400" cy="1554480"/>
+            <a:off x="978408" y="6035040"/>
+            <a:ext cx="10287000" cy="0"/>
           </a:xfrm>
           <a:prstGeom prst="rect">
             <a:avLst/>
@@ -7308,37 +6387,7 @@
               </a:defRPr>
             </a:pPr>
             <a:r>
-              <a:t>Add real APM traces for end-to-end request paths.</a:t>
-            </a:r>
-          </a:p>
-          <a:p>
-            <a:pPr>
-              <a:spcAft>
-                <a:spcPts val="300"/>
-              </a:spcAft>
-              <a:defRPr sz="950">
-                <a:solidFill>
-                  <a:srgbClr val="222D3D"/>
-                </a:solidFill>
-              </a:defRPr>
-            </a:pPr>
-            <a:r>
-              <a:t>Ingest application logs and infrastructure metrics.</a:t>
-            </a:r>
-          </a:p>
-          <a:p>
-            <a:pPr>
-              <a:spcAft>
-                <a:spcPts val="300"/>
-              </a:spcAft>
-              <a:defRPr sz="950">
-                <a:solidFill>
-                  <a:srgbClr val="222D3D"/>
-                </a:solidFill>
-              </a:defRPr>
-            </a:pPr>
-            <a:r>
-              <a:t>Create alert rules and official Elastic SLO objects.</a:t>
+              <a:t>https://payments-c225aa.kb.us-central1.gcp.elastic.cloud:443/app/dashboards#/view/250b10ed-6fa9-4032-bec9-8d7d1a3632f6</a:t>
             </a:r>
           </a:p>
         </p:txBody>
@@ -7351,7 +6400,7 @@
         </p:nvSpPr>
         <p:spPr>
           <a:xfrm>
-            <a:off x="868680" y="5897880"/>
+            <a:off x="1005840" y="5897880"/>
             <a:ext cx="7315200" cy="256032"/>
           </a:xfrm>
           <a:prstGeom prst="rect">
@@ -7370,9 +6419,9 @@
                 <a:solidFill>
                   <a:srgbClr val="3673C8"/>
                 </a:solidFill>
-                <a:hlinkClick r:id="rId2"/>
+                <a:hlinkClick r:id="rId7"/>
               </a:rPr>
-              <a:t>Open Payments Observability Dashboard</a:t>
+              <a:t>Open dashboard</a:t>
             </a:r>
           </a:p>
         </p:txBody>
@@ -14212,7 +13261,7 @@
         <p:spPr>
           <a:xfrm>
             <a:off x="502920" y="320040"/>
-            <a:ext cx="8046720" cy="502920"/>
+            <a:ext cx="8503920" cy="502920"/>
           </a:xfrm>
           <a:prstGeom prst="rect">
             <a:avLst/>
@@ -14233,7 +13282,7 @@
               </a:defRPr>
             </a:pPr>
             <a:r>
-              <a:t>Anomaly Detection Dashboard</a:t>
+              <a:t>Visibility Dashboard</a:t>
             </a:r>
           </a:p>
         </p:txBody>
@@ -14247,7 +13296,7 @@
         <p:spPr>
           <a:xfrm>
             <a:off x="530352" y="822960"/>
-            <a:ext cx="9601200" cy="320040"/>
+            <a:ext cx="9875520" cy="320040"/>
           </a:xfrm>
           <a:prstGeom prst="rect">
             <a:avLst/>
@@ -14268,7 +13317,7 @@
               </a:defRPr>
             </a:pPr>
             <a:r>
-              <a:t>Rule-based anomaly detection without Machine Learning</a:t>
+              <a:t>Service visibility view built from the current payment transaction data</a:t>
             </a:r>
           </a:p>
         </p:txBody>
@@ -14351,8 +13400,8 @@
         </p:nvSpPr>
         <p:spPr>
           <a:xfrm>
-            <a:off x="640080" y="1234440"/>
-            <a:ext cx="2560320" cy="1005840"/>
+            <a:off x="502920" y="1234440"/>
+            <a:ext cx="1737360" cy="1005840"/>
           </a:xfrm>
           <a:prstGeom prst="roundRect">
             <a:avLst/>
@@ -14396,14 +13445,14 @@
         </p:nvSpPr>
         <p:spPr>
           <a:xfrm>
-            <a:off x="640080" y="1234440"/>
+            <a:off x="502920" y="1234440"/>
             <a:ext cx="73152" cy="1005840"/>
           </a:xfrm>
           <a:prstGeom prst="rect">
             <a:avLst/>
           </a:prstGeom>
           <a:solidFill>
-            <a:srgbClr val="EF8438"/>
+            <a:srgbClr val="44AA5C"/>
           </a:solidFill>
           <a:ln>
             <a:noFill/>
@@ -14439,8 +13488,8 @@
         </p:nvSpPr>
         <p:spPr>
           <a:xfrm>
-            <a:off x="841247" y="1371600"/>
-            <a:ext cx="2240279" cy="274320"/>
+            <a:off x="704088" y="1371600"/>
+            <a:ext cx="1417319" cy="274320"/>
           </a:xfrm>
           <a:prstGeom prst="rect">
             <a:avLst/>
@@ -14461,7 +13510,7 @@
               </a:defRPr>
             </a:pPr>
             <a:r>
-              <a:t>High Amount Txns</a:t>
+              <a:t>Availability SLI</a:t>
             </a:r>
           </a:p>
         </p:txBody>
@@ -14474,8 +13523,8 @@
         </p:nvSpPr>
         <p:spPr>
           <a:xfrm>
-            <a:off x="841247" y="1673352"/>
-            <a:ext cx="2240279" cy="502920"/>
+            <a:off x="704088" y="1673352"/>
+            <a:ext cx="1417319" cy="502920"/>
           </a:xfrm>
           <a:prstGeom prst="rect">
             <a:avLst/>
@@ -14496,7 +13545,7 @@
               </a:defRPr>
             </a:pPr>
             <a:r>
-              <a:t>5,259</a:t>
+              <a:t>94.81%</a:t>
             </a:r>
           </a:p>
         </p:txBody>
@@ -14509,8 +13558,8 @@
         </p:nvSpPr>
         <p:spPr>
           <a:xfrm>
-            <a:off x="3520439" y="1234440"/>
-            <a:ext cx="2560320" cy="1005840"/>
+            <a:off x="2423160" y="1234440"/>
+            <a:ext cx="1737360" cy="1005840"/>
           </a:xfrm>
           <a:prstGeom prst="roundRect">
             <a:avLst/>
@@ -14554,14 +13603,14 @@
         </p:nvSpPr>
         <p:spPr>
           <a:xfrm>
-            <a:off x="3520439" y="1234440"/>
+            <a:off x="2423160" y="1234440"/>
             <a:ext cx="73152" cy="1005840"/>
           </a:xfrm>
           <a:prstGeom prst="rect">
             <a:avLst/>
           </a:prstGeom>
           <a:solidFill>
-            <a:srgbClr val="7058BE"/>
+            <a:srgbClr val="EF8438"/>
           </a:solidFill>
           <a:ln>
             <a:noFill/>
@@ -14597,8 +13646,8 @@
         </p:nvSpPr>
         <p:spPr>
           <a:xfrm>
-            <a:off x="3721607" y="1371600"/>
-            <a:ext cx="2240279" cy="274320"/>
+            <a:off x="2624328" y="1371600"/>
+            <a:ext cx="1417319" cy="274320"/>
           </a:xfrm>
           <a:prstGeom prst="rect">
             <a:avLst/>
@@ -14619,7 +13668,7 @@
               </a:defRPr>
             </a:pPr>
             <a:r>
-              <a:t>Off-hours Txns</a:t>
+              <a:t>Failure Rate</a:t>
             </a:r>
           </a:p>
         </p:txBody>
@@ -14632,8 +13681,8 @@
         </p:nvSpPr>
         <p:spPr>
           <a:xfrm>
-            <a:off x="3721607" y="1673352"/>
-            <a:ext cx="2240279" cy="502920"/>
+            <a:off x="2624328" y="1673352"/>
+            <a:ext cx="1417319" cy="502920"/>
           </a:xfrm>
           <a:prstGeom prst="rect">
             <a:avLst/>
@@ -14654,7 +13703,7 @@
               </a:defRPr>
             </a:pPr>
             <a:r>
-              <a:t>273,850</a:t>
+              <a:t>5.19%</a:t>
             </a:r>
           </a:p>
         </p:txBody>
@@ -14667,8 +13716,8 @@
         </p:nvSpPr>
         <p:spPr>
           <a:xfrm>
-            <a:off x="6400800" y="1234440"/>
-            <a:ext cx="2560320" cy="1005840"/>
+            <a:off x="4343400" y="1234440"/>
+            <a:ext cx="1737360" cy="1005840"/>
           </a:xfrm>
           <a:prstGeom prst="roundRect">
             <a:avLst/>
@@ -14712,14 +13761,14 @@
         </p:nvSpPr>
         <p:spPr>
           <a:xfrm>
-            <a:off x="6400800" y="1234440"/>
+            <a:off x="4343400" y="1234440"/>
             <a:ext cx="73152" cy="1005840"/>
           </a:xfrm>
           <a:prstGeom prst="rect">
             <a:avLst/>
           </a:prstGeom>
           <a:solidFill>
-            <a:srgbClr val="D24848"/>
+            <a:srgbClr val="3673C8"/>
           </a:solidFill>
           <a:ln>
             <a:noFill/>
@@ -14755,8 +13804,8 @@
         </p:nvSpPr>
         <p:spPr>
           <a:xfrm>
-            <a:off x="6601968" y="1371600"/>
-            <a:ext cx="2240279" cy="274320"/>
+            <a:off x="4544568" y="1371600"/>
+            <a:ext cx="1417319" cy="274320"/>
           </a:xfrm>
           <a:prstGeom prst="rect">
             <a:avLst/>
@@ -14777,7 +13826,7 @@
               </a:defRPr>
             </a:pPr>
             <a:r>
-              <a:t>High Decline Countries</a:t>
+              <a:t>P95 Latency</a:t>
             </a:r>
           </a:p>
         </p:txBody>
@@ -14790,8 +13839,8 @@
         </p:nvSpPr>
         <p:spPr>
           <a:xfrm>
-            <a:off x="6601968" y="1673352"/>
-            <a:ext cx="2240279" cy="502920"/>
+            <a:off x="4544568" y="1673352"/>
+            <a:ext cx="1417319" cy="502920"/>
           </a:xfrm>
           <a:prstGeom prst="rect">
             <a:avLst/>
@@ -14812,7 +13861,7 @@
               </a:defRPr>
             </a:pPr>
             <a:r>
-              <a:t>4</a:t>
+              <a:t>2,376 ms</a:t>
             </a:r>
           </a:p>
         </p:txBody>
@@ -14825,8 +13874,8 @@
         </p:nvSpPr>
         <p:spPr>
           <a:xfrm>
-            <a:off x="9281159" y="1234440"/>
-            <a:ext cx="2560320" cy="1005840"/>
+            <a:off x="6263640" y="1234440"/>
+            <a:ext cx="1737360" cy="1005840"/>
           </a:xfrm>
           <a:prstGeom prst="roundRect">
             <a:avLst/>
@@ -14870,14 +13919,14 @@
         </p:nvSpPr>
         <p:spPr>
           <a:xfrm>
-            <a:off x="9281159" y="1234440"/>
+            <a:off x="6263640" y="1234440"/>
             <a:ext cx="73152" cy="1005840"/>
           </a:xfrm>
           <a:prstGeom prst="rect">
             <a:avLst/>
           </a:prstGeom>
           <a:solidFill>
-            <a:srgbClr val="00959C"/>
+            <a:srgbClr val="7058BE"/>
           </a:solidFill>
           <a:ln>
             <a:noFill/>
@@ -14913,8 +13962,8 @@
         </p:nvSpPr>
         <p:spPr>
           <a:xfrm>
-            <a:off x="9482328" y="1371600"/>
-            <a:ext cx="2240279" cy="274320"/>
+            <a:off x="6464808" y="1371600"/>
+            <a:ext cx="1417319" cy="274320"/>
           </a:xfrm>
           <a:prstGeom prst="rect">
             <a:avLst/>
@@ -14935,7 +13984,7 @@
               </a:defRPr>
             </a:pPr>
             <a:r>
-              <a:t>Merchant Spikes</a:t>
+              <a:t>P99 Latency</a:t>
             </a:r>
           </a:p>
         </p:txBody>
@@ -14948,8 +13997,8 @@
         </p:nvSpPr>
         <p:spPr>
           <a:xfrm>
-            <a:off x="9482328" y="1673352"/>
-            <a:ext cx="2240279" cy="502920"/>
+            <a:off x="6464808" y="1673352"/>
+            <a:ext cx="1417319" cy="502920"/>
           </a:xfrm>
           <a:prstGeom prst="rect">
             <a:avLst/>
@@ -14970,108 +14019,21 @@
               </a:defRPr>
             </a:pPr>
             <a:r>
-              <a:t>Detected</a:t>
-            </a:r>
-          </a:p>
-        </p:txBody>
-      </p:sp>
-      <p:sp>
-        <p:nvSpPr>
-          <p:cNvPr id="23" name="TextBox 22"/>
-          <p:cNvSpPr txBox="1"/>
-          <p:nvPr/>
-        </p:nvSpPr>
-        <p:spPr>
-          <a:xfrm>
-            <a:off x="868680" y="2834640"/>
-            <a:ext cx="5212080" cy="2103120"/>
-          </a:xfrm>
-          <a:prstGeom prst="rect">
-            <a:avLst/>
-          </a:prstGeom>
-          <a:noFill/>
-        </p:spPr>
-        <p:txBody>
-          <a:bodyPr wrap="square">
-            <a:spAutoFit/>
-          </a:bodyPr>
-          <a:lstStyle/>
-          <a:p>
-            <a:pPr>
-              <a:buChar char="•"/>
-              <a:spcAft>
-                <a:spcPts val="800"/>
-              </a:spcAft>
-              <a:defRPr sz="1400">
-                <a:solidFill>
-                  <a:srgbClr val="222D3D"/>
-                </a:solidFill>
-              </a:defRPr>
-            </a:pPr>
-            <a:r>
-              <a:t>Flags transactions above an amount threshold.</a:t>
-            </a:r>
-          </a:p>
-          <a:p>
-            <a:pPr>
-              <a:buChar char="•"/>
-              <a:spcAft>
-                <a:spcPts val="800"/>
-              </a:spcAft>
-              <a:defRPr sz="1400">
-                <a:solidFill>
-                  <a:srgbClr val="222D3D"/>
-                </a:solidFill>
-              </a:defRPr>
-            </a:pPr>
-            <a:r>
-              <a:t>Finds merchants with unusual volume increases.</a:t>
-            </a:r>
-          </a:p>
-          <a:p>
-            <a:pPr>
-              <a:buChar char="•"/>
-              <a:spcAft>
-                <a:spcPts val="800"/>
-              </a:spcAft>
-              <a:defRPr sz="1400">
-                <a:solidFill>
-                  <a:srgbClr val="222D3D"/>
-                </a:solidFill>
-              </a:defRPr>
-            </a:pPr>
-            <a:r>
-              <a:t>Highlights countries with abnormal decline rates.</a:t>
-            </a:r>
-          </a:p>
-          <a:p>
-            <a:pPr>
-              <a:buChar char="•"/>
-              <a:spcAft>
-                <a:spcPts val="800"/>
-              </a:spcAft>
-              <a:defRPr sz="1400">
-                <a:solidFill>
-                  <a:srgbClr val="222D3D"/>
-                </a:solidFill>
-              </a:defRPr>
-            </a:pPr>
-            <a:r>
-              <a:t>Shows payments outside business hours.</a:t>
-            </a:r>
-          </a:p>
-        </p:txBody>
-      </p:sp>
-      <p:sp>
-        <p:nvSpPr>
-          <p:cNvPr id="24" name="Rounded Rectangle 23"/>
+              <a:t>2,475 ms</a:t>
+            </a:r>
+          </a:p>
+        </p:txBody>
+      </p:sp>
+      <p:sp>
+        <p:nvSpPr>
+          <p:cNvPr id="23" name="Rounded Rectangle 22"/>
           <p:cNvSpPr/>
           <p:nvPr/>
         </p:nvSpPr>
         <p:spPr>
           <a:xfrm>
-            <a:off x="6400800" y="2834640"/>
-            <a:ext cx="4572000" cy="2103120"/>
+            <a:off x="8183880" y="1234440"/>
+            <a:ext cx="1737360" cy="1005840"/>
           </a:xfrm>
           <a:prstGeom prst="roundRect">
             <a:avLst/>
@@ -15109,20 +14071,20 @@
       </p:sp>
       <p:sp>
         <p:nvSpPr>
-          <p:cNvPr id="25" name="Rectangle 24"/>
+          <p:cNvPr id="24" name="Rectangle 23"/>
           <p:cNvSpPr/>
           <p:nvPr/>
         </p:nvSpPr>
         <p:spPr>
           <a:xfrm>
-            <a:off x="6400800" y="2834640"/>
-            <a:ext cx="73152" cy="2103120"/>
+            <a:off x="8183880" y="1234440"/>
+            <a:ext cx="73152" cy="1005840"/>
           </a:xfrm>
           <a:prstGeom prst="rect">
             <a:avLst/>
           </a:prstGeom>
           <a:solidFill>
-            <a:srgbClr val="EF8438"/>
+            <a:srgbClr val="00959C"/>
           </a:solidFill>
           <a:ln>
             <a:noFill/>
@@ -15152,14 +14114,49 @@
       </p:sp>
       <p:sp>
         <p:nvSpPr>
+          <p:cNvPr id="25" name="TextBox 24"/>
+          <p:cNvSpPr txBox="1"/>
+          <p:nvPr/>
+        </p:nvSpPr>
+        <p:spPr>
+          <a:xfrm>
+            <a:off x="8385048" y="1371600"/>
+            <a:ext cx="1417319" cy="274320"/>
+          </a:xfrm>
+          <a:prstGeom prst="rect">
+            <a:avLst/>
+          </a:prstGeom>
+          <a:noFill/>
+        </p:spPr>
+        <p:txBody>
+          <a:bodyPr wrap="none">
+            <a:spAutoFit/>
+          </a:bodyPr>
+          <a:lstStyle/>
+          <a:p>
+            <a:pPr>
+              <a:defRPr sz="1000" b="1">
+                <a:solidFill>
+                  <a:srgbClr val="667487"/>
+                </a:solidFill>
+              </a:defRPr>
+            </a:pPr>
+            <a:r>
+              <a:t>Latency SLO &lt;=2s</a:t>
+            </a:r>
+          </a:p>
+        </p:txBody>
+      </p:sp>
+      <p:sp>
+        <p:nvSpPr>
           <p:cNvPr id="26" name="TextBox 25"/>
           <p:cNvSpPr txBox="1"/>
           <p:nvPr/>
         </p:nvSpPr>
         <p:spPr>
           <a:xfrm>
-            <a:off x="6601968" y="2971800"/>
-            <a:ext cx="4251960" cy="274320"/>
+            <a:off x="8385048" y="1673352"/>
+            <a:ext cx="1417319" cy="502920"/>
           </a:xfrm>
           <a:prstGeom prst="rect">
             <a:avLst/>
@@ -15173,6 +14170,129 @@
           <a:lstStyle/>
           <a:p>
             <a:pPr>
+              <a:defRPr sz="2200" b="1">
+                <a:solidFill>
+                  <a:srgbClr val="142440"/>
+                </a:solidFill>
+              </a:defRPr>
+            </a:pPr>
+            <a:r>
+              <a:t>79.89%</a:t>
+            </a:r>
+          </a:p>
+        </p:txBody>
+      </p:sp>
+      <p:sp>
+        <p:nvSpPr>
+          <p:cNvPr id="27" name="Rounded Rectangle 26"/>
+          <p:cNvSpPr/>
+          <p:nvPr/>
+        </p:nvSpPr>
+        <p:spPr>
+          <a:xfrm>
+            <a:off x="10104120" y="1234440"/>
+            <a:ext cx="1737360" cy="1005840"/>
+          </a:xfrm>
+          <a:prstGeom prst="roundRect">
+            <a:avLst/>
+          </a:prstGeom>
+          <a:solidFill>
+            <a:srgbClr val="FFFFFF"/>
+          </a:solidFill>
+          <a:ln>
+            <a:solidFill>
+              <a:srgbClr val="D2DDEB"/>
+            </a:solidFill>
+          </a:ln>
+        </p:spPr>
+        <p:style>
+          <a:lnRef idx="1">
+            <a:schemeClr val="accent1"/>
+          </a:lnRef>
+          <a:fillRef idx="3">
+            <a:schemeClr val="accent1"/>
+          </a:fillRef>
+          <a:effectRef idx="2">
+            <a:schemeClr val="accent1"/>
+          </a:effectRef>
+          <a:fontRef idx="minor">
+            <a:schemeClr val="lt1"/>
+          </a:fontRef>
+        </p:style>
+        <p:txBody>
+          <a:bodyPr rtlCol="0" anchor="ctr"/>
+          <a:lstStyle/>
+          <a:p>
+            <a:pPr algn="ctr"/>
+          </a:p>
+        </p:txBody>
+      </p:sp>
+      <p:sp>
+        <p:nvSpPr>
+          <p:cNvPr id="28" name="Rectangle 27"/>
+          <p:cNvSpPr/>
+          <p:nvPr/>
+        </p:nvSpPr>
+        <p:spPr>
+          <a:xfrm>
+            <a:off x="10104120" y="1234440"/>
+            <a:ext cx="73152" cy="1005840"/>
+          </a:xfrm>
+          <a:prstGeom prst="rect">
+            <a:avLst/>
+          </a:prstGeom>
+          <a:solidFill>
+            <a:srgbClr val="D24848"/>
+          </a:solidFill>
+          <a:ln>
+            <a:noFill/>
+          </a:ln>
+        </p:spPr>
+        <p:style>
+          <a:lnRef idx="1">
+            <a:schemeClr val="accent1"/>
+          </a:lnRef>
+          <a:fillRef idx="3">
+            <a:schemeClr val="accent1"/>
+          </a:fillRef>
+          <a:effectRef idx="2">
+            <a:schemeClr val="accent1"/>
+          </a:effectRef>
+          <a:fontRef idx="minor">
+            <a:schemeClr val="lt1"/>
+          </a:fontRef>
+        </p:style>
+        <p:txBody>
+          <a:bodyPr rtlCol="0" anchor="ctr"/>
+          <a:lstStyle/>
+          <a:p>
+            <a:pPr algn="ctr"/>
+          </a:p>
+        </p:txBody>
+      </p:sp>
+      <p:sp>
+        <p:nvSpPr>
+          <p:cNvPr id="29" name="TextBox 28"/>
+          <p:cNvSpPr txBox="1"/>
+          <p:nvPr/>
+        </p:nvSpPr>
+        <p:spPr>
+          <a:xfrm>
+            <a:off x="10305288" y="1371600"/>
+            <a:ext cx="1417319" cy="274320"/>
+          </a:xfrm>
+          <a:prstGeom prst="rect">
+            <a:avLst/>
+          </a:prstGeom>
+          <a:noFill/>
+        </p:spPr>
+        <p:txBody>
+          <a:bodyPr wrap="none">
+            <a:spAutoFit/>
+          </a:bodyPr>
+          <a:lstStyle/>
+          <a:p>
+            <a:pPr>
               <a:defRPr sz="1000" b="1">
                 <a:solidFill>
                   <a:srgbClr val="667487"/>
@@ -15180,21 +14300,266 @@
               </a:defRPr>
             </a:pPr>
             <a:r>
-              <a:t>Demo thresholds</a:t>
-            </a:r>
-          </a:p>
-        </p:txBody>
-      </p:sp>
-      <p:sp>
-        <p:nvSpPr>
-          <p:cNvPr id="27" name="TextBox 26"/>
-          <p:cNvSpPr txBox="1"/>
-          <p:nvPr/>
-        </p:nvSpPr>
-        <p:spPr>
-          <a:xfrm>
-            <a:off x="6601968" y="3291840"/>
-            <a:ext cx="4251960" cy="1417319"/>
+              <a:t>Error Log Events</a:t>
+            </a:r>
+          </a:p>
+        </p:txBody>
+      </p:sp>
+      <p:sp>
+        <p:nvSpPr>
+          <p:cNvPr id="30" name="TextBox 29"/>
+          <p:cNvSpPr txBox="1"/>
+          <p:nvPr/>
+        </p:nvSpPr>
+        <p:spPr>
+          <a:xfrm>
+            <a:off x="10305288" y="1673352"/>
+            <a:ext cx="1417319" cy="502920"/>
+          </a:xfrm>
+          <a:prstGeom prst="rect">
+            <a:avLst/>
+          </a:prstGeom>
+          <a:noFill/>
+        </p:spPr>
+        <p:txBody>
+          <a:bodyPr wrap="none">
+            <a:spAutoFit/>
+          </a:bodyPr>
+          <a:lstStyle/>
+          <a:p>
+            <a:pPr>
+              <a:defRPr sz="2200" b="1">
+                <a:solidFill>
+                  <a:srgbClr val="142440"/>
+                </a:solidFill>
+              </a:defRPr>
+            </a:pPr>
+            <a:r>
+              <a:t>51,887</a:t>
+            </a:r>
+          </a:p>
+        </p:txBody>
+      </p:sp>
+      <p:sp>
+        <p:nvSpPr>
+          <p:cNvPr id="31" name="TextBox 30"/>
+          <p:cNvSpPr txBox="1"/>
+          <p:nvPr/>
+        </p:nvSpPr>
+        <p:spPr>
+          <a:xfrm>
+            <a:off x="822960" y="2788920"/>
+            <a:ext cx="5212080" cy="2377440"/>
+          </a:xfrm>
+          <a:prstGeom prst="rect">
+            <a:avLst/>
+          </a:prstGeom>
+          <a:noFill/>
+        </p:spPr>
+        <p:txBody>
+          <a:bodyPr wrap="square">
+            <a:spAutoFit/>
+          </a:bodyPr>
+          <a:lstStyle/>
+          <a:p>
+            <a:pPr>
+              <a:buChar char="•"/>
+              <a:spcAft>
+                <a:spcPts val="800"/>
+              </a:spcAft>
+              <a:defRPr sz="1400">
+                <a:solidFill>
+                  <a:srgbClr val="222D3D"/>
+                </a:solidFill>
+              </a:defRPr>
+            </a:pPr>
+            <a:r>
+              <a:t>Treats each payment transaction as a service event for payments-api.</a:t>
+            </a:r>
+          </a:p>
+          <a:p>
+            <a:pPr>
+              <a:buChar char="•"/>
+              <a:spcAft>
+                <a:spcPts val="800"/>
+              </a:spcAft>
+              <a:defRPr sz="1400">
+                <a:solidFill>
+                  <a:srgbClr val="222D3D"/>
+                </a:solidFill>
+              </a:defRPr>
+            </a:pPr>
+            <a:r>
+              <a:t>Shows throughput, failure-rate and latency trends over time.</a:t>
+            </a:r>
+          </a:p>
+          <a:p>
+            <a:pPr>
+              <a:buChar char="•"/>
+              <a:spcAft>
+                <a:spcPts val="800"/>
+              </a:spcAft>
+              <a:defRPr sz="1400">
+                <a:solidFill>
+                  <a:srgbClr val="222D3D"/>
+                </a:solidFill>
+              </a:defRPr>
+            </a:pPr>
+            <a:r>
+              <a:t>Uses error_message as application log events for troubleshooting.</a:t>
+            </a:r>
+          </a:p>
+          <a:p>
+            <a:pPr>
+              <a:buChar char="•"/>
+              <a:spcAft>
+                <a:spcPts val="800"/>
+              </a:spcAft>
+              <a:defRPr sz="1400">
+                <a:solidFill>
+                  <a:srgbClr val="222D3D"/>
+                </a:solidFill>
+              </a:defRPr>
+            </a:pPr>
+            <a:r>
+              <a:t>Includes trace-style drill-down for slowest and failed transactions.</a:t>
+            </a:r>
+          </a:p>
+        </p:txBody>
+      </p:sp>
+      <p:sp>
+        <p:nvSpPr>
+          <p:cNvPr id="32" name="Rounded Rectangle 31"/>
+          <p:cNvSpPr/>
+          <p:nvPr/>
+        </p:nvSpPr>
+        <p:spPr>
+          <a:xfrm>
+            <a:off x="6400800" y="2788920"/>
+            <a:ext cx="4663440" cy="2240280"/>
+          </a:xfrm>
+          <a:prstGeom prst="roundRect">
+            <a:avLst/>
+          </a:prstGeom>
+          <a:solidFill>
+            <a:srgbClr val="FFFFFF"/>
+          </a:solidFill>
+          <a:ln>
+            <a:solidFill>
+              <a:srgbClr val="D2DDEB"/>
+            </a:solidFill>
+          </a:ln>
+        </p:spPr>
+        <p:style>
+          <a:lnRef idx="1">
+            <a:schemeClr val="accent1"/>
+          </a:lnRef>
+          <a:fillRef idx="3">
+            <a:schemeClr val="accent1"/>
+          </a:fillRef>
+          <a:effectRef idx="2">
+            <a:schemeClr val="accent1"/>
+          </a:effectRef>
+          <a:fontRef idx="minor">
+            <a:schemeClr val="lt1"/>
+          </a:fontRef>
+        </p:style>
+        <p:txBody>
+          <a:bodyPr rtlCol="0" anchor="ctr"/>
+          <a:lstStyle/>
+          <a:p>
+            <a:pPr algn="ctr"/>
+          </a:p>
+        </p:txBody>
+      </p:sp>
+      <p:sp>
+        <p:nvSpPr>
+          <p:cNvPr id="33" name="Rectangle 32"/>
+          <p:cNvSpPr/>
+          <p:nvPr/>
+        </p:nvSpPr>
+        <p:spPr>
+          <a:xfrm>
+            <a:off x="6400800" y="2788920"/>
+            <a:ext cx="73152" cy="2240280"/>
+          </a:xfrm>
+          <a:prstGeom prst="rect">
+            <a:avLst/>
+          </a:prstGeom>
+          <a:solidFill>
+            <a:srgbClr val="00959C"/>
+          </a:solidFill>
+          <a:ln>
+            <a:noFill/>
+          </a:ln>
+        </p:spPr>
+        <p:style>
+          <a:lnRef idx="1">
+            <a:schemeClr val="accent1"/>
+          </a:lnRef>
+          <a:fillRef idx="3">
+            <a:schemeClr val="accent1"/>
+          </a:fillRef>
+          <a:effectRef idx="2">
+            <a:schemeClr val="accent1"/>
+          </a:effectRef>
+          <a:fontRef idx="minor">
+            <a:schemeClr val="lt1"/>
+          </a:fontRef>
+        </p:style>
+        <p:txBody>
+          <a:bodyPr rtlCol="0" anchor="ctr"/>
+          <a:lstStyle/>
+          <a:p>
+            <a:pPr algn="ctr"/>
+          </a:p>
+        </p:txBody>
+      </p:sp>
+      <p:sp>
+        <p:nvSpPr>
+          <p:cNvPr id="34" name="TextBox 33"/>
+          <p:cNvSpPr txBox="1"/>
+          <p:nvPr/>
+        </p:nvSpPr>
+        <p:spPr>
+          <a:xfrm>
+            <a:off x="6601968" y="2926079"/>
+            <a:ext cx="4343400" cy="274320"/>
+          </a:xfrm>
+          <a:prstGeom prst="rect">
+            <a:avLst/>
+          </a:prstGeom>
+          <a:noFill/>
+        </p:spPr>
+        <p:txBody>
+          <a:bodyPr wrap="none">
+            <a:spAutoFit/>
+          </a:bodyPr>
+          <a:lstStyle/>
+          <a:p>
+            <a:pPr>
+              <a:defRPr sz="1000" b="1">
+                <a:solidFill>
+                  <a:srgbClr val="667487"/>
+                </a:solidFill>
+              </a:defRPr>
+            </a:pPr>
+            <a:r>
+              <a:t>Production extension</a:t>
+            </a:r>
+          </a:p>
+        </p:txBody>
+      </p:sp>
+      <p:sp>
+        <p:nvSpPr>
+          <p:cNvPr id="35" name="TextBox 34"/>
+          <p:cNvSpPr txBox="1"/>
+          <p:nvPr/>
+        </p:nvSpPr>
+        <p:spPr>
+          <a:xfrm>
+            <a:off x="6601968" y="3246120"/>
+            <a:ext cx="4343400" cy="1554480"/>
           </a:xfrm>
           <a:prstGeom prst="rect">
             <a:avLst/>
@@ -15218,7 +14583,7 @@
               </a:defRPr>
             </a:pPr>
             <a:r>
-              <a:t>High amount: amount &gt;= 250</a:t>
+              <a:t>Add real APM traces for end-to-end request paths.</a:t>
             </a:r>
           </a:p>
           <a:p>
@@ -15233,7 +14598,7 @@
               </a:defRPr>
             </a:pPr>
             <a:r>
-              <a:t>Off-hours: before 06:00 or after 22:00 UTC</a:t>
+              <a:t>Ingest application logs and infrastructure metrics.</a:t>
             </a:r>
           </a:p>
           <a:p>
@@ -15248,14 +14613,14 @@
               </a:defRPr>
             </a:pPr>
             <a:r>
-              <a:t>Country decline threshold: &gt;= 5.2%</a:t>
-            </a:r>
-          </a:p>
-        </p:txBody>
-      </p:sp>
-      <p:sp>
-        <p:nvSpPr>
-          <p:cNvPr id="28" name="TextBox 27"/>
+              <a:t>Create alert rules and official Elastic SLO objects.</a:t>
+            </a:r>
+          </a:p>
+        </p:txBody>
+      </p:sp>
+      <p:sp>
+        <p:nvSpPr>
+          <p:cNvPr id="36" name="TextBox 35"/>
           <p:cNvSpPr txBox="1"/>
           <p:nvPr/>
         </p:nvSpPr>
@@ -15282,7 +14647,7 @@
                 </a:solidFill>
                 <a:hlinkClick r:id="rId2"/>
               </a:rPr>
-              <a:t>Open Anomaly Detection Dashboard</a:t>
+              <a:t>Open Payments Visibility Dashboard</a:t>
             </a:r>
           </a:p>
         </p:txBody>
@@ -15386,7 +14751,7 @@
               </a:defRPr>
             </a:pPr>
             <a:r>
-              <a:t>Payments World Map</a:t>
+              <a:t>Anomaly Detection Dashboard</a:t>
             </a:r>
           </a:p>
         </p:txBody>
@@ -15421,7 +14786,7 @@
               </a:defRPr>
             </a:pPr>
             <a:r>
-              <a:t>Geographic distribution of payment count and total amount</a:t>
+              <a:t>Rule-based anomaly detection without Machine Learning</a:t>
             </a:r>
           </a:p>
         </p:txBody>
@@ -15504,8 +14869,8 @@
         </p:nvSpPr>
         <p:spPr>
           <a:xfrm>
-            <a:off x="731520" y="1143000"/>
-            <a:ext cx="5074920" cy="2011680"/>
+            <a:off x="640080" y="1234440"/>
+            <a:ext cx="2560320" cy="1005840"/>
           </a:xfrm>
           <a:prstGeom prst="roundRect">
             <a:avLst/>
@@ -15549,14 +14914,14 @@
         </p:nvSpPr>
         <p:spPr>
           <a:xfrm>
-            <a:off x="731520" y="1143000"/>
-            <a:ext cx="73152" cy="2011680"/>
+            <a:off x="640080" y="1234440"/>
+            <a:ext cx="73152" cy="1005840"/>
           </a:xfrm>
           <a:prstGeom prst="rect">
             <a:avLst/>
           </a:prstGeom>
           <a:solidFill>
-            <a:srgbClr val="3673C8"/>
+            <a:srgbClr val="EF8438"/>
           </a:solidFill>
           <a:ln>
             <a:noFill/>
@@ -15592,8 +14957,8 @@
         </p:nvSpPr>
         <p:spPr>
           <a:xfrm>
-            <a:off x="932688" y="1280160"/>
-            <a:ext cx="4754880" cy="274320"/>
+            <a:off x="841247" y="1371600"/>
+            <a:ext cx="2240279" cy="274320"/>
           </a:xfrm>
           <a:prstGeom prst="rect">
             <a:avLst/>
@@ -15614,7 +14979,7 @@
               </a:defRPr>
             </a:pPr>
             <a:r>
-              <a:t>Map 1: Number of payments</a:t>
+              <a:t>High Amount Txns</a:t>
             </a:r>
           </a:p>
         </p:txBody>
@@ -15627,62 +14992,29 @@
         </p:nvSpPr>
         <p:spPr>
           <a:xfrm>
-            <a:off x="932688" y="1600200"/>
-            <a:ext cx="4754880" cy="1325880"/>
-          </a:xfrm>
-          <a:prstGeom prst="rect">
-            <a:avLst/>
-          </a:prstGeom>
-          <a:noFill/>
-        </p:spPr>
-        <p:txBody>
-          <a:bodyPr wrap="square">
-            <a:normAutofit/>
-          </a:bodyPr>
-          <a:lstStyle/>
-          <a:p>
-            <a:pPr>
-              <a:spcAft>
-                <a:spcPts val="300"/>
-              </a:spcAft>
-              <a:defRPr sz="950">
-                <a:solidFill>
-                  <a:srgbClr val="222D3D"/>
-                </a:solidFill>
-              </a:defRPr>
-            </a:pPr>
-            <a:r>
-              <a:t>Country-level region map</a:t>
-            </a:r>
-          </a:p>
-          <a:p>
-            <a:pPr>
-              <a:spcAft>
-                <a:spcPts val="300"/>
-              </a:spcAft>
-              <a:defRPr sz="950">
-                <a:solidFill>
-                  <a:srgbClr val="222D3D"/>
-                </a:solidFill>
-              </a:defRPr>
-            </a:pPr>
-            <a:r>
-              <a:t>Metric: payments = COUNT(*)</a:t>
-            </a:r>
-          </a:p>
-          <a:p>
-            <a:pPr>
-              <a:spcAft>
-                <a:spcPts val="300"/>
-              </a:spcAft>
-              <a:defRPr sz="950">
-                <a:solidFill>
-                  <a:srgbClr val="222D3D"/>
-                </a:solidFill>
-              </a:defRPr>
-            </a:pPr>
-            <a:r>
-              <a:t>Uses ISO country codes internally for map matching</a:t>
+            <a:off x="841247" y="1673352"/>
+            <a:ext cx="2240279" cy="502920"/>
+          </a:xfrm>
+          <a:prstGeom prst="rect">
+            <a:avLst/>
+          </a:prstGeom>
+          <a:noFill/>
+        </p:spPr>
+        <p:txBody>
+          <a:bodyPr wrap="none">
+            <a:spAutoFit/>
+          </a:bodyPr>
+          <a:lstStyle/>
+          <a:p>
+            <a:pPr>
+              <a:defRPr sz="2200" b="1">
+                <a:solidFill>
+                  <a:srgbClr val="142440"/>
+                </a:solidFill>
+              </a:defRPr>
+            </a:pPr>
+            <a:r>
+              <a:t>5,259</a:t>
             </a:r>
           </a:p>
         </p:txBody>
@@ -15695,8 +15027,8 @@
         </p:nvSpPr>
         <p:spPr>
           <a:xfrm>
-            <a:off x="6355080" y="1143000"/>
-            <a:ext cx="5074920" cy="2011680"/>
+            <a:off x="3520439" y="1234440"/>
+            <a:ext cx="2560320" cy="1005840"/>
           </a:xfrm>
           <a:prstGeom prst="roundRect">
             <a:avLst/>
@@ -15740,14 +15072,14 @@
         </p:nvSpPr>
         <p:spPr>
           <a:xfrm>
-            <a:off x="6355080" y="1143000"/>
-            <a:ext cx="73152" cy="2011680"/>
+            <a:off x="3520439" y="1234440"/>
+            <a:ext cx="73152" cy="1005840"/>
           </a:xfrm>
           <a:prstGeom prst="rect">
             <a:avLst/>
           </a:prstGeom>
           <a:solidFill>
-            <a:srgbClr val="44AA5C"/>
+            <a:srgbClr val="7058BE"/>
           </a:solidFill>
           <a:ln>
             <a:noFill/>
@@ -15783,8 +15115,8 @@
         </p:nvSpPr>
         <p:spPr>
           <a:xfrm>
-            <a:off x="6556248" y="1280160"/>
-            <a:ext cx="4754880" cy="274320"/>
+            <a:off x="3721607" y="1371600"/>
+            <a:ext cx="2240279" cy="274320"/>
           </a:xfrm>
           <a:prstGeom prst="rect">
             <a:avLst/>
@@ -15805,7 +15137,7 @@
               </a:defRPr>
             </a:pPr>
             <a:r>
-              <a:t>Map 2: Total payment amount</a:t>
+              <a:t>Off-hours Txns</a:t>
             </a:r>
           </a:p>
         </p:txBody>
@@ -15818,76 +15150,8 @@
         </p:nvSpPr>
         <p:spPr>
           <a:xfrm>
-            <a:off x="6556248" y="1600200"/>
-            <a:ext cx="4754880" cy="1325880"/>
-          </a:xfrm>
-          <a:prstGeom prst="rect">
-            <a:avLst/>
-          </a:prstGeom>
-          <a:noFill/>
-        </p:spPr>
-        <p:txBody>
-          <a:bodyPr wrap="square">
-            <a:normAutofit/>
-          </a:bodyPr>
-          <a:lstStyle/>
-          <a:p>
-            <a:pPr>
-              <a:spcAft>
-                <a:spcPts val="300"/>
-              </a:spcAft>
-              <a:defRPr sz="950">
-                <a:solidFill>
-                  <a:srgbClr val="222D3D"/>
-                </a:solidFill>
-              </a:defRPr>
-            </a:pPr>
-            <a:r>
-              <a:t>Country-level region map</a:t>
-            </a:r>
-          </a:p>
-          <a:p>
-            <a:pPr>
-              <a:spcAft>
-                <a:spcPts val="300"/>
-              </a:spcAft>
-              <a:defRPr sz="950">
-                <a:solidFill>
-                  <a:srgbClr val="222D3D"/>
-                </a:solidFill>
-              </a:defRPr>
-            </a:pPr>
-            <a:r>
-              <a:t>Metric: total_amount = SUM(amount)</a:t>
-            </a:r>
-          </a:p>
-          <a:p>
-            <a:pPr>
-              <a:spcAft>
-                <a:spcPts val="300"/>
-              </a:spcAft>
-              <a:defRPr sz="950">
-                <a:solidFill>
-                  <a:srgbClr val="222D3D"/>
-                </a:solidFill>
-              </a:defRPr>
-            </a:pPr>
-            <a:r>
-              <a:t>Supporting table shows full country names</a:t>
-            </a:r>
-          </a:p>
-        </p:txBody>
-      </p:sp>
-      <p:sp>
-        <p:nvSpPr>
-          <p:cNvPr id="15" name="TextBox 14"/>
-          <p:cNvSpPr txBox="1"/>
-          <p:nvPr/>
-        </p:nvSpPr>
-        <p:spPr>
-          <a:xfrm>
-            <a:off x="914400" y="3630168"/>
-            <a:ext cx="4663440" cy="274320"/>
+            <a:off x="3721607" y="1673352"/>
+            <a:ext cx="2240279" cy="502920"/>
           </a:xfrm>
           <a:prstGeom prst="rect">
             <a:avLst/>
@@ -15901,270 +15165,30 @@
           <a:lstStyle/>
           <a:p>
             <a:pPr>
-              <a:defRPr b="1" sz="1200">
+              <a:defRPr sz="2200" b="1">
                 <a:solidFill>
                   <a:srgbClr val="142440"/>
                 </a:solidFill>
               </a:defRPr>
             </a:pPr>
             <a:r>
-              <a:t>Top countries displayed with full names</a:t>
-            </a:r>
-          </a:p>
-        </p:txBody>
-      </p:sp>
-      <p:sp>
-        <p:nvSpPr>
-          <p:cNvPr id="16" name="Rectangle 15"/>
+              <a:t>273,850</a:t>
+            </a:r>
+          </a:p>
+        </p:txBody>
+      </p:sp>
+      <p:sp>
+        <p:nvSpPr>
+          <p:cNvPr id="15" name="Rounded Rectangle 14"/>
           <p:cNvSpPr/>
           <p:nvPr/>
         </p:nvSpPr>
         <p:spPr>
           <a:xfrm>
-            <a:off x="914400" y="3977639"/>
-            <a:ext cx="2011680" cy="347472"/>
-          </a:xfrm>
-          <a:prstGeom prst="rect">
-            <a:avLst/>
-          </a:prstGeom>
-          <a:solidFill>
-            <a:srgbClr val="142440"/>
-          </a:solidFill>
-          <a:ln>
-            <a:solidFill>
-              <a:srgbClr val="FFFFFF"/>
-            </a:solidFill>
-          </a:ln>
-        </p:spPr>
-        <p:style>
-          <a:lnRef idx="1">
-            <a:schemeClr val="accent1"/>
-          </a:lnRef>
-          <a:fillRef idx="3">
-            <a:schemeClr val="accent1"/>
-          </a:fillRef>
-          <a:effectRef idx="2">
-            <a:schemeClr val="accent1"/>
-          </a:effectRef>
-          <a:fontRef idx="minor">
-            <a:schemeClr val="lt1"/>
-          </a:fontRef>
-        </p:style>
-        <p:txBody>
-          <a:bodyPr rtlCol="0" anchor="ctr"/>
-          <a:lstStyle/>
-          <a:p>
-            <a:pPr algn="ctr"/>
-          </a:p>
-        </p:txBody>
-      </p:sp>
-      <p:sp>
-        <p:nvSpPr>
-          <p:cNvPr id="17" name="TextBox 16"/>
-          <p:cNvSpPr txBox="1"/>
-          <p:nvPr/>
-        </p:nvSpPr>
-        <p:spPr>
-          <a:xfrm>
-            <a:off x="960120" y="4041648"/>
-            <a:ext cx="1920240" cy="292608"/>
-          </a:xfrm>
-          <a:prstGeom prst="rect">
-            <a:avLst/>
-          </a:prstGeom>
-          <a:noFill/>
-        </p:spPr>
-        <p:txBody>
-          <a:bodyPr wrap="none">
-            <a:spAutoFit/>
-          </a:bodyPr>
-          <a:lstStyle/>
-          <a:p>
-            <a:pPr>
-              <a:defRPr sz="850" b="1">
-                <a:solidFill>
-                  <a:srgbClr val="FFFFFF"/>
-                </a:solidFill>
-              </a:defRPr>
-            </a:pPr>
-            <a:r>
-              <a:t>Country</a:t>
-            </a:r>
-          </a:p>
-        </p:txBody>
-      </p:sp>
-      <p:sp>
-        <p:nvSpPr>
-          <p:cNvPr id="18" name="Rectangle 17"/>
-          <p:cNvSpPr/>
-          <p:nvPr/>
-        </p:nvSpPr>
-        <p:spPr>
-          <a:xfrm>
-            <a:off x="2926080" y="3977639"/>
-            <a:ext cx="1188720" cy="347472"/>
-          </a:xfrm>
-          <a:prstGeom prst="rect">
-            <a:avLst/>
-          </a:prstGeom>
-          <a:solidFill>
-            <a:srgbClr val="142440"/>
-          </a:solidFill>
-          <a:ln>
-            <a:solidFill>
-              <a:srgbClr val="FFFFFF"/>
-            </a:solidFill>
-          </a:ln>
-        </p:spPr>
-        <p:style>
-          <a:lnRef idx="1">
-            <a:schemeClr val="accent1"/>
-          </a:lnRef>
-          <a:fillRef idx="3">
-            <a:schemeClr val="accent1"/>
-          </a:fillRef>
-          <a:effectRef idx="2">
-            <a:schemeClr val="accent1"/>
-          </a:effectRef>
-          <a:fontRef idx="minor">
-            <a:schemeClr val="lt1"/>
-          </a:fontRef>
-        </p:style>
-        <p:txBody>
-          <a:bodyPr rtlCol="0" anchor="ctr"/>
-          <a:lstStyle/>
-          <a:p>
-            <a:pPr algn="ctr"/>
-          </a:p>
-        </p:txBody>
-      </p:sp>
-      <p:sp>
-        <p:nvSpPr>
-          <p:cNvPr id="19" name="TextBox 18"/>
-          <p:cNvSpPr txBox="1"/>
-          <p:nvPr/>
-        </p:nvSpPr>
-        <p:spPr>
-          <a:xfrm>
-            <a:off x="2971800" y="4041648"/>
-            <a:ext cx="1097280" cy="292608"/>
-          </a:xfrm>
-          <a:prstGeom prst="rect">
-            <a:avLst/>
-          </a:prstGeom>
-          <a:noFill/>
-        </p:spPr>
-        <p:txBody>
-          <a:bodyPr wrap="none">
-            <a:spAutoFit/>
-          </a:bodyPr>
-          <a:lstStyle/>
-          <a:p>
-            <a:pPr>
-              <a:defRPr sz="850" b="1">
-                <a:solidFill>
-                  <a:srgbClr val="FFFFFF"/>
-                </a:solidFill>
-              </a:defRPr>
-            </a:pPr>
-            <a:r>
-              <a:t>Payments</a:t>
-            </a:r>
-          </a:p>
-        </p:txBody>
-      </p:sp>
-      <p:sp>
-        <p:nvSpPr>
-          <p:cNvPr id="20" name="Rectangle 19"/>
-          <p:cNvSpPr/>
-          <p:nvPr/>
-        </p:nvSpPr>
-        <p:spPr>
-          <a:xfrm>
-            <a:off x="4114800" y="3977639"/>
-            <a:ext cx="1463040" cy="347472"/>
-          </a:xfrm>
-          <a:prstGeom prst="rect">
-            <a:avLst/>
-          </a:prstGeom>
-          <a:solidFill>
-            <a:srgbClr val="142440"/>
-          </a:solidFill>
-          <a:ln>
-            <a:solidFill>
-              <a:srgbClr val="FFFFFF"/>
-            </a:solidFill>
-          </a:ln>
-        </p:spPr>
-        <p:style>
-          <a:lnRef idx="1">
-            <a:schemeClr val="accent1"/>
-          </a:lnRef>
-          <a:fillRef idx="3">
-            <a:schemeClr val="accent1"/>
-          </a:fillRef>
-          <a:effectRef idx="2">
-            <a:schemeClr val="accent1"/>
-          </a:effectRef>
-          <a:fontRef idx="minor">
-            <a:schemeClr val="lt1"/>
-          </a:fontRef>
-        </p:style>
-        <p:txBody>
-          <a:bodyPr rtlCol="0" anchor="ctr"/>
-          <a:lstStyle/>
-          <a:p>
-            <a:pPr algn="ctr"/>
-          </a:p>
-        </p:txBody>
-      </p:sp>
-      <p:sp>
-        <p:nvSpPr>
-          <p:cNvPr id="21" name="TextBox 20"/>
-          <p:cNvSpPr txBox="1"/>
-          <p:nvPr/>
-        </p:nvSpPr>
-        <p:spPr>
-          <a:xfrm>
-            <a:off x="4160520" y="4041648"/>
-            <a:ext cx="1371600" cy="292608"/>
-          </a:xfrm>
-          <a:prstGeom prst="rect">
-            <a:avLst/>
-          </a:prstGeom>
-          <a:noFill/>
-        </p:spPr>
-        <p:txBody>
-          <a:bodyPr wrap="none">
-            <a:spAutoFit/>
-          </a:bodyPr>
-          <a:lstStyle/>
-          <a:p>
-            <a:pPr>
-              <a:defRPr sz="850" b="1">
-                <a:solidFill>
-                  <a:srgbClr val="FFFFFF"/>
-                </a:solidFill>
-              </a:defRPr>
-            </a:pPr>
-            <a:r>
-              <a:t>Amount</a:t>
-            </a:r>
-          </a:p>
-        </p:txBody>
-      </p:sp>
-      <p:sp>
-        <p:nvSpPr>
-          <p:cNvPr id="22" name="Rectangle 21"/>
-          <p:cNvSpPr/>
-          <p:nvPr/>
-        </p:nvSpPr>
-        <p:spPr>
-          <a:xfrm>
-            <a:off x="914400" y="4325112"/>
-            <a:ext cx="2011680" cy="347472"/>
-          </a:xfrm>
-          <a:prstGeom prst="rect">
+            <a:off x="6400800" y="1234440"/>
+            <a:ext cx="2560320" cy="1005840"/>
+          </a:xfrm>
+          <a:prstGeom prst="roundRect">
             <a:avLst/>
           </a:prstGeom>
           <a:solidFill>
@@ -16200,14 +15224,57 @@
       </p:sp>
       <p:sp>
         <p:nvSpPr>
-          <p:cNvPr id="23" name="TextBox 22"/>
-          <p:cNvSpPr txBox="1"/>
-          <p:nvPr/>
-        </p:nvSpPr>
-        <p:spPr>
-          <a:xfrm>
-            <a:off x="960120" y="4389120"/>
-            <a:ext cx="1920240" cy="292608"/>
+          <p:cNvPr id="16" name="Rectangle 15"/>
+          <p:cNvSpPr/>
+          <p:nvPr/>
+        </p:nvSpPr>
+        <p:spPr>
+          <a:xfrm>
+            <a:off x="6400800" y="1234440"/>
+            <a:ext cx="73152" cy="1005840"/>
+          </a:xfrm>
+          <a:prstGeom prst="rect">
+            <a:avLst/>
+          </a:prstGeom>
+          <a:solidFill>
+            <a:srgbClr val="D24848"/>
+          </a:solidFill>
+          <a:ln>
+            <a:noFill/>
+          </a:ln>
+        </p:spPr>
+        <p:style>
+          <a:lnRef idx="1">
+            <a:schemeClr val="accent1"/>
+          </a:lnRef>
+          <a:fillRef idx="3">
+            <a:schemeClr val="accent1"/>
+          </a:fillRef>
+          <a:effectRef idx="2">
+            <a:schemeClr val="accent1"/>
+          </a:effectRef>
+          <a:fontRef idx="minor">
+            <a:schemeClr val="lt1"/>
+          </a:fontRef>
+        </p:style>
+        <p:txBody>
+          <a:bodyPr rtlCol="0" anchor="ctr"/>
+          <a:lstStyle/>
+          <a:p>
+            <a:pPr algn="ctr"/>
+          </a:p>
+        </p:txBody>
+      </p:sp>
+      <p:sp>
+        <p:nvSpPr>
+          <p:cNvPr id="17" name="TextBox 16"/>
+          <p:cNvSpPr txBox="1"/>
+          <p:nvPr/>
+        </p:nvSpPr>
+        <p:spPr>
+          <a:xfrm>
+            <a:off x="6601968" y="1371600"/>
+            <a:ext cx="2240279" cy="274320"/>
           </a:xfrm>
           <a:prstGeom prst="rect">
             <a:avLst/>
@@ -16221,30 +15288,65 @@
           <a:lstStyle/>
           <a:p>
             <a:pPr>
-              <a:defRPr sz="850">
-                <a:solidFill>
-                  <a:srgbClr val="222D3D"/>
-                </a:solidFill>
-              </a:defRPr>
-            </a:pPr>
-            <a:r>
-              <a:t>Singapore</a:t>
-            </a:r>
-          </a:p>
-        </p:txBody>
-      </p:sp>
-      <p:sp>
-        <p:nvSpPr>
-          <p:cNvPr id="24" name="Rectangle 23"/>
+              <a:defRPr sz="1000" b="1">
+                <a:solidFill>
+                  <a:srgbClr val="667487"/>
+                </a:solidFill>
+              </a:defRPr>
+            </a:pPr>
+            <a:r>
+              <a:t>High Decline Countries</a:t>
+            </a:r>
+          </a:p>
+        </p:txBody>
+      </p:sp>
+      <p:sp>
+        <p:nvSpPr>
+          <p:cNvPr id="18" name="TextBox 17"/>
+          <p:cNvSpPr txBox="1"/>
+          <p:nvPr/>
+        </p:nvSpPr>
+        <p:spPr>
+          <a:xfrm>
+            <a:off x="6601968" y="1673352"/>
+            <a:ext cx="2240279" cy="502920"/>
+          </a:xfrm>
+          <a:prstGeom prst="rect">
+            <a:avLst/>
+          </a:prstGeom>
+          <a:noFill/>
+        </p:spPr>
+        <p:txBody>
+          <a:bodyPr wrap="none">
+            <a:spAutoFit/>
+          </a:bodyPr>
+          <a:lstStyle/>
+          <a:p>
+            <a:pPr>
+              <a:defRPr sz="2200" b="1">
+                <a:solidFill>
+                  <a:srgbClr val="142440"/>
+                </a:solidFill>
+              </a:defRPr>
+            </a:pPr>
+            <a:r>
+              <a:t>4</a:t>
+            </a:r>
+          </a:p>
+        </p:txBody>
+      </p:sp>
+      <p:sp>
+        <p:nvSpPr>
+          <p:cNvPr id="19" name="Rounded Rectangle 18"/>
           <p:cNvSpPr/>
           <p:nvPr/>
         </p:nvSpPr>
         <p:spPr>
           <a:xfrm>
-            <a:off x="2926080" y="4325112"/>
-            <a:ext cx="1188720" cy="347472"/>
-          </a:xfrm>
-          <a:prstGeom prst="rect">
+            <a:off x="9281159" y="1234440"/>
+            <a:ext cx="2560320" cy="1005840"/>
+          </a:xfrm>
+          <a:prstGeom prst="roundRect">
             <a:avLst/>
           </a:prstGeom>
           <a:solidFill>
@@ -16280,14 +15382,57 @@
       </p:sp>
       <p:sp>
         <p:nvSpPr>
-          <p:cNvPr id="25" name="TextBox 24"/>
-          <p:cNvSpPr txBox="1"/>
-          <p:nvPr/>
-        </p:nvSpPr>
-        <p:spPr>
-          <a:xfrm>
-            <a:off x="2971800" y="4389120"/>
-            <a:ext cx="1097280" cy="292608"/>
+          <p:cNvPr id="20" name="Rectangle 19"/>
+          <p:cNvSpPr/>
+          <p:nvPr/>
+        </p:nvSpPr>
+        <p:spPr>
+          <a:xfrm>
+            <a:off x="9281159" y="1234440"/>
+            <a:ext cx="73152" cy="1005840"/>
+          </a:xfrm>
+          <a:prstGeom prst="rect">
+            <a:avLst/>
+          </a:prstGeom>
+          <a:solidFill>
+            <a:srgbClr val="00959C"/>
+          </a:solidFill>
+          <a:ln>
+            <a:noFill/>
+          </a:ln>
+        </p:spPr>
+        <p:style>
+          <a:lnRef idx="1">
+            <a:schemeClr val="accent1"/>
+          </a:lnRef>
+          <a:fillRef idx="3">
+            <a:schemeClr val="accent1"/>
+          </a:fillRef>
+          <a:effectRef idx="2">
+            <a:schemeClr val="accent1"/>
+          </a:effectRef>
+          <a:fontRef idx="minor">
+            <a:schemeClr val="lt1"/>
+          </a:fontRef>
+        </p:style>
+        <p:txBody>
+          <a:bodyPr rtlCol="0" anchor="ctr"/>
+          <a:lstStyle/>
+          <a:p>
+            <a:pPr algn="ctr"/>
+          </a:p>
+        </p:txBody>
+      </p:sp>
+      <p:sp>
+        <p:nvSpPr>
+          <p:cNvPr id="21" name="TextBox 20"/>
+          <p:cNvSpPr txBox="1"/>
+          <p:nvPr/>
+        </p:nvSpPr>
+        <p:spPr>
+          <a:xfrm>
+            <a:off x="9482328" y="1371600"/>
+            <a:ext cx="2240279" cy="274320"/>
           </a:xfrm>
           <a:prstGeom prst="rect">
             <a:avLst/>
@@ -16301,30 +15446,152 @@
           <a:lstStyle/>
           <a:p>
             <a:pPr>
-              <a:defRPr sz="850">
+              <a:defRPr sz="1000" b="1">
+                <a:solidFill>
+                  <a:srgbClr val="667487"/>
+                </a:solidFill>
+              </a:defRPr>
+            </a:pPr>
+            <a:r>
+              <a:t>Merchant Spikes</a:t>
+            </a:r>
+          </a:p>
+        </p:txBody>
+      </p:sp>
+      <p:sp>
+        <p:nvSpPr>
+          <p:cNvPr id="22" name="TextBox 21"/>
+          <p:cNvSpPr txBox="1"/>
+          <p:nvPr/>
+        </p:nvSpPr>
+        <p:spPr>
+          <a:xfrm>
+            <a:off x="9482328" y="1673352"/>
+            <a:ext cx="2240279" cy="502920"/>
+          </a:xfrm>
+          <a:prstGeom prst="rect">
+            <a:avLst/>
+          </a:prstGeom>
+          <a:noFill/>
+        </p:spPr>
+        <p:txBody>
+          <a:bodyPr wrap="none">
+            <a:spAutoFit/>
+          </a:bodyPr>
+          <a:lstStyle/>
+          <a:p>
+            <a:pPr>
+              <a:defRPr sz="2200" b="1">
+                <a:solidFill>
+                  <a:srgbClr val="142440"/>
+                </a:solidFill>
+              </a:defRPr>
+            </a:pPr>
+            <a:r>
+              <a:t>Detected</a:t>
+            </a:r>
+          </a:p>
+        </p:txBody>
+      </p:sp>
+      <p:sp>
+        <p:nvSpPr>
+          <p:cNvPr id="23" name="TextBox 22"/>
+          <p:cNvSpPr txBox="1"/>
+          <p:nvPr/>
+        </p:nvSpPr>
+        <p:spPr>
+          <a:xfrm>
+            <a:off x="868680" y="2834640"/>
+            <a:ext cx="5212080" cy="2103120"/>
+          </a:xfrm>
+          <a:prstGeom prst="rect">
+            <a:avLst/>
+          </a:prstGeom>
+          <a:noFill/>
+        </p:spPr>
+        <p:txBody>
+          <a:bodyPr wrap="square">
+            <a:spAutoFit/>
+          </a:bodyPr>
+          <a:lstStyle/>
+          <a:p>
+            <a:pPr>
+              <a:buChar char="•"/>
+              <a:spcAft>
+                <a:spcPts val="800"/>
+              </a:spcAft>
+              <a:defRPr sz="1400">
                 <a:solidFill>
                   <a:srgbClr val="222D3D"/>
                 </a:solidFill>
               </a:defRPr>
             </a:pPr>
             <a:r>
-              <a:t>100,647</a:t>
-            </a:r>
-          </a:p>
-        </p:txBody>
-      </p:sp>
-      <p:sp>
-        <p:nvSpPr>
-          <p:cNvPr id="26" name="Rectangle 25"/>
+              <a:t>Flags transactions above an amount threshold.</a:t>
+            </a:r>
+          </a:p>
+          <a:p>
+            <a:pPr>
+              <a:buChar char="•"/>
+              <a:spcAft>
+                <a:spcPts val="800"/>
+              </a:spcAft>
+              <a:defRPr sz="1400">
+                <a:solidFill>
+                  <a:srgbClr val="222D3D"/>
+                </a:solidFill>
+              </a:defRPr>
+            </a:pPr>
+            <a:r>
+              <a:t>Finds merchants with unusual volume increases.</a:t>
+            </a:r>
+          </a:p>
+          <a:p>
+            <a:pPr>
+              <a:buChar char="•"/>
+              <a:spcAft>
+                <a:spcPts val="800"/>
+              </a:spcAft>
+              <a:defRPr sz="1400">
+                <a:solidFill>
+                  <a:srgbClr val="222D3D"/>
+                </a:solidFill>
+              </a:defRPr>
+            </a:pPr>
+            <a:r>
+              <a:t>Highlights countries with abnormal decline rates.</a:t>
+            </a:r>
+          </a:p>
+          <a:p>
+            <a:pPr>
+              <a:buChar char="•"/>
+              <a:spcAft>
+                <a:spcPts val="800"/>
+              </a:spcAft>
+              <a:defRPr sz="1400">
+                <a:solidFill>
+                  <a:srgbClr val="222D3D"/>
+                </a:solidFill>
+              </a:defRPr>
+            </a:pPr>
+            <a:r>
+              <a:t>Shows payments outside business hours.</a:t>
+            </a:r>
+          </a:p>
+        </p:txBody>
+      </p:sp>
+      <p:sp>
+        <p:nvSpPr>
+          <p:cNvPr id="24" name="Rounded Rectangle 23"/>
           <p:cNvSpPr/>
           <p:nvPr/>
         </p:nvSpPr>
         <p:spPr>
           <a:xfrm>
-            <a:off x="4114800" y="4325112"/>
-            <a:ext cx="1463040" cy="347472"/>
-          </a:xfrm>
-          <a:prstGeom prst="rect">
+            <a:off x="6400800" y="2834640"/>
+            <a:ext cx="4572000" cy="2103120"/>
+          </a:xfrm>
+          <a:prstGeom prst="roundRect">
             <a:avLst/>
           </a:prstGeom>
           <a:solidFill>
@@ -16360,60 +15627,23 @@
       </p:sp>
       <p:sp>
         <p:nvSpPr>
-          <p:cNvPr id="27" name="TextBox 26"/>
-          <p:cNvSpPr txBox="1"/>
-          <p:nvPr/>
-        </p:nvSpPr>
-        <p:spPr>
-          <a:xfrm>
-            <a:off x="4160520" y="4389120"/>
-            <a:ext cx="1371600" cy="292608"/>
-          </a:xfrm>
-          <a:prstGeom prst="rect">
-            <a:avLst/>
-          </a:prstGeom>
-          <a:noFill/>
-        </p:spPr>
-        <p:txBody>
-          <a:bodyPr wrap="none">
-            <a:spAutoFit/>
-          </a:bodyPr>
-          <a:lstStyle/>
-          <a:p>
-            <a:pPr>
-              <a:defRPr sz="850">
-                <a:solidFill>
-                  <a:srgbClr val="222D3D"/>
-                </a:solidFill>
-              </a:defRPr>
-            </a:pPr>
-            <a:r>
-              <a:t>$4,098,473</a:t>
-            </a:r>
-          </a:p>
-        </p:txBody>
-      </p:sp>
-      <p:sp>
-        <p:nvSpPr>
-          <p:cNvPr id="28" name="Rectangle 27"/>
+          <p:cNvPr id="25" name="Rectangle 24"/>
           <p:cNvSpPr/>
           <p:nvPr/>
         </p:nvSpPr>
         <p:spPr>
           <a:xfrm>
-            <a:off x="914400" y="4672583"/>
-            <a:ext cx="2011680" cy="347472"/>
+            <a:off x="6400800" y="2834640"/>
+            <a:ext cx="73152" cy="2103120"/>
           </a:xfrm>
           <a:prstGeom prst="rect">
             <a:avLst/>
           </a:prstGeom>
           <a:solidFill>
-            <a:srgbClr val="FFFFFF"/>
+            <a:srgbClr val="EF8438"/>
           </a:solidFill>
           <a:ln>
-            <a:solidFill>
-              <a:srgbClr val="D2DDEB"/>
-            </a:solidFill>
+            <a:noFill/>
           </a:ln>
         </p:spPr>
         <p:style>
@@ -16440,14 +15670,14 @@
       </p:sp>
       <p:sp>
         <p:nvSpPr>
-          <p:cNvPr id="29" name="TextBox 28"/>
-          <p:cNvSpPr txBox="1"/>
-          <p:nvPr/>
-        </p:nvSpPr>
-        <p:spPr>
-          <a:xfrm>
-            <a:off x="960120" y="4736592"/>
-            <a:ext cx="1920240" cy="292608"/>
+          <p:cNvPr id="26" name="TextBox 25"/>
+          <p:cNvSpPr txBox="1"/>
+          <p:nvPr/>
+        </p:nvSpPr>
+        <p:spPr>
+          <a:xfrm>
+            <a:off x="6601968" y="2971800"/>
+            <a:ext cx="4251960" cy="274320"/>
           </a:xfrm>
           <a:prstGeom prst="rect">
             <a:avLst/>
@@ -16461,907 +15691,95 @@
           <a:lstStyle/>
           <a:p>
             <a:pPr>
-              <a:defRPr sz="850">
+              <a:defRPr sz="1000" b="1">
+                <a:solidFill>
+                  <a:srgbClr val="667487"/>
+                </a:solidFill>
+              </a:defRPr>
+            </a:pPr>
+            <a:r>
+              <a:t>Demo thresholds</a:t>
+            </a:r>
+          </a:p>
+        </p:txBody>
+      </p:sp>
+      <p:sp>
+        <p:nvSpPr>
+          <p:cNvPr id="27" name="TextBox 26"/>
+          <p:cNvSpPr txBox="1"/>
+          <p:nvPr/>
+        </p:nvSpPr>
+        <p:spPr>
+          <a:xfrm>
+            <a:off x="6601968" y="3291840"/>
+            <a:ext cx="4251960" cy="1417319"/>
+          </a:xfrm>
+          <a:prstGeom prst="rect">
+            <a:avLst/>
+          </a:prstGeom>
+          <a:noFill/>
+        </p:spPr>
+        <p:txBody>
+          <a:bodyPr wrap="square">
+            <a:normAutofit/>
+          </a:bodyPr>
+          <a:lstStyle/>
+          <a:p>
+            <a:pPr>
+              <a:spcAft>
+                <a:spcPts val="300"/>
+              </a:spcAft>
+              <a:defRPr sz="950">
                 <a:solidFill>
                   <a:srgbClr val="222D3D"/>
                 </a:solidFill>
               </a:defRPr>
             </a:pPr>
             <a:r>
-              <a:t>Brazil</a:t>
-            </a:r>
-          </a:p>
-        </p:txBody>
-      </p:sp>
-      <p:sp>
-        <p:nvSpPr>
-          <p:cNvPr id="30" name="Rectangle 29"/>
-          <p:cNvSpPr/>
-          <p:nvPr/>
-        </p:nvSpPr>
-        <p:spPr>
-          <a:xfrm>
-            <a:off x="2926080" y="4672583"/>
-            <a:ext cx="1188720" cy="347472"/>
-          </a:xfrm>
-          <a:prstGeom prst="rect">
-            <a:avLst/>
-          </a:prstGeom>
-          <a:solidFill>
-            <a:srgbClr val="FFFFFF"/>
-          </a:solidFill>
-          <a:ln>
-            <a:solidFill>
-              <a:srgbClr val="D2DDEB"/>
-            </a:solidFill>
-          </a:ln>
-        </p:spPr>
-        <p:style>
-          <a:lnRef idx="1">
-            <a:schemeClr val="accent1"/>
-          </a:lnRef>
-          <a:fillRef idx="3">
-            <a:schemeClr val="accent1"/>
-          </a:fillRef>
-          <a:effectRef idx="2">
-            <a:schemeClr val="accent1"/>
-          </a:effectRef>
-          <a:fontRef idx="minor">
-            <a:schemeClr val="lt1"/>
-          </a:fontRef>
-        </p:style>
-        <p:txBody>
-          <a:bodyPr rtlCol="0" anchor="ctr"/>
-          <a:lstStyle/>
-          <a:p>
-            <a:pPr algn="ctr"/>
-          </a:p>
-        </p:txBody>
-      </p:sp>
-      <p:sp>
-        <p:nvSpPr>
-          <p:cNvPr id="31" name="TextBox 30"/>
-          <p:cNvSpPr txBox="1"/>
-          <p:nvPr/>
-        </p:nvSpPr>
-        <p:spPr>
-          <a:xfrm>
-            <a:off x="2971800" y="4736592"/>
-            <a:ext cx="1097280" cy="292608"/>
-          </a:xfrm>
-          <a:prstGeom prst="rect">
-            <a:avLst/>
-          </a:prstGeom>
-          <a:noFill/>
-        </p:spPr>
-        <p:txBody>
-          <a:bodyPr wrap="none">
-            <a:spAutoFit/>
-          </a:bodyPr>
-          <a:lstStyle/>
-          <a:p>
-            <a:pPr>
-              <a:defRPr sz="850">
+              <a:t>High amount: amount &gt;= 250</a:t>
+            </a:r>
+          </a:p>
+          <a:p>
+            <a:pPr>
+              <a:spcAft>
+                <a:spcPts val="300"/>
+              </a:spcAft>
+              <a:defRPr sz="950">
                 <a:solidFill>
                   <a:srgbClr val="222D3D"/>
                 </a:solidFill>
               </a:defRPr>
             </a:pPr>
             <a:r>
-              <a:t>100,318</a:t>
-            </a:r>
-          </a:p>
-        </p:txBody>
-      </p:sp>
-      <p:sp>
-        <p:nvSpPr>
-          <p:cNvPr id="32" name="Rectangle 31"/>
-          <p:cNvSpPr/>
-          <p:nvPr/>
-        </p:nvSpPr>
-        <p:spPr>
-          <a:xfrm>
-            <a:off x="4114800" y="4672583"/>
-            <a:ext cx="1463040" cy="347472"/>
-          </a:xfrm>
-          <a:prstGeom prst="rect">
-            <a:avLst/>
-          </a:prstGeom>
-          <a:solidFill>
-            <a:srgbClr val="FFFFFF"/>
-          </a:solidFill>
-          <a:ln>
-            <a:solidFill>
-              <a:srgbClr val="D2DDEB"/>
-            </a:solidFill>
-          </a:ln>
-        </p:spPr>
-        <p:style>
-          <a:lnRef idx="1">
-            <a:schemeClr val="accent1"/>
-          </a:lnRef>
-          <a:fillRef idx="3">
-            <a:schemeClr val="accent1"/>
-          </a:fillRef>
-          <a:effectRef idx="2">
-            <a:schemeClr val="accent1"/>
-          </a:effectRef>
-          <a:fontRef idx="minor">
-            <a:schemeClr val="lt1"/>
-          </a:fontRef>
-        </p:style>
-        <p:txBody>
-          <a:bodyPr rtlCol="0" anchor="ctr"/>
-          <a:lstStyle/>
-          <a:p>
-            <a:pPr algn="ctr"/>
-          </a:p>
-        </p:txBody>
-      </p:sp>
-      <p:sp>
-        <p:nvSpPr>
-          <p:cNvPr id="33" name="TextBox 32"/>
-          <p:cNvSpPr txBox="1"/>
-          <p:nvPr/>
-        </p:nvSpPr>
-        <p:spPr>
-          <a:xfrm>
-            <a:off x="4160520" y="4736592"/>
-            <a:ext cx="1371600" cy="292608"/>
-          </a:xfrm>
-          <a:prstGeom prst="rect">
-            <a:avLst/>
-          </a:prstGeom>
-          <a:noFill/>
-        </p:spPr>
-        <p:txBody>
-          <a:bodyPr wrap="none">
-            <a:spAutoFit/>
-          </a:bodyPr>
-          <a:lstStyle/>
-          <a:p>
-            <a:pPr>
-              <a:defRPr sz="850">
+              <a:t>Off-hours: before 06:00 or after 22:00 UTC</a:t>
+            </a:r>
+          </a:p>
+          <a:p>
+            <a:pPr>
+              <a:spcAft>
+                <a:spcPts val="300"/>
+              </a:spcAft>
+              <a:defRPr sz="950">
                 <a:solidFill>
                   <a:srgbClr val="222D3D"/>
                 </a:solidFill>
               </a:defRPr>
             </a:pPr>
             <a:r>
-              <a:t>$4,096,100</a:t>
-            </a:r>
-          </a:p>
-        </p:txBody>
-      </p:sp>
-      <p:sp>
-        <p:nvSpPr>
-          <p:cNvPr id="34" name="Rectangle 33"/>
-          <p:cNvSpPr/>
-          <p:nvPr/>
-        </p:nvSpPr>
-        <p:spPr>
-          <a:xfrm>
-            <a:off x="914400" y="5020056"/>
-            <a:ext cx="2011680" cy="347472"/>
-          </a:xfrm>
-          <a:prstGeom prst="rect">
-            <a:avLst/>
-          </a:prstGeom>
-          <a:solidFill>
-            <a:srgbClr val="FFFFFF"/>
-          </a:solidFill>
-          <a:ln>
-            <a:solidFill>
-              <a:srgbClr val="D2DDEB"/>
-            </a:solidFill>
-          </a:ln>
-        </p:spPr>
-        <p:style>
-          <a:lnRef idx="1">
-            <a:schemeClr val="accent1"/>
-          </a:lnRef>
-          <a:fillRef idx="3">
-            <a:schemeClr val="accent1"/>
-          </a:fillRef>
-          <a:effectRef idx="2">
-            <a:schemeClr val="accent1"/>
-          </a:effectRef>
-          <a:fontRef idx="minor">
-            <a:schemeClr val="lt1"/>
-          </a:fontRef>
-        </p:style>
-        <p:txBody>
-          <a:bodyPr rtlCol="0" anchor="ctr"/>
-          <a:lstStyle/>
-          <a:p>
-            <a:pPr algn="ctr"/>
-          </a:p>
-        </p:txBody>
-      </p:sp>
-      <p:sp>
-        <p:nvSpPr>
-          <p:cNvPr id="35" name="TextBox 34"/>
-          <p:cNvSpPr txBox="1"/>
-          <p:nvPr/>
-        </p:nvSpPr>
-        <p:spPr>
-          <a:xfrm>
-            <a:off x="960120" y="5084064"/>
-            <a:ext cx="1920240" cy="292608"/>
-          </a:xfrm>
-          <a:prstGeom prst="rect">
-            <a:avLst/>
-          </a:prstGeom>
-          <a:noFill/>
-        </p:spPr>
-        <p:txBody>
-          <a:bodyPr wrap="none">
-            <a:spAutoFit/>
-          </a:bodyPr>
-          <a:lstStyle/>
-          <a:p>
-            <a:pPr>
-              <a:defRPr sz="850">
-                <a:solidFill>
-                  <a:srgbClr val="222D3D"/>
-                </a:solidFill>
-              </a:defRPr>
-            </a:pPr>
-            <a:r>
-              <a:t>United Kingdom</a:t>
-            </a:r>
-          </a:p>
-        </p:txBody>
-      </p:sp>
-      <p:sp>
-        <p:nvSpPr>
-          <p:cNvPr id="36" name="Rectangle 35"/>
-          <p:cNvSpPr/>
-          <p:nvPr/>
-        </p:nvSpPr>
-        <p:spPr>
-          <a:xfrm>
-            <a:off x="2926080" y="5020056"/>
-            <a:ext cx="1188720" cy="347472"/>
-          </a:xfrm>
-          <a:prstGeom prst="rect">
-            <a:avLst/>
-          </a:prstGeom>
-          <a:solidFill>
-            <a:srgbClr val="FFFFFF"/>
-          </a:solidFill>
-          <a:ln>
-            <a:solidFill>
-              <a:srgbClr val="D2DDEB"/>
-            </a:solidFill>
-          </a:ln>
-        </p:spPr>
-        <p:style>
-          <a:lnRef idx="1">
-            <a:schemeClr val="accent1"/>
-          </a:lnRef>
-          <a:fillRef idx="3">
-            <a:schemeClr val="accent1"/>
-          </a:fillRef>
-          <a:effectRef idx="2">
-            <a:schemeClr val="accent1"/>
-          </a:effectRef>
-          <a:fontRef idx="minor">
-            <a:schemeClr val="lt1"/>
-          </a:fontRef>
-        </p:style>
-        <p:txBody>
-          <a:bodyPr rtlCol="0" anchor="ctr"/>
-          <a:lstStyle/>
-          <a:p>
-            <a:pPr algn="ctr"/>
-          </a:p>
-        </p:txBody>
-      </p:sp>
-      <p:sp>
-        <p:nvSpPr>
-          <p:cNvPr id="37" name="TextBox 36"/>
-          <p:cNvSpPr txBox="1"/>
-          <p:nvPr/>
-        </p:nvSpPr>
-        <p:spPr>
-          <a:xfrm>
-            <a:off x="2971800" y="5084064"/>
-            <a:ext cx="1097280" cy="292608"/>
-          </a:xfrm>
-          <a:prstGeom prst="rect">
-            <a:avLst/>
-          </a:prstGeom>
-          <a:noFill/>
-        </p:spPr>
-        <p:txBody>
-          <a:bodyPr wrap="none">
-            <a:spAutoFit/>
-          </a:bodyPr>
-          <a:lstStyle/>
-          <a:p>
-            <a:pPr>
-              <a:defRPr sz="850">
-                <a:solidFill>
-                  <a:srgbClr val="222D3D"/>
-                </a:solidFill>
-              </a:defRPr>
-            </a:pPr>
-            <a:r>
-              <a:t>100,297</a:t>
-            </a:r>
-          </a:p>
-        </p:txBody>
-      </p:sp>
-      <p:sp>
-        <p:nvSpPr>
-          <p:cNvPr id="38" name="Rectangle 37"/>
-          <p:cNvSpPr/>
-          <p:nvPr/>
-        </p:nvSpPr>
-        <p:spPr>
-          <a:xfrm>
-            <a:off x="4114800" y="5020056"/>
-            <a:ext cx="1463040" cy="347472"/>
-          </a:xfrm>
-          <a:prstGeom prst="rect">
-            <a:avLst/>
-          </a:prstGeom>
-          <a:solidFill>
-            <a:srgbClr val="FFFFFF"/>
-          </a:solidFill>
-          <a:ln>
-            <a:solidFill>
-              <a:srgbClr val="D2DDEB"/>
-            </a:solidFill>
-          </a:ln>
-        </p:spPr>
-        <p:style>
-          <a:lnRef idx="1">
-            <a:schemeClr val="accent1"/>
-          </a:lnRef>
-          <a:fillRef idx="3">
-            <a:schemeClr val="accent1"/>
-          </a:fillRef>
-          <a:effectRef idx="2">
-            <a:schemeClr val="accent1"/>
-          </a:effectRef>
-          <a:fontRef idx="minor">
-            <a:schemeClr val="lt1"/>
-          </a:fontRef>
-        </p:style>
-        <p:txBody>
-          <a:bodyPr rtlCol="0" anchor="ctr"/>
-          <a:lstStyle/>
-          <a:p>
-            <a:pPr algn="ctr"/>
-          </a:p>
-        </p:txBody>
-      </p:sp>
-      <p:sp>
-        <p:nvSpPr>
-          <p:cNvPr id="39" name="TextBox 38"/>
-          <p:cNvSpPr txBox="1"/>
-          <p:nvPr/>
-        </p:nvSpPr>
-        <p:spPr>
-          <a:xfrm>
-            <a:off x="4160520" y="5084064"/>
-            <a:ext cx="1371600" cy="292608"/>
-          </a:xfrm>
-          <a:prstGeom prst="rect">
-            <a:avLst/>
-          </a:prstGeom>
-          <a:noFill/>
-        </p:spPr>
-        <p:txBody>
-          <a:bodyPr wrap="none">
-            <a:spAutoFit/>
-          </a:bodyPr>
-          <a:lstStyle/>
-          <a:p>
-            <a:pPr>
-              <a:defRPr sz="850">
-                <a:solidFill>
-                  <a:srgbClr val="222D3D"/>
-                </a:solidFill>
-              </a:defRPr>
-            </a:pPr>
-            <a:r>
-              <a:t>$4,101,933</a:t>
-            </a:r>
-          </a:p>
-        </p:txBody>
-      </p:sp>
-      <p:sp>
-        <p:nvSpPr>
-          <p:cNvPr id="40" name="Rectangle 39"/>
-          <p:cNvSpPr/>
-          <p:nvPr/>
-        </p:nvSpPr>
-        <p:spPr>
-          <a:xfrm>
-            <a:off x="914400" y="5367527"/>
-            <a:ext cx="2011680" cy="347472"/>
-          </a:xfrm>
-          <a:prstGeom prst="rect">
-            <a:avLst/>
-          </a:prstGeom>
-          <a:solidFill>
-            <a:srgbClr val="FFFFFF"/>
-          </a:solidFill>
-          <a:ln>
-            <a:solidFill>
-              <a:srgbClr val="D2DDEB"/>
-            </a:solidFill>
-          </a:ln>
-        </p:spPr>
-        <p:style>
-          <a:lnRef idx="1">
-            <a:schemeClr val="accent1"/>
-          </a:lnRef>
-          <a:fillRef idx="3">
-            <a:schemeClr val="accent1"/>
-          </a:fillRef>
-          <a:effectRef idx="2">
-            <a:schemeClr val="accent1"/>
-          </a:effectRef>
-          <a:fontRef idx="minor">
-            <a:schemeClr val="lt1"/>
-          </a:fontRef>
-        </p:style>
-        <p:txBody>
-          <a:bodyPr rtlCol="0" anchor="ctr"/>
-          <a:lstStyle/>
-          <a:p>
-            <a:pPr algn="ctr"/>
-          </a:p>
-        </p:txBody>
-      </p:sp>
-      <p:sp>
-        <p:nvSpPr>
-          <p:cNvPr id="41" name="TextBox 40"/>
-          <p:cNvSpPr txBox="1"/>
-          <p:nvPr/>
-        </p:nvSpPr>
-        <p:spPr>
-          <a:xfrm>
-            <a:off x="960120" y="5431536"/>
-            <a:ext cx="1920240" cy="292608"/>
-          </a:xfrm>
-          <a:prstGeom prst="rect">
-            <a:avLst/>
-          </a:prstGeom>
-          <a:noFill/>
-        </p:spPr>
-        <p:txBody>
-          <a:bodyPr wrap="none">
-            <a:spAutoFit/>
-          </a:bodyPr>
-          <a:lstStyle/>
-          <a:p>
-            <a:pPr>
-              <a:defRPr sz="850">
-                <a:solidFill>
-                  <a:srgbClr val="222D3D"/>
-                </a:solidFill>
-              </a:defRPr>
-            </a:pPr>
-            <a:r>
-              <a:t>India</a:t>
-            </a:r>
-          </a:p>
-        </p:txBody>
-      </p:sp>
-      <p:sp>
-        <p:nvSpPr>
-          <p:cNvPr id="42" name="Rectangle 41"/>
-          <p:cNvSpPr/>
-          <p:nvPr/>
-        </p:nvSpPr>
-        <p:spPr>
-          <a:xfrm>
-            <a:off x="2926080" y="5367527"/>
-            <a:ext cx="1188720" cy="347472"/>
-          </a:xfrm>
-          <a:prstGeom prst="rect">
-            <a:avLst/>
-          </a:prstGeom>
-          <a:solidFill>
-            <a:srgbClr val="FFFFFF"/>
-          </a:solidFill>
-          <a:ln>
-            <a:solidFill>
-              <a:srgbClr val="D2DDEB"/>
-            </a:solidFill>
-          </a:ln>
-        </p:spPr>
-        <p:style>
-          <a:lnRef idx="1">
-            <a:schemeClr val="accent1"/>
-          </a:lnRef>
-          <a:fillRef idx="3">
-            <a:schemeClr val="accent1"/>
-          </a:fillRef>
-          <a:effectRef idx="2">
-            <a:schemeClr val="accent1"/>
-          </a:effectRef>
-          <a:fontRef idx="minor">
-            <a:schemeClr val="lt1"/>
-          </a:fontRef>
-        </p:style>
-        <p:txBody>
-          <a:bodyPr rtlCol="0" anchor="ctr"/>
-          <a:lstStyle/>
-          <a:p>
-            <a:pPr algn="ctr"/>
-          </a:p>
-        </p:txBody>
-      </p:sp>
-      <p:sp>
-        <p:nvSpPr>
-          <p:cNvPr id="43" name="TextBox 42"/>
-          <p:cNvSpPr txBox="1"/>
-          <p:nvPr/>
-        </p:nvSpPr>
-        <p:spPr>
-          <a:xfrm>
-            <a:off x="2971800" y="5431536"/>
-            <a:ext cx="1097280" cy="292608"/>
-          </a:xfrm>
-          <a:prstGeom prst="rect">
-            <a:avLst/>
-          </a:prstGeom>
-          <a:noFill/>
-        </p:spPr>
-        <p:txBody>
-          <a:bodyPr wrap="none">
-            <a:spAutoFit/>
-          </a:bodyPr>
-          <a:lstStyle/>
-          <a:p>
-            <a:pPr>
-              <a:defRPr sz="850">
-                <a:solidFill>
-                  <a:srgbClr val="222D3D"/>
-                </a:solidFill>
-              </a:defRPr>
-            </a:pPr>
-            <a:r>
-              <a:t>100,058</a:t>
-            </a:r>
-          </a:p>
-        </p:txBody>
-      </p:sp>
-      <p:sp>
-        <p:nvSpPr>
-          <p:cNvPr id="44" name="Rectangle 43"/>
-          <p:cNvSpPr/>
-          <p:nvPr/>
-        </p:nvSpPr>
-        <p:spPr>
-          <a:xfrm>
-            <a:off x="4114800" y="5367527"/>
-            <a:ext cx="1463040" cy="347472"/>
-          </a:xfrm>
-          <a:prstGeom prst="rect">
-            <a:avLst/>
-          </a:prstGeom>
-          <a:solidFill>
-            <a:srgbClr val="FFFFFF"/>
-          </a:solidFill>
-          <a:ln>
-            <a:solidFill>
-              <a:srgbClr val="D2DDEB"/>
-            </a:solidFill>
-          </a:ln>
-        </p:spPr>
-        <p:style>
-          <a:lnRef idx="1">
-            <a:schemeClr val="accent1"/>
-          </a:lnRef>
-          <a:fillRef idx="3">
-            <a:schemeClr val="accent1"/>
-          </a:fillRef>
-          <a:effectRef idx="2">
-            <a:schemeClr val="accent1"/>
-          </a:effectRef>
-          <a:fontRef idx="minor">
-            <a:schemeClr val="lt1"/>
-          </a:fontRef>
-        </p:style>
-        <p:txBody>
-          <a:bodyPr rtlCol="0" anchor="ctr"/>
-          <a:lstStyle/>
-          <a:p>
-            <a:pPr algn="ctr"/>
-          </a:p>
-        </p:txBody>
-      </p:sp>
-      <p:sp>
-        <p:nvSpPr>
-          <p:cNvPr id="45" name="TextBox 44"/>
-          <p:cNvSpPr txBox="1"/>
-          <p:nvPr/>
-        </p:nvSpPr>
-        <p:spPr>
-          <a:xfrm>
-            <a:off x="4160520" y="5431536"/>
-            <a:ext cx="1371600" cy="292608"/>
-          </a:xfrm>
-          <a:prstGeom prst="rect">
-            <a:avLst/>
-          </a:prstGeom>
-          <a:noFill/>
-        </p:spPr>
-        <p:txBody>
-          <a:bodyPr wrap="none">
-            <a:spAutoFit/>
-          </a:bodyPr>
-          <a:lstStyle/>
-          <a:p>
-            <a:pPr>
-              <a:defRPr sz="850">
-                <a:solidFill>
-                  <a:srgbClr val="222D3D"/>
-                </a:solidFill>
-              </a:defRPr>
-            </a:pPr>
-            <a:r>
-              <a:t>$4,104,417</a:t>
-            </a:r>
-          </a:p>
-        </p:txBody>
-      </p:sp>
-      <p:sp>
-        <p:nvSpPr>
-          <p:cNvPr id="46" name="Rectangle 45"/>
-          <p:cNvSpPr/>
-          <p:nvPr/>
-        </p:nvSpPr>
-        <p:spPr>
-          <a:xfrm>
-            <a:off x="914400" y="5715000"/>
-            <a:ext cx="2011680" cy="347472"/>
-          </a:xfrm>
-          <a:prstGeom prst="rect">
-            <a:avLst/>
-          </a:prstGeom>
-          <a:solidFill>
-            <a:srgbClr val="FFFFFF"/>
-          </a:solidFill>
-          <a:ln>
-            <a:solidFill>
-              <a:srgbClr val="D2DDEB"/>
-            </a:solidFill>
-          </a:ln>
-        </p:spPr>
-        <p:style>
-          <a:lnRef idx="1">
-            <a:schemeClr val="accent1"/>
-          </a:lnRef>
-          <a:fillRef idx="3">
-            <a:schemeClr val="accent1"/>
-          </a:fillRef>
-          <a:effectRef idx="2">
-            <a:schemeClr val="accent1"/>
-          </a:effectRef>
-          <a:fontRef idx="minor">
-            <a:schemeClr val="lt1"/>
-          </a:fontRef>
-        </p:style>
-        <p:txBody>
-          <a:bodyPr rtlCol="0" anchor="ctr"/>
-          <a:lstStyle/>
-          <a:p>
-            <a:pPr algn="ctr"/>
-          </a:p>
-        </p:txBody>
-      </p:sp>
-      <p:sp>
-        <p:nvSpPr>
-          <p:cNvPr id="47" name="TextBox 46"/>
-          <p:cNvSpPr txBox="1"/>
-          <p:nvPr/>
-        </p:nvSpPr>
-        <p:spPr>
-          <a:xfrm>
-            <a:off x="960120" y="5779008"/>
-            <a:ext cx="1920240" cy="292608"/>
-          </a:xfrm>
-          <a:prstGeom prst="rect">
-            <a:avLst/>
-          </a:prstGeom>
-          <a:noFill/>
-        </p:spPr>
-        <p:txBody>
-          <a:bodyPr wrap="none">
-            <a:spAutoFit/>
-          </a:bodyPr>
-          <a:lstStyle/>
-          <a:p>
-            <a:pPr>
-              <a:defRPr sz="850">
-                <a:solidFill>
-                  <a:srgbClr val="222D3D"/>
-                </a:solidFill>
-              </a:defRPr>
-            </a:pPr>
-            <a:r>
-              <a:t>Canada</a:t>
-            </a:r>
-          </a:p>
-        </p:txBody>
-      </p:sp>
-      <p:sp>
-        <p:nvSpPr>
-          <p:cNvPr id="48" name="Rectangle 47"/>
-          <p:cNvSpPr/>
-          <p:nvPr/>
-        </p:nvSpPr>
-        <p:spPr>
-          <a:xfrm>
-            <a:off x="2926080" y="5715000"/>
-            <a:ext cx="1188720" cy="347472"/>
-          </a:xfrm>
-          <a:prstGeom prst="rect">
-            <a:avLst/>
-          </a:prstGeom>
-          <a:solidFill>
-            <a:srgbClr val="FFFFFF"/>
-          </a:solidFill>
-          <a:ln>
-            <a:solidFill>
-              <a:srgbClr val="D2DDEB"/>
-            </a:solidFill>
-          </a:ln>
-        </p:spPr>
-        <p:style>
-          <a:lnRef idx="1">
-            <a:schemeClr val="accent1"/>
-          </a:lnRef>
-          <a:fillRef idx="3">
-            <a:schemeClr val="accent1"/>
-          </a:fillRef>
-          <a:effectRef idx="2">
-            <a:schemeClr val="accent1"/>
-          </a:effectRef>
-          <a:fontRef idx="minor">
-            <a:schemeClr val="lt1"/>
-          </a:fontRef>
-        </p:style>
-        <p:txBody>
-          <a:bodyPr rtlCol="0" anchor="ctr"/>
-          <a:lstStyle/>
-          <a:p>
-            <a:pPr algn="ctr"/>
-          </a:p>
-        </p:txBody>
-      </p:sp>
-      <p:sp>
-        <p:nvSpPr>
-          <p:cNvPr id="49" name="TextBox 48"/>
-          <p:cNvSpPr txBox="1"/>
-          <p:nvPr/>
-        </p:nvSpPr>
-        <p:spPr>
-          <a:xfrm>
-            <a:off x="2971800" y="5779008"/>
-            <a:ext cx="1097280" cy="292608"/>
-          </a:xfrm>
-          <a:prstGeom prst="rect">
-            <a:avLst/>
-          </a:prstGeom>
-          <a:noFill/>
-        </p:spPr>
-        <p:txBody>
-          <a:bodyPr wrap="none">
-            <a:spAutoFit/>
-          </a:bodyPr>
-          <a:lstStyle/>
-          <a:p>
-            <a:pPr>
-              <a:defRPr sz="850">
-                <a:solidFill>
-                  <a:srgbClr val="222D3D"/>
-                </a:solidFill>
-              </a:defRPr>
-            </a:pPr>
-            <a:r>
-              <a:t>99,976</a:t>
-            </a:r>
-          </a:p>
-        </p:txBody>
-      </p:sp>
-      <p:sp>
-        <p:nvSpPr>
-          <p:cNvPr id="50" name="Rectangle 49"/>
-          <p:cNvSpPr/>
-          <p:nvPr/>
-        </p:nvSpPr>
-        <p:spPr>
-          <a:xfrm>
-            <a:off x="4114800" y="5715000"/>
-            <a:ext cx="1463040" cy="347472"/>
-          </a:xfrm>
-          <a:prstGeom prst="rect">
-            <a:avLst/>
-          </a:prstGeom>
-          <a:solidFill>
-            <a:srgbClr val="FFFFFF"/>
-          </a:solidFill>
-          <a:ln>
-            <a:solidFill>
-              <a:srgbClr val="D2DDEB"/>
-            </a:solidFill>
-          </a:ln>
-        </p:spPr>
-        <p:style>
-          <a:lnRef idx="1">
-            <a:schemeClr val="accent1"/>
-          </a:lnRef>
-          <a:fillRef idx="3">
-            <a:schemeClr val="accent1"/>
-          </a:fillRef>
-          <a:effectRef idx="2">
-            <a:schemeClr val="accent1"/>
-          </a:effectRef>
-          <a:fontRef idx="minor">
-            <a:schemeClr val="lt1"/>
-          </a:fontRef>
-        </p:style>
-        <p:txBody>
-          <a:bodyPr rtlCol="0" anchor="ctr"/>
-          <a:lstStyle/>
-          <a:p>
-            <a:pPr algn="ctr"/>
-          </a:p>
-        </p:txBody>
-      </p:sp>
-      <p:sp>
-        <p:nvSpPr>
-          <p:cNvPr id="51" name="TextBox 50"/>
-          <p:cNvSpPr txBox="1"/>
-          <p:nvPr/>
-        </p:nvSpPr>
-        <p:spPr>
-          <a:xfrm>
-            <a:off x="4160520" y="5779008"/>
-            <a:ext cx="1371600" cy="292608"/>
-          </a:xfrm>
-          <a:prstGeom prst="rect">
-            <a:avLst/>
-          </a:prstGeom>
-          <a:noFill/>
-        </p:spPr>
-        <p:txBody>
-          <a:bodyPr wrap="none">
-            <a:spAutoFit/>
-          </a:bodyPr>
-          <a:lstStyle/>
-          <a:p>
-            <a:pPr>
-              <a:defRPr sz="850">
-                <a:solidFill>
-                  <a:srgbClr val="222D3D"/>
-                </a:solidFill>
-              </a:defRPr>
-            </a:pPr>
-            <a:r>
-              <a:t>$4,094,552</a:t>
-            </a:r>
-          </a:p>
-        </p:txBody>
-      </p:sp>
-      <p:sp>
-        <p:nvSpPr>
-          <p:cNvPr id="52" name="TextBox 51"/>
-          <p:cNvSpPr txBox="1"/>
-          <p:nvPr/>
-        </p:nvSpPr>
-        <p:spPr>
-          <a:xfrm>
-            <a:off x="914400" y="5989320"/>
+              <a:t>Country decline threshold: &gt;= 5.2%</a:t>
+            </a:r>
+          </a:p>
+        </p:txBody>
+      </p:sp>
+      <p:sp>
+        <p:nvSpPr>
+          <p:cNvPr id="28" name="TextBox 27"/>
+          <p:cNvSpPr txBox="1"/>
+          <p:nvPr/>
+        </p:nvSpPr>
+        <p:spPr>
+          <a:xfrm>
+            <a:off x="868680" y="5897880"/>
             <a:ext cx="7315200" cy="256032"/>
           </a:xfrm>
           <a:prstGeom prst="rect">
@@ -17382,7 +15800,7 @@
                 </a:solidFill>
                 <a:hlinkClick r:id="rId2"/>
               </a:rPr>
-              <a:t>Open Payments World Map</a:t>
+              <a:t>Open Anomaly Detection Dashboard</a:t>
             </a:r>
           </a:p>
         </p:txBody>
@@ -17486,7 +15904,7 @@
               </a:defRPr>
             </a:pPr>
             <a:r>
-              <a:t>Elasticsearch capabilities demonstrated</a:t>
+              <a:t>Payments World Map</a:t>
             </a:r>
           </a:p>
         </p:txBody>
@@ -17521,7 +15939,7 @@
               </a:defRPr>
             </a:pPr>
             <a:r>
-              <a:t>Search, analytics, runtime fields, schema management and lifecycle awareness</a:t>
+              <a:t>Geographic distribution of payment count and total amount</a:t>
             </a:r>
           </a:p>
         </p:txBody>
@@ -17604,8 +16022,8 @@
         </p:nvSpPr>
         <p:spPr>
           <a:xfrm>
-            <a:off x="685800" y="1143000"/>
-            <a:ext cx="5120640" cy="1005840"/>
+            <a:off x="731520" y="1143000"/>
+            <a:ext cx="5074920" cy="2011680"/>
           </a:xfrm>
           <a:prstGeom prst="roundRect">
             <a:avLst/>
@@ -17649,8 +16067,8 @@
         </p:nvSpPr>
         <p:spPr>
           <a:xfrm>
-            <a:off x="685800" y="1143000"/>
-            <a:ext cx="73152" cy="1005840"/>
+            <a:off x="731520" y="1143000"/>
+            <a:ext cx="73152" cy="2011680"/>
           </a:xfrm>
           <a:prstGeom prst="rect">
             <a:avLst/>
@@ -17692,8 +16110,8 @@
         </p:nvSpPr>
         <p:spPr>
           <a:xfrm>
-            <a:off x="886968" y="1280160"/>
-            <a:ext cx="4800600" cy="274320"/>
+            <a:off x="932688" y="1280160"/>
+            <a:ext cx="4754880" cy="274320"/>
           </a:xfrm>
           <a:prstGeom prst="rect">
             <a:avLst/>
@@ -17714,7 +16132,7 @@
               </a:defRPr>
             </a:pPr>
             <a:r>
-              <a:t>Aggregations</a:t>
+              <a:t>Map 1: Number of payments</a:t>
             </a:r>
           </a:p>
         </p:txBody>
@@ -17727,8 +16145,8 @@
         </p:nvSpPr>
         <p:spPr>
           <a:xfrm>
-            <a:off x="886968" y="1600200"/>
-            <a:ext cx="4800600" cy="320040"/>
+            <a:off x="932688" y="1600200"/>
+            <a:ext cx="4754880" cy="1325880"/>
           </a:xfrm>
           <a:prstGeom prst="rect">
             <a:avLst/>
@@ -17752,7 +16170,37 @@
               </a:defRPr>
             </a:pPr>
             <a:r>
-              <a:t>Revenue by merchant, approval rate by country, avg/P95 processing time</a:t>
+              <a:t>Country-level region map</a:t>
+            </a:r>
+          </a:p>
+          <a:p>
+            <a:pPr>
+              <a:spcAft>
+                <a:spcPts val="300"/>
+              </a:spcAft>
+              <a:defRPr sz="950">
+                <a:solidFill>
+                  <a:srgbClr val="222D3D"/>
+                </a:solidFill>
+              </a:defRPr>
+            </a:pPr>
+            <a:r>
+              <a:t>Metric: payments = COUNT(*)</a:t>
+            </a:r>
+          </a:p>
+          <a:p>
+            <a:pPr>
+              <a:spcAft>
+                <a:spcPts val="300"/>
+              </a:spcAft>
+              <a:defRPr sz="950">
+                <a:solidFill>
+                  <a:srgbClr val="222D3D"/>
+                </a:solidFill>
+              </a:defRPr>
+            </a:pPr>
+            <a:r>
+              <a:t>Uses ISO country codes internally for map matching</a:t>
             </a:r>
           </a:p>
         </p:txBody>
@@ -17766,7 +16214,7 @@
         <p:spPr>
           <a:xfrm>
             <a:off x="6355080" y="1143000"/>
-            <a:ext cx="5120640" cy="1005840"/>
+            <a:ext cx="5074920" cy="2011680"/>
           </a:xfrm>
           <a:prstGeom prst="roundRect">
             <a:avLst/>
@@ -17811,13 +16259,13 @@
         <p:spPr>
           <a:xfrm>
             <a:off x="6355080" y="1143000"/>
-            <a:ext cx="73152" cy="1005840"/>
+            <a:ext cx="73152" cy="2011680"/>
           </a:xfrm>
           <a:prstGeom prst="rect">
             <a:avLst/>
           </a:prstGeom>
           <a:solidFill>
-            <a:srgbClr val="00959C"/>
+            <a:srgbClr val="44AA5C"/>
           </a:solidFill>
           <a:ln>
             <a:noFill/>
@@ -17854,7 +16302,7 @@
         <p:spPr>
           <a:xfrm>
             <a:off x="6556248" y="1280160"/>
-            <a:ext cx="4800600" cy="274320"/>
+            <a:ext cx="4754880" cy="274320"/>
           </a:xfrm>
           <a:prstGeom prst="rect">
             <a:avLst/>
@@ -17875,7 +16323,7 @@
               </a:defRPr>
             </a:pPr>
             <a:r>
-              <a:t>Full-text search</a:t>
+              <a:t>Map 2: Total payment amount</a:t>
             </a:r>
           </a:p>
         </p:txBody>
@@ -17889,7 +16337,7 @@
         <p:spPr>
           <a:xfrm>
             <a:off x="6556248" y="1600200"/>
-            <a:ext cx="4800600" cy="320040"/>
+            <a:ext cx="4754880" cy="1325880"/>
           </a:xfrm>
           <a:prstGeom prst="rect">
             <a:avLst/>
@@ -17913,23 +16361,328 @@
               </a:defRPr>
             </a:pPr>
             <a:r>
-              <a:t>Transaction ID, merchant/category and error_message timeout searches</a:t>
-            </a:r>
-          </a:p>
-        </p:txBody>
-      </p:sp>
-      <p:sp>
-        <p:nvSpPr>
-          <p:cNvPr id="15" name="Rounded Rectangle 14"/>
+              <a:t>Country-level region map</a:t>
+            </a:r>
+          </a:p>
+          <a:p>
+            <a:pPr>
+              <a:spcAft>
+                <a:spcPts val="300"/>
+              </a:spcAft>
+              <a:defRPr sz="950">
+                <a:solidFill>
+                  <a:srgbClr val="222D3D"/>
+                </a:solidFill>
+              </a:defRPr>
+            </a:pPr>
+            <a:r>
+              <a:t>Metric: total_amount = SUM(amount)</a:t>
+            </a:r>
+          </a:p>
+          <a:p>
+            <a:pPr>
+              <a:spcAft>
+                <a:spcPts val="300"/>
+              </a:spcAft>
+              <a:defRPr sz="950">
+                <a:solidFill>
+                  <a:srgbClr val="222D3D"/>
+                </a:solidFill>
+              </a:defRPr>
+            </a:pPr>
+            <a:r>
+              <a:t>Supporting table shows full country names</a:t>
+            </a:r>
+          </a:p>
+        </p:txBody>
+      </p:sp>
+      <p:sp>
+        <p:nvSpPr>
+          <p:cNvPr id="15" name="TextBox 14"/>
+          <p:cNvSpPr txBox="1"/>
+          <p:nvPr/>
+        </p:nvSpPr>
+        <p:spPr>
+          <a:xfrm>
+            <a:off x="914400" y="3630168"/>
+            <a:ext cx="4663440" cy="274320"/>
+          </a:xfrm>
+          <a:prstGeom prst="rect">
+            <a:avLst/>
+          </a:prstGeom>
+          <a:noFill/>
+        </p:spPr>
+        <p:txBody>
+          <a:bodyPr wrap="none">
+            <a:spAutoFit/>
+          </a:bodyPr>
+          <a:lstStyle/>
+          <a:p>
+            <a:pPr>
+              <a:defRPr b="1" sz="1200">
+                <a:solidFill>
+                  <a:srgbClr val="142440"/>
+                </a:solidFill>
+              </a:defRPr>
+            </a:pPr>
+            <a:r>
+              <a:t>Top countries displayed with full names</a:t>
+            </a:r>
+          </a:p>
+        </p:txBody>
+      </p:sp>
+      <p:sp>
+        <p:nvSpPr>
+          <p:cNvPr id="16" name="Rectangle 15"/>
           <p:cNvSpPr/>
           <p:nvPr/>
         </p:nvSpPr>
         <p:spPr>
           <a:xfrm>
-            <a:off x="685800" y="2514600"/>
-            <a:ext cx="5120640" cy="1005840"/>
-          </a:xfrm>
-          <a:prstGeom prst="roundRect">
+            <a:off x="914400" y="3977639"/>
+            <a:ext cx="2011680" cy="347472"/>
+          </a:xfrm>
+          <a:prstGeom prst="rect">
+            <a:avLst/>
+          </a:prstGeom>
+          <a:solidFill>
+            <a:srgbClr val="142440"/>
+          </a:solidFill>
+          <a:ln>
+            <a:solidFill>
+              <a:srgbClr val="FFFFFF"/>
+            </a:solidFill>
+          </a:ln>
+        </p:spPr>
+        <p:style>
+          <a:lnRef idx="1">
+            <a:schemeClr val="accent1"/>
+          </a:lnRef>
+          <a:fillRef idx="3">
+            <a:schemeClr val="accent1"/>
+          </a:fillRef>
+          <a:effectRef idx="2">
+            <a:schemeClr val="accent1"/>
+          </a:effectRef>
+          <a:fontRef idx="minor">
+            <a:schemeClr val="lt1"/>
+          </a:fontRef>
+        </p:style>
+        <p:txBody>
+          <a:bodyPr rtlCol="0" anchor="ctr"/>
+          <a:lstStyle/>
+          <a:p>
+            <a:pPr algn="ctr"/>
+          </a:p>
+        </p:txBody>
+      </p:sp>
+      <p:sp>
+        <p:nvSpPr>
+          <p:cNvPr id="17" name="TextBox 16"/>
+          <p:cNvSpPr txBox="1"/>
+          <p:nvPr/>
+        </p:nvSpPr>
+        <p:spPr>
+          <a:xfrm>
+            <a:off x="960120" y="4041648"/>
+            <a:ext cx="1920240" cy="292608"/>
+          </a:xfrm>
+          <a:prstGeom prst="rect">
+            <a:avLst/>
+          </a:prstGeom>
+          <a:noFill/>
+        </p:spPr>
+        <p:txBody>
+          <a:bodyPr wrap="none">
+            <a:spAutoFit/>
+          </a:bodyPr>
+          <a:lstStyle/>
+          <a:p>
+            <a:pPr>
+              <a:defRPr sz="850" b="1">
+                <a:solidFill>
+                  <a:srgbClr val="FFFFFF"/>
+                </a:solidFill>
+              </a:defRPr>
+            </a:pPr>
+            <a:r>
+              <a:t>Country</a:t>
+            </a:r>
+          </a:p>
+        </p:txBody>
+      </p:sp>
+      <p:sp>
+        <p:nvSpPr>
+          <p:cNvPr id="18" name="Rectangle 17"/>
+          <p:cNvSpPr/>
+          <p:nvPr/>
+        </p:nvSpPr>
+        <p:spPr>
+          <a:xfrm>
+            <a:off x="2926080" y="3977639"/>
+            <a:ext cx="1188720" cy="347472"/>
+          </a:xfrm>
+          <a:prstGeom prst="rect">
+            <a:avLst/>
+          </a:prstGeom>
+          <a:solidFill>
+            <a:srgbClr val="142440"/>
+          </a:solidFill>
+          <a:ln>
+            <a:solidFill>
+              <a:srgbClr val="FFFFFF"/>
+            </a:solidFill>
+          </a:ln>
+        </p:spPr>
+        <p:style>
+          <a:lnRef idx="1">
+            <a:schemeClr val="accent1"/>
+          </a:lnRef>
+          <a:fillRef idx="3">
+            <a:schemeClr val="accent1"/>
+          </a:fillRef>
+          <a:effectRef idx="2">
+            <a:schemeClr val="accent1"/>
+          </a:effectRef>
+          <a:fontRef idx="minor">
+            <a:schemeClr val="lt1"/>
+          </a:fontRef>
+        </p:style>
+        <p:txBody>
+          <a:bodyPr rtlCol="0" anchor="ctr"/>
+          <a:lstStyle/>
+          <a:p>
+            <a:pPr algn="ctr"/>
+          </a:p>
+        </p:txBody>
+      </p:sp>
+      <p:sp>
+        <p:nvSpPr>
+          <p:cNvPr id="19" name="TextBox 18"/>
+          <p:cNvSpPr txBox="1"/>
+          <p:nvPr/>
+        </p:nvSpPr>
+        <p:spPr>
+          <a:xfrm>
+            <a:off x="2971800" y="4041648"/>
+            <a:ext cx="1097280" cy="292608"/>
+          </a:xfrm>
+          <a:prstGeom prst="rect">
+            <a:avLst/>
+          </a:prstGeom>
+          <a:noFill/>
+        </p:spPr>
+        <p:txBody>
+          <a:bodyPr wrap="none">
+            <a:spAutoFit/>
+          </a:bodyPr>
+          <a:lstStyle/>
+          <a:p>
+            <a:pPr>
+              <a:defRPr sz="850" b="1">
+                <a:solidFill>
+                  <a:srgbClr val="FFFFFF"/>
+                </a:solidFill>
+              </a:defRPr>
+            </a:pPr>
+            <a:r>
+              <a:t>Payments</a:t>
+            </a:r>
+          </a:p>
+        </p:txBody>
+      </p:sp>
+      <p:sp>
+        <p:nvSpPr>
+          <p:cNvPr id="20" name="Rectangle 19"/>
+          <p:cNvSpPr/>
+          <p:nvPr/>
+        </p:nvSpPr>
+        <p:spPr>
+          <a:xfrm>
+            <a:off x="4114800" y="3977639"/>
+            <a:ext cx="1463040" cy="347472"/>
+          </a:xfrm>
+          <a:prstGeom prst="rect">
+            <a:avLst/>
+          </a:prstGeom>
+          <a:solidFill>
+            <a:srgbClr val="142440"/>
+          </a:solidFill>
+          <a:ln>
+            <a:solidFill>
+              <a:srgbClr val="FFFFFF"/>
+            </a:solidFill>
+          </a:ln>
+        </p:spPr>
+        <p:style>
+          <a:lnRef idx="1">
+            <a:schemeClr val="accent1"/>
+          </a:lnRef>
+          <a:fillRef idx="3">
+            <a:schemeClr val="accent1"/>
+          </a:fillRef>
+          <a:effectRef idx="2">
+            <a:schemeClr val="accent1"/>
+          </a:effectRef>
+          <a:fontRef idx="minor">
+            <a:schemeClr val="lt1"/>
+          </a:fontRef>
+        </p:style>
+        <p:txBody>
+          <a:bodyPr rtlCol="0" anchor="ctr"/>
+          <a:lstStyle/>
+          <a:p>
+            <a:pPr algn="ctr"/>
+          </a:p>
+        </p:txBody>
+      </p:sp>
+      <p:sp>
+        <p:nvSpPr>
+          <p:cNvPr id="21" name="TextBox 20"/>
+          <p:cNvSpPr txBox="1"/>
+          <p:nvPr/>
+        </p:nvSpPr>
+        <p:spPr>
+          <a:xfrm>
+            <a:off x="4160520" y="4041648"/>
+            <a:ext cx="1371600" cy="292608"/>
+          </a:xfrm>
+          <a:prstGeom prst="rect">
+            <a:avLst/>
+          </a:prstGeom>
+          <a:noFill/>
+        </p:spPr>
+        <p:txBody>
+          <a:bodyPr wrap="none">
+            <a:spAutoFit/>
+          </a:bodyPr>
+          <a:lstStyle/>
+          <a:p>
+            <a:pPr>
+              <a:defRPr sz="850" b="1">
+                <a:solidFill>
+                  <a:srgbClr val="FFFFFF"/>
+                </a:solidFill>
+              </a:defRPr>
+            </a:pPr>
+            <a:r>
+              <a:t>Amount</a:t>
+            </a:r>
+          </a:p>
+        </p:txBody>
+      </p:sp>
+      <p:sp>
+        <p:nvSpPr>
+          <p:cNvPr id="22" name="Rectangle 21"/>
+          <p:cNvSpPr/>
+          <p:nvPr/>
+        </p:nvSpPr>
+        <p:spPr>
+          <a:xfrm>
+            <a:off x="914400" y="4325112"/>
+            <a:ext cx="2011680" cy="347472"/>
+          </a:xfrm>
+          <a:prstGeom prst="rect">
             <a:avLst/>
           </a:prstGeom>
           <a:solidFill>
@@ -17965,132 +16718,51 @@
       </p:sp>
       <p:sp>
         <p:nvSpPr>
-          <p:cNvPr id="16" name="Rectangle 15"/>
+          <p:cNvPr id="23" name="TextBox 22"/>
+          <p:cNvSpPr txBox="1"/>
+          <p:nvPr/>
+        </p:nvSpPr>
+        <p:spPr>
+          <a:xfrm>
+            <a:off x="960120" y="4389120"/>
+            <a:ext cx="1920240" cy="292608"/>
+          </a:xfrm>
+          <a:prstGeom prst="rect">
+            <a:avLst/>
+          </a:prstGeom>
+          <a:noFill/>
+        </p:spPr>
+        <p:txBody>
+          <a:bodyPr wrap="none">
+            <a:spAutoFit/>
+          </a:bodyPr>
+          <a:lstStyle/>
+          <a:p>
+            <a:pPr>
+              <a:defRPr sz="850">
+                <a:solidFill>
+                  <a:srgbClr val="222D3D"/>
+                </a:solidFill>
+              </a:defRPr>
+            </a:pPr>
+            <a:r>
+              <a:t>Singapore</a:t>
+            </a:r>
+          </a:p>
+        </p:txBody>
+      </p:sp>
+      <p:sp>
+        <p:nvSpPr>
+          <p:cNvPr id="24" name="Rectangle 23"/>
           <p:cNvSpPr/>
           <p:nvPr/>
         </p:nvSpPr>
         <p:spPr>
           <a:xfrm>
-            <a:off x="685800" y="2514600"/>
-            <a:ext cx="73152" cy="1005840"/>
-          </a:xfrm>
-          <a:prstGeom prst="rect">
-            <a:avLst/>
-          </a:prstGeom>
-          <a:solidFill>
-            <a:srgbClr val="7058BE"/>
-          </a:solidFill>
-          <a:ln>
-            <a:noFill/>
-          </a:ln>
-        </p:spPr>
-        <p:style>
-          <a:lnRef idx="1">
-            <a:schemeClr val="accent1"/>
-          </a:lnRef>
-          <a:fillRef idx="3">
-            <a:schemeClr val="accent1"/>
-          </a:fillRef>
-          <a:effectRef idx="2">
-            <a:schemeClr val="accent1"/>
-          </a:effectRef>
-          <a:fontRef idx="minor">
-            <a:schemeClr val="lt1"/>
-          </a:fontRef>
-        </p:style>
-        <p:txBody>
-          <a:bodyPr rtlCol="0" anchor="ctr"/>
-          <a:lstStyle/>
-          <a:p>
-            <a:pPr algn="ctr"/>
-          </a:p>
-        </p:txBody>
-      </p:sp>
-      <p:sp>
-        <p:nvSpPr>
-          <p:cNvPr id="17" name="TextBox 16"/>
-          <p:cNvSpPr txBox="1"/>
-          <p:nvPr/>
-        </p:nvSpPr>
-        <p:spPr>
-          <a:xfrm>
-            <a:off x="886968" y="2651760"/>
-            <a:ext cx="4800600" cy="274320"/>
-          </a:xfrm>
-          <a:prstGeom prst="rect">
-            <a:avLst/>
-          </a:prstGeom>
-          <a:noFill/>
-        </p:spPr>
-        <p:txBody>
-          <a:bodyPr wrap="none">
-            <a:spAutoFit/>
-          </a:bodyPr>
-          <a:lstStyle/>
-          <a:p>
-            <a:pPr>
-              <a:defRPr sz="1000" b="1">
-                <a:solidFill>
-                  <a:srgbClr val="667487"/>
-                </a:solidFill>
-              </a:defRPr>
-            </a:pPr>
-            <a:r>
-              <a:t>Runtime fields</a:t>
-            </a:r>
-          </a:p>
-        </p:txBody>
-      </p:sp>
-      <p:sp>
-        <p:nvSpPr>
-          <p:cNvPr id="18" name="TextBox 17"/>
-          <p:cNvSpPr txBox="1"/>
-          <p:nvPr/>
-        </p:nvSpPr>
-        <p:spPr>
-          <a:xfrm>
-            <a:off x="886968" y="2971800"/>
-            <a:ext cx="4800600" cy="320040"/>
-          </a:xfrm>
-          <a:prstGeom prst="rect">
-            <a:avLst/>
-          </a:prstGeom>
-          <a:noFill/>
-        </p:spPr>
-        <p:txBody>
-          <a:bodyPr wrap="square">
-            <a:normAutofit/>
-          </a:bodyPr>
-          <a:lstStyle/>
-          <a:p>
-            <a:pPr>
-              <a:spcAft>
-                <a:spcPts val="300"/>
-              </a:spcAft>
-              <a:defRPr sz="950">
-                <a:solidFill>
-                  <a:srgbClr val="222D3D"/>
-                </a:solidFill>
-              </a:defRPr>
-            </a:pPr>
-            <a:r>
-              <a:t>Live calculations for approval status, revenue, amount bands, country names</a:t>
-            </a:r>
-          </a:p>
-        </p:txBody>
-      </p:sp>
-      <p:sp>
-        <p:nvSpPr>
-          <p:cNvPr id="19" name="Rounded Rectangle 18"/>
-          <p:cNvSpPr/>
-          <p:nvPr/>
-        </p:nvSpPr>
-        <p:spPr>
-          <a:xfrm>
-            <a:off x="6355080" y="2514600"/>
-            <a:ext cx="5120640" cy="1005840"/>
-          </a:xfrm>
-          <a:prstGeom prst="roundRect">
+            <a:off x="2926080" y="4325112"/>
+            <a:ext cx="1188720" cy="347472"/>
+          </a:xfrm>
+          <a:prstGeom prst="rect">
             <a:avLst/>
           </a:prstGeom>
           <a:solidFill>
@@ -18126,132 +16798,51 @@
       </p:sp>
       <p:sp>
         <p:nvSpPr>
-          <p:cNvPr id="20" name="Rectangle 19"/>
+          <p:cNvPr id="25" name="TextBox 24"/>
+          <p:cNvSpPr txBox="1"/>
+          <p:nvPr/>
+        </p:nvSpPr>
+        <p:spPr>
+          <a:xfrm>
+            <a:off x="2971800" y="4389120"/>
+            <a:ext cx="1097280" cy="292608"/>
+          </a:xfrm>
+          <a:prstGeom prst="rect">
+            <a:avLst/>
+          </a:prstGeom>
+          <a:noFill/>
+        </p:spPr>
+        <p:txBody>
+          <a:bodyPr wrap="none">
+            <a:spAutoFit/>
+          </a:bodyPr>
+          <a:lstStyle/>
+          <a:p>
+            <a:pPr>
+              <a:defRPr sz="850">
+                <a:solidFill>
+                  <a:srgbClr val="222D3D"/>
+                </a:solidFill>
+              </a:defRPr>
+            </a:pPr>
+            <a:r>
+              <a:t>100,647</a:t>
+            </a:r>
+          </a:p>
+        </p:txBody>
+      </p:sp>
+      <p:sp>
+        <p:nvSpPr>
+          <p:cNvPr id="26" name="Rectangle 25"/>
           <p:cNvSpPr/>
           <p:nvPr/>
         </p:nvSpPr>
         <p:spPr>
           <a:xfrm>
-            <a:off x="6355080" y="2514600"/>
-            <a:ext cx="73152" cy="1005840"/>
-          </a:xfrm>
-          <a:prstGeom prst="rect">
-            <a:avLst/>
-          </a:prstGeom>
-          <a:solidFill>
-            <a:srgbClr val="EF8438"/>
-          </a:solidFill>
-          <a:ln>
-            <a:noFill/>
-          </a:ln>
-        </p:spPr>
-        <p:style>
-          <a:lnRef idx="1">
-            <a:schemeClr val="accent1"/>
-          </a:lnRef>
-          <a:fillRef idx="3">
-            <a:schemeClr val="accent1"/>
-          </a:fillRef>
-          <a:effectRef idx="2">
-            <a:schemeClr val="accent1"/>
-          </a:effectRef>
-          <a:fontRef idx="minor">
-            <a:schemeClr val="lt1"/>
-          </a:fontRef>
-        </p:style>
-        <p:txBody>
-          <a:bodyPr rtlCol="0" anchor="ctr"/>
-          <a:lstStyle/>
-          <a:p>
-            <a:pPr algn="ctr"/>
-          </a:p>
-        </p:txBody>
-      </p:sp>
-      <p:sp>
-        <p:nvSpPr>
-          <p:cNvPr id="21" name="TextBox 20"/>
-          <p:cNvSpPr txBox="1"/>
-          <p:nvPr/>
-        </p:nvSpPr>
-        <p:spPr>
-          <a:xfrm>
-            <a:off x="6556248" y="2651760"/>
-            <a:ext cx="4800600" cy="274320"/>
-          </a:xfrm>
-          <a:prstGeom prst="rect">
-            <a:avLst/>
-          </a:prstGeom>
-          <a:noFill/>
-        </p:spPr>
-        <p:txBody>
-          <a:bodyPr wrap="none">
-            <a:spAutoFit/>
-          </a:bodyPr>
-          <a:lstStyle/>
-          <a:p>
-            <a:pPr>
-              <a:defRPr sz="1000" b="1">
-                <a:solidFill>
-                  <a:srgbClr val="667487"/>
-                </a:solidFill>
-              </a:defRPr>
-            </a:pPr>
-            <a:r>
-              <a:t>Index templates</a:t>
-            </a:r>
-          </a:p>
-        </p:txBody>
-      </p:sp>
-      <p:sp>
-        <p:nvSpPr>
-          <p:cNvPr id="22" name="TextBox 21"/>
-          <p:cNvSpPr txBox="1"/>
-          <p:nvPr/>
-        </p:nvSpPr>
-        <p:spPr>
-          <a:xfrm>
-            <a:off x="6556248" y="2971800"/>
-            <a:ext cx="4800600" cy="320040"/>
-          </a:xfrm>
-          <a:prstGeom prst="rect">
-            <a:avLst/>
-          </a:prstGeom>
-          <a:noFill/>
-        </p:spPr>
-        <p:txBody>
-          <a:bodyPr wrap="square">
-            <a:normAutofit/>
-          </a:bodyPr>
-          <a:lstStyle/>
-          <a:p>
-            <a:pPr>
-              <a:spcAft>
-                <a:spcPts val="300"/>
-              </a:spcAft>
-              <a:defRPr sz="950">
-                <a:solidFill>
-                  <a:srgbClr val="222D3D"/>
-                </a:solidFill>
-              </a:defRPr>
-            </a:pPr>
-            <a:r>
-              <a:t>Reusable schema for future synthetic-transactions-* indices</a:t>
-            </a:r>
-          </a:p>
-        </p:txBody>
-      </p:sp>
-      <p:sp>
-        <p:nvSpPr>
-          <p:cNvPr id="23" name="Rounded Rectangle 22"/>
-          <p:cNvSpPr/>
-          <p:nvPr/>
-        </p:nvSpPr>
-        <p:spPr>
-          <a:xfrm>
-            <a:off x="685800" y="3886200"/>
-            <a:ext cx="5120640" cy="1005840"/>
-          </a:xfrm>
-          <a:prstGeom prst="roundRect">
+            <a:off x="4114800" y="4325112"/>
+            <a:ext cx="1463040" cy="347472"/>
+          </a:xfrm>
+          <a:prstGeom prst="rect">
             <a:avLst/>
           </a:prstGeom>
           <a:solidFill>
@@ -18287,23 +16878,60 @@
       </p:sp>
       <p:sp>
         <p:nvSpPr>
-          <p:cNvPr id="24" name="Rectangle 23"/>
+          <p:cNvPr id="27" name="TextBox 26"/>
+          <p:cNvSpPr txBox="1"/>
+          <p:nvPr/>
+        </p:nvSpPr>
+        <p:spPr>
+          <a:xfrm>
+            <a:off x="4160520" y="4389120"/>
+            <a:ext cx="1371600" cy="292608"/>
+          </a:xfrm>
+          <a:prstGeom prst="rect">
+            <a:avLst/>
+          </a:prstGeom>
+          <a:noFill/>
+        </p:spPr>
+        <p:txBody>
+          <a:bodyPr wrap="none">
+            <a:spAutoFit/>
+          </a:bodyPr>
+          <a:lstStyle/>
+          <a:p>
+            <a:pPr>
+              <a:defRPr sz="850">
+                <a:solidFill>
+                  <a:srgbClr val="222D3D"/>
+                </a:solidFill>
+              </a:defRPr>
+            </a:pPr>
+            <a:r>
+              <a:t>$4,098,473</a:t>
+            </a:r>
+          </a:p>
+        </p:txBody>
+      </p:sp>
+      <p:sp>
+        <p:nvSpPr>
+          <p:cNvPr id="28" name="Rectangle 27"/>
           <p:cNvSpPr/>
           <p:nvPr/>
         </p:nvSpPr>
         <p:spPr>
           <a:xfrm>
-            <a:off x="685800" y="3886200"/>
-            <a:ext cx="73152" cy="1005840"/>
+            <a:off x="914400" y="4672583"/>
+            <a:ext cx="2011680" cy="347472"/>
           </a:xfrm>
           <a:prstGeom prst="rect">
             <a:avLst/>
           </a:prstGeom>
           <a:solidFill>
-            <a:srgbClr val="44AA5C"/>
+            <a:srgbClr val="FFFFFF"/>
           </a:solidFill>
           <a:ln>
-            <a:noFill/>
+            <a:solidFill>
+              <a:srgbClr val="D2DDEB"/>
+            </a:solidFill>
           </a:ln>
         </p:spPr>
         <p:style>
@@ -18330,14 +16958,14 @@
       </p:sp>
       <p:sp>
         <p:nvSpPr>
-          <p:cNvPr id="25" name="TextBox 24"/>
-          <p:cNvSpPr txBox="1"/>
-          <p:nvPr/>
-        </p:nvSpPr>
-        <p:spPr>
-          <a:xfrm>
-            <a:off x="886968" y="4023360"/>
-            <a:ext cx="4800600" cy="274320"/>
+          <p:cNvPr id="29" name="TextBox 28"/>
+          <p:cNvSpPr txBox="1"/>
+          <p:nvPr/>
+        </p:nvSpPr>
+        <p:spPr>
+          <a:xfrm>
+            <a:off x="960120" y="4736592"/>
+            <a:ext cx="1920240" cy="292608"/>
           </a:xfrm>
           <a:prstGeom prst="rect">
             <a:avLst/>
@@ -18351,65 +16979,907 @@
           <a:lstStyle/>
           <a:p>
             <a:pPr>
-              <a:defRPr sz="1000" b="1">
-                <a:solidFill>
-                  <a:srgbClr val="667487"/>
-                </a:solidFill>
-              </a:defRPr>
-            </a:pPr>
-            <a:r>
-              <a:t>Lifecycle / ILM</a:t>
-            </a:r>
-          </a:p>
-        </p:txBody>
-      </p:sp>
-      <p:sp>
-        <p:nvSpPr>
-          <p:cNvPr id="26" name="TextBox 25"/>
-          <p:cNvSpPr txBox="1"/>
-          <p:nvPr/>
-        </p:nvSpPr>
-        <p:spPr>
-          <a:xfrm>
-            <a:off x="886968" y="4343400"/>
-            <a:ext cx="4800600" cy="320040"/>
-          </a:xfrm>
-          <a:prstGeom prst="rect">
-            <a:avLst/>
-          </a:prstGeom>
-          <a:noFill/>
-        </p:spPr>
-        <p:txBody>
-          <a:bodyPr wrap="square">
-            <a:normAutofit/>
-          </a:bodyPr>
-          <a:lstStyle/>
-          <a:p>
-            <a:pPr>
-              <a:spcAft>
-                <a:spcPts val="300"/>
-              </a:spcAft>
-              <a:defRPr sz="950">
+              <a:defRPr sz="850">
                 <a:solidFill>
                   <a:srgbClr val="222D3D"/>
                 </a:solidFill>
               </a:defRPr>
             </a:pPr>
             <a:r>
-              <a:t>Serverless note plus hot/warm/delete ILM concept for Stack deployments</a:t>
-            </a:r>
-          </a:p>
-        </p:txBody>
-      </p:sp>
-      <p:sp>
-        <p:nvSpPr>
-          <p:cNvPr id="27" name="TextBox 26"/>
-          <p:cNvSpPr txBox="1"/>
-          <p:nvPr/>
-        </p:nvSpPr>
-        <p:spPr>
-          <a:xfrm>
-            <a:off x="777240" y="5897880"/>
+              <a:t>Brazil</a:t>
+            </a:r>
+          </a:p>
+        </p:txBody>
+      </p:sp>
+      <p:sp>
+        <p:nvSpPr>
+          <p:cNvPr id="30" name="Rectangle 29"/>
+          <p:cNvSpPr/>
+          <p:nvPr/>
+        </p:nvSpPr>
+        <p:spPr>
+          <a:xfrm>
+            <a:off x="2926080" y="4672583"/>
+            <a:ext cx="1188720" cy="347472"/>
+          </a:xfrm>
+          <a:prstGeom prst="rect">
+            <a:avLst/>
+          </a:prstGeom>
+          <a:solidFill>
+            <a:srgbClr val="FFFFFF"/>
+          </a:solidFill>
+          <a:ln>
+            <a:solidFill>
+              <a:srgbClr val="D2DDEB"/>
+            </a:solidFill>
+          </a:ln>
+        </p:spPr>
+        <p:style>
+          <a:lnRef idx="1">
+            <a:schemeClr val="accent1"/>
+          </a:lnRef>
+          <a:fillRef idx="3">
+            <a:schemeClr val="accent1"/>
+          </a:fillRef>
+          <a:effectRef idx="2">
+            <a:schemeClr val="accent1"/>
+          </a:effectRef>
+          <a:fontRef idx="minor">
+            <a:schemeClr val="lt1"/>
+          </a:fontRef>
+        </p:style>
+        <p:txBody>
+          <a:bodyPr rtlCol="0" anchor="ctr"/>
+          <a:lstStyle/>
+          <a:p>
+            <a:pPr algn="ctr"/>
+          </a:p>
+        </p:txBody>
+      </p:sp>
+      <p:sp>
+        <p:nvSpPr>
+          <p:cNvPr id="31" name="TextBox 30"/>
+          <p:cNvSpPr txBox="1"/>
+          <p:nvPr/>
+        </p:nvSpPr>
+        <p:spPr>
+          <a:xfrm>
+            <a:off x="2971800" y="4736592"/>
+            <a:ext cx="1097280" cy="292608"/>
+          </a:xfrm>
+          <a:prstGeom prst="rect">
+            <a:avLst/>
+          </a:prstGeom>
+          <a:noFill/>
+        </p:spPr>
+        <p:txBody>
+          <a:bodyPr wrap="none">
+            <a:spAutoFit/>
+          </a:bodyPr>
+          <a:lstStyle/>
+          <a:p>
+            <a:pPr>
+              <a:defRPr sz="850">
+                <a:solidFill>
+                  <a:srgbClr val="222D3D"/>
+                </a:solidFill>
+              </a:defRPr>
+            </a:pPr>
+            <a:r>
+              <a:t>100,318</a:t>
+            </a:r>
+          </a:p>
+        </p:txBody>
+      </p:sp>
+      <p:sp>
+        <p:nvSpPr>
+          <p:cNvPr id="32" name="Rectangle 31"/>
+          <p:cNvSpPr/>
+          <p:nvPr/>
+        </p:nvSpPr>
+        <p:spPr>
+          <a:xfrm>
+            <a:off x="4114800" y="4672583"/>
+            <a:ext cx="1463040" cy="347472"/>
+          </a:xfrm>
+          <a:prstGeom prst="rect">
+            <a:avLst/>
+          </a:prstGeom>
+          <a:solidFill>
+            <a:srgbClr val="FFFFFF"/>
+          </a:solidFill>
+          <a:ln>
+            <a:solidFill>
+              <a:srgbClr val="D2DDEB"/>
+            </a:solidFill>
+          </a:ln>
+        </p:spPr>
+        <p:style>
+          <a:lnRef idx="1">
+            <a:schemeClr val="accent1"/>
+          </a:lnRef>
+          <a:fillRef idx="3">
+            <a:schemeClr val="accent1"/>
+          </a:fillRef>
+          <a:effectRef idx="2">
+            <a:schemeClr val="accent1"/>
+          </a:effectRef>
+          <a:fontRef idx="minor">
+            <a:schemeClr val="lt1"/>
+          </a:fontRef>
+        </p:style>
+        <p:txBody>
+          <a:bodyPr rtlCol="0" anchor="ctr"/>
+          <a:lstStyle/>
+          <a:p>
+            <a:pPr algn="ctr"/>
+          </a:p>
+        </p:txBody>
+      </p:sp>
+      <p:sp>
+        <p:nvSpPr>
+          <p:cNvPr id="33" name="TextBox 32"/>
+          <p:cNvSpPr txBox="1"/>
+          <p:nvPr/>
+        </p:nvSpPr>
+        <p:spPr>
+          <a:xfrm>
+            <a:off x="4160520" y="4736592"/>
+            <a:ext cx="1371600" cy="292608"/>
+          </a:xfrm>
+          <a:prstGeom prst="rect">
+            <a:avLst/>
+          </a:prstGeom>
+          <a:noFill/>
+        </p:spPr>
+        <p:txBody>
+          <a:bodyPr wrap="none">
+            <a:spAutoFit/>
+          </a:bodyPr>
+          <a:lstStyle/>
+          <a:p>
+            <a:pPr>
+              <a:defRPr sz="850">
+                <a:solidFill>
+                  <a:srgbClr val="222D3D"/>
+                </a:solidFill>
+              </a:defRPr>
+            </a:pPr>
+            <a:r>
+              <a:t>$4,096,100</a:t>
+            </a:r>
+          </a:p>
+        </p:txBody>
+      </p:sp>
+      <p:sp>
+        <p:nvSpPr>
+          <p:cNvPr id="34" name="Rectangle 33"/>
+          <p:cNvSpPr/>
+          <p:nvPr/>
+        </p:nvSpPr>
+        <p:spPr>
+          <a:xfrm>
+            <a:off x="914400" y="5020056"/>
+            <a:ext cx="2011680" cy="347472"/>
+          </a:xfrm>
+          <a:prstGeom prst="rect">
+            <a:avLst/>
+          </a:prstGeom>
+          <a:solidFill>
+            <a:srgbClr val="FFFFFF"/>
+          </a:solidFill>
+          <a:ln>
+            <a:solidFill>
+              <a:srgbClr val="D2DDEB"/>
+            </a:solidFill>
+          </a:ln>
+        </p:spPr>
+        <p:style>
+          <a:lnRef idx="1">
+            <a:schemeClr val="accent1"/>
+          </a:lnRef>
+          <a:fillRef idx="3">
+            <a:schemeClr val="accent1"/>
+          </a:fillRef>
+          <a:effectRef idx="2">
+            <a:schemeClr val="accent1"/>
+          </a:effectRef>
+          <a:fontRef idx="minor">
+            <a:schemeClr val="lt1"/>
+          </a:fontRef>
+        </p:style>
+        <p:txBody>
+          <a:bodyPr rtlCol="0" anchor="ctr"/>
+          <a:lstStyle/>
+          <a:p>
+            <a:pPr algn="ctr"/>
+          </a:p>
+        </p:txBody>
+      </p:sp>
+      <p:sp>
+        <p:nvSpPr>
+          <p:cNvPr id="35" name="TextBox 34"/>
+          <p:cNvSpPr txBox="1"/>
+          <p:nvPr/>
+        </p:nvSpPr>
+        <p:spPr>
+          <a:xfrm>
+            <a:off x="960120" y="5084064"/>
+            <a:ext cx="1920240" cy="292608"/>
+          </a:xfrm>
+          <a:prstGeom prst="rect">
+            <a:avLst/>
+          </a:prstGeom>
+          <a:noFill/>
+        </p:spPr>
+        <p:txBody>
+          <a:bodyPr wrap="none">
+            <a:spAutoFit/>
+          </a:bodyPr>
+          <a:lstStyle/>
+          <a:p>
+            <a:pPr>
+              <a:defRPr sz="850">
+                <a:solidFill>
+                  <a:srgbClr val="222D3D"/>
+                </a:solidFill>
+              </a:defRPr>
+            </a:pPr>
+            <a:r>
+              <a:t>United Kingdom</a:t>
+            </a:r>
+          </a:p>
+        </p:txBody>
+      </p:sp>
+      <p:sp>
+        <p:nvSpPr>
+          <p:cNvPr id="36" name="Rectangle 35"/>
+          <p:cNvSpPr/>
+          <p:nvPr/>
+        </p:nvSpPr>
+        <p:spPr>
+          <a:xfrm>
+            <a:off x="2926080" y="5020056"/>
+            <a:ext cx="1188720" cy="347472"/>
+          </a:xfrm>
+          <a:prstGeom prst="rect">
+            <a:avLst/>
+          </a:prstGeom>
+          <a:solidFill>
+            <a:srgbClr val="FFFFFF"/>
+          </a:solidFill>
+          <a:ln>
+            <a:solidFill>
+              <a:srgbClr val="D2DDEB"/>
+            </a:solidFill>
+          </a:ln>
+        </p:spPr>
+        <p:style>
+          <a:lnRef idx="1">
+            <a:schemeClr val="accent1"/>
+          </a:lnRef>
+          <a:fillRef idx="3">
+            <a:schemeClr val="accent1"/>
+          </a:fillRef>
+          <a:effectRef idx="2">
+            <a:schemeClr val="accent1"/>
+          </a:effectRef>
+          <a:fontRef idx="minor">
+            <a:schemeClr val="lt1"/>
+          </a:fontRef>
+        </p:style>
+        <p:txBody>
+          <a:bodyPr rtlCol="0" anchor="ctr"/>
+          <a:lstStyle/>
+          <a:p>
+            <a:pPr algn="ctr"/>
+          </a:p>
+        </p:txBody>
+      </p:sp>
+      <p:sp>
+        <p:nvSpPr>
+          <p:cNvPr id="37" name="TextBox 36"/>
+          <p:cNvSpPr txBox="1"/>
+          <p:nvPr/>
+        </p:nvSpPr>
+        <p:spPr>
+          <a:xfrm>
+            <a:off x="2971800" y="5084064"/>
+            <a:ext cx="1097280" cy="292608"/>
+          </a:xfrm>
+          <a:prstGeom prst="rect">
+            <a:avLst/>
+          </a:prstGeom>
+          <a:noFill/>
+        </p:spPr>
+        <p:txBody>
+          <a:bodyPr wrap="none">
+            <a:spAutoFit/>
+          </a:bodyPr>
+          <a:lstStyle/>
+          <a:p>
+            <a:pPr>
+              <a:defRPr sz="850">
+                <a:solidFill>
+                  <a:srgbClr val="222D3D"/>
+                </a:solidFill>
+              </a:defRPr>
+            </a:pPr>
+            <a:r>
+              <a:t>100,297</a:t>
+            </a:r>
+          </a:p>
+        </p:txBody>
+      </p:sp>
+      <p:sp>
+        <p:nvSpPr>
+          <p:cNvPr id="38" name="Rectangle 37"/>
+          <p:cNvSpPr/>
+          <p:nvPr/>
+        </p:nvSpPr>
+        <p:spPr>
+          <a:xfrm>
+            <a:off x="4114800" y="5020056"/>
+            <a:ext cx="1463040" cy="347472"/>
+          </a:xfrm>
+          <a:prstGeom prst="rect">
+            <a:avLst/>
+          </a:prstGeom>
+          <a:solidFill>
+            <a:srgbClr val="FFFFFF"/>
+          </a:solidFill>
+          <a:ln>
+            <a:solidFill>
+              <a:srgbClr val="D2DDEB"/>
+            </a:solidFill>
+          </a:ln>
+        </p:spPr>
+        <p:style>
+          <a:lnRef idx="1">
+            <a:schemeClr val="accent1"/>
+          </a:lnRef>
+          <a:fillRef idx="3">
+            <a:schemeClr val="accent1"/>
+          </a:fillRef>
+          <a:effectRef idx="2">
+            <a:schemeClr val="accent1"/>
+          </a:effectRef>
+          <a:fontRef idx="minor">
+            <a:schemeClr val="lt1"/>
+          </a:fontRef>
+        </p:style>
+        <p:txBody>
+          <a:bodyPr rtlCol="0" anchor="ctr"/>
+          <a:lstStyle/>
+          <a:p>
+            <a:pPr algn="ctr"/>
+          </a:p>
+        </p:txBody>
+      </p:sp>
+      <p:sp>
+        <p:nvSpPr>
+          <p:cNvPr id="39" name="TextBox 38"/>
+          <p:cNvSpPr txBox="1"/>
+          <p:nvPr/>
+        </p:nvSpPr>
+        <p:spPr>
+          <a:xfrm>
+            <a:off x="4160520" y="5084064"/>
+            <a:ext cx="1371600" cy="292608"/>
+          </a:xfrm>
+          <a:prstGeom prst="rect">
+            <a:avLst/>
+          </a:prstGeom>
+          <a:noFill/>
+        </p:spPr>
+        <p:txBody>
+          <a:bodyPr wrap="none">
+            <a:spAutoFit/>
+          </a:bodyPr>
+          <a:lstStyle/>
+          <a:p>
+            <a:pPr>
+              <a:defRPr sz="850">
+                <a:solidFill>
+                  <a:srgbClr val="222D3D"/>
+                </a:solidFill>
+              </a:defRPr>
+            </a:pPr>
+            <a:r>
+              <a:t>$4,101,933</a:t>
+            </a:r>
+          </a:p>
+        </p:txBody>
+      </p:sp>
+      <p:sp>
+        <p:nvSpPr>
+          <p:cNvPr id="40" name="Rectangle 39"/>
+          <p:cNvSpPr/>
+          <p:nvPr/>
+        </p:nvSpPr>
+        <p:spPr>
+          <a:xfrm>
+            <a:off x="914400" y="5367527"/>
+            <a:ext cx="2011680" cy="347472"/>
+          </a:xfrm>
+          <a:prstGeom prst="rect">
+            <a:avLst/>
+          </a:prstGeom>
+          <a:solidFill>
+            <a:srgbClr val="FFFFFF"/>
+          </a:solidFill>
+          <a:ln>
+            <a:solidFill>
+              <a:srgbClr val="D2DDEB"/>
+            </a:solidFill>
+          </a:ln>
+        </p:spPr>
+        <p:style>
+          <a:lnRef idx="1">
+            <a:schemeClr val="accent1"/>
+          </a:lnRef>
+          <a:fillRef idx="3">
+            <a:schemeClr val="accent1"/>
+          </a:fillRef>
+          <a:effectRef idx="2">
+            <a:schemeClr val="accent1"/>
+          </a:effectRef>
+          <a:fontRef idx="minor">
+            <a:schemeClr val="lt1"/>
+          </a:fontRef>
+        </p:style>
+        <p:txBody>
+          <a:bodyPr rtlCol="0" anchor="ctr"/>
+          <a:lstStyle/>
+          <a:p>
+            <a:pPr algn="ctr"/>
+          </a:p>
+        </p:txBody>
+      </p:sp>
+      <p:sp>
+        <p:nvSpPr>
+          <p:cNvPr id="41" name="TextBox 40"/>
+          <p:cNvSpPr txBox="1"/>
+          <p:nvPr/>
+        </p:nvSpPr>
+        <p:spPr>
+          <a:xfrm>
+            <a:off x="960120" y="5431536"/>
+            <a:ext cx="1920240" cy="292608"/>
+          </a:xfrm>
+          <a:prstGeom prst="rect">
+            <a:avLst/>
+          </a:prstGeom>
+          <a:noFill/>
+        </p:spPr>
+        <p:txBody>
+          <a:bodyPr wrap="none">
+            <a:spAutoFit/>
+          </a:bodyPr>
+          <a:lstStyle/>
+          <a:p>
+            <a:pPr>
+              <a:defRPr sz="850">
+                <a:solidFill>
+                  <a:srgbClr val="222D3D"/>
+                </a:solidFill>
+              </a:defRPr>
+            </a:pPr>
+            <a:r>
+              <a:t>India</a:t>
+            </a:r>
+          </a:p>
+        </p:txBody>
+      </p:sp>
+      <p:sp>
+        <p:nvSpPr>
+          <p:cNvPr id="42" name="Rectangle 41"/>
+          <p:cNvSpPr/>
+          <p:nvPr/>
+        </p:nvSpPr>
+        <p:spPr>
+          <a:xfrm>
+            <a:off x="2926080" y="5367527"/>
+            <a:ext cx="1188720" cy="347472"/>
+          </a:xfrm>
+          <a:prstGeom prst="rect">
+            <a:avLst/>
+          </a:prstGeom>
+          <a:solidFill>
+            <a:srgbClr val="FFFFFF"/>
+          </a:solidFill>
+          <a:ln>
+            <a:solidFill>
+              <a:srgbClr val="D2DDEB"/>
+            </a:solidFill>
+          </a:ln>
+        </p:spPr>
+        <p:style>
+          <a:lnRef idx="1">
+            <a:schemeClr val="accent1"/>
+          </a:lnRef>
+          <a:fillRef idx="3">
+            <a:schemeClr val="accent1"/>
+          </a:fillRef>
+          <a:effectRef idx="2">
+            <a:schemeClr val="accent1"/>
+          </a:effectRef>
+          <a:fontRef idx="minor">
+            <a:schemeClr val="lt1"/>
+          </a:fontRef>
+        </p:style>
+        <p:txBody>
+          <a:bodyPr rtlCol="0" anchor="ctr"/>
+          <a:lstStyle/>
+          <a:p>
+            <a:pPr algn="ctr"/>
+          </a:p>
+        </p:txBody>
+      </p:sp>
+      <p:sp>
+        <p:nvSpPr>
+          <p:cNvPr id="43" name="TextBox 42"/>
+          <p:cNvSpPr txBox="1"/>
+          <p:nvPr/>
+        </p:nvSpPr>
+        <p:spPr>
+          <a:xfrm>
+            <a:off x="2971800" y="5431536"/>
+            <a:ext cx="1097280" cy="292608"/>
+          </a:xfrm>
+          <a:prstGeom prst="rect">
+            <a:avLst/>
+          </a:prstGeom>
+          <a:noFill/>
+        </p:spPr>
+        <p:txBody>
+          <a:bodyPr wrap="none">
+            <a:spAutoFit/>
+          </a:bodyPr>
+          <a:lstStyle/>
+          <a:p>
+            <a:pPr>
+              <a:defRPr sz="850">
+                <a:solidFill>
+                  <a:srgbClr val="222D3D"/>
+                </a:solidFill>
+              </a:defRPr>
+            </a:pPr>
+            <a:r>
+              <a:t>100,058</a:t>
+            </a:r>
+          </a:p>
+        </p:txBody>
+      </p:sp>
+      <p:sp>
+        <p:nvSpPr>
+          <p:cNvPr id="44" name="Rectangle 43"/>
+          <p:cNvSpPr/>
+          <p:nvPr/>
+        </p:nvSpPr>
+        <p:spPr>
+          <a:xfrm>
+            <a:off x="4114800" y="5367527"/>
+            <a:ext cx="1463040" cy="347472"/>
+          </a:xfrm>
+          <a:prstGeom prst="rect">
+            <a:avLst/>
+          </a:prstGeom>
+          <a:solidFill>
+            <a:srgbClr val="FFFFFF"/>
+          </a:solidFill>
+          <a:ln>
+            <a:solidFill>
+              <a:srgbClr val="D2DDEB"/>
+            </a:solidFill>
+          </a:ln>
+        </p:spPr>
+        <p:style>
+          <a:lnRef idx="1">
+            <a:schemeClr val="accent1"/>
+          </a:lnRef>
+          <a:fillRef idx="3">
+            <a:schemeClr val="accent1"/>
+          </a:fillRef>
+          <a:effectRef idx="2">
+            <a:schemeClr val="accent1"/>
+          </a:effectRef>
+          <a:fontRef idx="minor">
+            <a:schemeClr val="lt1"/>
+          </a:fontRef>
+        </p:style>
+        <p:txBody>
+          <a:bodyPr rtlCol="0" anchor="ctr"/>
+          <a:lstStyle/>
+          <a:p>
+            <a:pPr algn="ctr"/>
+          </a:p>
+        </p:txBody>
+      </p:sp>
+      <p:sp>
+        <p:nvSpPr>
+          <p:cNvPr id="45" name="TextBox 44"/>
+          <p:cNvSpPr txBox="1"/>
+          <p:nvPr/>
+        </p:nvSpPr>
+        <p:spPr>
+          <a:xfrm>
+            <a:off x="4160520" y="5431536"/>
+            <a:ext cx="1371600" cy="292608"/>
+          </a:xfrm>
+          <a:prstGeom prst="rect">
+            <a:avLst/>
+          </a:prstGeom>
+          <a:noFill/>
+        </p:spPr>
+        <p:txBody>
+          <a:bodyPr wrap="none">
+            <a:spAutoFit/>
+          </a:bodyPr>
+          <a:lstStyle/>
+          <a:p>
+            <a:pPr>
+              <a:defRPr sz="850">
+                <a:solidFill>
+                  <a:srgbClr val="222D3D"/>
+                </a:solidFill>
+              </a:defRPr>
+            </a:pPr>
+            <a:r>
+              <a:t>$4,104,417</a:t>
+            </a:r>
+          </a:p>
+        </p:txBody>
+      </p:sp>
+      <p:sp>
+        <p:nvSpPr>
+          <p:cNvPr id="46" name="Rectangle 45"/>
+          <p:cNvSpPr/>
+          <p:nvPr/>
+        </p:nvSpPr>
+        <p:spPr>
+          <a:xfrm>
+            <a:off x="914400" y="5715000"/>
+            <a:ext cx="2011680" cy="347472"/>
+          </a:xfrm>
+          <a:prstGeom prst="rect">
+            <a:avLst/>
+          </a:prstGeom>
+          <a:solidFill>
+            <a:srgbClr val="FFFFFF"/>
+          </a:solidFill>
+          <a:ln>
+            <a:solidFill>
+              <a:srgbClr val="D2DDEB"/>
+            </a:solidFill>
+          </a:ln>
+        </p:spPr>
+        <p:style>
+          <a:lnRef idx="1">
+            <a:schemeClr val="accent1"/>
+          </a:lnRef>
+          <a:fillRef idx="3">
+            <a:schemeClr val="accent1"/>
+          </a:fillRef>
+          <a:effectRef idx="2">
+            <a:schemeClr val="accent1"/>
+          </a:effectRef>
+          <a:fontRef idx="minor">
+            <a:schemeClr val="lt1"/>
+          </a:fontRef>
+        </p:style>
+        <p:txBody>
+          <a:bodyPr rtlCol="0" anchor="ctr"/>
+          <a:lstStyle/>
+          <a:p>
+            <a:pPr algn="ctr"/>
+          </a:p>
+        </p:txBody>
+      </p:sp>
+      <p:sp>
+        <p:nvSpPr>
+          <p:cNvPr id="47" name="TextBox 46"/>
+          <p:cNvSpPr txBox="1"/>
+          <p:nvPr/>
+        </p:nvSpPr>
+        <p:spPr>
+          <a:xfrm>
+            <a:off x="960120" y="5779008"/>
+            <a:ext cx="1920240" cy="292608"/>
+          </a:xfrm>
+          <a:prstGeom prst="rect">
+            <a:avLst/>
+          </a:prstGeom>
+          <a:noFill/>
+        </p:spPr>
+        <p:txBody>
+          <a:bodyPr wrap="none">
+            <a:spAutoFit/>
+          </a:bodyPr>
+          <a:lstStyle/>
+          <a:p>
+            <a:pPr>
+              <a:defRPr sz="850">
+                <a:solidFill>
+                  <a:srgbClr val="222D3D"/>
+                </a:solidFill>
+              </a:defRPr>
+            </a:pPr>
+            <a:r>
+              <a:t>Canada</a:t>
+            </a:r>
+          </a:p>
+        </p:txBody>
+      </p:sp>
+      <p:sp>
+        <p:nvSpPr>
+          <p:cNvPr id="48" name="Rectangle 47"/>
+          <p:cNvSpPr/>
+          <p:nvPr/>
+        </p:nvSpPr>
+        <p:spPr>
+          <a:xfrm>
+            <a:off x="2926080" y="5715000"/>
+            <a:ext cx="1188720" cy="347472"/>
+          </a:xfrm>
+          <a:prstGeom prst="rect">
+            <a:avLst/>
+          </a:prstGeom>
+          <a:solidFill>
+            <a:srgbClr val="FFFFFF"/>
+          </a:solidFill>
+          <a:ln>
+            <a:solidFill>
+              <a:srgbClr val="D2DDEB"/>
+            </a:solidFill>
+          </a:ln>
+        </p:spPr>
+        <p:style>
+          <a:lnRef idx="1">
+            <a:schemeClr val="accent1"/>
+          </a:lnRef>
+          <a:fillRef idx="3">
+            <a:schemeClr val="accent1"/>
+          </a:fillRef>
+          <a:effectRef idx="2">
+            <a:schemeClr val="accent1"/>
+          </a:effectRef>
+          <a:fontRef idx="minor">
+            <a:schemeClr val="lt1"/>
+          </a:fontRef>
+        </p:style>
+        <p:txBody>
+          <a:bodyPr rtlCol="0" anchor="ctr"/>
+          <a:lstStyle/>
+          <a:p>
+            <a:pPr algn="ctr"/>
+          </a:p>
+        </p:txBody>
+      </p:sp>
+      <p:sp>
+        <p:nvSpPr>
+          <p:cNvPr id="49" name="TextBox 48"/>
+          <p:cNvSpPr txBox="1"/>
+          <p:nvPr/>
+        </p:nvSpPr>
+        <p:spPr>
+          <a:xfrm>
+            <a:off x="2971800" y="5779008"/>
+            <a:ext cx="1097280" cy="292608"/>
+          </a:xfrm>
+          <a:prstGeom prst="rect">
+            <a:avLst/>
+          </a:prstGeom>
+          <a:noFill/>
+        </p:spPr>
+        <p:txBody>
+          <a:bodyPr wrap="none">
+            <a:spAutoFit/>
+          </a:bodyPr>
+          <a:lstStyle/>
+          <a:p>
+            <a:pPr>
+              <a:defRPr sz="850">
+                <a:solidFill>
+                  <a:srgbClr val="222D3D"/>
+                </a:solidFill>
+              </a:defRPr>
+            </a:pPr>
+            <a:r>
+              <a:t>99,976</a:t>
+            </a:r>
+          </a:p>
+        </p:txBody>
+      </p:sp>
+      <p:sp>
+        <p:nvSpPr>
+          <p:cNvPr id="50" name="Rectangle 49"/>
+          <p:cNvSpPr/>
+          <p:nvPr/>
+        </p:nvSpPr>
+        <p:spPr>
+          <a:xfrm>
+            <a:off x="4114800" y="5715000"/>
+            <a:ext cx="1463040" cy="347472"/>
+          </a:xfrm>
+          <a:prstGeom prst="rect">
+            <a:avLst/>
+          </a:prstGeom>
+          <a:solidFill>
+            <a:srgbClr val="FFFFFF"/>
+          </a:solidFill>
+          <a:ln>
+            <a:solidFill>
+              <a:srgbClr val="D2DDEB"/>
+            </a:solidFill>
+          </a:ln>
+        </p:spPr>
+        <p:style>
+          <a:lnRef idx="1">
+            <a:schemeClr val="accent1"/>
+          </a:lnRef>
+          <a:fillRef idx="3">
+            <a:schemeClr val="accent1"/>
+          </a:fillRef>
+          <a:effectRef idx="2">
+            <a:schemeClr val="accent1"/>
+          </a:effectRef>
+          <a:fontRef idx="minor">
+            <a:schemeClr val="lt1"/>
+          </a:fontRef>
+        </p:style>
+        <p:txBody>
+          <a:bodyPr rtlCol="0" anchor="ctr"/>
+          <a:lstStyle/>
+          <a:p>
+            <a:pPr algn="ctr"/>
+          </a:p>
+        </p:txBody>
+      </p:sp>
+      <p:sp>
+        <p:nvSpPr>
+          <p:cNvPr id="51" name="TextBox 50"/>
+          <p:cNvSpPr txBox="1"/>
+          <p:nvPr/>
+        </p:nvSpPr>
+        <p:spPr>
+          <a:xfrm>
+            <a:off x="4160520" y="5779008"/>
+            <a:ext cx="1371600" cy="292608"/>
+          </a:xfrm>
+          <a:prstGeom prst="rect">
+            <a:avLst/>
+          </a:prstGeom>
+          <a:noFill/>
+        </p:spPr>
+        <p:txBody>
+          <a:bodyPr wrap="none">
+            <a:spAutoFit/>
+          </a:bodyPr>
+          <a:lstStyle/>
+          <a:p>
+            <a:pPr>
+              <a:defRPr sz="850">
+                <a:solidFill>
+                  <a:srgbClr val="222D3D"/>
+                </a:solidFill>
+              </a:defRPr>
+            </a:pPr>
+            <a:r>
+              <a:t>$4,094,552</a:t>
+            </a:r>
+          </a:p>
+        </p:txBody>
+      </p:sp>
+      <p:sp>
+        <p:nvSpPr>
+          <p:cNvPr id="52" name="TextBox 51"/>
+          <p:cNvSpPr txBox="1"/>
+          <p:nvPr/>
+        </p:nvSpPr>
+        <p:spPr>
+          <a:xfrm>
+            <a:off x="914400" y="5989320"/>
             <a:ext cx="7315200" cy="256032"/>
           </a:xfrm>
           <a:prstGeom prst="rect">
@@ -18430,7 +17900,7 @@
                 </a:solidFill>
                 <a:hlinkClick r:id="rId2"/>
               </a:rPr>
-              <a:t>Open Elasticsearch Capabilities Demo</a:t>
+              <a:t>Open Payments World Map</a:t>
             </a:r>
           </a:p>
         </p:txBody>
@@ -18534,7 +18004,7 @@
               </a:defRPr>
             </a:pPr>
             <a:r>
-              <a:t>Key insights to communicate</a:t>
+              <a:t>Elasticsearch capabilities demonstrated</a:t>
             </a:r>
           </a:p>
         </p:txBody>
@@ -18569,7 +18039,7 @@
               </a:defRPr>
             </a:pPr>
             <a:r>
-              <a:t>Business and technical outcomes from the dashboards</a:t>
+              <a:t>Search, analytics, runtime fields, schema management and lifecycle awareness</a:t>
             </a:r>
           </a:p>
         </p:txBody>
@@ -18646,117 +18116,14 @@
       </p:sp>
       <p:sp>
         <p:nvSpPr>
-          <p:cNvPr id="7" name="TextBox 6"/>
-          <p:cNvSpPr txBox="1"/>
-          <p:nvPr/>
-        </p:nvSpPr>
-        <p:spPr>
-          <a:xfrm>
-            <a:off x="822960" y="1234440"/>
-            <a:ext cx="5303520" cy="4389120"/>
-          </a:xfrm>
-          <a:prstGeom prst="rect">
-            <a:avLst/>
-          </a:prstGeom>
-          <a:noFill/>
-        </p:spPr>
-        <p:txBody>
-          <a:bodyPr wrap="square">
-            <a:spAutoFit/>
-          </a:bodyPr>
-          <a:lstStyle/>
-          <a:p>
-            <a:pPr>
-              <a:buChar char="•"/>
-              <a:spcAft>
-                <a:spcPts val="800"/>
-              </a:spcAft>
-              <a:defRPr sz="1400">
-                <a:solidFill>
-                  <a:srgbClr val="222D3D"/>
-                </a:solidFill>
-              </a:defRPr>
-            </a:pPr>
-            <a:r>
-              <a:t>Payment approval rate is 93.02%, showing a healthy baseline.</a:t>
-            </a:r>
-          </a:p>
-          <a:p>
-            <a:pPr>
-              <a:buChar char="•"/>
-              <a:spcAft>
-                <a:spcPts val="800"/>
-              </a:spcAft>
-              <a:defRPr sz="1400">
-                <a:solidFill>
-                  <a:srgbClr val="222D3D"/>
-                </a:solidFill>
-              </a:defRPr>
-            </a:pPr>
-            <a:r>
-              <a:t>Total synthetic revenue is approximately $35,128,691 across 1,000,000 transactions.</a:t>
-            </a:r>
-          </a:p>
-          <a:p>
-            <a:pPr>
-              <a:buChar char="•"/>
-              <a:spcAft>
-                <a:spcPts val="800"/>
-              </a:spcAft>
-              <a:defRPr sz="1400">
-                <a:solidFill>
-                  <a:srgbClr val="222D3D"/>
-                </a:solidFill>
-              </a:defRPr>
-            </a:pPr>
-            <a:r>
-              <a:t>Operational risk: 51,887 failed transactions and 201,523 high-latency transactions.</a:t>
-            </a:r>
-          </a:p>
-          <a:p>
-            <a:pPr>
-              <a:buChar char="•"/>
-              <a:spcAft>
-                <a:spcPts val="800"/>
-              </a:spcAft>
-              <a:defRPr sz="1400">
-                <a:solidFill>
-                  <a:srgbClr val="222D3D"/>
-                </a:solidFill>
-              </a:defRPr>
-            </a:pPr>
-            <a:r>
-              <a:t>Country and merchant breakdowns make it easy to explain where performance changes originate.</a:t>
-            </a:r>
-          </a:p>
-          <a:p>
-            <a:pPr>
-              <a:buChar char="•"/>
-              <a:spcAft>
-                <a:spcPts val="800"/>
-              </a:spcAft>
-              <a:defRPr sz="1400">
-                <a:solidFill>
-                  <a:srgbClr val="222D3D"/>
-                </a:solidFill>
-              </a:defRPr>
-            </a:pPr>
-            <a:r>
-              <a:t>Runtime fields and ES|QL enable new calculations without reindexing the data.</a:t>
-            </a:r>
-          </a:p>
-        </p:txBody>
-      </p:sp>
-      <p:sp>
-        <p:nvSpPr>
-          <p:cNvPr id="8" name="Rounded Rectangle 7"/>
+          <p:cNvPr id="7" name="Rounded Rectangle 6"/>
           <p:cNvSpPr/>
           <p:nvPr/>
         </p:nvSpPr>
         <p:spPr>
           <a:xfrm>
-            <a:off x="6537960" y="1325880"/>
-            <a:ext cx="4480560" cy="3108960"/>
+            <a:off x="685800" y="1143000"/>
+            <a:ext cx="5120640" cy="1005840"/>
           </a:xfrm>
           <a:prstGeom prst="roundRect">
             <a:avLst/>
@@ -18794,14 +18161,14 @@
       </p:sp>
       <p:sp>
         <p:nvSpPr>
-          <p:cNvPr id="9" name="Rectangle 8"/>
+          <p:cNvPr id="8" name="Rectangle 7"/>
           <p:cNvSpPr/>
           <p:nvPr/>
         </p:nvSpPr>
         <p:spPr>
           <a:xfrm>
-            <a:off x="6537960" y="1325880"/>
-            <a:ext cx="73152" cy="3108960"/>
+            <a:off x="685800" y="1143000"/>
+            <a:ext cx="73152" cy="1005840"/>
           </a:xfrm>
           <a:prstGeom prst="rect">
             <a:avLst/>
@@ -18837,49 +18204,49 @@
       </p:sp>
       <p:sp>
         <p:nvSpPr>
+          <p:cNvPr id="9" name="TextBox 8"/>
+          <p:cNvSpPr txBox="1"/>
+          <p:nvPr/>
+        </p:nvSpPr>
+        <p:spPr>
+          <a:xfrm>
+            <a:off x="886968" y="1280160"/>
+            <a:ext cx="4800600" cy="274320"/>
+          </a:xfrm>
+          <a:prstGeom prst="rect">
+            <a:avLst/>
+          </a:prstGeom>
+          <a:noFill/>
+        </p:spPr>
+        <p:txBody>
+          <a:bodyPr wrap="none">
+            <a:spAutoFit/>
+          </a:bodyPr>
+          <a:lstStyle/>
+          <a:p>
+            <a:pPr>
+              <a:defRPr sz="1000" b="1">
+                <a:solidFill>
+                  <a:srgbClr val="667487"/>
+                </a:solidFill>
+              </a:defRPr>
+            </a:pPr>
+            <a:r>
+              <a:t>Aggregations</a:t>
+            </a:r>
+          </a:p>
+        </p:txBody>
+      </p:sp>
+      <p:sp>
+        <p:nvSpPr>
           <p:cNvPr id="10" name="TextBox 9"/>
           <p:cNvSpPr txBox="1"/>
           <p:nvPr/>
         </p:nvSpPr>
         <p:spPr>
           <a:xfrm>
-            <a:off x="6739128" y="1463039"/>
-            <a:ext cx="4160520" cy="274320"/>
-          </a:xfrm>
-          <a:prstGeom prst="rect">
-            <a:avLst/>
-          </a:prstGeom>
-          <a:noFill/>
-        </p:spPr>
-        <p:txBody>
-          <a:bodyPr wrap="none">
-            <a:spAutoFit/>
-          </a:bodyPr>
-          <a:lstStyle/>
-          <a:p>
-            <a:pPr>
-              <a:defRPr sz="1000" b="1">
-                <a:solidFill>
-                  <a:srgbClr val="667487"/>
-                </a:solidFill>
-              </a:defRPr>
-            </a:pPr>
-            <a:r>
-              <a:t>Presentation narrative</a:t>
-            </a:r>
-          </a:p>
-        </p:txBody>
-      </p:sp>
-      <p:sp>
-        <p:nvSpPr>
-          <p:cNvPr id="11" name="TextBox 10"/>
-          <p:cNvSpPr txBox="1"/>
-          <p:nvPr/>
-        </p:nvSpPr>
-        <p:spPr>
-          <a:xfrm>
-            <a:off x="6739128" y="1783080"/>
-            <a:ext cx="4160520" cy="2423160"/>
+            <a:off x="886968" y="1600200"/>
+            <a:ext cx="4800600" cy="320040"/>
           </a:xfrm>
           <a:prstGeom prst="rect">
             <a:avLst/>
@@ -18903,9 +18270,155 @@
               </a:defRPr>
             </a:pPr>
             <a:r>
-              <a:t>1. Start with executive KPIs</a:t>
-            </a:r>
-          </a:p>
+              <a:t>Revenue by merchant, approval rate by country, avg/P95 processing time</a:t>
+            </a:r>
+          </a:p>
+        </p:txBody>
+      </p:sp>
+      <p:sp>
+        <p:nvSpPr>
+          <p:cNvPr id="11" name="Rounded Rectangle 10"/>
+          <p:cNvSpPr/>
+          <p:nvPr/>
+        </p:nvSpPr>
+        <p:spPr>
+          <a:xfrm>
+            <a:off x="6355080" y="1143000"/>
+            <a:ext cx="5120640" cy="1005840"/>
+          </a:xfrm>
+          <a:prstGeom prst="roundRect">
+            <a:avLst/>
+          </a:prstGeom>
+          <a:solidFill>
+            <a:srgbClr val="FFFFFF"/>
+          </a:solidFill>
+          <a:ln>
+            <a:solidFill>
+              <a:srgbClr val="D2DDEB"/>
+            </a:solidFill>
+          </a:ln>
+        </p:spPr>
+        <p:style>
+          <a:lnRef idx="1">
+            <a:schemeClr val="accent1"/>
+          </a:lnRef>
+          <a:fillRef idx="3">
+            <a:schemeClr val="accent1"/>
+          </a:fillRef>
+          <a:effectRef idx="2">
+            <a:schemeClr val="accent1"/>
+          </a:effectRef>
+          <a:fontRef idx="minor">
+            <a:schemeClr val="lt1"/>
+          </a:fontRef>
+        </p:style>
+        <p:txBody>
+          <a:bodyPr rtlCol="0" anchor="ctr"/>
+          <a:lstStyle/>
+          <a:p>
+            <a:pPr algn="ctr"/>
+          </a:p>
+        </p:txBody>
+      </p:sp>
+      <p:sp>
+        <p:nvSpPr>
+          <p:cNvPr id="12" name="Rectangle 11"/>
+          <p:cNvSpPr/>
+          <p:nvPr/>
+        </p:nvSpPr>
+        <p:spPr>
+          <a:xfrm>
+            <a:off x="6355080" y="1143000"/>
+            <a:ext cx="73152" cy="1005840"/>
+          </a:xfrm>
+          <a:prstGeom prst="rect">
+            <a:avLst/>
+          </a:prstGeom>
+          <a:solidFill>
+            <a:srgbClr val="00959C"/>
+          </a:solidFill>
+          <a:ln>
+            <a:noFill/>
+          </a:ln>
+        </p:spPr>
+        <p:style>
+          <a:lnRef idx="1">
+            <a:schemeClr val="accent1"/>
+          </a:lnRef>
+          <a:fillRef idx="3">
+            <a:schemeClr val="accent1"/>
+          </a:fillRef>
+          <a:effectRef idx="2">
+            <a:schemeClr val="accent1"/>
+          </a:effectRef>
+          <a:fontRef idx="minor">
+            <a:schemeClr val="lt1"/>
+          </a:fontRef>
+        </p:style>
+        <p:txBody>
+          <a:bodyPr rtlCol="0" anchor="ctr"/>
+          <a:lstStyle/>
+          <a:p>
+            <a:pPr algn="ctr"/>
+          </a:p>
+        </p:txBody>
+      </p:sp>
+      <p:sp>
+        <p:nvSpPr>
+          <p:cNvPr id="13" name="TextBox 12"/>
+          <p:cNvSpPr txBox="1"/>
+          <p:nvPr/>
+        </p:nvSpPr>
+        <p:spPr>
+          <a:xfrm>
+            <a:off x="6556248" y="1280160"/>
+            <a:ext cx="4800600" cy="274320"/>
+          </a:xfrm>
+          <a:prstGeom prst="rect">
+            <a:avLst/>
+          </a:prstGeom>
+          <a:noFill/>
+        </p:spPr>
+        <p:txBody>
+          <a:bodyPr wrap="none">
+            <a:spAutoFit/>
+          </a:bodyPr>
+          <a:lstStyle/>
+          <a:p>
+            <a:pPr>
+              <a:defRPr sz="1000" b="1">
+                <a:solidFill>
+                  <a:srgbClr val="667487"/>
+                </a:solidFill>
+              </a:defRPr>
+            </a:pPr>
+            <a:r>
+              <a:t>Full-text search</a:t>
+            </a:r>
+          </a:p>
+        </p:txBody>
+      </p:sp>
+      <p:sp>
+        <p:nvSpPr>
+          <p:cNvPr id="14" name="TextBox 13"/>
+          <p:cNvSpPr txBox="1"/>
+          <p:nvPr/>
+        </p:nvSpPr>
+        <p:spPr>
+          <a:xfrm>
+            <a:off x="6556248" y="1600200"/>
+            <a:ext cx="4800600" cy="320040"/>
+          </a:xfrm>
+          <a:prstGeom prst="rect">
+            <a:avLst/>
+          </a:prstGeom>
+          <a:noFill/>
+        </p:spPr>
+        <p:txBody>
+          <a:bodyPr wrap="square">
+            <a:normAutofit/>
+          </a:bodyPr>
+          <a:lstStyle/>
           <a:p>
             <a:pPr>
               <a:spcAft>
@@ -18918,9 +18431,155 @@
               </a:defRPr>
             </a:pPr>
             <a:r>
-              <a:t>2. Show operational drill-down</a:t>
-            </a:r>
-          </a:p>
+              <a:t>Transaction ID, merchant/category and error_message timeout searches</a:t>
+            </a:r>
+          </a:p>
+        </p:txBody>
+      </p:sp>
+      <p:sp>
+        <p:nvSpPr>
+          <p:cNvPr id="15" name="Rounded Rectangle 14"/>
+          <p:cNvSpPr/>
+          <p:nvPr/>
+        </p:nvSpPr>
+        <p:spPr>
+          <a:xfrm>
+            <a:off x="685800" y="2514600"/>
+            <a:ext cx="5120640" cy="1005840"/>
+          </a:xfrm>
+          <a:prstGeom prst="roundRect">
+            <a:avLst/>
+          </a:prstGeom>
+          <a:solidFill>
+            <a:srgbClr val="FFFFFF"/>
+          </a:solidFill>
+          <a:ln>
+            <a:solidFill>
+              <a:srgbClr val="D2DDEB"/>
+            </a:solidFill>
+          </a:ln>
+        </p:spPr>
+        <p:style>
+          <a:lnRef idx="1">
+            <a:schemeClr val="accent1"/>
+          </a:lnRef>
+          <a:fillRef idx="3">
+            <a:schemeClr val="accent1"/>
+          </a:fillRef>
+          <a:effectRef idx="2">
+            <a:schemeClr val="accent1"/>
+          </a:effectRef>
+          <a:fontRef idx="minor">
+            <a:schemeClr val="lt1"/>
+          </a:fontRef>
+        </p:style>
+        <p:txBody>
+          <a:bodyPr rtlCol="0" anchor="ctr"/>
+          <a:lstStyle/>
+          <a:p>
+            <a:pPr algn="ctr"/>
+          </a:p>
+        </p:txBody>
+      </p:sp>
+      <p:sp>
+        <p:nvSpPr>
+          <p:cNvPr id="16" name="Rectangle 15"/>
+          <p:cNvSpPr/>
+          <p:nvPr/>
+        </p:nvSpPr>
+        <p:spPr>
+          <a:xfrm>
+            <a:off x="685800" y="2514600"/>
+            <a:ext cx="73152" cy="1005840"/>
+          </a:xfrm>
+          <a:prstGeom prst="rect">
+            <a:avLst/>
+          </a:prstGeom>
+          <a:solidFill>
+            <a:srgbClr val="7058BE"/>
+          </a:solidFill>
+          <a:ln>
+            <a:noFill/>
+          </a:ln>
+        </p:spPr>
+        <p:style>
+          <a:lnRef idx="1">
+            <a:schemeClr val="accent1"/>
+          </a:lnRef>
+          <a:fillRef idx="3">
+            <a:schemeClr val="accent1"/>
+          </a:fillRef>
+          <a:effectRef idx="2">
+            <a:schemeClr val="accent1"/>
+          </a:effectRef>
+          <a:fontRef idx="minor">
+            <a:schemeClr val="lt1"/>
+          </a:fontRef>
+        </p:style>
+        <p:txBody>
+          <a:bodyPr rtlCol="0" anchor="ctr"/>
+          <a:lstStyle/>
+          <a:p>
+            <a:pPr algn="ctr"/>
+          </a:p>
+        </p:txBody>
+      </p:sp>
+      <p:sp>
+        <p:nvSpPr>
+          <p:cNvPr id="17" name="TextBox 16"/>
+          <p:cNvSpPr txBox="1"/>
+          <p:nvPr/>
+        </p:nvSpPr>
+        <p:spPr>
+          <a:xfrm>
+            <a:off x="886968" y="2651760"/>
+            <a:ext cx="4800600" cy="274320"/>
+          </a:xfrm>
+          <a:prstGeom prst="rect">
+            <a:avLst/>
+          </a:prstGeom>
+          <a:noFill/>
+        </p:spPr>
+        <p:txBody>
+          <a:bodyPr wrap="none">
+            <a:spAutoFit/>
+          </a:bodyPr>
+          <a:lstStyle/>
+          <a:p>
+            <a:pPr>
+              <a:defRPr sz="1000" b="1">
+                <a:solidFill>
+                  <a:srgbClr val="667487"/>
+                </a:solidFill>
+              </a:defRPr>
+            </a:pPr>
+            <a:r>
+              <a:t>Runtime fields</a:t>
+            </a:r>
+          </a:p>
+        </p:txBody>
+      </p:sp>
+      <p:sp>
+        <p:nvSpPr>
+          <p:cNvPr id="18" name="TextBox 17"/>
+          <p:cNvSpPr txBox="1"/>
+          <p:nvPr/>
+        </p:nvSpPr>
+        <p:spPr>
+          <a:xfrm>
+            <a:off x="886968" y="2971800"/>
+            <a:ext cx="4800600" cy="320040"/>
+          </a:xfrm>
+          <a:prstGeom prst="rect">
+            <a:avLst/>
+          </a:prstGeom>
+          <a:noFill/>
+        </p:spPr>
+        <p:txBody>
+          <a:bodyPr wrap="square">
+            <a:normAutofit/>
+          </a:bodyPr>
+          <a:lstStyle/>
           <a:p>
             <a:pPr>
               <a:spcAft>
@@ -18933,9 +18592,155 @@
               </a:defRPr>
             </a:pPr>
             <a:r>
-              <a:t>3. Demonstrate anomaly monitoring</a:t>
-            </a:r>
-          </a:p>
+              <a:t>Live calculations for approval status, revenue, amount bands, country names</a:t>
+            </a:r>
+          </a:p>
+        </p:txBody>
+      </p:sp>
+      <p:sp>
+        <p:nvSpPr>
+          <p:cNvPr id="19" name="Rounded Rectangle 18"/>
+          <p:cNvSpPr/>
+          <p:nvPr/>
+        </p:nvSpPr>
+        <p:spPr>
+          <a:xfrm>
+            <a:off x="6355080" y="2514600"/>
+            <a:ext cx="5120640" cy="1005840"/>
+          </a:xfrm>
+          <a:prstGeom prst="roundRect">
+            <a:avLst/>
+          </a:prstGeom>
+          <a:solidFill>
+            <a:srgbClr val="FFFFFF"/>
+          </a:solidFill>
+          <a:ln>
+            <a:solidFill>
+              <a:srgbClr val="D2DDEB"/>
+            </a:solidFill>
+          </a:ln>
+        </p:spPr>
+        <p:style>
+          <a:lnRef idx="1">
+            <a:schemeClr val="accent1"/>
+          </a:lnRef>
+          <a:fillRef idx="3">
+            <a:schemeClr val="accent1"/>
+          </a:fillRef>
+          <a:effectRef idx="2">
+            <a:schemeClr val="accent1"/>
+          </a:effectRef>
+          <a:fontRef idx="minor">
+            <a:schemeClr val="lt1"/>
+          </a:fontRef>
+        </p:style>
+        <p:txBody>
+          <a:bodyPr rtlCol="0" anchor="ctr"/>
+          <a:lstStyle/>
+          <a:p>
+            <a:pPr algn="ctr"/>
+          </a:p>
+        </p:txBody>
+      </p:sp>
+      <p:sp>
+        <p:nvSpPr>
+          <p:cNvPr id="20" name="Rectangle 19"/>
+          <p:cNvSpPr/>
+          <p:nvPr/>
+        </p:nvSpPr>
+        <p:spPr>
+          <a:xfrm>
+            <a:off x="6355080" y="2514600"/>
+            <a:ext cx="73152" cy="1005840"/>
+          </a:xfrm>
+          <a:prstGeom prst="rect">
+            <a:avLst/>
+          </a:prstGeom>
+          <a:solidFill>
+            <a:srgbClr val="EF8438"/>
+          </a:solidFill>
+          <a:ln>
+            <a:noFill/>
+          </a:ln>
+        </p:spPr>
+        <p:style>
+          <a:lnRef idx="1">
+            <a:schemeClr val="accent1"/>
+          </a:lnRef>
+          <a:fillRef idx="3">
+            <a:schemeClr val="accent1"/>
+          </a:fillRef>
+          <a:effectRef idx="2">
+            <a:schemeClr val="accent1"/>
+          </a:effectRef>
+          <a:fontRef idx="minor">
+            <a:schemeClr val="lt1"/>
+          </a:fontRef>
+        </p:style>
+        <p:txBody>
+          <a:bodyPr rtlCol="0" anchor="ctr"/>
+          <a:lstStyle/>
+          <a:p>
+            <a:pPr algn="ctr"/>
+          </a:p>
+        </p:txBody>
+      </p:sp>
+      <p:sp>
+        <p:nvSpPr>
+          <p:cNvPr id="21" name="TextBox 20"/>
+          <p:cNvSpPr txBox="1"/>
+          <p:nvPr/>
+        </p:nvSpPr>
+        <p:spPr>
+          <a:xfrm>
+            <a:off x="6556248" y="2651760"/>
+            <a:ext cx="4800600" cy="274320"/>
+          </a:xfrm>
+          <a:prstGeom prst="rect">
+            <a:avLst/>
+          </a:prstGeom>
+          <a:noFill/>
+        </p:spPr>
+        <p:txBody>
+          <a:bodyPr wrap="none">
+            <a:spAutoFit/>
+          </a:bodyPr>
+          <a:lstStyle/>
+          <a:p>
+            <a:pPr>
+              <a:defRPr sz="1000" b="1">
+                <a:solidFill>
+                  <a:srgbClr val="667487"/>
+                </a:solidFill>
+              </a:defRPr>
+            </a:pPr>
+            <a:r>
+              <a:t>Index templates</a:t>
+            </a:r>
+          </a:p>
+        </p:txBody>
+      </p:sp>
+      <p:sp>
+        <p:nvSpPr>
+          <p:cNvPr id="22" name="TextBox 21"/>
+          <p:cNvSpPr txBox="1"/>
+          <p:nvPr/>
+        </p:nvSpPr>
+        <p:spPr>
+          <a:xfrm>
+            <a:off x="6556248" y="2971800"/>
+            <a:ext cx="4800600" cy="320040"/>
+          </a:xfrm>
+          <a:prstGeom prst="rect">
+            <a:avLst/>
+          </a:prstGeom>
+          <a:noFill/>
+        </p:spPr>
+        <p:txBody>
+          <a:bodyPr wrap="square">
+            <a:normAutofit/>
+          </a:bodyPr>
+          <a:lstStyle/>
           <a:p>
             <a:pPr>
               <a:spcAft>
@@ -18948,7 +18753,202 @@
               </a:defRPr>
             </a:pPr>
             <a:r>
-              <a:t>4. Close with Elasticsearch platform capabilities</a:t>
+              <a:t>Reusable schema for future synthetic-transactions-* indices</a:t>
+            </a:r>
+          </a:p>
+        </p:txBody>
+      </p:sp>
+      <p:sp>
+        <p:nvSpPr>
+          <p:cNvPr id="23" name="Rounded Rectangle 22"/>
+          <p:cNvSpPr/>
+          <p:nvPr/>
+        </p:nvSpPr>
+        <p:spPr>
+          <a:xfrm>
+            <a:off x="685800" y="3886200"/>
+            <a:ext cx="5120640" cy="1005840"/>
+          </a:xfrm>
+          <a:prstGeom prst="roundRect">
+            <a:avLst/>
+          </a:prstGeom>
+          <a:solidFill>
+            <a:srgbClr val="FFFFFF"/>
+          </a:solidFill>
+          <a:ln>
+            <a:solidFill>
+              <a:srgbClr val="D2DDEB"/>
+            </a:solidFill>
+          </a:ln>
+        </p:spPr>
+        <p:style>
+          <a:lnRef idx="1">
+            <a:schemeClr val="accent1"/>
+          </a:lnRef>
+          <a:fillRef idx="3">
+            <a:schemeClr val="accent1"/>
+          </a:fillRef>
+          <a:effectRef idx="2">
+            <a:schemeClr val="accent1"/>
+          </a:effectRef>
+          <a:fontRef idx="minor">
+            <a:schemeClr val="lt1"/>
+          </a:fontRef>
+        </p:style>
+        <p:txBody>
+          <a:bodyPr rtlCol="0" anchor="ctr"/>
+          <a:lstStyle/>
+          <a:p>
+            <a:pPr algn="ctr"/>
+          </a:p>
+        </p:txBody>
+      </p:sp>
+      <p:sp>
+        <p:nvSpPr>
+          <p:cNvPr id="24" name="Rectangle 23"/>
+          <p:cNvSpPr/>
+          <p:nvPr/>
+        </p:nvSpPr>
+        <p:spPr>
+          <a:xfrm>
+            <a:off x="685800" y="3886200"/>
+            <a:ext cx="73152" cy="1005840"/>
+          </a:xfrm>
+          <a:prstGeom prst="rect">
+            <a:avLst/>
+          </a:prstGeom>
+          <a:solidFill>
+            <a:srgbClr val="44AA5C"/>
+          </a:solidFill>
+          <a:ln>
+            <a:noFill/>
+          </a:ln>
+        </p:spPr>
+        <p:style>
+          <a:lnRef idx="1">
+            <a:schemeClr val="accent1"/>
+          </a:lnRef>
+          <a:fillRef idx="3">
+            <a:schemeClr val="accent1"/>
+          </a:fillRef>
+          <a:effectRef idx="2">
+            <a:schemeClr val="accent1"/>
+          </a:effectRef>
+          <a:fontRef idx="minor">
+            <a:schemeClr val="lt1"/>
+          </a:fontRef>
+        </p:style>
+        <p:txBody>
+          <a:bodyPr rtlCol="0" anchor="ctr"/>
+          <a:lstStyle/>
+          <a:p>
+            <a:pPr algn="ctr"/>
+          </a:p>
+        </p:txBody>
+      </p:sp>
+      <p:sp>
+        <p:nvSpPr>
+          <p:cNvPr id="25" name="TextBox 24"/>
+          <p:cNvSpPr txBox="1"/>
+          <p:nvPr/>
+        </p:nvSpPr>
+        <p:spPr>
+          <a:xfrm>
+            <a:off x="886968" y="4023360"/>
+            <a:ext cx="4800600" cy="274320"/>
+          </a:xfrm>
+          <a:prstGeom prst="rect">
+            <a:avLst/>
+          </a:prstGeom>
+          <a:noFill/>
+        </p:spPr>
+        <p:txBody>
+          <a:bodyPr wrap="none">
+            <a:spAutoFit/>
+          </a:bodyPr>
+          <a:lstStyle/>
+          <a:p>
+            <a:pPr>
+              <a:defRPr sz="1000" b="1">
+                <a:solidFill>
+                  <a:srgbClr val="667487"/>
+                </a:solidFill>
+              </a:defRPr>
+            </a:pPr>
+            <a:r>
+              <a:t>Lifecycle / ILM</a:t>
+            </a:r>
+          </a:p>
+        </p:txBody>
+      </p:sp>
+      <p:sp>
+        <p:nvSpPr>
+          <p:cNvPr id="26" name="TextBox 25"/>
+          <p:cNvSpPr txBox="1"/>
+          <p:nvPr/>
+        </p:nvSpPr>
+        <p:spPr>
+          <a:xfrm>
+            <a:off x="886968" y="4343400"/>
+            <a:ext cx="4800600" cy="320040"/>
+          </a:xfrm>
+          <a:prstGeom prst="rect">
+            <a:avLst/>
+          </a:prstGeom>
+          <a:noFill/>
+        </p:spPr>
+        <p:txBody>
+          <a:bodyPr wrap="square">
+            <a:normAutofit/>
+          </a:bodyPr>
+          <a:lstStyle/>
+          <a:p>
+            <a:pPr>
+              <a:spcAft>
+                <a:spcPts val="300"/>
+              </a:spcAft>
+              <a:defRPr sz="950">
+                <a:solidFill>
+                  <a:srgbClr val="222D3D"/>
+                </a:solidFill>
+              </a:defRPr>
+            </a:pPr>
+            <a:r>
+              <a:t>Serverless note plus hot/warm/delete ILM concept for Stack deployments</a:t>
+            </a:r>
+          </a:p>
+        </p:txBody>
+      </p:sp>
+      <p:sp>
+        <p:nvSpPr>
+          <p:cNvPr id="27" name="TextBox 26"/>
+          <p:cNvSpPr txBox="1"/>
+          <p:nvPr/>
+        </p:nvSpPr>
+        <p:spPr>
+          <a:xfrm>
+            <a:off x="777240" y="5897880"/>
+            <a:ext cx="7315200" cy="256032"/>
+          </a:xfrm>
+          <a:prstGeom prst="rect">
+            <a:avLst/>
+          </a:prstGeom>
+          <a:noFill/>
+        </p:spPr>
+        <p:txBody>
+          <a:bodyPr wrap="none">
+            <a:spAutoFit/>
+          </a:bodyPr>
+          <a:lstStyle/>
+          <a:p>
+            <a:r>
+              <a:rPr sz="1000" u="sng">
+                <a:solidFill>
+                  <a:srgbClr val="3673C8"/>
+                </a:solidFill>
+                <a:hlinkClick r:id="rId2"/>
+              </a:rPr>
+              <a:t>Open Elasticsearch Capabilities Demo</a:t>
             </a:r>
           </a:p>
         </p:txBody>

--- a/presentations/payments_dashboards_summary.pptx
+++ b/presentations/payments_dashboards_summary.pptx
@@ -12,11 +12,13 @@
     <p:sldId id="260" r:id="rId11"/>
     <p:sldId id="267" r:id="rId18"/>
     <p:sldId id="261" r:id="rId12"/>
+    <p:sldId id="268" r:id="rId19"/>
     <p:sldId id="262" r:id="rId13"/>
     <p:sldId id="263" r:id="rId14"/>
     <p:sldId id="264" r:id="rId15"/>
     <p:sldId id="265" r:id="rId16"/>
     <p:sldId id="266" r:id="rId17"/>
+    <p:sldId id="269" r:id="rId20"/>
   </p:sldIdLst>
   <p:sldSz cx="12191695" cy="6858000" type="screen4x3"/>
   <p:notesSz cx="6858000" cy="9144000"/>
@@ -3890,7 +3892,7 @@
               </a:defRPr>
             </a:pPr>
             <a:r>
-              <a:t>5</a:t>
+              <a:t>7</a:t>
             </a:r>
           </a:p>
         </p:txBody>
@@ -6422,6 +6424,2756 @@
                 <a:hlinkClick r:id="rId7"/>
               </a:rPr>
               <a:t>Open dashboard</a:t>
+            </a:r>
+          </a:p>
+        </p:txBody>
+      </p:sp>
+    </p:spTree>
+  </p:cSld>
+  <p:clrMapOvr>
+    <a:masterClrMapping/>
+  </p:clrMapOvr>
+</p:sld>
+</file>
+
+<file path=ppt/slides/slide13.xml><?xml version="1.0" encoding="utf-8"?>
+<p:sld xmlns:a="http://schemas.openxmlformats.org/drawingml/2006/main" xmlns:p="http://schemas.openxmlformats.org/presentationml/2006/main" xmlns:r="http://schemas.openxmlformats.org/officeDocument/2006/relationships">
+  <p:cSld>
+    <p:bg>
+      <p:bgPr>
+        <a:solidFill>
+          <a:srgbClr val="F4F8FC"/>
+        </a:solidFill>
+        <a:effectLst/>
+      </p:bgPr>
+    </p:bg>
+    <p:spTree>
+      <p:nvGrpSpPr>
+        <p:cNvPr id="1" name=""/>
+        <p:cNvGrpSpPr/>
+        <p:nvPr/>
+      </p:nvGrpSpPr>
+      <p:grpSpPr/>
+      <p:sp>
+        <p:nvSpPr>
+          <p:cNvPr id="2" name="Rectangle 1"/>
+          <p:cNvSpPr/>
+          <p:nvPr/>
+        </p:nvSpPr>
+        <p:spPr>
+          <a:xfrm>
+            <a:off x="0" y="0"/>
+            <a:ext cx="12191695" cy="164592"/>
+          </a:xfrm>
+          <a:prstGeom prst="rect">
+            <a:avLst/>
+          </a:prstGeom>
+          <a:solidFill>
+            <a:srgbClr val="3673C8"/>
+          </a:solidFill>
+          <a:ln>
+            <a:noFill/>
+          </a:ln>
+        </p:spPr>
+        <p:style>
+          <a:lnRef idx="1">
+            <a:schemeClr val="accent1"/>
+          </a:lnRef>
+          <a:fillRef idx="3">
+            <a:schemeClr val="accent1"/>
+          </a:fillRef>
+          <a:effectRef idx="2">
+            <a:schemeClr val="accent1"/>
+          </a:effectRef>
+          <a:fontRef idx="minor">
+            <a:schemeClr val="lt1"/>
+          </a:fontRef>
+        </p:style>
+        <p:txBody>
+          <a:bodyPr rtlCol="0" anchor="ctr"/>
+          <a:lstStyle/>
+          <a:p>
+            <a:pPr algn="ctr"/>
+          </a:p>
+        </p:txBody>
+      </p:sp>
+      <p:sp>
+        <p:nvSpPr>
+          <p:cNvPr id="3" name="TextBox 2"/>
+          <p:cNvSpPr txBox="1"/>
+          <p:nvPr/>
+        </p:nvSpPr>
+        <p:spPr>
+          <a:xfrm>
+            <a:off x="502920" y="320040"/>
+            <a:ext cx="8961120" cy="502920"/>
+          </a:xfrm>
+          <a:prstGeom prst="rect">
+            <a:avLst/>
+          </a:prstGeom>
+          <a:noFill/>
+        </p:spPr>
+        <p:txBody>
+          <a:bodyPr wrap="none">
+            <a:spAutoFit/>
+          </a:bodyPr>
+          <a:lstStyle/>
+          <a:p>
+            <a:pPr>
+              <a:defRPr sz="2400" b="1">
+                <a:solidFill>
+                  <a:srgbClr val="142440"/>
+                </a:solidFill>
+              </a:defRPr>
+            </a:pPr>
+            <a:r>
+              <a:t>Business Scenarios Dashboard</a:t>
+            </a:r>
+          </a:p>
+        </p:txBody>
+      </p:sp>
+      <p:sp>
+        <p:nvSpPr>
+          <p:cNvPr id="4" name="TextBox 3"/>
+          <p:cNvSpPr txBox="1"/>
+          <p:nvPr/>
+        </p:nvSpPr>
+        <p:spPr>
+          <a:xfrm>
+            <a:off x="530352" y="822960"/>
+            <a:ext cx="9875520" cy="320040"/>
+          </a:xfrm>
+          <a:prstGeom prst="rect">
+            <a:avLst/>
+          </a:prstGeom>
+          <a:noFill/>
+        </p:spPr>
+        <p:txBody>
+          <a:bodyPr wrap="none">
+            <a:spAutoFit/>
+          </a:bodyPr>
+          <a:lstStyle/>
+          <a:p>
+            <a:pPr>
+              <a:defRPr sz="1050">
+                <a:solidFill>
+                  <a:srgbClr val="667487"/>
+                </a:solidFill>
+              </a:defRPr>
+            </a:pPr>
+            <a:r>
+              <a:t>Realistic payment incidents added to make the demo story feel like production data</a:t>
+            </a:r>
+          </a:p>
+        </p:txBody>
+      </p:sp>
+      <p:sp>
+        <p:nvSpPr>
+          <p:cNvPr id="5" name="TextBox 4"/>
+          <p:cNvSpPr txBox="1"/>
+          <p:nvPr/>
+        </p:nvSpPr>
+        <p:spPr>
+          <a:xfrm>
+            <a:off x="502920" y="6446520"/>
+            <a:ext cx="4572000" cy="228600"/>
+          </a:xfrm>
+          <a:prstGeom prst="rect">
+            <a:avLst/>
+          </a:prstGeom>
+          <a:noFill/>
+        </p:spPr>
+        <p:txBody>
+          <a:bodyPr wrap="none">
+            <a:spAutoFit/>
+          </a:bodyPr>
+          <a:lstStyle/>
+          <a:p>
+            <a:pPr>
+              <a:defRPr sz="800">
+                <a:solidFill>
+                  <a:srgbClr val="667487"/>
+                </a:solidFill>
+              </a:defRPr>
+            </a:pPr>
+            <a:r>
+              <a:t>Elastic Payments Analytics Demo</a:t>
+            </a:r>
+          </a:p>
+        </p:txBody>
+      </p:sp>
+      <p:sp>
+        <p:nvSpPr>
+          <p:cNvPr id="6" name="TextBox 5"/>
+          <p:cNvSpPr txBox="1"/>
+          <p:nvPr/>
+        </p:nvSpPr>
+        <p:spPr>
+          <a:xfrm>
+            <a:off x="9326880" y="6446520"/>
+            <a:ext cx="2377440" cy="228600"/>
+          </a:xfrm>
+          <a:prstGeom prst="rect">
+            <a:avLst/>
+          </a:prstGeom>
+          <a:noFill/>
+        </p:spPr>
+        <p:txBody>
+          <a:bodyPr wrap="none">
+            <a:spAutoFit/>
+          </a:bodyPr>
+          <a:lstStyle/>
+          <a:p>
+            <a:pPr algn="r">
+              <a:defRPr sz="800">
+                <a:solidFill>
+                  <a:srgbClr val="667487"/>
+                </a:solidFill>
+              </a:defRPr>
+            </a:pPr>
+            <a:r>
+              <a:t>Jun 10, 2026</a:t>
+            </a:r>
+          </a:p>
+        </p:txBody>
+      </p:sp>
+      <p:sp>
+        <p:nvSpPr>
+          <p:cNvPr id="7" name="Rounded Rectangle 6"/>
+          <p:cNvSpPr/>
+          <p:nvPr/>
+        </p:nvSpPr>
+        <p:spPr>
+          <a:xfrm>
+            <a:off x="502920" y="1234440"/>
+            <a:ext cx="2148840" cy="1005840"/>
+          </a:xfrm>
+          <a:prstGeom prst="roundRect">
+            <a:avLst/>
+          </a:prstGeom>
+          <a:solidFill>
+            <a:srgbClr val="FFFFFF"/>
+          </a:solidFill>
+          <a:ln>
+            <a:solidFill>
+              <a:srgbClr val="D2DDEB"/>
+            </a:solidFill>
+          </a:ln>
+        </p:spPr>
+        <p:style>
+          <a:lnRef idx="1">
+            <a:schemeClr val="accent1"/>
+          </a:lnRef>
+          <a:fillRef idx="3">
+            <a:schemeClr val="accent1"/>
+          </a:fillRef>
+          <a:effectRef idx="2">
+            <a:schemeClr val="accent1"/>
+          </a:effectRef>
+          <a:fontRef idx="minor">
+            <a:schemeClr val="lt1"/>
+          </a:fontRef>
+        </p:style>
+        <p:txBody>
+          <a:bodyPr rtlCol="0" anchor="ctr"/>
+          <a:lstStyle/>
+          <a:p>
+            <a:pPr algn="ctr"/>
+          </a:p>
+        </p:txBody>
+      </p:sp>
+      <p:sp>
+        <p:nvSpPr>
+          <p:cNvPr id="8" name="Rectangle 7"/>
+          <p:cNvSpPr/>
+          <p:nvPr/>
+        </p:nvSpPr>
+        <p:spPr>
+          <a:xfrm>
+            <a:off x="502920" y="1234440"/>
+            <a:ext cx="73152" cy="1005840"/>
+          </a:xfrm>
+          <a:prstGeom prst="rect">
+            <a:avLst/>
+          </a:prstGeom>
+          <a:solidFill>
+            <a:srgbClr val="3673C8"/>
+          </a:solidFill>
+          <a:ln>
+            <a:noFill/>
+          </a:ln>
+        </p:spPr>
+        <p:style>
+          <a:lnRef idx="1">
+            <a:schemeClr val="accent1"/>
+          </a:lnRef>
+          <a:fillRef idx="3">
+            <a:schemeClr val="accent1"/>
+          </a:fillRef>
+          <a:effectRef idx="2">
+            <a:schemeClr val="accent1"/>
+          </a:effectRef>
+          <a:fontRef idx="minor">
+            <a:schemeClr val="lt1"/>
+          </a:fontRef>
+        </p:style>
+        <p:txBody>
+          <a:bodyPr rtlCol="0" anchor="ctr"/>
+          <a:lstStyle/>
+          <a:p>
+            <a:pPr algn="ctr"/>
+          </a:p>
+        </p:txBody>
+      </p:sp>
+      <p:sp>
+        <p:nvSpPr>
+          <p:cNvPr id="9" name="TextBox 8"/>
+          <p:cNvSpPr txBox="1"/>
+          <p:nvPr/>
+        </p:nvSpPr>
+        <p:spPr>
+          <a:xfrm>
+            <a:off x="704088" y="1371600"/>
+            <a:ext cx="1828800" cy="274320"/>
+          </a:xfrm>
+          <a:prstGeom prst="rect">
+            <a:avLst/>
+          </a:prstGeom>
+          <a:noFill/>
+        </p:spPr>
+        <p:txBody>
+          <a:bodyPr wrap="none">
+            <a:spAutoFit/>
+          </a:bodyPr>
+          <a:lstStyle/>
+          <a:p>
+            <a:pPr>
+              <a:defRPr sz="1000" b="1">
+                <a:solidFill>
+                  <a:srgbClr val="667487"/>
+                </a:solidFill>
+              </a:defRPr>
+            </a:pPr>
+            <a:r>
+              <a:t>Scenario Txns</a:t>
+            </a:r>
+          </a:p>
+        </p:txBody>
+      </p:sp>
+      <p:sp>
+        <p:nvSpPr>
+          <p:cNvPr id="10" name="TextBox 9"/>
+          <p:cNvSpPr txBox="1"/>
+          <p:nvPr/>
+        </p:nvSpPr>
+        <p:spPr>
+          <a:xfrm>
+            <a:off x="704088" y="1673352"/>
+            <a:ext cx="1828800" cy="502920"/>
+          </a:xfrm>
+          <a:prstGeom prst="rect">
+            <a:avLst/>
+          </a:prstGeom>
+          <a:noFill/>
+        </p:spPr>
+        <p:txBody>
+          <a:bodyPr wrap="none">
+            <a:spAutoFit/>
+          </a:bodyPr>
+          <a:lstStyle/>
+          <a:p>
+            <a:pPr>
+              <a:defRPr sz="2200" b="1">
+                <a:solidFill>
+                  <a:srgbClr val="142440"/>
+                </a:solidFill>
+              </a:defRPr>
+            </a:pPr>
+            <a:r>
+              <a:t>66,500</a:t>
+            </a:r>
+          </a:p>
+        </p:txBody>
+      </p:sp>
+      <p:sp>
+        <p:nvSpPr>
+          <p:cNvPr id="11" name="Rounded Rectangle 10"/>
+          <p:cNvSpPr/>
+          <p:nvPr/>
+        </p:nvSpPr>
+        <p:spPr>
+          <a:xfrm>
+            <a:off x="2788920" y="1234440"/>
+            <a:ext cx="2148840" cy="1005840"/>
+          </a:xfrm>
+          <a:prstGeom prst="roundRect">
+            <a:avLst/>
+          </a:prstGeom>
+          <a:solidFill>
+            <a:srgbClr val="FFFFFF"/>
+          </a:solidFill>
+          <a:ln>
+            <a:solidFill>
+              <a:srgbClr val="D2DDEB"/>
+            </a:solidFill>
+          </a:ln>
+        </p:spPr>
+        <p:style>
+          <a:lnRef idx="1">
+            <a:schemeClr val="accent1"/>
+          </a:lnRef>
+          <a:fillRef idx="3">
+            <a:schemeClr val="accent1"/>
+          </a:fillRef>
+          <a:effectRef idx="2">
+            <a:schemeClr val="accent1"/>
+          </a:effectRef>
+          <a:fontRef idx="minor">
+            <a:schemeClr val="lt1"/>
+          </a:fontRef>
+        </p:style>
+        <p:txBody>
+          <a:bodyPr rtlCol="0" anchor="ctr"/>
+          <a:lstStyle/>
+          <a:p>
+            <a:pPr algn="ctr"/>
+          </a:p>
+        </p:txBody>
+      </p:sp>
+      <p:sp>
+        <p:nvSpPr>
+          <p:cNvPr id="12" name="Rectangle 11"/>
+          <p:cNvSpPr/>
+          <p:nvPr/>
+        </p:nvSpPr>
+        <p:spPr>
+          <a:xfrm>
+            <a:off x="2788920" y="1234440"/>
+            <a:ext cx="73152" cy="1005840"/>
+          </a:xfrm>
+          <a:prstGeom prst="rect">
+            <a:avLst/>
+          </a:prstGeom>
+          <a:solidFill>
+            <a:srgbClr val="D24848"/>
+          </a:solidFill>
+          <a:ln>
+            <a:noFill/>
+          </a:ln>
+        </p:spPr>
+        <p:style>
+          <a:lnRef idx="1">
+            <a:schemeClr val="accent1"/>
+          </a:lnRef>
+          <a:fillRef idx="3">
+            <a:schemeClr val="accent1"/>
+          </a:fillRef>
+          <a:effectRef idx="2">
+            <a:schemeClr val="accent1"/>
+          </a:effectRef>
+          <a:fontRef idx="minor">
+            <a:schemeClr val="lt1"/>
+          </a:fontRef>
+        </p:style>
+        <p:txBody>
+          <a:bodyPr rtlCol="0" anchor="ctr"/>
+          <a:lstStyle/>
+          <a:p>
+            <a:pPr algn="ctr"/>
+          </a:p>
+        </p:txBody>
+      </p:sp>
+      <p:sp>
+        <p:nvSpPr>
+          <p:cNvPr id="13" name="TextBox 12"/>
+          <p:cNvSpPr txBox="1"/>
+          <p:nvPr/>
+        </p:nvSpPr>
+        <p:spPr>
+          <a:xfrm>
+            <a:off x="2990088" y="1371600"/>
+            <a:ext cx="1828800" cy="274320"/>
+          </a:xfrm>
+          <a:prstGeom prst="rect">
+            <a:avLst/>
+          </a:prstGeom>
+          <a:noFill/>
+        </p:spPr>
+        <p:txBody>
+          <a:bodyPr wrap="none">
+            <a:spAutoFit/>
+          </a:bodyPr>
+          <a:lstStyle/>
+          <a:p>
+            <a:pPr>
+              <a:defRPr sz="1000" b="1">
+                <a:solidFill>
+                  <a:srgbClr val="667487"/>
+                </a:solidFill>
+              </a:defRPr>
+            </a:pPr>
+            <a:r>
+              <a:t>02:00 Failures</a:t>
+            </a:r>
+          </a:p>
+        </p:txBody>
+      </p:sp>
+      <p:sp>
+        <p:nvSpPr>
+          <p:cNvPr id="14" name="TextBox 13"/>
+          <p:cNvSpPr txBox="1"/>
+          <p:nvPr/>
+        </p:nvSpPr>
+        <p:spPr>
+          <a:xfrm>
+            <a:off x="2990088" y="1673352"/>
+            <a:ext cx="1828800" cy="502920"/>
+          </a:xfrm>
+          <a:prstGeom prst="rect">
+            <a:avLst/>
+          </a:prstGeom>
+          <a:noFill/>
+        </p:spPr>
+        <p:txBody>
+          <a:bodyPr wrap="none">
+            <a:spAutoFit/>
+          </a:bodyPr>
+          <a:lstStyle/>
+          <a:p>
+            <a:pPr>
+              <a:defRPr sz="2200" b="1">
+                <a:solidFill>
+                  <a:srgbClr val="142440"/>
+                </a:solidFill>
+              </a:defRPr>
+            </a:pPr>
+            <a:r>
+              <a:t>12,000</a:t>
+            </a:r>
+          </a:p>
+        </p:txBody>
+      </p:sp>
+      <p:sp>
+        <p:nvSpPr>
+          <p:cNvPr id="15" name="Rounded Rectangle 14"/>
+          <p:cNvSpPr/>
+          <p:nvPr/>
+        </p:nvSpPr>
+        <p:spPr>
+          <a:xfrm>
+            <a:off x="5074920" y="1234440"/>
+            <a:ext cx="2148840" cy="1005840"/>
+          </a:xfrm>
+          <a:prstGeom prst="roundRect">
+            <a:avLst/>
+          </a:prstGeom>
+          <a:solidFill>
+            <a:srgbClr val="FFFFFF"/>
+          </a:solidFill>
+          <a:ln>
+            <a:solidFill>
+              <a:srgbClr val="D2DDEB"/>
+            </a:solidFill>
+          </a:ln>
+        </p:spPr>
+        <p:style>
+          <a:lnRef idx="1">
+            <a:schemeClr val="accent1"/>
+          </a:lnRef>
+          <a:fillRef idx="3">
+            <a:schemeClr val="accent1"/>
+          </a:fillRef>
+          <a:effectRef idx="2">
+            <a:schemeClr val="accent1"/>
+          </a:effectRef>
+          <a:fontRef idx="minor">
+            <a:schemeClr val="lt1"/>
+          </a:fontRef>
+        </p:style>
+        <p:txBody>
+          <a:bodyPr rtlCol="0" anchor="ctr"/>
+          <a:lstStyle/>
+          <a:p>
+            <a:pPr algn="ctr"/>
+          </a:p>
+        </p:txBody>
+      </p:sp>
+      <p:sp>
+        <p:nvSpPr>
+          <p:cNvPr id="16" name="Rectangle 15"/>
+          <p:cNvSpPr/>
+          <p:nvPr/>
+        </p:nvSpPr>
+        <p:spPr>
+          <a:xfrm>
+            <a:off x="5074920" y="1234440"/>
+            <a:ext cx="73152" cy="1005840"/>
+          </a:xfrm>
+          <a:prstGeom prst="rect">
+            <a:avLst/>
+          </a:prstGeom>
+          <a:solidFill>
+            <a:srgbClr val="00959C"/>
+          </a:solidFill>
+          <a:ln>
+            <a:noFill/>
+          </a:ln>
+        </p:spPr>
+        <p:style>
+          <a:lnRef idx="1">
+            <a:schemeClr val="accent1"/>
+          </a:lnRef>
+          <a:fillRef idx="3">
+            <a:schemeClr val="accent1"/>
+          </a:fillRef>
+          <a:effectRef idx="2">
+            <a:schemeClr val="accent1"/>
+          </a:effectRef>
+          <a:fontRef idx="minor">
+            <a:schemeClr val="lt1"/>
+          </a:fontRef>
+        </p:style>
+        <p:txBody>
+          <a:bodyPr rtlCol="0" anchor="ctr"/>
+          <a:lstStyle/>
+          <a:p>
+            <a:pPr algn="ctr"/>
+          </a:p>
+        </p:txBody>
+      </p:sp>
+      <p:sp>
+        <p:nvSpPr>
+          <p:cNvPr id="17" name="TextBox 16"/>
+          <p:cNvSpPr txBox="1"/>
+          <p:nvPr/>
+        </p:nvSpPr>
+        <p:spPr>
+          <a:xfrm>
+            <a:off x="5276088" y="1371600"/>
+            <a:ext cx="1828800" cy="274320"/>
+          </a:xfrm>
+          <a:prstGeom prst="rect">
+            <a:avLst/>
+          </a:prstGeom>
+          <a:noFill/>
+        </p:spPr>
+        <p:txBody>
+          <a:bodyPr wrap="none">
+            <a:spAutoFit/>
+          </a:bodyPr>
+          <a:lstStyle/>
+          <a:p>
+            <a:pPr>
+              <a:defRPr sz="1000" b="1">
+                <a:solidFill>
+                  <a:srgbClr val="667487"/>
+                </a:solidFill>
+              </a:defRPr>
+            </a:pPr>
+            <a:r>
+              <a:t>Top Merchant</a:t>
+            </a:r>
+          </a:p>
+        </p:txBody>
+      </p:sp>
+      <p:sp>
+        <p:nvSpPr>
+          <p:cNvPr id="18" name="TextBox 17"/>
+          <p:cNvSpPr txBox="1"/>
+          <p:nvPr/>
+        </p:nvSpPr>
+        <p:spPr>
+          <a:xfrm>
+            <a:off x="5276088" y="1673352"/>
+            <a:ext cx="1828800" cy="502920"/>
+          </a:xfrm>
+          <a:prstGeom prst="rect">
+            <a:avLst/>
+          </a:prstGeom>
+          <a:noFill/>
+        </p:spPr>
+        <p:txBody>
+          <a:bodyPr wrap="none">
+            <a:spAutoFit/>
+          </a:bodyPr>
+          <a:lstStyle/>
+          <a:p>
+            <a:pPr>
+              <a:defRPr sz="2200" b="1">
+                <a:solidFill>
+                  <a:srgbClr val="142440"/>
+                </a:solidFill>
+              </a:defRPr>
+            </a:pPr>
+            <a:r>
+              <a:t>merch-42424</a:t>
+            </a:r>
+          </a:p>
+        </p:txBody>
+      </p:sp>
+      <p:sp>
+        <p:nvSpPr>
+          <p:cNvPr id="19" name="Rounded Rectangle 18"/>
+          <p:cNvSpPr/>
+          <p:nvPr/>
+        </p:nvSpPr>
+        <p:spPr>
+          <a:xfrm>
+            <a:off x="7360920" y="1234440"/>
+            <a:ext cx="2148840" cy="1005840"/>
+          </a:xfrm>
+          <a:prstGeom prst="roundRect">
+            <a:avLst/>
+          </a:prstGeom>
+          <a:solidFill>
+            <a:srgbClr val="FFFFFF"/>
+          </a:solidFill>
+          <a:ln>
+            <a:solidFill>
+              <a:srgbClr val="D2DDEB"/>
+            </a:solidFill>
+          </a:ln>
+        </p:spPr>
+        <p:style>
+          <a:lnRef idx="1">
+            <a:schemeClr val="accent1"/>
+          </a:lnRef>
+          <a:fillRef idx="3">
+            <a:schemeClr val="accent1"/>
+          </a:fillRef>
+          <a:effectRef idx="2">
+            <a:schemeClr val="accent1"/>
+          </a:effectRef>
+          <a:fontRef idx="minor">
+            <a:schemeClr val="lt1"/>
+          </a:fontRef>
+        </p:style>
+        <p:txBody>
+          <a:bodyPr rtlCol="0" anchor="ctr"/>
+          <a:lstStyle/>
+          <a:p>
+            <a:pPr algn="ctr"/>
+          </a:p>
+        </p:txBody>
+      </p:sp>
+      <p:sp>
+        <p:nvSpPr>
+          <p:cNvPr id="20" name="Rectangle 19"/>
+          <p:cNvSpPr/>
+          <p:nvPr/>
+        </p:nvSpPr>
+        <p:spPr>
+          <a:xfrm>
+            <a:off x="7360920" y="1234440"/>
+            <a:ext cx="73152" cy="1005840"/>
+          </a:xfrm>
+          <a:prstGeom prst="rect">
+            <a:avLst/>
+          </a:prstGeom>
+          <a:solidFill>
+            <a:srgbClr val="EF8438"/>
+          </a:solidFill>
+          <a:ln>
+            <a:noFill/>
+          </a:ln>
+        </p:spPr>
+        <p:style>
+          <a:lnRef idx="1">
+            <a:schemeClr val="accent1"/>
+          </a:lnRef>
+          <a:fillRef idx="3">
+            <a:schemeClr val="accent1"/>
+          </a:fillRef>
+          <a:effectRef idx="2">
+            <a:schemeClr val="accent1"/>
+          </a:effectRef>
+          <a:fontRef idx="minor">
+            <a:schemeClr val="lt1"/>
+          </a:fontRef>
+        </p:style>
+        <p:txBody>
+          <a:bodyPr rtlCol="0" anchor="ctr"/>
+          <a:lstStyle/>
+          <a:p>
+            <a:pPr algn="ctr"/>
+          </a:p>
+        </p:txBody>
+      </p:sp>
+      <p:sp>
+        <p:nvSpPr>
+          <p:cNvPr id="21" name="TextBox 20"/>
+          <p:cNvSpPr txBox="1"/>
+          <p:nvPr/>
+        </p:nvSpPr>
+        <p:spPr>
+          <a:xfrm>
+            <a:off x="7562088" y="1371600"/>
+            <a:ext cx="1828800" cy="274320"/>
+          </a:xfrm>
+          <a:prstGeom prst="rect">
+            <a:avLst/>
+          </a:prstGeom>
+          <a:noFill/>
+        </p:spPr>
+        <p:txBody>
+          <a:bodyPr wrap="none">
+            <a:spAutoFit/>
+          </a:bodyPr>
+          <a:lstStyle/>
+          <a:p>
+            <a:pPr>
+              <a:defRPr sz="1000" b="1">
+                <a:solidFill>
+                  <a:srgbClr val="667487"/>
+                </a:solidFill>
+              </a:defRPr>
+            </a:pPr>
+            <a:r>
+              <a:t>Brazil Failure Rate</a:t>
+            </a:r>
+          </a:p>
+        </p:txBody>
+      </p:sp>
+      <p:sp>
+        <p:nvSpPr>
+          <p:cNvPr id="22" name="TextBox 21"/>
+          <p:cNvSpPr txBox="1"/>
+          <p:nvPr/>
+        </p:nvSpPr>
+        <p:spPr>
+          <a:xfrm>
+            <a:off x="7562088" y="1673352"/>
+            <a:ext cx="1828800" cy="502920"/>
+          </a:xfrm>
+          <a:prstGeom prst="rect">
+            <a:avLst/>
+          </a:prstGeom>
+          <a:noFill/>
+        </p:spPr>
+        <p:txBody>
+          <a:bodyPr wrap="none">
+            <a:spAutoFit/>
+          </a:bodyPr>
+          <a:lstStyle/>
+          <a:p>
+            <a:pPr>
+              <a:defRPr sz="2200" b="1">
+                <a:solidFill>
+                  <a:srgbClr val="142440"/>
+                </a:solidFill>
+              </a:defRPr>
+            </a:pPr>
+            <a:r>
+              <a:t>84.29%</a:t>
+            </a:r>
+          </a:p>
+        </p:txBody>
+      </p:sp>
+      <p:sp>
+        <p:nvSpPr>
+          <p:cNvPr id="23" name="Rounded Rectangle 22"/>
+          <p:cNvSpPr/>
+          <p:nvPr/>
+        </p:nvSpPr>
+        <p:spPr>
+          <a:xfrm>
+            <a:off x="9646920" y="1234440"/>
+            <a:ext cx="2057400" cy="1005840"/>
+          </a:xfrm>
+          <a:prstGeom prst="roundRect">
+            <a:avLst/>
+          </a:prstGeom>
+          <a:solidFill>
+            <a:srgbClr val="FFFFFF"/>
+          </a:solidFill>
+          <a:ln>
+            <a:solidFill>
+              <a:srgbClr val="D2DDEB"/>
+            </a:solidFill>
+          </a:ln>
+        </p:spPr>
+        <p:style>
+          <a:lnRef idx="1">
+            <a:schemeClr val="accent1"/>
+          </a:lnRef>
+          <a:fillRef idx="3">
+            <a:schemeClr val="accent1"/>
+          </a:fillRef>
+          <a:effectRef idx="2">
+            <a:schemeClr val="accent1"/>
+          </a:effectRef>
+          <a:fontRef idx="minor">
+            <a:schemeClr val="lt1"/>
+          </a:fontRef>
+        </p:style>
+        <p:txBody>
+          <a:bodyPr rtlCol="0" anchor="ctr"/>
+          <a:lstStyle/>
+          <a:p>
+            <a:pPr algn="ctr"/>
+          </a:p>
+        </p:txBody>
+      </p:sp>
+      <p:sp>
+        <p:nvSpPr>
+          <p:cNvPr id="24" name="Rectangle 23"/>
+          <p:cNvSpPr/>
+          <p:nvPr/>
+        </p:nvSpPr>
+        <p:spPr>
+          <a:xfrm>
+            <a:off x="9646920" y="1234440"/>
+            <a:ext cx="73152" cy="1005840"/>
+          </a:xfrm>
+          <a:prstGeom prst="rect">
+            <a:avLst/>
+          </a:prstGeom>
+          <a:solidFill>
+            <a:srgbClr val="7058BE"/>
+          </a:solidFill>
+          <a:ln>
+            <a:noFill/>
+          </a:ln>
+        </p:spPr>
+        <p:style>
+          <a:lnRef idx="1">
+            <a:schemeClr val="accent1"/>
+          </a:lnRef>
+          <a:fillRef idx="3">
+            <a:schemeClr val="accent1"/>
+          </a:fillRef>
+          <a:effectRef idx="2">
+            <a:schemeClr val="accent1"/>
+          </a:effectRef>
+          <a:fontRef idx="minor">
+            <a:schemeClr val="lt1"/>
+          </a:fontRef>
+        </p:style>
+        <p:txBody>
+          <a:bodyPr rtlCol="0" anchor="ctr"/>
+          <a:lstStyle/>
+          <a:p>
+            <a:pPr algn="ctr"/>
+          </a:p>
+        </p:txBody>
+      </p:sp>
+      <p:sp>
+        <p:nvSpPr>
+          <p:cNvPr id="25" name="TextBox 24"/>
+          <p:cNvSpPr txBox="1"/>
+          <p:nvPr/>
+        </p:nvSpPr>
+        <p:spPr>
+          <a:xfrm>
+            <a:off x="9848088" y="1371600"/>
+            <a:ext cx="1737360" cy="274320"/>
+          </a:xfrm>
+          <a:prstGeom prst="rect">
+            <a:avLst/>
+          </a:prstGeom>
+          <a:noFill/>
+        </p:spPr>
+        <p:txBody>
+          <a:bodyPr wrap="none">
+            <a:spAutoFit/>
+          </a:bodyPr>
+          <a:lstStyle/>
+          <a:p>
+            <a:pPr>
+              <a:defRPr sz="1000" b="1">
+                <a:solidFill>
+                  <a:srgbClr val="667487"/>
+                </a:solidFill>
+              </a:defRPr>
+            </a:pPr>
+            <a:r>
+              <a:t>Latency P95</a:t>
+            </a:r>
+          </a:p>
+        </p:txBody>
+      </p:sp>
+      <p:sp>
+        <p:nvSpPr>
+          <p:cNvPr id="26" name="TextBox 25"/>
+          <p:cNvSpPr txBox="1"/>
+          <p:nvPr/>
+        </p:nvSpPr>
+        <p:spPr>
+          <a:xfrm>
+            <a:off x="9848088" y="1673352"/>
+            <a:ext cx="1737360" cy="502920"/>
+          </a:xfrm>
+          <a:prstGeom prst="rect">
+            <a:avLst/>
+          </a:prstGeom>
+          <a:noFill/>
+        </p:spPr>
+        <p:txBody>
+          <a:bodyPr wrap="none">
+            <a:spAutoFit/>
+          </a:bodyPr>
+          <a:lstStyle/>
+          <a:p>
+            <a:pPr>
+              <a:defRPr sz="2200" b="1">
+                <a:solidFill>
+                  <a:srgbClr val="142440"/>
+                </a:solidFill>
+              </a:defRPr>
+            </a:pPr>
+            <a:r>
+              <a:t>3,279 ms</a:t>
+            </a:r>
+          </a:p>
+        </p:txBody>
+      </p:sp>
+      <p:sp>
+        <p:nvSpPr>
+          <p:cNvPr id="27" name="TextBox 26"/>
+          <p:cNvSpPr txBox="1"/>
+          <p:nvPr/>
+        </p:nvSpPr>
+        <p:spPr>
+          <a:xfrm>
+            <a:off x="822960" y="2788920"/>
+            <a:ext cx="5212080" cy="2057400"/>
+          </a:xfrm>
+          <a:prstGeom prst="rect">
+            <a:avLst/>
+          </a:prstGeom>
+          <a:noFill/>
+        </p:spPr>
+        <p:txBody>
+          <a:bodyPr wrap="square">
+            <a:spAutoFit/>
+          </a:bodyPr>
+          <a:lstStyle/>
+          <a:p>
+            <a:pPr>
+              <a:buChar char="•"/>
+              <a:spcAft>
+                <a:spcPts val="800"/>
+              </a:spcAft>
+              <a:defRPr sz="1400">
+                <a:solidFill>
+                  <a:srgbClr val="222D3D"/>
+                </a:solidFill>
+              </a:defRPr>
+            </a:pPr>
+            <a:r>
+              <a:t>Adds a visible failure spike between 02:00 and 03:00 UTC.</a:t>
+            </a:r>
+          </a:p>
+          <a:p>
+            <a:pPr>
+              <a:buChar char="•"/>
+              <a:spcAft>
+                <a:spcPts val="800"/>
+              </a:spcAft>
+              <a:defRPr sz="1400">
+                <a:solidFill>
+                  <a:srgbClr val="222D3D"/>
+                </a:solidFill>
+              </a:defRPr>
+            </a:pPr>
+            <a:r>
+              <a:t>Merchant merch-42424 becomes an obvious volume outlier with 15,000 transactions.</a:t>
+            </a:r>
+          </a:p>
+          <a:p>
+            <a:pPr>
+              <a:buChar char="•"/>
+              <a:spcAft>
+                <a:spcPts val="800"/>
+              </a:spcAft>
+              <a:defRPr sz="1400">
+                <a:solidFill>
+                  <a:srgbClr val="222D3D"/>
+                </a:solidFill>
+              </a:defRPr>
+            </a:pPr>
+            <a:r>
+              <a:t>Brazil shows an elevated failure rate of 84.29%.</a:t>
+            </a:r>
+          </a:p>
+          <a:p>
+            <a:pPr>
+              <a:buChar char="•"/>
+              <a:spcAft>
+                <a:spcPts val="800"/>
+              </a:spcAft>
+              <a:defRPr sz="1400">
+                <a:solidFill>
+                  <a:srgbClr val="222D3D"/>
+                </a:solidFill>
+              </a:defRPr>
+            </a:pPr>
+            <a:r>
+              <a:t>High-value transactions reach $9,496.</a:t>
+            </a:r>
+          </a:p>
+          <a:p>
+            <a:pPr>
+              <a:buChar char="•"/>
+              <a:spcAft>
+                <a:spcPts val="800"/>
+              </a:spcAft>
+              <a:defRPr sz="1400">
+                <a:solidFill>
+                  <a:srgbClr val="222D3D"/>
+                </a:solidFill>
+              </a:defRPr>
+            </a:pPr>
+            <a:r>
+              <a:t>Latency incident shows baseline around 100ms, jump near 3000ms, and recovery.</a:t>
+            </a:r>
+          </a:p>
+        </p:txBody>
+      </p:sp>
+      <p:sp>
+        <p:nvSpPr>
+          <p:cNvPr id="28" name="TextBox 27"/>
+          <p:cNvSpPr txBox="1"/>
+          <p:nvPr/>
+        </p:nvSpPr>
+        <p:spPr>
+          <a:xfrm>
+            <a:off x="6400800" y="2715768"/>
+            <a:ext cx="4389120" cy="274320"/>
+          </a:xfrm>
+          <a:prstGeom prst="rect">
+            <a:avLst/>
+          </a:prstGeom>
+          <a:noFill/>
+        </p:spPr>
+        <p:txBody>
+          <a:bodyPr wrap="none">
+            <a:spAutoFit/>
+          </a:bodyPr>
+          <a:lstStyle/>
+          <a:p>
+            <a:pPr>
+              <a:defRPr b="1" sz="1200">
+                <a:solidFill>
+                  <a:srgbClr val="142440"/>
+                </a:solidFill>
+              </a:defRPr>
+            </a:pPr>
+            <a:r>
+              <a:t>Scenario volumes</a:t>
+            </a:r>
+          </a:p>
+        </p:txBody>
+      </p:sp>
+      <p:sp>
+        <p:nvSpPr>
+          <p:cNvPr id="29" name="Rectangle 28"/>
+          <p:cNvSpPr/>
+          <p:nvPr/>
+        </p:nvSpPr>
+        <p:spPr>
+          <a:xfrm>
+            <a:off x="6400800" y="3063240"/>
+            <a:ext cx="3291840" cy="347472"/>
+          </a:xfrm>
+          <a:prstGeom prst="rect">
+            <a:avLst/>
+          </a:prstGeom>
+          <a:solidFill>
+            <a:srgbClr val="142440"/>
+          </a:solidFill>
+          <a:ln>
+            <a:solidFill>
+              <a:srgbClr val="FFFFFF"/>
+            </a:solidFill>
+          </a:ln>
+        </p:spPr>
+        <p:style>
+          <a:lnRef idx="1">
+            <a:schemeClr val="accent1"/>
+          </a:lnRef>
+          <a:fillRef idx="3">
+            <a:schemeClr val="accent1"/>
+          </a:fillRef>
+          <a:effectRef idx="2">
+            <a:schemeClr val="accent1"/>
+          </a:effectRef>
+          <a:fontRef idx="minor">
+            <a:schemeClr val="lt1"/>
+          </a:fontRef>
+        </p:style>
+        <p:txBody>
+          <a:bodyPr rtlCol="0" anchor="ctr"/>
+          <a:lstStyle/>
+          <a:p>
+            <a:pPr algn="ctr"/>
+          </a:p>
+        </p:txBody>
+      </p:sp>
+      <p:sp>
+        <p:nvSpPr>
+          <p:cNvPr id="30" name="TextBox 29"/>
+          <p:cNvSpPr txBox="1"/>
+          <p:nvPr/>
+        </p:nvSpPr>
+        <p:spPr>
+          <a:xfrm>
+            <a:off x="6446520" y="3127248"/>
+            <a:ext cx="3200400" cy="292608"/>
+          </a:xfrm>
+          <a:prstGeom prst="rect">
+            <a:avLst/>
+          </a:prstGeom>
+          <a:noFill/>
+        </p:spPr>
+        <p:txBody>
+          <a:bodyPr wrap="none">
+            <a:spAutoFit/>
+          </a:bodyPr>
+          <a:lstStyle/>
+          <a:p>
+            <a:pPr>
+              <a:defRPr sz="850" b="1">
+                <a:solidFill>
+                  <a:srgbClr val="FFFFFF"/>
+                </a:solidFill>
+              </a:defRPr>
+            </a:pPr>
+            <a:r>
+              <a:t>Scenario</a:t>
+            </a:r>
+          </a:p>
+        </p:txBody>
+      </p:sp>
+      <p:sp>
+        <p:nvSpPr>
+          <p:cNvPr id="31" name="Rectangle 30"/>
+          <p:cNvSpPr/>
+          <p:nvPr/>
+        </p:nvSpPr>
+        <p:spPr>
+          <a:xfrm>
+            <a:off x="9692640" y="3063240"/>
+            <a:ext cx="1097280" cy="347472"/>
+          </a:xfrm>
+          <a:prstGeom prst="rect">
+            <a:avLst/>
+          </a:prstGeom>
+          <a:solidFill>
+            <a:srgbClr val="142440"/>
+          </a:solidFill>
+          <a:ln>
+            <a:solidFill>
+              <a:srgbClr val="FFFFFF"/>
+            </a:solidFill>
+          </a:ln>
+        </p:spPr>
+        <p:style>
+          <a:lnRef idx="1">
+            <a:schemeClr val="accent1"/>
+          </a:lnRef>
+          <a:fillRef idx="3">
+            <a:schemeClr val="accent1"/>
+          </a:fillRef>
+          <a:effectRef idx="2">
+            <a:schemeClr val="accent1"/>
+          </a:effectRef>
+          <a:fontRef idx="minor">
+            <a:schemeClr val="lt1"/>
+          </a:fontRef>
+        </p:style>
+        <p:txBody>
+          <a:bodyPr rtlCol="0" anchor="ctr"/>
+          <a:lstStyle/>
+          <a:p>
+            <a:pPr algn="ctr"/>
+          </a:p>
+        </p:txBody>
+      </p:sp>
+      <p:sp>
+        <p:nvSpPr>
+          <p:cNvPr id="32" name="TextBox 31"/>
+          <p:cNvSpPr txBox="1"/>
+          <p:nvPr/>
+        </p:nvSpPr>
+        <p:spPr>
+          <a:xfrm>
+            <a:off x="9738360" y="3127248"/>
+            <a:ext cx="1005839" cy="292608"/>
+          </a:xfrm>
+          <a:prstGeom prst="rect">
+            <a:avLst/>
+          </a:prstGeom>
+          <a:noFill/>
+        </p:spPr>
+        <p:txBody>
+          <a:bodyPr wrap="none">
+            <a:spAutoFit/>
+          </a:bodyPr>
+          <a:lstStyle/>
+          <a:p>
+            <a:pPr>
+              <a:defRPr sz="850" b="1">
+                <a:solidFill>
+                  <a:srgbClr val="FFFFFF"/>
+                </a:solidFill>
+              </a:defRPr>
+            </a:pPr>
+            <a:r>
+              <a:t>Txns</a:t>
+            </a:r>
+          </a:p>
+        </p:txBody>
+      </p:sp>
+      <p:sp>
+        <p:nvSpPr>
+          <p:cNvPr id="33" name="Rectangle 32"/>
+          <p:cNvSpPr/>
+          <p:nvPr/>
+        </p:nvSpPr>
+        <p:spPr>
+          <a:xfrm>
+            <a:off x="6400800" y="3410712"/>
+            <a:ext cx="3291840" cy="347472"/>
+          </a:xfrm>
+          <a:prstGeom prst="rect">
+            <a:avLst/>
+          </a:prstGeom>
+          <a:solidFill>
+            <a:srgbClr val="FFFFFF"/>
+          </a:solidFill>
+          <a:ln>
+            <a:solidFill>
+              <a:srgbClr val="D2DDEB"/>
+            </a:solidFill>
+          </a:ln>
+        </p:spPr>
+        <p:style>
+          <a:lnRef idx="1">
+            <a:schemeClr val="accent1"/>
+          </a:lnRef>
+          <a:fillRef idx="3">
+            <a:schemeClr val="accent1"/>
+          </a:fillRef>
+          <a:effectRef idx="2">
+            <a:schemeClr val="accent1"/>
+          </a:effectRef>
+          <a:fontRef idx="minor">
+            <a:schemeClr val="lt1"/>
+          </a:fontRef>
+        </p:style>
+        <p:txBody>
+          <a:bodyPr rtlCol="0" anchor="ctr"/>
+          <a:lstStyle/>
+          <a:p>
+            <a:pPr algn="ctr"/>
+          </a:p>
+        </p:txBody>
+      </p:sp>
+      <p:sp>
+        <p:nvSpPr>
+          <p:cNvPr id="34" name="TextBox 33"/>
+          <p:cNvSpPr txBox="1"/>
+          <p:nvPr/>
+        </p:nvSpPr>
+        <p:spPr>
+          <a:xfrm>
+            <a:off x="6446520" y="3474720"/>
+            <a:ext cx="3200400" cy="292608"/>
+          </a:xfrm>
+          <a:prstGeom prst="rect">
+            <a:avLst/>
+          </a:prstGeom>
+          <a:noFill/>
+        </p:spPr>
+        <p:txBody>
+          <a:bodyPr wrap="none">
+            <a:spAutoFit/>
+          </a:bodyPr>
+          <a:lstStyle/>
+          <a:p>
+            <a:pPr>
+              <a:defRPr sz="850">
+                <a:solidFill>
+                  <a:srgbClr val="222D3D"/>
+                </a:solidFill>
+              </a:defRPr>
+            </a:pPr>
+            <a:r>
+              <a:t>Brazil elevated decline rate</a:t>
+            </a:r>
+          </a:p>
+        </p:txBody>
+      </p:sp>
+      <p:sp>
+        <p:nvSpPr>
+          <p:cNvPr id="35" name="Rectangle 34"/>
+          <p:cNvSpPr/>
+          <p:nvPr/>
+        </p:nvSpPr>
+        <p:spPr>
+          <a:xfrm>
+            <a:off x="9692640" y="3410712"/>
+            <a:ext cx="1097280" cy="347472"/>
+          </a:xfrm>
+          <a:prstGeom prst="rect">
+            <a:avLst/>
+          </a:prstGeom>
+          <a:solidFill>
+            <a:srgbClr val="FFFFFF"/>
+          </a:solidFill>
+          <a:ln>
+            <a:solidFill>
+              <a:srgbClr val="D2DDEB"/>
+            </a:solidFill>
+          </a:ln>
+        </p:spPr>
+        <p:style>
+          <a:lnRef idx="1">
+            <a:schemeClr val="accent1"/>
+          </a:lnRef>
+          <a:fillRef idx="3">
+            <a:schemeClr val="accent1"/>
+          </a:fillRef>
+          <a:effectRef idx="2">
+            <a:schemeClr val="accent1"/>
+          </a:effectRef>
+          <a:fontRef idx="minor">
+            <a:schemeClr val="lt1"/>
+          </a:fontRef>
+        </p:style>
+        <p:txBody>
+          <a:bodyPr rtlCol="0" anchor="ctr"/>
+          <a:lstStyle/>
+          <a:p>
+            <a:pPr algn="ctr"/>
+          </a:p>
+        </p:txBody>
+      </p:sp>
+      <p:sp>
+        <p:nvSpPr>
+          <p:cNvPr id="36" name="TextBox 35"/>
+          <p:cNvSpPr txBox="1"/>
+          <p:nvPr/>
+        </p:nvSpPr>
+        <p:spPr>
+          <a:xfrm>
+            <a:off x="9738360" y="3474720"/>
+            <a:ext cx="1005839" cy="292608"/>
+          </a:xfrm>
+          <a:prstGeom prst="rect">
+            <a:avLst/>
+          </a:prstGeom>
+          <a:noFill/>
+        </p:spPr>
+        <p:txBody>
+          <a:bodyPr wrap="none">
+            <a:spAutoFit/>
+          </a:bodyPr>
+          <a:lstStyle/>
+          <a:p>
+            <a:pPr>
+              <a:defRPr sz="850">
+                <a:solidFill>
+                  <a:srgbClr val="222D3D"/>
+                </a:solidFill>
+              </a:defRPr>
+            </a:pPr>
+            <a:r>
+              <a:t>22,000</a:t>
+            </a:r>
+          </a:p>
+        </p:txBody>
+      </p:sp>
+      <p:sp>
+        <p:nvSpPr>
+          <p:cNvPr id="37" name="Rectangle 36"/>
+          <p:cNvSpPr/>
+          <p:nvPr/>
+        </p:nvSpPr>
+        <p:spPr>
+          <a:xfrm>
+            <a:off x="6400800" y="3758184"/>
+            <a:ext cx="3291840" cy="347472"/>
+          </a:xfrm>
+          <a:prstGeom prst="rect">
+            <a:avLst/>
+          </a:prstGeom>
+          <a:solidFill>
+            <a:srgbClr val="FFFFFF"/>
+          </a:solidFill>
+          <a:ln>
+            <a:solidFill>
+              <a:srgbClr val="D2DDEB"/>
+            </a:solidFill>
+          </a:ln>
+        </p:spPr>
+        <p:style>
+          <a:lnRef idx="1">
+            <a:schemeClr val="accent1"/>
+          </a:lnRef>
+          <a:fillRef idx="3">
+            <a:schemeClr val="accent1"/>
+          </a:fillRef>
+          <a:effectRef idx="2">
+            <a:schemeClr val="accent1"/>
+          </a:effectRef>
+          <a:fontRef idx="minor">
+            <a:schemeClr val="lt1"/>
+          </a:fontRef>
+        </p:style>
+        <p:txBody>
+          <a:bodyPr rtlCol="0" anchor="ctr"/>
+          <a:lstStyle/>
+          <a:p>
+            <a:pPr algn="ctr"/>
+          </a:p>
+        </p:txBody>
+      </p:sp>
+      <p:sp>
+        <p:nvSpPr>
+          <p:cNvPr id="38" name="TextBox 37"/>
+          <p:cNvSpPr txBox="1"/>
+          <p:nvPr/>
+        </p:nvSpPr>
+        <p:spPr>
+          <a:xfrm>
+            <a:off x="6446520" y="3822192"/>
+            <a:ext cx="3200400" cy="292608"/>
+          </a:xfrm>
+          <a:prstGeom prst="rect">
+            <a:avLst/>
+          </a:prstGeom>
+          <a:noFill/>
+        </p:spPr>
+        <p:txBody>
+          <a:bodyPr wrap="none">
+            <a:spAutoFit/>
+          </a:bodyPr>
+          <a:lstStyle/>
+          <a:p>
+            <a:pPr>
+              <a:defRPr sz="850">
+                <a:solidFill>
+                  <a:srgbClr val="222D3D"/>
+                </a:solidFill>
+              </a:defRPr>
+            </a:pPr>
+            <a:r>
+              <a:t>merchant flash-sale volume spike</a:t>
+            </a:r>
+          </a:p>
+        </p:txBody>
+      </p:sp>
+      <p:sp>
+        <p:nvSpPr>
+          <p:cNvPr id="39" name="Rectangle 38"/>
+          <p:cNvSpPr/>
+          <p:nvPr/>
+        </p:nvSpPr>
+        <p:spPr>
+          <a:xfrm>
+            <a:off x="9692640" y="3758184"/>
+            <a:ext cx="1097280" cy="347472"/>
+          </a:xfrm>
+          <a:prstGeom prst="rect">
+            <a:avLst/>
+          </a:prstGeom>
+          <a:solidFill>
+            <a:srgbClr val="FFFFFF"/>
+          </a:solidFill>
+          <a:ln>
+            <a:solidFill>
+              <a:srgbClr val="D2DDEB"/>
+            </a:solidFill>
+          </a:ln>
+        </p:spPr>
+        <p:style>
+          <a:lnRef idx="1">
+            <a:schemeClr val="accent1"/>
+          </a:lnRef>
+          <a:fillRef idx="3">
+            <a:schemeClr val="accent1"/>
+          </a:fillRef>
+          <a:effectRef idx="2">
+            <a:schemeClr val="accent1"/>
+          </a:effectRef>
+          <a:fontRef idx="minor">
+            <a:schemeClr val="lt1"/>
+          </a:fontRef>
+        </p:style>
+        <p:txBody>
+          <a:bodyPr rtlCol="0" anchor="ctr"/>
+          <a:lstStyle/>
+          <a:p>
+            <a:pPr algn="ctr"/>
+          </a:p>
+        </p:txBody>
+      </p:sp>
+      <p:sp>
+        <p:nvSpPr>
+          <p:cNvPr id="40" name="TextBox 39"/>
+          <p:cNvSpPr txBox="1"/>
+          <p:nvPr/>
+        </p:nvSpPr>
+        <p:spPr>
+          <a:xfrm>
+            <a:off x="9738360" y="3822192"/>
+            <a:ext cx="1005839" cy="292608"/>
+          </a:xfrm>
+          <a:prstGeom prst="rect">
+            <a:avLst/>
+          </a:prstGeom>
+          <a:noFill/>
+        </p:spPr>
+        <p:txBody>
+          <a:bodyPr wrap="none">
+            <a:spAutoFit/>
+          </a:bodyPr>
+          <a:lstStyle/>
+          <a:p>
+            <a:pPr>
+              <a:defRPr sz="850">
+                <a:solidFill>
+                  <a:srgbClr val="222D3D"/>
+                </a:solidFill>
+              </a:defRPr>
+            </a:pPr>
+            <a:r>
+              <a:t>15,000</a:t>
+            </a:r>
+          </a:p>
+        </p:txBody>
+      </p:sp>
+      <p:sp>
+        <p:nvSpPr>
+          <p:cNvPr id="41" name="Rectangle 40"/>
+          <p:cNvSpPr/>
+          <p:nvPr/>
+        </p:nvSpPr>
+        <p:spPr>
+          <a:xfrm>
+            <a:off x="6400800" y="4105656"/>
+            <a:ext cx="3291840" cy="347472"/>
+          </a:xfrm>
+          <a:prstGeom prst="rect">
+            <a:avLst/>
+          </a:prstGeom>
+          <a:solidFill>
+            <a:srgbClr val="FFFFFF"/>
+          </a:solidFill>
+          <a:ln>
+            <a:solidFill>
+              <a:srgbClr val="D2DDEB"/>
+            </a:solidFill>
+          </a:ln>
+        </p:spPr>
+        <p:style>
+          <a:lnRef idx="1">
+            <a:schemeClr val="accent1"/>
+          </a:lnRef>
+          <a:fillRef idx="3">
+            <a:schemeClr val="accent1"/>
+          </a:fillRef>
+          <a:effectRef idx="2">
+            <a:schemeClr val="accent1"/>
+          </a:effectRef>
+          <a:fontRef idx="minor">
+            <a:schemeClr val="lt1"/>
+          </a:fontRef>
+        </p:style>
+        <p:txBody>
+          <a:bodyPr rtlCol="0" anchor="ctr"/>
+          <a:lstStyle/>
+          <a:p>
+            <a:pPr algn="ctr"/>
+          </a:p>
+        </p:txBody>
+      </p:sp>
+      <p:sp>
+        <p:nvSpPr>
+          <p:cNvPr id="42" name="TextBox 41"/>
+          <p:cNvSpPr txBox="1"/>
+          <p:nvPr/>
+        </p:nvSpPr>
+        <p:spPr>
+          <a:xfrm>
+            <a:off x="6446520" y="4169664"/>
+            <a:ext cx="3200400" cy="292608"/>
+          </a:xfrm>
+          <a:prstGeom prst="rect">
+            <a:avLst/>
+          </a:prstGeom>
+          <a:noFill/>
+        </p:spPr>
+        <p:txBody>
+          <a:bodyPr wrap="none">
+            <a:spAutoFit/>
+          </a:bodyPr>
+          <a:lstStyle/>
+          <a:p>
+            <a:pPr>
+              <a:defRPr sz="850">
+                <a:solidFill>
+                  <a:srgbClr val="222D3D"/>
+                </a:solidFill>
+              </a:defRPr>
+            </a:pPr>
+            <a:r>
+              <a:t>02:00-03:00 failure spike</a:t>
+            </a:r>
+          </a:p>
+        </p:txBody>
+      </p:sp>
+      <p:sp>
+        <p:nvSpPr>
+          <p:cNvPr id="43" name="Rectangle 42"/>
+          <p:cNvSpPr/>
+          <p:nvPr/>
+        </p:nvSpPr>
+        <p:spPr>
+          <a:xfrm>
+            <a:off x="9692640" y="4105656"/>
+            <a:ext cx="1097280" cy="347472"/>
+          </a:xfrm>
+          <a:prstGeom prst="rect">
+            <a:avLst/>
+          </a:prstGeom>
+          <a:solidFill>
+            <a:srgbClr val="FFFFFF"/>
+          </a:solidFill>
+          <a:ln>
+            <a:solidFill>
+              <a:srgbClr val="D2DDEB"/>
+            </a:solidFill>
+          </a:ln>
+        </p:spPr>
+        <p:style>
+          <a:lnRef idx="1">
+            <a:schemeClr val="accent1"/>
+          </a:lnRef>
+          <a:fillRef idx="3">
+            <a:schemeClr val="accent1"/>
+          </a:fillRef>
+          <a:effectRef idx="2">
+            <a:schemeClr val="accent1"/>
+          </a:effectRef>
+          <a:fontRef idx="minor">
+            <a:schemeClr val="lt1"/>
+          </a:fontRef>
+        </p:style>
+        <p:txBody>
+          <a:bodyPr rtlCol="0" anchor="ctr"/>
+          <a:lstStyle/>
+          <a:p>
+            <a:pPr algn="ctr"/>
+          </a:p>
+        </p:txBody>
+      </p:sp>
+      <p:sp>
+        <p:nvSpPr>
+          <p:cNvPr id="44" name="TextBox 43"/>
+          <p:cNvSpPr txBox="1"/>
+          <p:nvPr/>
+        </p:nvSpPr>
+        <p:spPr>
+          <a:xfrm>
+            <a:off x="9738360" y="4169664"/>
+            <a:ext cx="1005839" cy="292608"/>
+          </a:xfrm>
+          <a:prstGeom prst="rect">
+            <a:avLst/>
+          </a:prstGeom>
+          <a:noFill/>
+        </p:spPr>
+        <p:txBody>
+          <a:bodyPr wrap="none">
+            <a:spAutoFit/>
+          </a:bodyPr>
+          <a:lstStyle/>
+          <a:p>
+            <a:pPr>
+              <a:defRPr sz="850">
+                <a:solidFill>
+                  <a:srgbClr val="222D3D"/>
+                </a:solidFill>
+              </a:defRPr>
+            </a:pPr>
+            <a:r>
+              <a:t>12,000</a:t>
+            </a:r>
+          </a:p>
+        </p:txBody>
+      </p:sp>
+      <p:sp>
+        <p:nvSpPr>
+          <p:cNvPr id="45" name="Rectangle 44"/>
+          <p:cNvSpPr/>
+          <p:nvPr/>
+        </p:nvSpPr>
+        <p:spPr>
+          <a:xfrm>
+            <a:off x="6400800" y="4453128"/>
+            <a:ext cx="3291840" cy="347472"/>
+          </a:xfrm>
+          <a:prstGeom prst="rect">
+            <a:avLst/>
+          </a:prstGeom>
+          <a:solidFill>
+            <a:srgbClr val="FFFFFF"/>
+          </a:solidFill>
+          <a:ln>
+            <a:solidFill>
+              <a:srgbClr val="D2DDEB"/>
+            </a:solidFill>
+          </a:ln>
+        </p:spPr>
+        <p:style>
+          <a:lnRef idx="1">
+            <a:schemeClr val="accent1"/>
+          </a:lnRef>
+          <a:fillRef idx="3">
+            <a:schemeClr val="accent1"/>
+          </a:fillRef>
+          <a:effectRef idx="2">
+            <a:schemeClr val="accent1"/>
+          </a:effectRef>
+          <a:fontRef idx="minor">
+            <a:schemeClr val="lt1"/>
+          </a:fontRef>
+        </p:style>
+        <p:txBody>
+          <a:bodyPr rtlCol="0" anchor="ctr"/>
+          <a:lstStyle/>
+          <a:p>
+            <a:pPr algn="ctr"/>
+          </a:p>
+        </p:txBody>
+      </p:sp>
+      <p:sp>
+        <p:nvSpPr>
+          <p:cNvPr id="46" name="TextBox 45"/>
+          <p:cNvSpPr txBox="1"/>
+          <p:nvPr/>
+        </p:nvSpPr>
+        <p:spPr>
+          <a:xfrm>
+            <a:off x="6446520" y="4517136"/>
+            <a:ext cx="3200400" cy="292608"/>
+          </a:xfrm>
+          <a:prstGeom prst="rect">
+            <a:avLst/>
+          </a:prstGeom>
+          <a:noFill/>
+        </p:spPr>
+        <p:txBody>
+          <a:bodyPr wrap="none">
+            <a:spAutoFit/>
+          </a:bodyPr>
+          <a:lstStyle/>
+          <a:p>
+            <a:pPr>
+              <a:defRPr sz="850">
+                <a:solidFill>
+                  <a:srgbClr val="222D3D"/>
+                </a:solidFill>
+              </a:defRPr>
+            </a:pPr>
+            <a:r>
+              <a:t>processor latency incident 100ms to 3000ms</a:t>
+            </a:r>
+          </a:p>
+        </p:txBody>
+      </p:sp>
+      <p:sp>
+        <p:nvSpPr>
+          <p:cNvPr id="47" name="Rectangle 46"/>
+          <p:cNvSpPr/>
+          <p:nvPr/>
+        </p:nvSpPr>
+        <p:spPr>
+          <a:xfrm>
+            <a:off x="9692640" y="4453128"/>
+            <a:ext cx="1097280" cy="347472"/>
+          </a:xfrm>
+          <a:prstGeom prst="rect">
+            <a:avLst/>
+          </a:prstGeom>
+          <a:solidFill>
+            <a:srgbClr val="FFFFFF"/>
+          </a:solidFill>
+          <a:ln>
+            <a:solidFill>
+              <a:srgbClr val="D2DDEB"/>
+            </a:solidFill>
+          </a:ln>
+        </p:spPr>
+        <p:style>
+          <a:lnRef idx="1">
+            <a:schemeClr val="accent1"/>
+          </a:lnRef>
+          <a:fillRef idx="3">
+            <a:schemeClr val="accent1"/>
+          </a:fillRef>
+          <a:effectRef idx="2">
+            <a:schemeClr val="accent1"/>
+          </a:effectRef>
+          <a:fontRef idx="minor">
+            <a:schemeClr val="lt1"/>
+          </a:fontRef>
+        </p:style>
+        <p:txBody>
+          <a:bodyPr rtlCol="0" anchor="ctr"/>
+          <a:lstStyle/>
+          <a:p>
+            <a:pPr algn="ctr"/>
+          </a:p>
+        </p:txBody>
+      </p:sp>
+      <p:sp>
+        <p:nvSpPr>
+          <p:cNvPr id="48" name="TextBox 47"/>
+          <p:cNvSpPr txBox="1"/>
+          <p:nvPr/>
+        </p:nvSpPr>
+        <p:spPr>
+          <a:xfrm>
+            <a:off x="9738360" y="4517136"/>
+            <a:ext cx="1005839" cy="292608"/>
+          </a:xfrm>
+          <a:prstGeom prst="rect">
+            <a:avLst/>
+          </a:prstGeom>
+          <a:noFill/>
+        </p:spPr>
+        <p:txBody>
+          <a:bodyPr wrap="none">
+            <a:spAutoFit/>
+          </a:bodyPr>
+          <a:lstStyle/>
+          <a:p>
+            <a:pPr>
+              <a:defRPr sz="850">
+                <a:solidFill>
+                  <a:srgbClr val="222D3D"/>
+                </a:solidFill>
+              </a:defRPr>
+            </a:pPr>
+            <a:r>
+              <a:t>9,000</a:t>
+            </a:r>
+          </a:p>
+        </p:txBody>
+      </p:sp>
+      <p:sp>
+        <p:nvSpPr>
+          <p:cNvPr id="49" name="Rectangle 48"/>
+          <p:cNvSpPr/>
+          <p:nvPr/>
+        </p:nvSpPr>
+        <p:spPr>
+          <a:xfrm>
+            <a:off x="6400800" y="4800600"/>
+            <a:ext cx="3291840" cy="347472"/>
+          </a:xfrm>
+          <a:prstGeom prst="rect">
+            <a:avLst/>
+          </a:prstGeom>
+          <a:solidFill>
+            <a:srgbClr val="FFFFFF"/>
+          </a:solidFill>
+          <a:ln>
+            <a:solidFill>
+              <a:srgbClr val="D2DDEB"/>
+            </a:solidFill>
+          </a:ln>
+        </p:spPr>
+        <p:style>
+          <a:lnRef idx="1">
+            <a:schemeClr val="accent1"/>
+          </a:lnRef>
+          <a:fillRef idx="3">
+            <a:schemeClr val="accent1"/>
+          </a:fillRef>
+          <a:effectRef idx="2">
+            <a:schemeClr val="accent1"/>
+          </a:effectRef>
+          <a:fontRef idx="minor">
+            <a:schemeClr val="lt1"/>
+          </a:fontRef>
+        </p:style>
+        <p:txBody>
+          <a:bodyPr rtlCol="0" anchor="ctr"/>
+          <a:lstStyle/>
+          <a:p>
+            <a:pPr algn="ctr"/>
+          </a:p>
+        </p:txBody>
+      </p:sp>
+      <p:sp>
+        <p:nvSpPr>
+          <p:cNvPr id="50" name="TextBox 49"/>
+          <p:cNvSpPr txBox="1"/>
+          <p:nvPr/>
+        </p:nvSpPr>
+        <p:spPr>
+          <a:xfrm>
+            <a:off x="6446520" y="4864608"/>
+            <a:ext cx="3200400" cy="292608"/>
+          </a:xfrm>
+          <a:prstGeom prst="rect">
+            <a:avLst/>
+          </a:prstGeom>
+          <a:noFill/>
+        </p:spPr>
+        <p:txBody>
+          <a:bodyPr wrap="none">
+            <a:spAutoFit/>
+          </a:bodyPr>
+          <a:lstStyle/>
+          <a:p>
+            <a:pPr>
+              <a:defRPr sz="850">
+                <a:solidFill>
+                  <a:srgbClr val="222D3D"/>
+                </a:solidFill>
+              </a:defRPr>
+            </a:pPr>
+            <a:r>
+              <a:t>high-value transaction cluster</a:t>
+            </a:r>
+          </a:p>
+        </p:txBody>
+      </p:sp>
+      <p:sp>
+        <p:nvSpPr>
+          <p:cNvPr id="51" name="Rectangle 50"/>
+          <p:cNvSpPr/>
+          <p:nvPr/>
+        </p:nvSpPr>
+        <p:spPr>
+          <a:xfrm>
+            <a:off x="9692640" y="4800600"/>
+            <a:ext cx="1097280" cy="347472"/>
+          </a:xfrm>
+          <a:prstGeom prst="rect">
+            <a:avLst/>
+          </a:prstGeom>
+          <a:solidFill>
+            <a:srgbClr val="FFFFFF"/>
+          </a:solidFill>
+          <a:ln>
+            <a:solidFill>
+              <a:srgbClr val="D2DDEB"/>
+            </a:solidFill>
+          </a:ln>
+        </p:spPr>
+        <p:style>
+          <a:lnRef idx="1">
+            <a:schemeClr val="accent1"/>
+          </a:lnRef>
+          <a:fillRef idx="3">
+            <a:schemeClr val="accent1"/>
+          </a:fillRef>
+          <a:effectRef idx="2">
+            <a:schemeClr val="accent1"/>
+          </a:effectRef>
+          <a:fontRef idx="minor">
+            <a:schemeClr val="lt1"/>
+          </a:fontRef>
+        </p:style>
+        <p:txBody>
+          <a:bodyPr rtlCol="0" anchor="ctr"/>
+          <a:lstStyle/>
+          <a:p>
+            <a:pPr algn="ctr"/>
+          </a:p>
+        </p:txBody>
+      </p:sp>
+      <p:sp>
+        <p:nvSpPr>
+          <p:cNvPr id="52" name="TextBox 51"/>
+          <p:cNvSpPr txBox="1"/>
+          <p:nvPr/>
+        </p:nvSpPr>
+        <p:spPr>
+          <a:xfrm>
+            <a:off x="9738360" y="4864608"/>
+            <a:ext cx="1005839" cy="292608"/>
+          </a:xfrm>
+          <a:prstGeom prst="rect">
+            <a:avLst/>
+          </a:prstGeom>
+          <a:noFill/>
+        </p:spPr>
+        <p:txBody>
+          <a:bodyPr wrap="none">
+            <a:spAutoFit/>
+          </a:bodyPr>
+          <a:lstStyle/>
+          <a:p>
+            <a:pPr>
+              <a:defRPr sz="850">
+                <a:solidFill>
+                  <a:srgbClr val="222D3D"/>
+                </a:solidFill>
+              </a:defRPr>
+            </a:pPr>
+            <a:r>
+              <a:t>3,500</a:t>
+            </a:r>
+          </a:p>
+        </p:txBody>
+      </p:sp>
+      <p:sp>
+        <p:nvSpPr>
+          <p:cNvPr id="53" name="Rectangle 52"/>
+          <p:cNvSpPr/>
+          <p:nvPr/>
+        </p:nvSpPr>
+        <p:spPr>
+          <a:xfrm>
+            <a:off x="6400800" y="5148072"/>
+            <a:ext cx="3291840" cy="347472"/>
+          </a:xfrm>
+          <a:prstGeom prst="rect">
+            <a:avLst/>
+          </a:prstGeom>
+          <a:solidFill>
+            <a:srgbClr val="FFFFFF"/>
+          </a:solidFill>
+          <a:ln>
+            <a:solidFill>
+              <a:srgbClr val="D2DDEB"/>
+            </a:solidFill>
+          </a:ln>
+        </p:spPr>
+        <p:style>
+          <a:lnRef idx="1">
+            <a:schemeClr val="accent1"/>
+          </a:lnRef>
+          <a:fillRef idx="3">
+            <a:schemeClr val="accent1"/>
+          </a:fillRef>
+          <a:effectRef idx="2">
+            <a:schemeClr val="accent1"/>
+          </a:effectRef>
+          <a:fontRef idx="minor">
+            <a:schemeClr val="lt1"/>
+          </a:fontRef>
+        </p:style>
+        <p:txBody>
+          <a:bodyPr rtlCol="0" anchor="ctr"/>
+          <a:lstStyle/>
+          <a:p>
+            <a:pPr algn="ctr"/>
+          </a:p>
+        </p:txBody>
+      </p:sp>
+      <p:sp>
+        <p:nvSpPr>
+          <p:cNvPr id="54" name="TextBox 53"/>
+          <p:cNvSpPr txBox="1"/>
+          <p:nvPr/>
+        </p:nvSpPr>
+        <p:spPr>
+          <a:xfrm>
+            <a:off x="6446520" y="5212080"/>
+            <a:ext cx="3200400" cy="292608"/>
+          </a:xfrm>
+          <a:prstGeom prst="rect">
+            <a:avLst/>
+          </a:prstGeom>
+          <a:noFill/>
+        </p:spPr>
+        <p:txBody>
+          <a:bodyPr wrap="none">
+            <a:spAutoFit/>
+          </a:bodyPr>
+          <a:lstStyle/>
+          <a:p>
+            <a:pPr>
+              <a:defRPr sz="850">
+                <a:solidFill>
+                  <a:srgbClr val="222D3D"/>
+                </a:solidFill>
+              </a:defRPr>
+            </a:pPr>
+            <a:r>
+              <a:t>latency recovery after incident</a:t>
+            </a:r>
+          </a:p>
+        </p:txBody>
+      </p:sp>
+      <p:sp>
+        <p:nvSpPr>
+          <p:cNvPr id="55" name="Rectangle 54"/>
+          <p:cNvSpPr/>
+          <p:nvPr/>
+        </p:nvSpPr>
+        <p:spPr>
+          <a:xfrm>
+            <a:off x="9692640" y="5148072"/>
+            <a:ext cx="1097280" cy="347472"/>
+          </a:xfrm>
+          <a:prstGeom prst="rect">
+            <a:avLst/>
+          </a:prstGeom>
+          <a:solidFill>
+            <a:srgbClr val="FFFFFF"/>
+          </a:solidFill>
+          <a:ln>
+            <a:solidFill>
+              <a:srgbClr val="D2DDEB"/>
+            </a:solidFill>
+          </a:ln>
+        </p:spPr>
+        <p:style>
+          <a:lnRef idx="1">
+            <a:schemeClr val="accent1"/>
+          </a:lnRef>
+          <a:fillRef idx="3">
+            <a:schemeClr val="accent1"/>
+          </a:fillRef>
+          <a:effectRef idx="2">
+            <a:schemeClr val="accent1"/>
+          </a:effectRef>
+          <a:fontRef idx="minor">
+            <a:schemeClr val="lt1"/>
+          </a:fontRef>
+        </p:style>
+        <p:txBody>
+          <a:bodyPr rtlCol="0" anchor="ctr"/>
+          <a:lstStyle/>
+          <a:p>
+            <a:pPr algn="ctr"/>
+          </a:p>
+        </p:txBody>
+      </p:sp>
+      <p:sp>
+        <p:nvSpPr>
+          <p:cNvPr id="56" name="TextBox 55"/>
+          <p:cNvSpPr txBox="1"/>
+          <p:nvPr/>
+        </p:nvSpPr>
+        <p:spPr>
+          <a:xfrm>
+            <a:off x="9738360" y="5212080"/>
+            <a:ext cx="1005839" cy="292608"/>
+          </a:xfrm>
+          <a:prstGeom prst="rect">
+            <a:avLst/>
+          </a:prstGeom>
+          <a:noFill/>
+        </p:spPr>
+        <p:txBody>
+          <a:bodyPr wrap="none">
+            <a:spAutoFit/>
+          </a:bodyPr>
+          <a:lstStyle/>
+          <a:p>
+            <a:pPr>
+              <a:defRPr sz="850">
+                <a:solidFill>
+                  <a:srgbClr val="222D3D"/>
+                </a:solidFill>
+              </a:defRPr>
+            </a:pPr>
+            <a:r>
+              <a:t>2,500</a:t>
+            </a:r>
+          </a:p>
+        </p:txBody>
+      </p:sp>
+      <p:sp>
+        <p:nvSpPr>
+          <p:cNvPr id="57" name="TextBox 56"/>
+          <p:cNvSpPr txBox="1"/>
+          <p:nvPr/>
+        </p:nvSpPr>
+        <p:spPr>
+          <a:xfrm>
+            <a:off x="868680" y="5897880"/>
+            <a:ext cx="7315200" cy="256032"/>
+          </a:xfrm>
+          <a:prstGeom prst="rect">
+            <a:avLst/>
+          </a:prstGeom>
+          <a:noFill/>
+        </p:spPr>
+        <p:txBody>
+          <a:bodyPr wrap="none">
+            <a:spAutoFit/>
+          </a:bodyPr>
+          <a:lstStyle/>
+          <a:p>
+            <a:r>
+              <a:rPr sz="1000" u="sng">
+                <a:solidFill>
+                  <a:srgbClr val="3673C8"/>
+                </a:solidFill>
+                <a:hlinkClick r:id="rId2"/>
+              </a:rPr>
+              <a:t>Open Payments Business Scenarios Dashboard</a:t>
+            </a:r>
+          </a:p>
+        </p:txBody>
+      </p:sp>
+    </p:spTree>
+  </p:cSld>
+  <p:clrMapOvr>
+    <a:masterClrMapping/>
+  </p:clrMapOvr>
+</p:sld>
+</file>
+
+<file path=ppt/slides/slide14.xml><?xml version="1.0" encoding="utf-8"?>
+<p:sld xmlns:a="http://schemas.openxmlformats.org/drawingml/2006/main" xmlns:p="http://schemas.openxmlformats.org/presentationml/2006/main" xmlns:r="http://schemas.openxmlformats.org/officeDocument/2006/relationships">
+  <p:cSld>
+    <p:bg>
+      <p:bgPr>
+        <a:solidFill>
+          <a:srgbClr val="F4F8FC"/>
+        </a:solidFill>
+        <a:effectLst/>
+      </p:bgPr>
+    </p:bg>
+    <p:spTree>
+      <p:nvGrpSpPr>
+        <p:cNvPr id="1" name=""/>
+        <p:cNvGrpSpPr/>
+        <p:nvPr/>
+      </p:nvGrpSpPr>
+      <p:grpSpPr/>
+      <p:sp>
+        <p:nvSpPr>
+          <p:cNvPr id="2" name="Rectangle 1"/>
+          <p:cNvSpPr/>
+          <p:nvPr/>
+        </p:nvSpPr>
+        <p:spPr>
+          <a:xfrm>
+            <a:off x="0" y="0"/>
+            <a:ext cx="12191695" cy="164592"/>
+          </a:xfrm>
+          <a:prstGeom prst="rect">
+            <a:avLst/>
+          </a:prstGeom>
+          <a:solidFill>
+            <a:srgbClr val="3673C8"/>
+          </a:solidFill>
+          <a:ln>
+            <a:noFill/>
+          </a:ln>
+        </p:spPr>
+        <p:style>
+          <a:lnRef idx="1">
+            <a:schemeClr val="accent1"/>
+          </a:lnRef>
+          <a:fillRef idx="3">
+            <a:schemeClr val="accent1"/>
+          </a:fillRef>
+          <a:effectRef idx="2">
+            <a:schemeClr val="accent1"/>
+          </a:effectRef>
+          <a:fontRef idx="minor">
+            <a:schemeClr val="lt1"/>
+          </a:fontRef>
+        </p:style>
+        <p:txBody>
+          <a:bodyPr rtlCol="0" anchor="ctr"/>
+          <a:lstStyle/>
+          <a:p>
+            <a:pPr algn="ctr"/>
+          </a:p>
+        </p:txBody>
+      </p:sp>
+      <p:sp>
+        <p:nvSpPr>
+          <p:cNvPr id="3" name="TextBox 2"/>
+          <p:cNvSpPr txBox="1"/>
+          <p:nvPr/>
+        </p:nvSpPr>
+        <p:spPr>
+          <a:xfrm>
+            <a:off x="502920" y="320040"/>
+            <a:ext cx="8961120" cy="502920"/>
+          </a:xfrm>
+          <a:prstGeom prst="rect">
+            <a:avLst/>
+          </a:prstGeom>
+          <a:noFill/>
+        </p:spPr>
+        <p:txBody>
+          <a:bodyPr wrap="none">
+            <a:spAutoFit/>
+          </a:bodyPr>
+          <a:lstStyle/>
+          <a:p>
+            <a:pPr>
+              <a:defRPr sz="2400" b="1">
+                <a:solidFill>
+                  <a:srgbClr val="142440"/>
+                </a:solidFill>
+              </a:defRPr>
+            </a:pPr>
+            <a:r>
+              <a:t>Appendix: business scenario dashboard</a:t>
+            </a:r>
+          </a:p>
+        </p:txBody>
+      </p:sp>
+      <p:sp>
+        <p:nvSpPr>
+          <p:cNvPr id="4" name="TextBox 3"/>
+          <p:cNvSpPr txBox="1"/>
+          <p:nvPr/>
+        </p:nvSpPr>
+        <p:spPr>
+          <a:xfrm>
+            <a:off x="530352" y="822960"/>
+            <a:ext cx="9875520" cy="320040"/>
+          </a:xfrm>
+          <a:prstGeom prst="rect">
+            <a:avLst/>
+          </a:prstGeom>
+          <a:noFill/>
+        </p:spPr>
+        <p:txBody>
+          <a:bodyPr wrap="none">
+            <a:spAutoFit/>
+          </a:bodyPr>
+          <a:lstStyle/>
+          <a:p>
+            <a:pPr>
+              <a:defRPr sz="1050">
+                <a:solidFill>
+                  <a:srgbClr val="667487"/>
+                </a:solidFill>
+              </a:defRPr>
+            </a:pPr>
+            <a:r>
+              <a:t>Additional live link for the realistic incident scenarios</a:t>
+            </a:r>
+          </a:p>
+        </p:txBody>
+      </p:sp>
+      <p:sp>
+        <p:nvSpPr>
+          <p:cNvPr id="5" name="TextBox 4"/>
+          <p:cNvSpPr txBox="1"/>
+          <p:nvPr/>
+        </p:nvSpPr>
+        <p:spPr>
+          <a:xfrm>
+            <a:off x="502920" y="6446520"/>
+            <a:ext cx="4572000" cy="228600"/>
+          </a:xfrm>
+          <a:prstGeom prst="rect">
+            <a:avLst/>
+          </a:prstGeom>
+          <a:noFill/>
+        </p:spPr>
+        <p:txBody>
+          <a:bodyPr wrap="none">
+            <a:spAutoFit/>
+          </a:bodyPr>
+          <a:lstStyle/>
+          <a:p>
+            <a:pPr>
+              <a:defRPr sz="800">
+                <a:solidFill>
+                  <a:srgbClr val="667487"/>
+                </a:solidFill>
+              </a:defRPr>
+            </a:pPr>
+            <a:r>
+              <a:t>Elastic Payments Analytics Demo</a:t>
+            </a:r>
+          </a:p>
+        </p:txBody>
+      </p:sp>
+      <p:sp>
+        <p:nvSpPr>
+          <p:cNvPr id="6" name="TextBox 5"/>
+          <p:cNvSpPr txBox="1"/>
+          <p:nvPr/>
+        </p:nvSpPr>
+        <p:spPr>
+          <a:xfrm>
+            <a:off x="9326880" y="6446520"/>
+            <a:ext cx="2377440" cy="228600"/>
+          </a:xfrm>
+          <a:prstGeom prst="rect">
+            <a:avLst/>
+          </a:prstGeom>
+          <a:noFill/>
+        </p:spPr>
+        <p:txBody>
+          <a:bodyPr wrap="none">
+            <a:spAutoFit/>
+          </a:bodyPr>
+          <a:lstStyle/>
+          <a:p>
+            <a:pPr algn="r">
+              <a:defRPr sz="800">
+                <a:solidFill>
+                  <a:srgbClr val="667487"/>
+                </a:solidFill>
+              </a:defRPr>
+            </a:pPr>
+            <a:r>
+              <a:t>Jun 10, 2026</a:t>
+            </a:r>
+          </a:p>
+        </p:txBody>
+      </p:sp>
+      <p:sp>
+        <p:nvSpPr>
+          <p:cNvPr id="7" name="Rounded Rectangle 6"/>
+          <p:cNvSpPr/>
+          <p:nvPr/>
+        </p:nvSpPr>
+        <p:spPr>
+          <a:xfrm>
+            <a:off x="777240" y="1325880"/>
+            <a:ext cx="10607040" cy="914400"/>
+          </a:xfrm>
+          <a:prstGeom prst="roundRect">
+            <a:avLst/>
+          </a:prstGeom>
+          <a:solidFill>
+            <a:srgbClr val="FFFFFF"/>
+          </a:solidFill>
+          <a:ln>
+            <a:solidFill>
+              <a:srgbClr val="D2DDEB"/>
+            </a:solidFill>
+          </a:ln>
+        </p:spPr>
+        <p:style>
+          <a:lnRef idx="1">
+            <a:schemeClr val="accent1"/>
+          </a:lnRef>
+          <a:fillRef idx="3">
+            <a:schemeClr val="accent1"/>
+          </a:fillRef>
+          <a:effectRef idx="2">
+            <a:schemeClr val="accent1"/>
+          </a:effectRef>
+          <a:fontRef idx="minor">
+            <a:schemeClr val="lt1"/>
+          </a:fontRef>
+        </p:style>
+        <p:txBody>
+          <a:bodyPr rtlCol="0" anchor="ctr"/>
+          <a:lstStyle/>
+          <a:p>
+            <a:pPr algn="ctr"/>
+          </a:p>
+        </p:txBody>
+      </p:sp>
+      <p:sp>
+        <p:nvSpPr>
+          <p:cNvPr id="8" name="Rectangle 7"/>
+          <p:cNvSpPr/>
+          <p:nvPr/>
+        </p:nvSpPr>
+        <p:spPr>
+          <a:xfrm>
+            <a:off x="777240" y="1325880"/>
+            <a:ext cx="73152" cy="914400"/>
+          </a:xfrm>
+          <a:prstGeom prst="rect">
+            <a:avLst/>
+          </a:prstGeom>
+          <a:solidFill>
+            <a:srgbClr val="EF8438"/>
+          </a:solidFill>
+          <a:ln>
+            <a:noFill/>
+          </a:ln>
+        </p:spPr>
+        <p:style>
+          <a:lnRef idx="1">
+            <a:schemeClr val="accent1"/>
+          </a:lnRef>
+          <a:fillRef idx="3">
+            <a:schemeClr val="accent1"/>
+          </a:fillRef>
+          <a:effectRef idx="2">
+            <a:schemeClr val="accent1"/>
+          </a:effectRef>
+          <a:fontRef idx="minor">
+            <a:schemeClr val="lt1"/>
+          </a:fontRef>
+        </p:style>
+        <p:txBody>
+          <a:bodyPr rtlCol="0" anchor="ctr"/>
+          <a:lstStyle/>
+          <a:p>
+            <a:pPr algn="ctr"/>
+          </a:p>
+        </p:txBody>
+      </p:sp>
+      <p:sp>
+        <p:nvSpPr>
+          <p:cNvPr id="9" name="TextBox 8"/>
+          <p:cNvSpPr txBox="1"/>
+          <p:nvPr/>
+        </p:nvSpPr>
+        <p:spPr>
+          <a:xfrm>
+            <a:off x="978408" y="1463039"/>
+            <a:ext cx="10287000" cy="274320"/>
+          </a:xfrm>
+          <a:prstGeom prst="rect">
+            <a:avLst/>
+          </a:prstGeom>
+          <a:noFill/>
+        </p:spPr>
+        <p:txBody>
+          <a:bodyPr wrap="none">
+            <a:spAutoFit/>
+          </a:bodyPr>
+          <a:lstStyle/>
+          <a:p>
+            <a:pPr>
+              <a:defRPr sz="1000" b="1">
+                <a:solidFill>
+                  <a:srgbClr val="667487"/>
+                </a:solidFill>
+              </a:defRPr>
+            </a:pPr>
+            <a:r>
+              <a:t>Payments Business Scenarios Dashboard</a:t>
+            </a:r>
+          </a:p>
+        </p:txBody>
+      </p:sp>
+      <p:sp>
+        <p:nvSpPr>
+          <p:cNvPr id="10" name="TextBox 9"/>
+          <p:cNvSpPr txBox="1"/>
+          <p:nvPr/>
+        </p:nvSpPr>
+        <p:spPr>
+          <a:xfrm>
+            <a:off x="978408" y="1783080"/>
+            <a:ext cx="10287000" cy="228600"/>
+          </a:xfrm>
+          <a:prstGeom prst="rect">
+            <a:avLst/>
+          </a:prstGeom>
+          <a:noFill/>
+        </p:spPr>
+        <p:txBody>
+          <a:bodyPr wrap="square">
+            <a:normAutofit/>
+          </a:bodyPr>
+          <a:lstStyle/>
+          <a:p>
+            <a:pPr>
+              <a:spcAft>
+                <a:spcPts val="300"/>
+              </a:spcAft>
+              <a:defRPr sz="950">
+                <a:solidFill>
+                  <a:srgbClr val="222D3D"/>
+                </a:solidFill>
+              </a:defRPr>
+            </a:pPr>
+            <a:r>
+              <a:t>https://payments-c225aa.kb.us-central1.gcp.elastic.cloud:443/app/dashboards#/view/37d8487c-132f-4c80-9bef-a760f75cf5a0</a:t>
+            </a:r>
+          </a:p>
+        </p:txBody>
+      </p:sp>
+      <p:sp>
+        <p:nvSpPr>
+          <p:cNvPr id="11" name="TextBox 10"/>
+          <p:cNvSpPr txBox="1"/>
+          <p:nvPr/>
+        </p:nvSpPr>
+        <p:spPr>
+          <a:xfrm>
+            <a:off x="1005840" y="1828800"/>
+            <a:ext cx="7315200" cy="256032"/>
+          </a:xfrm>
+          <a:prstGeom prst="rect">
+            <a:avLst/>
+          </a:prstGeom>
+          <a:noFill/>
+        </p:spPr>
+        <p:txBody>
+          <a:bodyPr wrap="none">
+            <a:spAutoFit/>
+          </a:bodyPr>
+          <a:lstStyle/>
+          <a:p>
+            <a:r>
+              <a:rPr sz="1000" u="sng">
+                <a:solidFill>
+                  <a:srgbClr val="3673C8"/>
+                </a:solidFill>
+                <a:hlinkClick r:id="rId2"/>
+              </a:rPr>
+              <a:t>Open dashboard</a:t>
+            </a:r>
+          </a:p>
+        </p:txBody>
+      </p:sp>
+      <p:sp>
+        <p:nvSpPr>
+          <p:cNvPr id="12" name="TextBox 11"/>
+          <p:cNvSpPr txBox="1"/>
+          <p:nvPr/>
+        </p:nvSpPr>
+        <p:spPr>
+          <a:xfrm>
+            <a:off x="914400" y="2834640"/>
+            <a:ext cx="9601200" cy="1828800"/>
+          </a:xfrm>
+          <a:prstGeom prst="rect">
+            <a:avLst/>
+          </a:prstGeom>
+          <a:noFill/>
+        </p:spPr>
+        <p:txBody>
+          <a:bodyPr wrap="square">
+            <a:spAutoFit/>
+          </a:bodyPr>
+          <a:lstStyle/>
+          <a:p>
+            <a:pPr>
+              <a:buChar char="•"/>
+              <a:spcAft>
+                <a:spcPts val="800"/>
+              </a:spcAft>
+              <a:defRPr sz="1500">
+                <a:solidFill>
+                  <a:srgbClr val="222D3D"/>
+                </a:solidFill>
+              </a:defRPr>
+            </a:pPr>
+            <a:r>
+              <a:t>Use this dashboard when presenting the business story: incident spike, merchant outlier, country decline issue, high-value payments and latency outage.</a:t>
+            </a:r>
+          </a:p>
+          <a:p>
+            <a:pPr>
+              <a:buChar char="•"/>
+              <a:spcAft>
+                <a:spcPts val="800"/>
+              </a:spcAft>
+              <a:defRPr sz="1500">
+                <a:solidFill>
+                  <a:srgbClr val="222D3D"/>
+                </a:solidFill>
+              </a:defRPr>
+            </a:pPr>
+            <a:r>
+              <a:t>The dashboard uses a fixed June 10 time range so the scenario remains stable for demos.</a:t>
             </a:r>
           </a:p>
         </p:txBody>
